--- a/Pitch Deck.pptx
+++ b/Pitch Deck.pptx
@@ -5,7 +5,7 @@
     <p:sldMasterId id="2147483678" r:id="rId1"/>
   </p:sldMasterIdLst>
   <p:notesMasterIdLst>
-    <p:notesMasterId r:id="rId20"/>
+    <p:notesMasterId r:id="rId21"/>
   </p:notesMasterIdLst>
   <p:sldIdLst>
     <p:sldId id="330" r:id="rId2"/>
@@ -13,31 +13,32 @@
     <p:sldId id="345" r:id="rId4"/>
     <p:sldId id="346" r:id="rId5"/>
     <p:sldId id="347" r:id="rId6"/>
-    <p:sldId id="342" r:id="rId7"/>
-    <p:sldId id="348" r:id="rId8"/>
-    <p:sldId id="331" r:id="rId9"/>
-    <p:sldId id="333" r:id="rId10"/>
-    <p:sldId id="335" r:id="rId11"/>
-    <p:sldId id="337" r:id="rId12"/>
-    <p:sldId id="323" r:id="rId13"/>
-    <p:sldId id="324" r:id="rId14"/>
-    <p:sldId id="340" r:id="rId15"/>
-    <p:sldId id="326" r:id="rId16"/>
-    <p:sldId id="320" r:id="rId17"/>
-    <p:sldId id="343" r:id="rId18"/>
-    <p:sldId id="321" r:id="rId19"/>
+    <p:sldId id="349" r:id="rId7"/>
+    <p:sldId id="342" r:id="rId8"/>
+    <p:sldId id="348" r:id="rId9"/>
+    <p:sldId id="331" r:id="rId10"/>
+    <p:sldId id="333" r:id="rId11"/>
+    <p:sldId id="335" r:id="rId12"/>
+    <p:sldId id="337" r:id="rId13"/>
+    <p:sldId id="323" r:id="rId14"/>
+    <p:sldId id="324" r:id="rId15"/>
+    <p:sldId id="340" r:id="rId16"/>
+    <p:sldId id="326" r:id="rId17"/>
+    <p:sldId id="320" r:id="rId18"/>
+    <p:sldId id="343" r:id="rId19"/>
+    <p:sldId id="321" r:id="rId20"/>
   </p:sldIdLst>
   <p:sldSz cx="9144000" cy="5143500" type="screen16x9"/>
   <p:notesSz cx="6858000" cy="9144000"/>
   <p:embeddedFontLst>
     <p:embeddedFont>
       <p:font typeface="Maven Pro" panose="020B0604020202020204" charset="0"/>
-      <p:regular r:id="rId21"/>
-      <p:bold r:id="rId22"/>
+      <p:regular r:id="rId22"/>
+      <p:bold r:id="rId23"/>
     </p:embeddedFont>
     <p:embeddedFont>
       <p:font typeface="Press Start 2P" panose="00000500000000000000" pitchFamily="2" charset="0"/>
-      <p:regular r:id="rId23"/>
+      <p:regular r:id="rId24"/>
     </p:embeddedFont>
   </p:embeddedFontLst>
   <p:defaultTextStyle>
@@ -830,6 +831,133 @@
         <p:cNvPr id="1" name="Shape 995">
           <a:extLst>
             <a:ext uri="{FF2B5EF4-FFF2-40B4-BE49-F238E27FC236}">
+              <a16:creationId xmlns:a16="http://schemas.microsoft.com/office/drawing/2014/main" id="{4D07437F-E0EA-831F-F2B8-84F59181FE21}"/>
+            </a:ext>
+          </a:extLst>
+        </p:cNvPr>
+        <p:cNvGrpSpPr/>
+        <p:nvPr/>
+      </p:nvGrpSpPr>
+      <p:grpSpPr>
+        <a:xfrm>
+          <a:off x="0" y="0"/>
+          <a:ext cx="0" cy="0"/>
+          <a:chOff x="0" y="0"/>
+          <a:chExt cx="0" cy="0"/>
+        </a:xfrm>
+      </p:grpSpPr>
+      <p:sp>
+        <p:nvSpPr>
+          <p:cNvPr id="996" name="Google Shape;996;g6ed1d3ee59_0_10084:notes">
+            <a:extLst>
+              <a:ext uri="{FF2B5EF4-FFF2-40B4-BE49-F238E27FC236}">
+                <a16:creationId xmlns:a16="http://schemas.microsoft.com/office/drawing/2014/main" id="{A074959D-9AA7-D270-552C-3D655A2FDB8A}"/>
+              </a:ext>
+            </a:extLst>
+          </p:cNvPr>
+          <p:cNvSpPr>
+            <a:spLocks noGrp="1" noRot="1" noChangeAspect="1"/>
+          </p:cNvSpPr>
+          <p:nvPr>
+            <p:ph type="sldImg" idx="2"/>
+          </p:nvPr>
+        </p:nvSpPr>
+        <p:spPr>
+          <a:xfrm>
+            <a:off x="381000" y="685800"/>
+            <a:ext cx="6096000" cy="3429000"/>
+          </a:xfrm>
+          <a:custGeom>
+            <a:avLst/>
+            <a:gdLst/>
+            <a:ahLst/>
+            <a:cxnLst/>
+            <a:rect l="l" t="t" r="r" b="b"/>
+            <a:pathLst>
+              <a:path w="120000" h="120000" extrusionOk="0">
+                <a:moveTo>
+                  <a:pt x="0" y="0"/>
+                </a:moveTo>
+                <a:lnTo>
+                  <a:pt x="120000" y="0"/>
+                </a:lnTo>
+                <a:lnTo>
+                  <a:pt x="120000" y="120000"/>
+                </a:lnTo>
+                <a:lnTo>
+                  <a:pt x="0" y="120000"/>
+                </a:lnTo>
+                <a:close/>
+              </a:path>
+            </a:pathLst>
+          </a:custGeom>
+        </p:spPr>
+      </p:sp>
+      <p:sp>
+        <p:nvSpPr>
+          <p:cNvPr id="997" name="Google Shape;997;g6ed1d3ee59_0_10084:notes">
+            <a:extLst>
+              <a:ext uri="{FF2B5EF4-FFF2-40B4-BE49-F238E27FC236}">
+                <a16:creationId xmlns:a16="http://schemas.microsoft.com/office/drawing/2014/main" id="{63C974D2-18E8-8BEA-6DD5-A55D55F87092}"/>
+              </a:ext>
+            </a:extLst>
+          </p:cNvPr>
+          <p:cNvSpPr txBox="1">
+            <a:spLocks noGrp="1"/>
+          </p:cNvSpPr>
+          <p:nvPr>
+            <p:ph type="body" idx="1"/>
+          </p:nvPr>
+        </p:nvSpPr>
+        <p:spPr>
+          <a:xfrm>
+            <a:off x="685800" y="4343400"/>
+            <a:ext cx="5486400" cy="4114800"/>
+          </a:xfrm>
+          <a:prstGeom prst="rect">
+            <a:avLst/>
+          </a:prstGeom>
+        </p:spPr>
+        <p:txBody>
+          <a:bodyPr spcFirstLastPara="1" wrap="square" lIns="91425" tIns="91425" rIns="91425" bIns="91425" anchor="t" anchorCtr="0">
+            <a:noAutofit/>
+          </a:bodyPr>
+          <a:lstStyle/>
+          <a:p>
+            <a:pPr marL="0" lvl="0" indent="0" algn="l" rtl="0">
+              <a:spcBef>
+                <a:spcPts val="0"/>
+              </a:spcBef>
+              <a:spcAft>
+                <a:spcPts val="0"/>
+              </a:spcAft>
+              <a:buNone/>
+            </a:pPr>
+            <a:endParaRPr/>
+          </a:p>
+        </p:txBody>
+      </p:sp>
+    </p:spTree>
+    <p:extLst>
+      <p:ext uri="{BB962C8B-B14F-4D97-AF65-F5344CB8AC3E}">
+        <p14:creationId xmlns:p14="http://schemas.microsoft.com/office/powerpoint/2010/main" val="3495024847"/>
+      </p:ext>
+    </p:extLst>
+  </p:cSld>
+  <p:clrMapOvr>
+    <a:masterClrMapping/>
+  </p:clrMapOvr>
+</p:notes>
+</file>
+
+<file path=ppt/notesSlides/notesSlide11.xml><?xml version="1.0" encoding="utf-8"?>
+<p:notes xmlns:a="http://schemas.openxmlformats.org/drawingml/2006/main" xmlns:r="http://schemas.openxmlformats.org/officeDocument/2006/relationships" xmlns:p="http://schemas.openxmlformats.org/presentationml/2006/main" showMasterSp="0" showMasterPhAnim="0">
+  <p:cSld>
+    <p:spTree>
+      <p:nvGrpSpPr>
+        <p:cNvPr id="1" name="Shape 995">
+          <a:extLst>
+            <a:ext uri="{FF2B5EF4-FFF2-40B4-BE49-F238E27FC236}">
               <a16:creationId xmlns:a16="http://schemas.microsoft.com/office/drawing/2014/main" id="{80B67A76-22B9-84A6-E145-6E495BB36FEB}"/>
             </a:ext>
           </a:extLst>
@@ -1338,6 +1466,133 @@
         <p:cNvPr id="1" name="Shape 995">
           <a:extLst>
             <a:ext uri="{FF2B5EF4-FFF2-40B4-BE49-F238E27FC236}">
+              <a16:creationId xmlns:a16="http://schemas.microsoft.com/office/drawing/2014/main" id="{22717E27-6FB4-BC23-2466-5E75556A267C}"/>
+            </a:ext>
+          </a:extLst>
+        </p:cNvPr>
+        <p:cNvGrpSpPr/>
+        <p:nvPr/>
+      </p:nvGrpSpPr>
+      <p:grpSpPr>
+        <a:xfrm>
+          <a:off x="0" y="0"/>
+          <a:ext cx="0" cy="0"/>
+          <a:chOff x="0" y="0"/>
+          <a:chExt cx="0" cy="0"/>
+        </a:xfrm>
+      </p:grpSpPr>
+      <p:sp>
+        <p:nvSpPr>
+          <p:cNvPr id="996" name="Google Shape;996;g6ed1d3ee59_0_10084:notes">
+            <a:extLst>
+              <a:ext uri="{FF2B5EF4-FFF2-40B4-BE49-F238E27FC236}">
+                <a16:creationId xmlns:a16="http://schemas.microsoft.com/office/drawing/2014/main" id="{A183FEBC-059D-AB63-AF33-EAD32DED9D56}"/>
+              </a:ext>
+            </a:extLst>
+          </p:cNvPr>
+          <p:cNvSpPr>
+            <a:spLocks noGrp="1" noRot="1" noChangeAspect="1"/>
+          </p:cNvSpPr>
+          <p:nvPr>
+            <p:ph type="sldImg" idx="2"/>
+          </p:nvPr>
+        </p:nvSpPr>
+        <p:spPr>
+          <a:xfrm>
+            <a:off x="381000" y="685800"/>
+            <a:ext cx="6096000" cy="3429000"/>
+          </a:xfrm>
+          <a:custGeom>
+            <a:avLst/>
+            <a:gdLst/>
+            <a:ahLst/>
+            <a:cxnLst/>
+            <a:rect l="l" t="t" r="r" b="b"/>
+            <a:pathLst>
+              <a:path w="120000" h="120000" extrusionOk="0">
+                <a:moveTo>
+                  <a:pt x="0" y="0"/>
+                </a:moveTo>
+                <a:lnTo>
+                  <a:pt x="120000" y="0"/>
+                </a:lnTo>
+                <a:lnTo>
+                  <a:pt x="120000" y="120000"/>
+                </a:lnTo>
+                <a:lnTo>
+                  <a:pt x="0" y="120000"/>
+                </a:lnTo>
+                <a:close/>
+              </a:path>
+            </a:pathLst>
+          </a:custGeom>
+        </p:spPr>
+      </p:sp>
+      <p:sp>
+        <p:nvSpPr>
+          <p:cNvPr id="997" name="Google Shape;997;g6ed1d3ee59_0_10084:notes">
+            <a:extLst>
+              <a:ext uri="{FF2B5EF4-FFF2-40B4-BE49-F238E27FC236}">
+                <a16:creationId xmlns:a16="http://schemas.microsoft.com/office/drawing/2014/main" id="{23BBDD17-5A60-0D6A-F8AE-B41025932796}"/>
+              </a:ext>
+            </a:extLst>
+          </p:cNvPr>
+          <p:cNvSpPr txBox="1">
+            <a:spLocks noGrp="1"/>
+          </p:cNvSpPr>
+          <p:nvPr>
+            <p:ph type="body" idx="1"/>
+          </p:nvPr>
+        </p:nvSpPr>
+        <p:spPr>
+          <a:xfrm>
+            <a:off x="685800" y="4343400"/>
+            <a:ext cx="5486400" cy="4114800"/>
+          </a:xfrm>
+          <a:prstGeom prst="rect">
+            <a:avLst/>
+          </a:prstGeom>
+        </p:spPr>
+        <p:txBody>
+          <a:bodyPr spcFirstLastPara="1" wrap="square" lIns="91425" tIns="91425" rIns="91425" bIns="91425" anchor="t" anchorCtr="0">
+            <a:noAutofit/>
+          </a:bodyPr>
+          <a:lstStyle/>
+          <a:p>
+            <a:pPr marL="0" lvl="0" indent="0" algn="l" rtl="0">
+              <a:spcBef>
+                <a:spcPts val="0"/>
+              </a:spcBef>
+              <a:spcAft>
+                <a:spcPts val="0"/>
+              </a:spcAft>
+              <a:buNone/>
+            </a:pPr>
+            <a:endParaRPr/>
+          </a:p>
+        </p:txBody>
+      </p:sp>
+    </p:spTree>
+    <p:extLst>
+      <p:ext uri="{BB962C8B-B14F-4D97-AF65-F5344CB8AC3E}">
+        <p14:creationId xmlns:p14="http://schemas.microsoft.com/office/powerpoint/2010/main" val="3846880759"/>
+      </p:ext>
+    </p:extLst>
+  </p:cSld>
+  <p:clrMapOvr>
+    <a:masterClrMapping/>
+  </p:clrMapOvr>
+</p:notes>
+</file>
+
+<file path=ppt/notesSlides/notesSlide6.xml><?xml version="1.0" encoding="utf-8"?>
+<p:notes xmlns:a="http://schemas.openxmlformats.org/drawingml/2006/main" xmlns:r="http://schemas.openxmlformats.org/officeDocument/2006/relationships" xmlns:p="http://schemas.openxmlformats.org/presentationml/2006/main" showMasterSp="0" showMasterPhAnim="0">
+  <p:cSld>
+    <p:spTree>
+      <p:nvGrpSpPr>
+        <p:cNvPr id="1" name="Shape 995">
+          <a:extLst>
+            <a:ext uri="{FF2B5EF4-FFF2-40B4-BE49-F238E27FC236}">
               <a16:creationId xmlns:a16="http://schemas.microsoft.com/office/drawing/2014/main" id="{074B9D20-03E9-9419-86F2-50EF17F4CE05}"/>
             </a:ext>
           </a:extLst>
@@ -1457,7 +1712,7 @@
 </p:notes>
 </file>
 
-<file path=ppt/notesSlides/notesSlide6.xml><?xml version="1.0" encoding="utf-8"?>
+<file path=ppt/notesSlides/notesSlide7.xml><?xml version="1.0" encoding="utf-8"?>
 <p:notes xmlns:a="http://schemas.openxmlformats.org/drawingml/2006/main" xmlns:r="http://schemas.openxmlformats.org/officeDocument/2006/relationships" xmlns:p="http://schemas.openxmlformats.org/presentationml/2006/main" showMasterSp="0" showMasterPhAnim="0">
   <p:cSld>
     <p:spTree>
@@ -1584,7 +1839,7 @@
 </p:notes>
 </file>
 
-<file path=ppt/notesSlides/notesSlide7.xml><?xml version="1.0" encoding="utf-8"?>
+<file path=ppt/notesSlides/notesSlide8.xml><?xml version="1.0" encoding="utf-8"?>
 <p:notes xmlns:a="http://schemas.openxmlformats.org/drawingml/2006/main" xmlns:r="http://schemas.openxmlformats.org/officeDocument/2006/relationships" xmlns:p="http://schemas.openxmlformats.org/presentationml/2006/main" showMasterSp="0" showMasterPhAnim="0">
   <p:cSld>
     <p:spTree>
@@ -1711,7 +1966,7 @@
 </p:notes>
 </file>
 
-<file path=ppt/notesSlides/notesSlide8.xml><?xml version="1.0" encoding="utf-8"?>
+<file path=ppt/notesSlides/notesSlide9.xml><?xml version="1.0" encoding="utf-8"?>
 <p:notes xmlns:a="http://schemas.openxmlformats.org/drawingml/2006/main" xmlns:r="http://schemas.openxmlformats.org/officeDocument/2006/relationships" xmlns:p="http://schemas.openxmlformats.org/presentationml/2006/main" showMasterSp="0" showMasterPhAnim="0">
   <p:cSld>
     <p:spTree>
@@ -1829,133 +2084,6 @@
     <p:extLst>
       <p:ext uri="{BB962C8B-B14F-4D97-AF65-F5344CB8AC3E}">
         <p14:creationId xmlns:p14="http://schemas.microsoft.com/office/powerpoint/2010/main" val="1372550086"/>
-      </p:ext>
-    </p:extLst>
-  </p:cSld>
-  <p:clrMapOvr>
-    <a:masterClrMapping/>
-  </p:clrMapOvr>
-</p:notes>
-</file>
-
-<file path=ppt/notesSlides/notesSlide9.xml><?xml version="1.0" encoding="utf-8"?>
-<p:notes xmlns:a="http://schemas.openxmlformats.org/drawingml/2006/main" xmlns:r="http://schemas.openxmlformats.org/officeDocument/2006/relationships" xmlns:p="http://schemas.openxmlformats.org/presentationml/2006/main" showMasterSp="0" showMasterPhAnim="0">
-  <p:cSld>
-    <p:spTree>
-      <p:nvGrpSpPr>
-        <p:cNvPr id="1" name="Shape 995">
-          <a:extLst>
-            <a:ext uri="{FF2B5EF4-FFF2-40B4-BE49-F238E27FC236}">
-              <a16:creationId xmlns:a16="http://schemas.microsoft.com/office/drawing/2014/main" id="{4D07437F-E0EA-831F-F2B8-84F59181FE21}"/>
-            </a:ext>
-          </a:extLst>
-        </p:cNvPr>
-        <p:cNvGrpSpPr/>
-        <p:nvPr/>
-      </p:nvGrpSpPr>
-      <p:grpSpPr>
-        <a:xfrm>
-          <a:off x="0" y="0"/>
-          <a:ext cx="0" cy="0"/>
-          <a:chOff x="0" y="0"/>
-          <a:chExt cx="0" cy="0"/>
-        </a:xfrm>
-      </p:grpSpPr>
-      <p:sp>
-        <p:nvSpPr>
-          <p:cNvPr id="996" name="Google Shape;996;g6ed1d3ee59_0_10084:notes">
-            <a:extLst>
-              <a:ext uri="{FF2B5EF4-FFF2-40B4-BE49-F238E27FC236}">
-                <a16:creationId xmlns:a16="http://schemas.microsoft.com/office/drawing/2014/main" id="{A074959D-9AA7-D270-552C-3D655A2FDB8A}"/>
-              </a:ext>
-            </a:extLst>
-          </p:cNvPr>
-          <p:cNvSpPr>
-            <a:spLocks noGrp="1" noRot="1" noChangeAspect="1"/>
-          </p:cNvSpPr>
-          <p:nvPr>
-            <p:ph type="sldImg" idx="2"/>
-          </p:nvPr>
-        </p:nvSpPr>
-        <p:spPr>
-          <a:xfrm>
-            <a:off x="381000" y="685800"/>
-            <a:ext cx="6096000" cy="3429000"/>
-          </a:xfrm>
-          <a:custGeom>
-            <a:avLst/>
-            <a:gdLst/>
-            <a:ahLst/>
-            <a:cxnLst/>
-            <a:rect l="l" t="t" r="r" b="b"/>
-            <a:pathLst>
-              <a:path w="120000" h="120000" extrusionOk="0">
-                <a:moveTo>
-                  <a:pt x="0" y="0"/>
-                </a:moveTo>
-                <a:lnTo>
-                  <a:pt x="120000" y="0"/>
-                </a:lnTo>
-                <a:lnTo>
-                  <a:pt x="120000" y="120000"/>
-                </a:lnTo>
-                <a:lnTo>
-                  <a:pt x="0" y="120000"/>
-                </a:lnTo>
-                <a:close/>
-              </a:path>
-            </a:pathLst>
-          </a:custGeom>
-        </p:spPr>
-      </p:sp>
-      <p:sp>
-        <p:nvSpPr>
-          <p:cNvPr id="997" name="Google Shape;997;g6ed1d3ee59_0_10084:notes">
-            <a:extLst>
-              <a:ext uri="{FF2B5EF4-FFF2-40B4-BE49-F238E27FC236}">
-                <a16:creationId xmlns:a16="http://schemas.microsoft.com/office/drawing/2014/main" id="{63C974D2-18E8-8BEA-6DD5-A55D55F87092}"/>
-              </a:ext>
-            </a:extLst>
-          </p:cNvPr>
-          <p:cNvSpPr txBox="1">
-            <a:spLocks noGrp="1"/>
-          </p:cNvSpPr>
-          <p:nvPr>
-            <p:ph type="body" idx="1"/>
-          </p:nvPr>
-        </p:nvSpPr>
-        <p:spPr>
-          <a:xfrm>
-            <a:off x="685800" y="4343400"/>
-            <a:ext cx="5486400" cy="4114800"/>
-          </a:xfrm>
-          <a:prstGeom prst="rect">
-            <a:avLst/>
-          </a:prstGeom>
-        </p:spPr>
-        <p:txBody>
-          <a:bodyPr spcFirstLastPara="1" wrap="square" lIns="91425" tIns="91425" rIns="91425" bIns="91425" anchor="t" anchorCtr="0">
-            <a:noAutofit/>
-          </a:bodyPr>
-          <a:lstStyle/>
-          <a:p>
-            <a:pPr marL="0" lvl="0" indent="0" algn="l" rtl="0">
-              <a:spcBef>
-                <a:spcPts val="0"/>
-              </a:spcBef>
-              <a:spcAft>
-                <a:spcPts val="0"/>
-              </a:spcAft>
-              <a:buNone/>
-            </a:pPr>
-            <a:endParaRPr/>
-          </a:p>
-        </p:txBody>
-      </p:sp>
-    </p:spTree>
-    <p:extLst>
-      <p:ext uri="{BB962C8B-B14F-4D97-AF65-F5344CB8AC3E}">
-        <p14:creationId xmlns:p14="http://schemas.microsoft.com/office/powerpoint/2010/main" val="3495024847"/>
       </p:ext>
     </p:extLst>
   </p:cSld>
@@ -17086,6 +17214,99 @@
           <p:cNvPr id="2" name="Object 1">
             <a:extLst>
               <a:ext uri="{FF2B5EF4-FFF2-40B4-BE49-F238E27FC236}">
+                <a16:creationId xmlns:a16="http://schemas.microsoft.com/office/drawing/2014/main" id="{B8F103BA-FE0A-AA41-EBEC-DC6531E5551D}"/>
+              </a:ext>
+            </a:extLst>
+          </p:cNvPr>
+          <p:cNvGraphicFramePr>
+            <a:graphicFrameLocks noChangeAspect="1"/>
+          </p:cNvGraphicFramePr>
+          <p:nvPr>
+            <p:extLst>
+              <p:ext uri="{D42A27DB-BD31-4B8C-83A1-F6EECF244321}">
+                <p14:modId xmlns:p14="http://schemas.microsoft.com/office/powerpoint/2010/main" val="318484214"/>
+              </p:ext>
+            </p:extLst>
+          </p:nvPr>
+        </p:nvGraphicFramePr>
+        <p:xfrm>
+          <a:off x="0" y="0"/>
+          <a:ext cx="9144000" cy="5143500"/>
+        </p:xfrm>
+        <a:graphic>
+          <a:graphicData uri="http://schemas.openxmlformats.org/presentationml/2006/ole">
+            <mc:AlternateContent xmlns:mc="http://schemas.openxmlformats.org/markup-compatibility/2006">
+              <mc:Choice xmlns:v="urn:schemas-microsoft-com:vml" Requires="v">
+                <p:oleObj r:id="rId2" imgW="23457131" imgH="13194723" progId="">
+                  <p:embed/>
+                </p:oleObj>
+              </mc:Choice>
+              <mc:Fallback>
+                <p:oleObj r:id="rId2" imgW="23457131" imgH="13194723" progId="">
+                  <p:embed/>
+                  <p:pic>
+                    <p:nvPicPr>
+                      <p:cNvPr id="0" name=""/>
+                      <p:cNvPicPr/>
+                      <p:nvPr/>
+                    </p:nvPicPr>
+                    <p:blipFill>
+                      <a:blip r:embed="rId3"/>
+                      <a:stretch>
+                        <a:fillRect/>
+                      </a:stretch>
+                    </p:blipFill>
+                    <p:spPr>
+                      <a:xfrm>
+                        <a:off x="0" y="0"/>
+                        <a:ext cx="9144000" cy="5143500"/>
+                      </a:xfrm>
+                      <a:prstGeom prst="rect">
+                        <a:avLst/>
+                      </a:prstGeom>
+                    </p:spPr>
+                  </p:pic>
+                </p:oleObj>
+              </mc:Fallback>
+            </mc:AlternateContent>
+          </a:graphicData>
+        </a:graphic>
+      </p:graphicFrame>
+    </p:spTree>
+    <p:extLst>
+      <p:ext uri="{BB962C8B-B14F-4D97-AF65-F5344CB8AC3E}">
+        <p14:creationId xmlns:p14="http://schemas.microsoft.com/office/powerpoint/2010/main" val="1421057380"/>
+      </p:ext>
+    </p:extLst>
+  </p:cSld>
+  <p:clrMapOvr>
+    <a:masterClrMapping/>
+  </p:clrMapOvr>
+</p:sld>
+</file>
+
+<file path=ppt/slides/slide11.xml><?xml version="1.0" encoding="utf-8"?>
+<p:sld xmlns:a="http://schemas.openxmlformats.org/drawingml/2006/main" xmlns:r="http://schemas.openxmlformats.org/officeDocument/2006/relationships" xmlns:p="http://schemas.openxmlformats.org/presentationml/2006/main">
+  <p:cSld>
+    <p:spTree>
+      <p:nvGrpSpPr>
+        <p:cNvPr id="1" name=""/>
+        <p:cNvGrpSpPr/>
+        <p:nvPr/>
+      </p:nvGrpSpPr>
+      <p:grpSpPr>
+        <a:xfrm>
+          <a:off x="0" y="0"/>
+          <a:ext cx="0" cy="0"/>
+          <a:chOff x="0" y="0"/>
+          <a:chExt cx="0" cy="0"/>
+        </a:xfrm>
+      </p:grpSpPr>
+      <p:graphicFrame>
+        <p:nvGraphicFramePr>
+          <p:cNvPr id="2" name="Object 1">
+            <a:extLst>
+              <a:ext uri="{FF2B5EF4-FFF2-40B4-BE49-F238E27FC236}">
                 <a16:creationId xmlns:a16="http://schemas.microsoft.com/office/drawing/2014/main" id="{0609FE13-086A-FABE-04FF-6CEC053EBD8D}"/>
               </a:ext>
             </a:extLst>
@@ -17157,7 +17378,7 @@
 </p:sld>
 </file>
 
-<file path=ppt/slides/slide11.xml><?xml version="1.0" encoding="utf-8"?>
+<file path=ppt/slides/slide12.xml><?xml version="1.0" encoding="utf-8"?>
 <p:sld xmlns:a="http://schemas.openxmlformats.org/drawingml/2006/main" xmlns:r="http://schemas.openxmlformats.org/officeDocument/2006/relationships" xmlns:p="http://schemas.openxmlformats.org/presentationml/2006/main">
   <p:cSld>
     <p:spTree>
@@ -17250,7 +17471,7 @@
 </p:sld>
 </file>
 
-<file path=ppt/slides/slide12.xml><?xml version="1.0" encoding="utf-8"?>
+<file path=ppt/slides/slide13.xml><?xml version="1.0" encoding="utf-8"?>
 <p:sld xmlns:a="http://schemas.openxmlformats.org/drawingml/2006/main" xmlns:r="http://schemas.openxmlformats.org/officeDocument/2006/relationships" xmlns:p="http://schemas.openxmlformats.org/presentationml/2006/main">
   <p:cSld>
     <p:spTree>
@@ -17798,6 +18019,44 @@
           </a:p>
         </p:txBody>
       </p:sp>
+      <p:pic>
+        <p:nvPicPr>
+          <p:cNvPr id="2" name="Picture 1" descr="A red cross on a black background&#10;&#10;AI-generated content may be incorrect.">
+            <a:extLst>
+              <a:ext uri="{FF2B5EF4-FFF2-40B4-BE49-F238E27FC236}">
+                <a16:creationId xmlns:a16="http://schemas.microsoft.com/office/drawing/2014/main" id="{386FFFBA-FE05-76C7-2391-7A8913311D19}"/>
+              </a:ext>
+            </a:extLst>
+          </p:cNvPr>
+          <p:cNvPicPr>
+            <a:picLocks noChangeAspect="1"/>
+          </p:cNvPicPr>
+          <p:nvPr/>
+        </p:nvPicPr>
+        <p:blipFill>
+          <a:blip r:embed="rId4"/>
+          <a:stretch>
+            <a:fillRect/>
+          </a:stretch>
+        </p:blipFill>
+        <p:spPr>
+          <a:xfrm>
+            <a:off x="312978" y="4340822"/>
+            <a:ext cx="1362314" cy="461429"/>
+          </a:xfrm>
+          <a:prstGeom prst="rect">
+            <a:avLst/>
+          </a:prstGeom>
+          <a:effectLst>
+            <a:glow rad="228600">
+              <a:schemeClr val="accent4">
+                <a:satMod val="175000"/>
+                <a:alpha val="40000"/>
+              </a:schemeClr>
+            </a:glow>
+          </a:effectLst>
+        </p:spPr>
+      </p:pic>
     </p:spTree>
     <p:extLst>
       <p:ext uri="{BB962C8B-B14F-4D97-AF65-F5344CB8AC3E}">
@@ -17811,7 +18070,7 @@
 </p:sld>
 </file>
 
-<file path=ppt/slides/slide13.xml><?xml version="1.0" encoding="utf-8"?>
+<file path=ppt/slides/slide14.xml><?xml version="1.0" encoding="utf-8"?>
 <p:sld xmlns:a="http://schemas.openxmlformats.org/drawingml/2006/main" xmlns:r="http://schemas.openxmlformats.org/officeDocument/2006/relationships" xmlns:p="http://schemas.openxmlformats.org/presentationml/2006/main">
   <p:cSld>
     <p:spTree>
@@ -18420,6 +18679,44 @@
           </a:p>
         </p:txBody>
       </p:sp>
+      <p:pic>
+        <p:nvPicPr>
+          <p:cNvPr id="4" name="Picture 3" descr="A red cross on a black background&#10;&#10;AI-generated content may be incorrect.">
+            <a:extLst>
+              <a:ext uri="{FF2B5EF4-FFF2-40B4-BE49-F238E27FC236}">
+                <a16:creationId xmlns:a16="http://schemas.microsoft.com/office/drawing/2014/main" id="{CC0F2286-4A82-FDE3-FB44-1F7DB76159B6}"/>
+              </a:ext>
+            </a:extLst>
+          </p:cNvPr>
+          <p:cNvPicPr>
+            <a:picLocks noChangeAspect="1"/>
+          </p:cNvPicPr>
+          <p:nvPr/>
+        </p:nvPicPr>
+        <p:blipFill>
+          <a:blip r:embed="rId4"/>
+          <a:stretch>
+            <a:fillRect/>
+          </a:stretch>
+        </p:blipFill>
+        <p:spPr>
+          <a:xfrm>
+            <a:off x="312978" y="4340822"/>
+            <a:ext cx="1362314" cy="461429"/>
+          </a:xfrm>
+          <a:prstGeom prst="rect">
+            <a:avLst/>
+          </a:prstGeom>
+          <a:effectLst>
+            <a:glow rad="228600">
+              <a:schemeClr val="accent4">
+                <a:satMod val="175000"/>
+                <a:alpha val="40000"/>
+              </a:schemeClr>
+            </a:glow>
+          </a:effectLst>
+        </p:spPr>
+      </p:pic>
     </p:spTree>
     <p:extLst>
       <p:ext uri="{BB962C8B-B14F-4D97-AF65-F5344CB8AC3E}">
@@ -18433,7 +18730,7 @@
 </p:sld>
 </file>
 
-<file path=ppt/slides/slide14.xml><?xml version="1.0" encoding="utf-8"?>
+<file path=ppt/slides/slide15.xml><?xml version="1.0" encoding="utf-8"?>
 <p:sld xmlns:a="http://schemas.openxmlformats.org/drawingml/2006/main" xmlns:r="http://schemas.openxmlformats.org/officeDocument/2006/relationships" xmlns:p="http://schemas.openxmlformats.org/presentationml/2006/main">
   <p:cSld>
     <p:spTree>
@@ -18506,8 +18803,8 @@
         </p:nvSpPr>
         <p:spPr>
           <a:xfrm>
-            <a:off x="1725793" y="1132021"/>
-            <a:ext cx="5692356" cy="777875"/>
+            <a:off x="2343175" y="1148669"/>
+            <a:ext cx="4457650" cy="777875"/>
           </a:xfrm>
           <a:prstGeom prst="rect">
             <a:avLst/>
@@ -18889,6 +19186,44 @@
           </a:p>
         </p:txBody>
       </p:sp>
+      <p:pic>
+        <p:nvPicPr>
+          <p:cNvPr id="4" name="Picture 3" descr="A red cross on a black background&#10;&#10;AI-generated content may be incorrect.">
+            <a:extLst>
+              <a:ext uri="{FF2B5EF4-FFF2-40B4-BE49-F238E27FC236}">
+                <a16:creationId xmlns:a16="http://schemas.microsoft.com/office/drawing/2014/main" id="{94D08BD7-0DC1-9958-4E1D-4C6558D63EDC}"/>
+              </a:ext>
+            </a:extLst>
+          </p:cNvPr>
+          <p:cNvPicPr>
+            <a:picLocks noChangeAspect="1"/>
+          </p:cNvPicPr>
+          <p:nvPr/>
+        </p:nvPicPr>
+        <p:blipFill>
+          <a:blip r:embed="rId5"/>
+          <a:stretch>
+            <a:fillRect/>
+          </a:stretch>
+        </p:blipFill>
+        <p:spPr>
+          <a:xfrm>
+            <a:off x="312978" y="4340822"/>
+            <a:ext cx="1362314" cy="461429"/>
+          </a:xfrm>
+          <a:prstGeom prst="rect">
+            <a:avLst/>
+          </a:prstGeom>
+          <a:effectLst>
+            <a:glow rad="228600">
+              <a:schemeClr val="accent4">
+                <a:satMod val="175000"/>
+                <a:alpha val="40000"/>
+              </a:schemeClr>
+            </a:glow>
+          </a:effectLst>
+        </p:spPr>
+      </p:pic>
     </p:spTree>
     <p:extLst>
       <p:ext uri="{BB962C8B-B14F-4D97-AF65-F5344CB8AC3E}">
@@ -18902,7 +19237,7 @@
 </p:sld>
 </file>
 
-<file path=ppt/slides/slide15.xml><?xml version="1.0" encoding="utf-8"?>
+<file path=ppt/slides/slide16.xml><?xml version="1.0" encoding="utf-8"?>
 <p:sld xmlns:a="http://schemas.openxmlformats.org/drawingml/2006/main" xmlns:r="http://schemas.openxmlformats.org/officeDocument/2006/relationships" xmlns:p="http://schemas.openxmlformats.org/presentationml/2006/main">
   <p:cSld>
     <p:spTree>
@@ -19564,6 +19899,44 @@
           </a:prstGeom>
         </p:spPr>
       </p:pic>
+      <p:pic>
+        <p:nvPicPr>
+          <p:cNvPr id="4" name="Picture 3" descr="A red cross on a black background&#10;&#10;AI-generated content may be incorrect.">
+            <a:extLst>
+              <a:ext uri="{FF2B5EF4-FFF2-40B4-BE49-F238E27FC236}">
+                <a16:creationId xmlns:a16="http://schemas.microsoft.com/office/drawing/2014/main" id="{47BFC70F-DA71-A68A-4A61-35A173CC42A1}"/>
+              </a:ext>
+            </a:extLst>
+          </p:cNvPr>
+          <p:cNvPicPr>
+            <a:picLocks noChangeAspect="1"/>
+          </p:cNvPicPr>
+          <p:nvPr/>
+        </p:nvPicPr>
+        <p:blipFill>
+          <a:blip r:embed="rId6"/>
+          <a:stretch>
+            <a:fillRect/>
+          </a:stretch>
+        </p:blipFill>
+        <p:spPr>
+          <a:xfrm>
+            <a:off x="312978" y="4340822"/>
+            <a:ext cx="1362314" cy="461429"/>
+          </a:xfrm>
+          <a:prstGeom prst="rect">
+            <a:avLst/>
+          </a:prstGeom>
+          <a:effectLst>
+            <a:glow rad="228600">
+              <a:schemeClr val="accent4">
+                <a:satMod val="175000"/>
+                <a:alpha val="40000"/>
+              </a:schemeClr>
+            </a:glow>
+          </a:effectLst>
+        </p:spPr>
+      </p:pic>
     </p:spTree>
     <p:extLst>
       <p:ext uri="{BB962C8B-B14F-4D97-AF65-F5344CB8AC3E}">
@@ -19577,7 +19950,7 @@
 </p:sld>
 </file>
 
-<file path=ppt/slides/slide16.xml><?xml version="1.0" encoding="utf-8"?>
+<file path=ppt/slides/slide17.xml><?xml version="1.0" encoding="utf-8"?>
 <p:sld xmlns:a="http://schemas.openxmlformats.org/drawingml/2006/main" xmlns:r="http://schemas.openxmlformats.org/officeDocument/2006/relationships" xmlns:p="http://schemas.openxmlformats.org/presentationml/2006/main">
   <p:cSld>
     <p:spTree>
@@ -19694,7 +20067,7 @@
                 </a:effectLst>
                 <a:latin typeface="Press Start 2P" panose="00000500000000000000" pitchFamily="2" charset="0"/>
               </a:rPr>
-              <a:t>Estimated development time: 14 months.</a:t>
+              <a:t>Estimated development time: xx months.</a:t>
             </a:r>
             <a:br>
               <a:rPr lang="en-US" sz="1000" dirty="0">
@@ -19760,10 +20133,10 @@
                 </a:effectLst>
                 <a:latin typeface="Press Start 2P" panose="00000500000000000000" pitchFamily="2" charset="0"/>
               </a:rPr>
-              <a:t>Estimated budget: </a:t>
+              <a:t>Estimated budget</a:t>
             </a:r>
             <a:r>
-              <a:rPr lang="en-US" sz="1000" dirty="0" err="1">
+              <a:rPr lang="en-US" sz="1000">
                 <a:solidFill>
                   <a:schemeClr val="bg1">
                     <a:lumMod val="75000"/>
@@ -19779,7 +20152,7 @@
                 </a:effectLst>
                 <a:latin typeface="Press Start 2P" panose="00000500000000000000" pitchFamily="2" charset="0"/>
               </a:rPr>
-              <a:t>xxxK</a:t>
+              <a:t>: xxx </a:t>
             </a:r>
             <a:r>
               <a:rPr lang="en-US" sz="1000" dirty="0">
@@ -19798,7 +20171,7 @@
                 </a:effectLst>
                 <a:latin typeface="Press Start 2P" panose="00000500000000000000" pitchFamily="2" charset="0"/>
               </a:rPr>
-              <a:t> USD (*)</a:t>
+              <a:t>USD (*)</a:t>
             </a:r>
           </a:p>
           <a:p>
@@ -19880,8 +20253,8 @@
         </p:nvSpPr>
         <p:spPr>
           <a:xfrm>
-            <a:off x="1390426" y="4362135"/>
-            <a:ext cx="6245278" cy="659568"/>
+            <a:off x="2168911" y="4340822"/>
+            <a:ext cx="4806177" cy="659568"/>
           </a:xfrm>
           <a:prstGeom prst="rect">
             <a:avLst/>
@@ -20499,6 +20872,44 @@
           </a:p>
         </p:txBody>
       </p:sp>
+      <p:pic>
+        <p:nvPicPr>
+          <p:cNvPr id="5" name="Picture 4" descr="A red cross on a black background&#10;&#10;AI-generated content may be incorrect.">
+            <a:extLst>
+              <a:ext uri="{FF2B5EF4-FFF2-40B4-BE49-F238E27FC236}">
+                <a16:creationId xmlns:a16="http://schemas.microsoft.com/office/drawing/2014/main" id="{0FA8F0FE-F8BC-A2C9-AF49-8ACFCF2DD370}"/>
+              </a:ext>
+            </a:extLst>
+          </p:cNvPr>
+          <p:cNvPicPr>
+            <a:picLocks noChangeAspect="1"/>
+          </p:cNvPicPr>
+          <p:nvPr/>
+        </p:nvPicPr>
+        <p:blipFill>
+          <a:blip r:embed="rId4"/>
+          <a:stretch>
+            <a:fillRect/>
+          </a:stretch>
+        </p:blipFill>
+        <p:spPr>
+          <a:xfrm>
+            <a:off x="312978" y="4340822"/>
+            <a:ext cx="1362314" cy="461429"/>
+          </a:xfrm>
+          <a:prstGeom prst="rect">
+            <a:avLst/>
+          </a:prstGeom>
+          <a:effectLst>
+            <a:glow rad="228600">
+              <a:schemeClr val="accent4">
+                <a:satMod val="175000"/>
+                <a:alpha val="40000"/>
+              </a:schemeClr>
+            </a:glow>
+          </a:effectLst>
+        </p:spPr>
+      </p:pic>
     </p:spTree>
     <p:extLst>
       <p:ext uri="{BB962C8B-B14F-4D97-AF65-F5344CB8AC3E}">
@@ -20512,7 +20923,7 @@
 </p:sld>
 </file>
 
-<file path=ppt/slides/slide17.xml><?xml version="1.0" encoding="utf-8"?>
+<file path=ppt/slides/slide18.xml><?xml version="1.0" encoding="utf-8"?>
 <p:sld xmlns:a="http://schemas.openxmlformats.org/drawingml/2006/main" xmlns:r="http://schemas.openxmlformats.org/officeDocument/2006/relationships" xmlns:p="http://schemas.openxmlformats.org/presentationml/2006/main">
   <p:cSld>
     <p:spTree>
@@ -20841,7 +21252,7 @@
 </p:sld>
 </file>
 
-<file path=ppt/slides/slide18.xml><?xml version="1.0" encoding="utf-8"?>
+<file path=ppt/slides/slide19.xml><?xml version="1.0" encoding="utf-8"?>
 <p:sld xmlns:a="http://schemas.openxmlformats.org/drawingml/2006/main" xmlns:r="http://schemas.openxmlformats.org/officeDocument/2006/relationships" xmlns:p="http://schemas.openxmlformats.org/presentationml/2006/main">
   <p:cSld>
     <p:spTree>
@@ -20979,7 +21390,7 @@
         </p:nvSpPr>
         <p:spPr>
           <a:xfrm>
-            <a:off x="1898519" y="4543066"/>
+            <a:off x="1732989" y="4543066"/>
             <a:ext cx="5346957" cy="400290"/>
           </a:xfrm>
           <a:prstGeom prst="rect">
@@ -21523,6 +21934,44 @@
           </a:p>
         </p:txBody>
       </p:sp>
+      <p:pic>
+        <p:nvPicPr>
+          <p:cNvPr id="3" name="Picture 2" descr="A red cross on a black background&#10;&#10;AI-generated content may be incorrect.">
+            <a:extLst>
+              <a:ext uri="{FF2B5EF4-FFF2-40B4-BE49-F238E27FC236}">
+                <a16:creationId xmlns:a16="http://schemas.microsoft.com/office/drawing/2014/main" id="{166806AD-98D4-D7EB-6E60-4E2D5324FA03}"/>
+              </a:ext>
+            </a:extLst>
+          </p:cNvPr>
+          <p:cNvPicPr>
+            <a:picLocks noChangeAspect="1"/>
+          </p:cNvPicPr>
+          <p:nvPr/>
+        </p:nvPicPr>
+        <p:blipFill>
+          <a:blip r:embed="rId4"/>
+          <a:stretch>
+            <a:fillRect/>
+          </a:stretch>
+        </p:blipFill>
+        <p:spPr>
+          <a:xfrm>
+            <a:off x="312978" y="4340822"/>
+            <a:ext cx="1362314" cy="461429"/>
+          </a:xfrm>
+          <a:prstGeom prst="rect">
+            <a:avLst/>
+          </a:prstGeom>
+          <a:effectLst>
+            <a:glow rad="228600">
+              <a:schemeClr val="accent4">
+                <a:satMod val="175000"/>
+                <a:alpha val="40000"/>
+              </a:schemeClr>
+            </a:glow>
+          </a:effectLst>
+        </p:spPr>
+      </p:pic>
     </p:spTree>
   </p:cSld>
   <p:clrMapOvr>
@@ -21799,7 +22248,7 @@
         </p:blipFill>
         <p:spPr>
           <a:xfrm>
-            <a:off x="1747293" y="3924909"/>
+            <a:off x="3478656" y="3983316"/>
             <a:ext cx="571500" cy="914400"/>
           </a:xfrm>
           <a:prstGeom prst="rect">
@@ -21829,12 +22278,50 @@
         </p:blipFill>
         <p:spPr>
           <a:xfrm flipH="1">
-            <a:off x="6825208" y="3983316"/>
+            <a:off x="4969043" y="3945001"/>
             <a:ext cx="571500" cy="857250"/>
           </a:xfrm>
           <a:prstGeom prst="rect">
             <a:avLst/>
           </a:prstGeom>
+        </p:spPr>
+      </p:pic>
+      <p:pic>
+        <p:nvPicPr>
+          <p:cNvPr id="4" name="Picture 3" descr="A red cross on a black background&#10;&#10;AI-generated content may be incorrect.">
+            <a:extLst>
+              <a:ext uri="{FF2B5EF4-FFF2-40B4-BE49-F238E27FC236}">
+                <a16:creationId xmlns:a16="http://schemas.microsoft.com/office/drawing/2014/main" id="{CD570A14-9AB3-B1FD-5DB0-393BE4F215C2}"/>
+              </a:ext>
+            </a:extLst>
+          </p:cNvPr>
+          <p:cNvPicPr>
+            <a:picLocks noChangeAspect="1"/>
+          </p:cNvPicPr>
+          <p:nvPr/>
+        </p:nvPicPr>
+        <p:blipFill>
+          <a:blip r:embed="rId6"/>
+          <a:stretch>
+            <a:fillRect/>
+          </a:stretch>
+        </p:blipFill>
+        <p:spPr>
+          <a:xfrm>
+            <a:off x="312978" y="4340822"/>
+            <a:ext cx="1362314" cy="461429"/>
+          </a:xfrm>
+          <a:prstGeom prst="rect">
+            <a:avLst/>
+          </a:prstGeom>
+          <a:effectLst>
+            <a:glow rad="228600">
+              <a:schemeClr val="accent4">
+                <a:satMod val="175000"/>
+                <a:alpha val="40000"/>
+              </a:schemeClr>
+            </a:glow>
+          </a:effectLst>
         </p:spPr>
       </p:pic>
     </p:spTree>
@@ -21923,8 +22410,8 @@
         </p:nvSpPr>
         <p:spPr>
           <a:xfrm>
-            <a:off x="826015" y="1046257"/>
-            <a:ext cx="7491970" cy="1112837"/>
+            <a:off x="468268" y="1057573"/>
+            <a:ext cx="3943625" cy="1112837"/>
           </a:xfrm>
           <a:prstGeom prst="rect">
             <a:avLst/>
@@ -22089,35 +22576,628 @@
               <a:t>Permadeath - each death teaches something new and unlocks items.</a:t>
             </a:r>
           </a:p>
-          <a:p>
-            <a:pPr marL="171450" indent="-171450">
+        </p:txBody>
+      </p:sp>
+      <p:sp>
+        <p:nvSpPr>
+          <p:cNvPr id="4" name="Google Shape;999;p37">
+            <a:extLst>
+              <a:ext uri="{FF2B5EF4-FFF2-40B4-BE49-F238E27FC236}">
+                <a16:creationId xmlns:a16="http://schemas.microsoft.com/office/drawing/2014/main" id="{222FC448-A206-6ED2-5D02-283984CF433B}"/>
+              </a:ext>
+            </a:extLst>
+          </p:cNvPr>
+          <p:cNvSpPr txBox="1">
+            <a:spLocks/>
+          </p:cNvSpPr>
+          <p:nvPr/>
+        </p:nvSpPr>
+        <p:spPr>
+          <a:xfrm>
+            <a:off x="2043566" y="362755"/>
+            <a:ext cx="5067392" cy="526471"/>
+          </a:xfrm>
+          <a:prstGeom prst="rect">
+            <a:avLst/>
+          </a:prstGeom>
+          <a:noFill/>
+          <a:ln>
+            <a:noFill/>
+          </a:ln>
+        </p:spPr>
+        <p:txBody>
+          <a:bodyPr spcFirstLastPara="1" wrap="square" lIns="91425" tIns="91425" rIns="91425" bIns="91425" anchor="ctr" anchorCtr="0">
+            <a:noAutofit/>
+          </a:bodyPr>
+          <a:lstStyle>
+            <a:defPPr marR="0" lvl="0" algn="l" rtl="0">
               <a:lnSpc>
-                <a:spcPts val="1400"/>
+                <a:spcPct val="100000"/>
               </a:lnSpc>
+              <a:spcBef>
+                <a:spcPts val="0"/>
+              </a:spcBef>
+              <a:spcAft>
+                <a:spcPts val="0"/>
+              </a:spcAft>
+            </a:defPPr>
+            <a:lvl1pPr marR="0" lvl="0" algn="l" rtl="0">
+              <a:lnSpc>
+                <a:spcPct val="100000"/>
+              </a:lnSpc>
+              <a:spcBef>
+                <a:spcPts val="0"/>
+              </a:spcBef>
+              <a:spcAft>
+                <a:spcPts val="0"/>
+              </a:spcAft>
               <a:buClr>
-                <a:srgbClr val="AB5130"/>
+                <a:srgbClr val="FFFF00"/>
+              </a:buClr>
+              <a:buSzPts val="3000"/>
+              <a:buFont typeface="Press Start 2P"/>
+              <a:buNone/>
+              <a:defRPr sz="3000" b="0" i="0" u="none" strike="noStrike" cap="none">
+                <a:solidFill>
+                  <a:srgbClr val="FFFF00"/>
+                </a:solidFill>
+                <a:latin typeface="Press Start 2P"/>
+                <a:ea typeface="Press Start 2P"/>
+                <a:cs typeface="Press Start 2P"/>
+                <a:sym typeface="Press Start 2P"/>
+              </a:defRPr>
+            </a:lvl1pPr>
+            <a:lvl2pPr marR="0" lvl="1" algn="l" rtl="0">
+              <a:lnSpc>
+                <a:spcPct val="100000"/>
+              </a:lnSpc>
+              <a:spcBef>
+                <a:spcPts val="0"/>
+              </a:spcBef>
+              <a:spcAft>
+                <a:spcPts val="0"/>
+              </a:spcAft>
+              <a:buClr>
+                <a:srgbClr val="FFFF00"/>
+              </a:buClr>
+              <a:buSzPts val="2800"/>
+              <a:buFont typeface="Press Start 2P"/>
+              <a:buNone/>
+              <a:defRPr sz="2800" b="0" i="0" u="none" strike="noStrike" cap="none">
+                <a:solidFill>
+                  <a:srgbClr val="FFFF00"/>
+                </a:solidFill>
+                <a:latin typeface="Press Start 2P"/>
+                <a:ea typeface="Press Start 2P"/>
+                <a:cs typeface="Press Start 2P"/>
+                <a:sym typeface="Press Start 2P"/>
+              </a:defRPr>
+            </a:lvl2pPr>
+            <a:lvl3pPr marR="0" lvl="2" algn="l" rtl="0">
+              <a:lnSpc>
+                <a:spcPct val="100000"/>
+              </a:lnSpc>
+              <a:spcBef>
+                <a:spcPts val="0"/>
+              </a:spcBef>
+              <a:spcAft>
+                <a:spcPts val="0"/>
+              </a:spcAft>
+              <a:buClr>
+                <a:srgbClr val="FFFF00"/>
+              </a:buClr>
+              <a:buSzPts val="2800"/>
+              <a:buFont typeface="Press Start 2P"/>
+              <a:buNone/>
+              <a:defRPr sz="2800" b="0" i="0" u="none" strike="noStrike" cap="none">
+                <a:solidFill>
+                  <a:srgbClr val="FFFF00"/>
+                </a:solidFill>
+                <a:latin typeface="Press Start 2P"/>
+                <a:ea typeface="Press Start 2P"/>
+                <a:cs typeface="Press Start 2P"/>
+                <a:sym typeface="Press Start 2P"/>
+              </a:defRPr>
+            </a:lvl3pPr>
+            <a:lvl4pPr marR="0" lvl="3" algn="l" rtl="0">
+              <a:lnSpc>
+                <a:spcPct val="100000"/>
+              </a:lnSpc>
+              <a:spcBef>
+                <a:spcPts val="0"/>
+              </a:spcBef>
+              <a:spcAft>
+                <a:spcPts val="0"/>
+              </a:spcAft>
+              <a:buClr>
+                <a:srgbClr val="FFFF00"/>
+              </a:buClr>
+              <a:buSzPts val="2800"/>
+              <a:buFont typeface="Press Start 2P"/>
+              <a:buNone/>
+              <a:defRPr sz="2800" b="0" i="0" u="none" strike="noStrike" cap="none">
+                <a:solidFill>
+                  <a:srgbClr val="FFFF00"/>
+                </a:solidFill>
+                <a:latin typeface="Press Start 2P"/>
+                <a:ea typeface="Press Start 2P"/>
+                <a:cs typeface="Press Start 2P"/>
+                <a:sym typeface="Press Start 2P"/>
+              </a:defRPr>
+            </a:lvl4pPr>
+            <a:lvl5pPr marR="0" lvl="4" algn="l" rtl="0">
+              <a:lnSpc>
+                <a:spcPct val="100000"/>
+              </a:lnSpc>
+              <a:spcBef>
+                <a:spcPts val="0"/>
+              </a:spcBef>
+              <a:spcAft>
+                <a:spcPts val="0"/>
+              </a:spcAft>
+              <a:buClr>
+                <a:srgbClr val="FFFF00"/>
+              </a:buClr>
+              <a:buSzPts val="2800"/>
+              <a:buFont typeface="Press Start 2P"/>
+              <a:buNone/>
+              <a:defRPr sz="2800" b="0" i="0" u="none" strike="noStrike" cap="none">
+                <a:solidFill>
+                  <a:srgbClr val="FFFF00"/>
+                </a:solidFill>
+                <a:latin typeface="Press Start 2P"/>
+                <a:ea typeface="Press Start 2P"/>
+                <a:cs typeface="Press Start 2P"/>
+                <a:sym typeface="Press Start 2P"/>
+              </a:defRPr>
+            </a:lvl5pPr>
+            <a:lvl6pPr marR="0" lvl="5" algn="l" rtl="0">
+              <a:lnSpc>
+                <a:spcPct val="100000"/>
+              </a:lnSpc>
+              <a:spcBef>
+                <a:spcPts val="0"/>
+              </a:spcBef>
+              <a:spcAft>
+                <a:spcPts val="0"/>
+              </a:spcAft>
+              <a:buClr>
+                <a:srgbClr val="FFFF00"/>
+              </a:buClr>
+              <a:buSzPts val="2800"/>
+              <a:buFont typeface="Press Start 2P"/>
+              <a:buNone/>
+              <a:defRPr sz="2800" b="0" i="0" u="none" strike="noStrike" cap="none">
+                <a:solidFill>
+                  <a:srgbClr val="FFFF00"/>
+                </a:solidFill>
+                <a:latin typeface="Press Start 2P"/>
+                <a:ea typeface="Press Start 2P"/>
+                <a:cs typeface="Press Start 2P"/>
+                <a:sym typeface="Press Start 2P"/>
+              </a:defRPr>
+            </a:lvl6pPr>
+            <a:lvl7pPr marR="0" lvl="6" algn="l" rtl="0">
+              <a:lnSpc>
+                <a:spcPct val="100000"/>
+              </a:lnSpc>
+              <a:spcBef>
+                <a:spcPts val="0"/>
+              </a:spcBef>
+              <a:spcAft>
+                <a:spcPts val="0"/>
+              </a:spcAft>
+              <a:buClr>
+                <a:srgbClr val="FFFF00"/>
+              </a:buClr>
+              <a:buSzPts val="2800"/>
+              <a:buFont typeface="Press Start 2P"/>
+              <a:buNone/>
+              <a:defRPr sz="2800" b="0" i="0" u="none" strike="noStrike" cap="none">
+                <a:solidFill>
+                  <a:srgbClr val="FFFF00"/>
+                </a:solidFill>
+                <a:latin typeface="Press Start 2P"/>
+                <a:ea typeface="Press Start 2P"/>
+                <a:cs typeface="Press Start 2P"/>
+                <a:sym typeface="Press Start 2P"/>
+              </a:defRPr>
+            </a:lvl7pPr>
+            <a:lvl8pPr marR="0" lvl="7" algn="l" rtl="0">
+              <a:lnSpc>
+                <a:spcPct val="100000"/>
+              </a:lnSpc>
+              <a:spcBef>
+                <a:spcPts val="0"/>
+              </a:spcBef>
+              <a:spcAft>
+                <a:spcPts val="0"/>
+              </a:spcAft>
+              <a:buClr>
+                <a:srgbClr val="FFFF00"/>
+              </a:buClr>
+              <a:buSzPts val="2800"/>
+              <a:buFont typeface="Press Start 2P"/>
+              <a:buNone/>
+              <a:defRPr sz="2800" b="0" i="0" u="none" strike="noStrike" cap="none">
+                <a:solidFill>
+                  <a:srgbClr val="FFFF00"/>
+                </a:solidFill>
+                <a:latin typeface="Press Start 2P"/>
+                <a:ea typeface="Press Start 2P"/>
+                <a:cs typeface="Press Start 2P"/>
+                <a:sym typeface="Press Start 2P"/>
+              </a:defRPr>
+            </a:lvl8pPr>
+            <a:lvl9pPr marR="0" lvl="8" algn="l" rtl="0">
+              <a:lnSpc>
+                <a:spcPct val="100000"/>
+              </a:lnSpc>
+              <a:spcBef>
+                <a:spcPts val="0"/>
+              </a:spcBef>
+              <a:spcAft>
+                <a:spcPts val="0"/>
+              </a:spcAft>
+              <a:buClr>
+                <a:srgbClr val="FFFF00"/>
+              </a:buClr>
+              <a:buSzPts val="2800"/>
+              <a:buFont typeface="Press Start 2P"/>
+              <a:buNone/>
+              <a:defRPr sz="2800" b="0" i="0" u="none" strike="noStrike" cap="none">
+                <a:solidFill>
+                  <a:srgbClr val="FFFF00"/>
+                </a:solidFill>
+                <a:latin typeface="Press Start 2P"/>
+                <a:ea typeface="Press Start 2P"/>
+                <a:cs typeface="Press Start 2P"/>
+                <a:sym typeface="Press Start 2P"/>
+              </a:defRPr>
+            </a:lvl9pPr>
+          </a:lstStyle>
+          <a:p>
+            <a:pPr algn="ctr">
+              <a:buClr>
+                <a:schemeClr val="dk1"/>
               </a:buClr>
               <a:buSzPts val="1100"/>
-              <a:buFont typeface="Press Start 2P" panose="00000500000000000000" pitchFamily="2" charset="0"/>
-              <a:buChar char="♦"/>
             </a:pPr>
-            <a:endParaRPr lang="en-US" sz="1000" dirty="0">
-              <a:solidFill>
-                <a:schemeClr val="bg1">
-                  <a:lumMod val="75000"/>
-                </a:schemeClr>
-              </a:solidFill>
-              <a:effectLst>
-                <a:glow rad="228600">
-                  <a:schemeClr val="accent4">
-                    <a:satMod val="175000"/>
-                    <a:alpha val="40000"/>
-                  </a:schemeClr>
-                </a:glow>
-              </a:effectLst>
-              <a:latin typeface="Press Start 2P" panose="00000500000000000000" pitchFamily="2" charset="0"/>
-            </a:endParaRPr>
-          </a:p>
+            <a:r>
+              <a:rPr lang="en-US" sz="2400" dirty="0">
+                <a:solidFill>
+                  <a:srgbClr val="AB5130"/>
+                </a:solidFill>
+                <a:effectLst>
+                  <a:glow rad="228600">
+                    <a:schemeClr val="accent4">
+                      <a:satMod val="175000"/>
+                      <a:alpha val="40000"/>
+                    </a:schemeClr>
+                  </a:glow>
+                </a:effectLst>
+              </a:rPr>
+              <a:t>Gameplay</a:t>
+            </a:r>
+          </a:p>
+        </p:txBody>
+      </p:sp>
+      <p:pic>
+        <p:nvPicPr>
+          <p:cNvPr id="2" name="Picture 1" descr="A red cross on a black background&#10;&#10;AI-generated content may be incorrect.">
+            <a:extLst>
+              <a:ext uri="{FF2B5EF4-FFF2-40B4-BE49-F238E27FC236}">
+                <a16:creationId xmlns:a16="http://schemas.microsoft.com/office/drawing/2014/main" id="{70F51829-3710-F3A2-AF29-71B7F7D688C5}"/>
+              </a:ext>
+            </a:extLst>
+          </p:cNvPr>
+          <p:cNvPicPr>
+            <a:picLocks noChangeAspect="1"/>
+          </p:cNvPicPr>
+          <p:nvPr/>
+        </p:nvPicPr>
+        <p:blipFill>
+          <a:blip r:embed="rId4"/>
+          <a:stretch>
+            <a:fillRect/>
+          </a:stretch>
+        </p:blipFill>
+        <p:spPr>
+          <a:xfrm>
+            <a:off x="312978" y="4340822"/>
+            <a:ext cx="1362314" cy="461429"/>
+          </a:xfrm>
+          <a:prstGeom prst="rect">
+            <a:avLst/>
+          </a:prstGeom>
+          <a:effectLst>
+            <a:glow rad="228600">
+              <a:schemeClr val="accent4">
+                <a:satMod val="175000"/>
+                <a:alpha val="40000"/>
+              </a:schemeClr>
+            </a:glow>
+          </a:effectLst>
+        </p:spPr>
+      </p:pic>
+      <p:sp>
+        <p:nvSpPr>
+          <p:cNvPr id="3" name="Google Shape;1000;p37">
+            <a:extLst>
+              <a:ext uri="{FF2B5EF4-FFF2-40B4-BE49-F238E27FC236}">
+                <a16:creationId xmlns:a16="http://schemas.microsoft.com/office/drawing/2014/main" id="{74A8C62E-6348-5319-0365-F8283626CA1A}"/>
+              </a:ext>
+            </a:extLst>
+          </p:cNvPr>
+          <p:cNvSpPr txBox="1">
+            <a:spLocks/>
+          </p:cNvSpPr>
+          <p:nvPr/>
+        </p:nvSpPr>
+        <p:spPr>
+          <a:xfrm>
+            <a:off x="4806134" y="1054409"/>
+            <a:ext cx="3943625" cy="1112837"/>
+          </a:xfrm>
+          <a:prstGeom prst="rect">
+            <a:avLst/>
+          </a:prstGeom>
+          <a:noFill/>
+          <a:ln>
+            <a:noFill/>
+          </a:ln>
+        </p:spPr>
+        <p:txBody>
+          <a:bodyPr spcFirstLastPara="1" wrap="square" lIns="91425" tIns="91425" rIns="91425" bIns="91425" anchor="t" anchorCtr="0">
+            <a:noAutofit/>
+          </a:bodyPr>
+          <a:lstStyle>
+            <a:defPPr marR="0" lvl="0" algn="l" rtl="0">
+              <a:lnSpc>
+                <a:spcPct val="100000"/>
+              </a:lnSpc>
+              <a:spcBef>
+                <a:spcPts val="0"/>
+              </a:spcBef>
+              <a:spcAft>
+                <a:spcPts val="0"/>
+              </a:spcAft>
+            </a:defPPr>
+            <a:lvl1pPr marL="457200" marR="0" lvl="0" indent="-330200" algn="l" rtl="0">
+              <a:lnSpc>
+                <a:spcPct val="115000"/>
+              </a:lnSpc>
+              <a:spcBef>
+                <a:spcPts val="0"/>
+              </a:spcBef>
+              <a:spcAft>
+                <a:spcPts val="0"/>
+              </a:spcAft>
+              <a:buClr>
+                <a:schemeClr val="lt1"/>
+              </a:buClr>
+              <a:buSzPts val="1600"/>
+              <a:buFont typeface="Maven Pro"/>
+              <a:buChar char="●"/>
+              <a:defRPr sz="1600" b="0" i="0" u="none" strike="noStrike" cap="none">
+                <a:solidFill>
+                  <a:schemeClr val="lt1"/>
+                </a:solidFill>
+                <a:latin typeface="Maven Pro"/>
+                <a:ea typeface="Maven Pro"/>
+                <a:cs typeface="Maven Pro"/>
+                <a:sym typeface="Maven Pro"/>
+              </a:defRPr>
+            </a:lvl1pPr>
+            <a:lvl2pPr marL="914400" marR="0" lvl="1" indent="-330200" algn="l" rtl="0">
+              <a:lnSpc>
+                <a:spcPct val="115000"/>
+              </a:lnSpc>
+              <a:spcBef>
+                <a:spcPts val="1600"/>
+              </a:spcBef>
+              <a:spcAft>
+                <a:spcPts val="0"/>
+              </a:spcAft>
+              <a:buClr>
+                <a:schemeClr val="lt1"/>
+              </a:buClr>
+              <a:buSzPts val="1600"/>
+              <a:buFont typeface="Maven Pro"/>
+              <a:buChar char="○"/>
+              <a:defRPr sz="1600" b="0" i="0" u="none" strike="noStrike" cap="none">
+                <a:solidFill>
+                  <a:schemeClr val="lt1"/>
+                </a:solidFill>
+                <a:latin typeface="Maven Pro"/>
+                <a:ea typeface="Maven Pro"/>
+                <a:cs typeface="Maven Pro"/>
+                <a:sym typeface="Maven Pro"/>
+              </a:defRPr>
+            </a:lvl2pPr>
+            <a:lvl3pPr marL="1371600" marR="0" lvl="2" indent="-330200" algn="l" rtl="0">
+              <a:lnSpc>
+                <a:spcPct val="115000"/>
+              </a:lnSpc>
+              <a:spcBef>
+                <a:spcPts val="1600"/>
+              </a:spcBef>
+              <a:spcAft>
+                <a:spcPts val="0"/>
+              </a:spcAft>
+              <a:buClr>
+                <a:schemeClr val="lt1"/>
+              </a:buClr>
+              <a:buSzPts val="1600"/>
+              <a:buFont typeface="Maven Pro"/>
+              <a:buChar char="■"/>
+              <a:defRPr sz="1600" b="0" i="0" u="none" strike="noStrike" cap="none">
+                <a:solidFill>
+                  <a:schemeClr val="lt1"/>
+                </a:solidFill>
+                <a:latin typeface="Maven Pro"/>
+                <a:ea typeface="Maven Pro"/>
+                <a:cs typeface="Maven Pro"/>
+                <a:sym typeface="Maven Pro"/>
+              </a:defRPr>
+            </a:lvl3pPr>
+            <a:lvl4pPr marL="1828800" marR="0" lvl="3" indent="-330200" algn="l" rtl="0">
+              <a:lnSpc>
+                <a:spcPct val="115000"/>
+              </a:lnSpc>
+              <a:spcBef>
+                <a:spcPts val="1600"/>
+              </a:spcBef>
+              <a:spcAft>
+                <a:spcPts val="0"/>
+              </a:spcAft>
+              <a:buClr>
+                <a:schemeClr val="lt1"/>
+              </a:buClr>
+              <a:buSzPts val="1600"/>
+              <a:buFont typeface="Maven Pro"/>
+              <a:buChar char="●"/>
+              <a:defRPr sz="1600" b="0" i="0" u="none" strike="noStrike" cap="none">
+                <a:solidFill>
+                  <a:schemeClr val="lt1"/>
+                </a:solidFill>
+                <a:latin typeface="Maven Pro"/>
+                <a:ea typeface="Maven Pro"/>
+                <a:cs typeface="Maven Pro"/>
+                <a:sym typeface="Maven Pro"/>
+              </a:defRPr>
+            </a:lvl4pPr>
+            <a:lvl5pPr marL="2286000" marR="0" lvl="4" indent="-330200" algn="l" rtl="0">
+              <a:lnSpc>
+                <a:spcPct val="115000"/>
+              </a:lnSpc>
+              <a:spcBef>
+                <a:spcPts val="1600"/>
+              </a:spcBef>
+              <a:spcAft>
+                <a:spcPts val="0"/>
+              </a:spcAft>
+              <a:buClr>
+                <a:schemeClr val="lt1"/>
+              </a:buClr>
+              <a:buSzPts val="1600"/>
+              <a:buFont typeface="Maven Pro"/>
+              <a:buChar char="○"/>
+              <a:defRPr sz="1600" b="0" i="0" u="none" strike="noStrike" cap="none">
+                <a:solidFill>
+                  <a:schemeClr val="lt1"/>
+                </a:solidFill>
+                <a:latin typeface="Maven Pro"/>
+                <a:ea typeface="Maven Pro"/>
+                <a:cs typeface="Maven Pro"/>
+                <a:sym typeface="Maven Pro"/>
+              </a:defRPr>
+            </a:lvl5pPr>
+            <a:lvl6pPr marL="2743200" marR="0" lvl="5" indent="-330200" algn="l" rtl="0">
+              <a:lnSpc>
+                <a:spcPct val="115000"/>
+              </a:lnSpc>
+              <a:spcBef>
+                <a:spcPts val="1600"/>
+              </a:spcBef>
+              <a:spcAft>
+                <a:spcPts val="0"/>
+              </a:spcAft>
+              <a:buClr>
+                <a:schemeClr val="lt1"/>
+              </a:buClr>
+              <a:buSzPts val="1600"/>
+              <a:buFont typeface="Maven Pro"/>
+              <a:buChar char="■"/>
+              <a:defRPr sz="1600" b="0" i="0" u="none" strike="noStrike" cap="none">
+                <a:solidFill>
+                  <a:schemeClr val="lt1"/>
+                </a:solidFill>
+                <a:latin typeface="Maven Pro"/>
+                <a:ea typeface="Maven Pro"/>
+                <a:cs typeface="Maven Pro"/>
+                <a:sym typeface="Maven Pro"/>
+              </a:defRPr>
+            </a:lvl6pPr>
+            <a:lvl7pPr marL="3200400" marR="0" lvl="6" indent="-330200" algn="l" rtl="0">
+              <a:lnSpc>
+                <a:spcPct val="115000"/>
+              </a:lnSpc>
+              <a:spcBef>
+                <a:spcPts val="1600"/>
+              </a:spcBef>
+              <a:spcAft>
+                <a:spcPts val="0"/>
+              </a:spcAft>
+              <a:buClr>
+                <a:schemeClr val="lt1"/>
+              </a:buClr>
+              <a:buSzPts val="1600"/>
+              <a:buFont typeface="Maven Pro"/>
+              <a:buChar char="●"/>
+              <a:defRPr sz="1600" b="0" i="0" u="none" strike="noStrike" cap="none">
+                <a:solidFill>
+                  <a:schemeClr val="lt1"/>
+                </a:solidFill>
+                <a:latin typeface="Maven Pro"/>
+                <a:ea typeface="Maven Pro"/>
+                <a:cs typeface="Maven Pro"/>
+                <a:sym typeface="Maven Pro"/>
+              </a:defRPr>
+            </a:lvl7pPr>
+            <a:lvl8pPr marL="3657600" marR="0" lvl="7" indent="-330200" algn="l" rtl="0">
+              <a:lnSpc>
+                <a:spcPct val="115000"/>
+              </a:lnSpc>
+              <a:spcBef>
+                <a:spcPts val="1600"/>
+              </a:spcBef>
+              <a:spcAft>
+                <a:spcPts val="0"/>
+              </a:spcAft>
+              <a:buClr>
+                <a:schemeClr val="lt1"/>
+              </a:buClr>
+              <a:buSzPts val="1600"/>
+              <a:buFont typeface="Maven Pro"/>
+              <a:buChar char="○"/>
+              <a:defRPr sz="1600" b="0" i="0" u="none" strike="noStrike" cap="none">
+                <a:solidFill>
+                  <a:schemeClr val="lt1"/>
+                </a:solidFill>
+                <a:latin typeface="Maven Pro"/>
+                <a:ea typeface="Maven Pro"/>
+                <a:cs typeface="Maven Pro"/>
+                <a:sym typeface="Maven Pro"/>
+              </a:defRPr>
+            </a:lvl8pPr>
+            <a:lvl9pPr marL="4114800" marR="0" lvl="8" indent="-330200" algn="l" rtl="0">
+              <a:lnSpc>
+                <a:spcPct val="115000"/>
+              </a:lnSpc>
+              <a:spcBef>
+                <a:spcPts val="1600"/>
+              </a:spcBef>
+              <a:spcAft>
+                <a:spcPts val="1600"/>
+              </a:spcAft>
+              <a:buClr>
+                <a:schemeClr val="lt1"/>
+              </a:buClr>
+              <a:buSzPts val="1600"/>
+              <a:buFont typeface="Maven Pro"/>
+              <a:buChar char="■"/>
+              <a:defRPr sz="1600" b="0" i="0" u="none" strike="noStrike" cap="none">
+                <a:solidFill>
+                  <a:schemeClr val="lt1"/>
+                </a:solidFill>
+                <a:latin typeface="Maven Pro"/>
+                <a:ea typeface="Maven Pro"/>
+                <a:cs typeface="Maven Pro"/>
+                <a:sym typeface="Maven Pro"/>
+              </a:defRPr>
+            </a:lvl9pPr>
+          </a:lstStyle>
           <a:p>
             <a:pPr marL="171450" indent="-171450">
               <a:lnSpc>
@@ -22290,310 +23370,6 @@
               </a:solidFill>
               <a:latin typeface="Press Start 2P" panose="00000500000000000000" pitchFamily="2" charset="0"/>
             </a:endParaRPr>
-          </a:p>
-        </p:txBody>
-      </p:sp>
-      <p:sp>
-        <p:nvSpPr>
-          <p:cNvPr id="4" name="Google Shape;999;p37">
-            <a:extLst>
-              <a:ext uri="{FF2B5EF4-FFF2-40B4-BE49-F238E27FC236}">
-                <a16:creationId xmlns:a16="http://schemas.microsoft.com/office/drawing/2014/main" id="{222FC448-A206-6ED2-5D02-283984CF433B}"/>
-              </a:ext>
-            </a:extLst>
-          </p:cNvPr>
-          <p:cNvSpPr txBox="1">
-            <a:spLocks/>
-          </p:cNvSpPr>
-          <p:nvPr/>
-        </p:nvSpPr>
-        <p:spPr>
-          <a:xfrm>
-            <a:off x="2043566" y="362755"/>
-            <a:ext cx="5067392" cy="526471"/>
-          </a:xfrm>
-          <a:prstGeom prst="rect">
-            <a:avLst/>
-          </a:prstGeom>
-          <a:noFill/>
-          <a:ln>
-            <a:noFill/>
-          </a:ln>
-        </p:spPr>
-        <p:txBody>
-          <a:bodyPr spcFirstLastPara="1" wrap="square" lIns="91425" tIns="91425" rIns="91425" bIns="91425" anchor="ctr" anchorCtr="0">
-            <a:noAutofit/>
-          </a:bodyPr>
-          <a:lstStyle>
-            <a:defPPr marR="0" lvl="0" algn="l" rtl="0">
-              <a:lnSpc>
-                <a:spcPct val="100000"/>
-              </a:lnSpc>
-              <a:spcBef>
-                <a:spcPts val="0"/>
-              </a:spcBef>
-              <a:spcAft>
-                <a:spcPts val="0"/>
-              </a:spcAft>
-            </a:defPPr>
-            <a:lvl1pPr marR="0" lvl="0" algn="l" rtl="0">
-              <a:lnSpc>
-                <a:spcPct val="100000"/>
-              </a:lnSpc>
-              <a:spcBef>
-                <a:spcPts val="0"/>
-              </a:spcBef>
-              <a:spcAft>
-                <a:spcPts val="0"/>
-              </a:spcAft>
-              <a:buClr>
-                <a:srgbClr val="FFFF00"/>
-              </a:buClr>
-              <a:buSzPts val="3000"/>
-              <a:buFont typeface="Press Start 2P"/>
-              <a:buNone/>
-              <a:defRPr sz="3000" b="0" i="0" u="none" strike="noStrike" cap="none">
-                <a:solidFill>
-                  <a:srgbClr val="FFFF00"/>
-                </a:solidFill>
-                <a:latin typeface="Press Start 2P"/>
-                <a:ea typeface="Press Start 2P"/>
-                <a:cs typeface="Press Start 2P"/>
-                <a:sym typeface="Press Start 2P"/>
-              </a:defRPr>
-            </a:lvl1pPr>
-            <a:lvl2pPr marR="0" lvl="1" algn="l" rtl="0">
-              <a:lnSpc>
-                <a:spcPct val="100000"/>
-              </a:lnSpc>
-              <a:spcBef>
-                <a:spcPts val="0"/>
-              </a:spcBef>
-              <a:spcAft>
-                <a:spcPts val="0"/>
-              </a:spcAft>
-              <a:buClr>
-                <a:srgbClr val="FFFF00"/>
-              </a:buClr>
-              <a:buSzPts val="2800"/>
-              <a:buFont typeface="Press Start 2P"/>
-              <a:buNone/>
-              <a:defRPr sz="2800" b="0" i="0" u="none" strike="noStrike" cap="none">
-                <a:solidFill>
-                  <a:srgbClr val="FFFF00"/>
-                </a:solidFill>
-                <a:latin typeface="Press Start 2P"/>
-                <a:ea typeface="Press Start 2P"/>
-                <a:cs typeface="Press Start 2P"/>
-                <a:sym typeface="Press Start 2P"/>
-              </a:defRPr>
-            </a:lvl2pPr>
-            <a:lvl3pPr marR="0" lvl="2" algn="l" rtl="0">
-              <a:lnSpc>
-                <a:spcPct val="100000"/>
-              </a:lnSpc>
-              <a:spcBef>
-                <a:spcPts val="0"/>
-              </a:spcBef>
-              <a:spcAft>
-                <a:spcPts val="0"/>
-              </a:spcAft>
-              <a:buClr>
-                <a:srgbClr val="FFFF00"/>
-              </a:buClr>
-              <a:buSzPts val="2800"/>
-              <a:buFont typeface="Press Start 2P"/>
-              <a:buNone/>
-              <a:defRPr sz="2800" b="0" i="0" u="none" strike="noStrike" cap="none">
-                <a:solidFill>
-                  <a:srgbClr val="FFFF00"/>
-                </a:solidFill>
-                <a:latin typeface="Press Start 2P"/>
-                <a:ea typeface="Press Start 2P"/>
-                <a:cs typeface="Press Start 2P"/>
-                <a:sym typeface="Press Start 2P"/>
-              </a:defRPr>
-            </a:lvl3pPr>
-            <a:lvl4pPr marR="0" lvl="3" algn="l" rtl="0">
-              <a:lnSpc>
-                <a:spcPct val="100000"/>
-              </a:lnSpc>
-              <a:spcBef>
-                <a:spcPts val="0"/>
-              </a:spcBef>
-              <a:spcAft>
-                <a:spcPts val="0"/>
-              </a:spcAft>
-              <a:buClr>
-                <a:srgbClr val="FFFF00"/>
-              </a:buClr>
-              <a:buSzPts val="2800"/>
-              <a:buFont typeface="Press Start 2P"/>
-              <a:buNone/>
-              <a:defRPr sz="2800" b="0" i="0" u="none" strike="noStrike" cap="none">
-                <a:solidFill>
-                  <a:srgbClr val="FFFF00"/>
-                </a:solidFill>
-                <a:latin typeface="Press Start 2P"/>
-                <a:ea typeface="Press Start 2P"/>
-                <a:cs typeface="Press Start 2P"/>
-                <a:sym typeface="Press Start 2P"/>
-              </a:defRPr>
-            </a:lvl4pPr>
-            <a:lvl5pPr marR="0" lvl="4" algn="l" rtl="0">
-              <a:lnSpc>
-                <a:spcPct val="100000"/>
-              </a:lnSpc>
-              <a:spcBef>
-                <a:spcPts val="0"/>
-              </a:spcBef>
-              <a:spcAft>
-                <a:spcPts val="0"/>
-              </a:spcAft>
-              <a:buClr>
-                <a:srgbClr val="FFFF00"/>
-              </a:buClr>
-              <a:buSzPts val="2800"/>
-              <a:buFont typeface="Press Start 2P"/>
-              <a:buNone/>
-              <a:defRPr sz="2800" b="0" i="0" u="none" strike="noStrike" cap="none">
-                <a:solidFill>
-                  <a:srgbClr val="FFFF00"/>
-                </a:solidFill>
-                <a:latin typeface="Press Start 2P"/>
-                <a:ea typeface="Press Start 2P"/>
-                <a:cs typeface="Press Start 2P"/>
-                <a:sym typeface="Press Start 2P"/>
-              </a:defRPr>
-            </a:lvl5pPr>
-            <a:lvl6pPr marR="0" lvl="5" algn="l" rtl="0">
-              <a:lnSpc>
-                <a:spcPct val="100000"/>
-              </a:lnSpc>
-              <a:spcBef>
-                <a:spcPts val="0"/>
-              </a:spcBef>
-              <a:spcAft>
-                <a:spcPts val="0"/>
-              </a:spcAft>
-              <a:buClr>
-                <a:srgbClr val="FFFF00"/>
-              </a:buClr>
-              <a:buSzPts val="2800"/>
-              <a:buFont typeface="Press Start 2P"/>
-              <a:buNone/>
-              <a:defRPr sz="2800" b="0" i="0" u="none" strike="noStrike" cap="none">
-                <a:solidFill>
-                  <a:srgbClr val="FFFF00"/>
-                </a:solidFill>
-                <a:latin typeface="Press Start 2P"/>
-                <a:ea typeface="Press Start 2P"/>
-                <a:cs typeface="Press Start 2P"/>
-                <a:sym typeface="Press Start 2P"/>
-              </a:defRPr>
-            </a:lvl6pPr>
-            <a:lvl7pPr marR="0" lvl="6" algn="l" rtl="0">
-              <a:lnSpc>
-                <a:spcPct val="100000"/>
-              </a:lnSpc>
-              <a:spcBef>
-                <a:spcPts val="0"/>
-              </a:spcBef>
-              <a:spcAft>
-                <a:spcPts val="0"/>
-              </a:spcAft>
-              <a:buClr>
-                <a:srgbClr val="FFFF00"/>
-              </a:buClr>
-              <a:buSzPts val="2800"/>
-              <a:buFont typeface="Press Start 2P"/>
-              <a:buNone/>
-              <a:defRPr sz="2800" b="0" i="0" u="none" strike="noStrike" cap="none">
-                <a:solidFill>
-                  <a:srgbClr val="FFFF00"/>
-                </a:solidFill>
-                <a:latin typeface="Press Start 2P"/>
-                <a:ea typeface="Press Start 2P"/>
-                <a:cs typeface="Press Start 2P"/>
-                <a:sym typeface="Press Start 2P"/>
-              </a:defRPr>
-            </a:lvl7pPr>
-            <a:lvl8pPr marR="0" lvl="7" algn="l" rtl="0">
-              <a:lnSpc>
-                <a:spcPct val="100000"/>
-              </a:lnSpc>
-              <a:spcBef>
-                <a:spcPts val="0"/>
-              </a:spcBef>
-              <a:spcAft>
-                <a:spcPts val="0"/>
-              </a:spcAft>
-              <a:buClr>
-                <a:srgbClr val="FFFF00"/>
-              </a:buClr>
-              <a:buSzPts val="2800"/>
-              <a:buFont typeface="Press Start 2P"/>
-              <a:buNone/>
-              <a:defRPr sz="2800" b="0" i="0" u="none" strike="noStrike" cap="none">
-                <a:solidFill>
-                  <a:srgbClr val="FFFF00"/>
-                </a:solidFill>
-                <a:latin typeface="Press Start 2P"/>
-                <a:ea typeface="Press Start 2P"/>
-                <a:cs typeface="Press Start 2P"/>
-                <a:sym typeface="Press Start 2P"/>
-              </a:defRPr>
-            </a:lvl8pPr>
-            <a:lvl9pPr marR="0" lvl="8" algn="l" rtl="0">
-              <a:lnSpc>
-                <a:spcPct val="100000"/>
-              </a:lnSpc>
-              <a:spcBef>
-                <a:spcPts val="0"/>
-              </a:spcBef>
-              <a:spcAft>
-                <a:spcPts val="0"/>
-              </a:spcAft>
-              <a:buClr>
-                <a:srgbClr val="FFFF00"/>
-              </a:buClr>
-              <a:buSzPts val="2800"/>
-              <a:buFont typeface="Press Start 2P"/>
-              <a:buNone/>
-              <a:defRPr sz="2800" b="0" i="0" u="none" strike="noStrike" cap="none">
-                <a:solidFill>
-                  <a:srgbClr val="FFFF00"/>
-                </a:solidFill>
-                <a:latin typeface="Press Start 2P"/>
-                <a:ea typeface="Press Start 2P"/>
-                <a:cs typeface="Press Start 2P"/>
-                <a:sym typeface="Press Start 2P"/>
-              </a:defRPr>
-            </a:lvl9pPr>
-          </a:lstStyle>
-          <a:p>
-            <a:pPr algn="ctr">
-              <a:buClr>
-                <a:schemeClr val="dk1"/>
-              </a:buClr>
-              <a:buSzPts val="1100"/>
-            </a:pPr>
-            <a:r>
-              <a:rPr lang="en-US" sz="2400" dirty="0">
-                <a:solidFill>
-                  <a:srgbClr val="AB5130"/>
-                </a:solidFill>
-                <a:effectLst>
-                  <a:glow rad="228600">
-                    <a:schemeClr val="accent4">
-                      <a:satMod val="175000"/>
-                      <a:alpha val="40000"/>
-                    </a:schemeClr>
-                  </a:glow>
-                </a:effectLst>
-              </a:rPr>
-              <a:t>Gameplay</a:t>
-            </a:r>
           </a:p>
         </p:txBody>
       </p:sp>
@@ -22683,8 +23459,8 @@
         </p:nvSpPr>
         <p:spPr>
           <a:xfrm>
-            <a:off x="848451" y="1085481"/>
-            <a:ext cx="7447097" cy="1112837"/>
+            <a:off x="503677" y="1167927"/>
+            <a:ext cx="3723549" cy="1112837"/>
           </a:xfrm>
           <a:prstGeom prst="rect">
             <a:avLst/>
@@ -22849,35 +23625,628 @@
               <a:t>Atmospheric 2D lighting – sometimes only your items can pierce it.</a:t>
             </a:r>
           </a:p>
-          <a:p>
-            <a:pPr marL="171450" indent="-171450">
+        </p:txBody>
+      </p:sp>
+      <p:sp>
+        <p:nvSpPr>
+          <p:cNvPr id="4" name="Google Shape;999;p37">
+            <a:extLst>
+              <a:ext uri="{FF2B5EF4-FFF2-40B4-BE49-F238E27FC236}">
+                <a16:creationId xmlns:a16="http://schemas.microsoft.com/office/drawing/2014/main" id="{9D51D7DF-2FB6-A59C-16D4-D49CA4CCDF04}"/>
+              </a:ext>
+            </a:extLst>
+          </p:cNvPr>
+          <p:cNvSpPr txBox="1">
+            <a:spLocks/>
+          </p:cNvSpPr>
+          <p:nvPr/>
+        </p:nvSpPr>
+        <p:spPr>
+          <a:xfrm>
+            <a:off x="2043566" y="362755"/>
+            <a:ext cx="5067392" cy="526471"/>
+          </a:xfrm>
+          <a:prstGeom prst="rect">
+            <a:avLst/>
+          </a:prstGeom>
+          <a:noFill/>
+          <a:ln>
+            <a:noFill/>
+          </a:ln>
+        </p:spPr>
+        <p:txBody>
+          <a:bodyPr spcFirstLastPara="1" wrap="square" lIns="91425" tIns="91425" rIns="91425" bIns="91425" anchor="ctr" anchorCtr="0">
+            <a:noAutofit/>
+          </a:bodyPr>
+          <a:lstStyle>
+            <a:defPPr marR="0" lvl="0" algn="l" rtl="0">
               <a:lnSpc>
-                <a:spcPts val="1400"/>
+                <a:spcPct val="100000"/>
               </a:lnSpc>
+              <a:spcBef>
+                <a:spcPts val="0"/>
+              </a:spcBef>
+              <a:spcAft>
+                <a:spcPts val="0"/>
+              </a:spcAft>
+            </a:defPPr>
+            <a:lvl1pPr marR="0" lvl="0" algn="l" rtl="0">
+              <a:lnSpc>
+                <a:spcPct val="100000"/>
+              </a:lnSpc>
+              <a:spcBef>
+                <a:spcPts val="0"/>
+              </a:spcBef>
+              <a:spcAft>
+                <a:spcPts val="0"/>
+              </a:spcAft>
               <a:buClr>
-                <a:srgbClr val="AB5130"/>
+                <a:srgbClr val="FFFF00"/>
+              </a:buClr>
+              <a:buSzPts val="3000"/>
+              <a:buFont typeface="Press Start 2P"/>
+              <a:buNone/>
+              <a:defRPr sz="3000" b="0" i="0" u="none" strike="noStrike" cap="none">
+                <a:solidFill>
+                  <a:srgbClr val="FFFF00"/>
+                </a:solidFill>
+                <a:latin typeface="Press Start 2P"/>
+                <a:ea typeface="Press Start 2P"/>
+                <a:cs typeface="Press Start 2P"/>
+                <a:sym typeface="Press Start 2P"/>
+              </a:defRPr>
+            </a:lvl1pPr>
+            <a:lvl2pPr marR="0" lvl="1" algn="l" rtl="0">
+              <a:lnSpc>
+                <a:spcPct val="100000"/>
+              </a:lnSpc>
+              <a:spcBef>
+                <a:spcPts val="0"/>
+              </a:spcBef>
+              <a:spcAft>
+                <a:spcPts val="0"/>
+              </a:spcAft>
+              <a:buClr>
+                <a:srgbClr val="FFFF00"/>
+              </a:buClr>
+              <a:buSzPts val="2800"/>
+              <a:buFont typeface="Press Start 2P"/>
+              <a:buNone/>
+              <a:defRPr sz="2800" b="0" i="0" u="none" strike="noStrike" cap="none">
+                <a:solidFill>
+                  <a:srgbClr val="FFFF00"/>
+                </a:solidFill>
+                <a:latin typeface="Press Start 2P"/>
+                <a:ea typeface="Press Start 2P"/>
+                <a:cs typeface="Press Start 2P"/>
+                <a:sym typeface="Press Start 2P"/>
+              </a:defRPr>
+            </a:lvl2pPr>
+            <a:lvl3pPr marR="0" lvl="2" algn="l" rtl="0">
+              <a:lnSpc>
+                <a:spcPct val="100000"/>
+              </a:lnSpc>
+              <a:spcBef>
+                <a:spcPts val="0"/>
+              </a:spcBef>
+              <a:spcAft>
+                <a:spcPts val="0"/>
+              </a:spcAft>
+              <a:buClr>
+                <a:srgbClr val="FFFF00"/>
+              </a:buClr>
+              <a:buSzPts val="2800"/>
+              <a:buFont typeface="Press Start 2P"/>
+              <a:buNone/>
+              <a:defRPr sz="2800" b="0" i="0" u="none" strike="noStrike" cap="none">
+                <a:solidFill>
+                  <a:srgbClr val="FFFF00"/>
+                </a:solidFill>
+                <a:latin typeface="Press Start 2P"/>
+                <a:ea typeface="Press Start 2P"/>
+                <a:cs typeface="Press Start 2P"/>
+                <a:sym typeface="Press Start 2P"/>
+              </a:defRPr>
+            </a:lvl3pPr>
+            <a:lvl4pPr marR="0" lvl="3" algn="l" rtl="0">
+              <a:lnSpc>
+                <a:spcPct val="100000"/>
+              </a:lnSpc>
+              <a:spcBef>
+                <a:spcPts val="0"/>
+              </a:spcBef>
+              <a:spcAft>
+                <a:spcPts val="0"/>
+              </a:spcAft>
+              <a:buClr>
+                <a:srgbClr val="FFFF00"/>
+              </a:buClr>
+              <a:buSzPts val="2800"/>
+              <a:buFont typeface="Press Start 2P"/>
+              <a:buNone/>
+              <a:defRPr sz="2800" b="0" i="0" u="none" strike="noStrike" cap="none">
+                <a:solidFill>
+                  <a:srgbClr val="FFFF00"/>
+                </a:solidFill>
+                <a:latin typeface="Press Start 2P"/>
+                <a:ea typeface="Press Start 2P"/>
+                <a:cs typeface="Press Start 2P"/>
+                <a:sym typeface="Press Start 2P"/>
+              </a:defRPr>
+            </a:lvl4pPr>
+            <a:lvl5pPr marR="0" lvl="4" algn="l" rtl="0">
+              <a:lnSpc>
+                <a:spcPct val="100000"/>
+              </a:lnSpc>
+              <a:spcBef>
+                <a:spcPts val="0"/>
+              </a:spcBef>
+              <a:spcAft>
+                <a:spcPts val="0"/>
+              </a:spcAft>
+              <a:buClr>
+                <a:srgbClr val="FFFF00"/>
+              </a:buClr>
+              <a:buSzPts val="2800"/>
+              <a:buFont typeface="Press Start 2P"/>
+              <a:buNone/>
+              <a:defRPr sz="2800" b="0" i="0" u="none" strike="noStrike" cap="none">
+                <a:solidFill>
+                  <a:srgbClr val="FFFF00"/>
+                </a:solidFill>
+                <a:latin typeface="Press Start 2P"/>
+                <a:ea typeface="Press Start 2P"/>
+                <a:cs typeface="Press Start 2P"/>
+                <a:sym typeface="Press Start 2P"/>
+              </a:defRPr>
+            </a:lvl5pPr>
+            <a:lvl6pPr marR="0" lvl="5" algn="l" rtl="0">
+              <a:lnSpc>
+                <a:spcPct val="100000"/>
+              </a:lnSpc>
+              <a:spcBef>
+                <a:spcPts val="0"/>
+              </a:spcBef>
+              <a:spcAft>
+                <a:spcPts val="0"/>
+              </a:spcAft>
+              <a:buClr>
+                <a:srgbClr val="FFFF00"/>
+              </a:buClr>
+              <a:buSzPts val="2800"/>
+              <a:buFont typeface="Press Start 2P"/>
+              <a:buNone/>
+              <a:defRPr sz="2800" b="0" i="0" u="none" strike="noStrike" cap="none">
+                <a:solidFill>
+                  <a:srgbClr val="FFFF00"/>
+                </a:solidFill>
+                <a:latin typeface="Press Start 2P"/>
+                <a:ea typeface="Press Start 2P"/>
+                <a:cs typeface="Press Start 2P"/>
+                <a:sym typeface="Press Start 2P"/>
+              </a:defRPr>
+            </a:lvl6pPr>
+            <a:lvl7pPr marR="0" lvl="6" algn="l" rtl="0">
+              <a:lnSpc>
+                <a:spcPct val="100000"/>
+              </a:lnSpc>
+              <a:spcBef>
+                <a:spcPts val="0"/>
+              </a:spcBef>
+              <a:spcAft>
+                <a:spcPts val="0"/>
+              </a:spcAft>
+              <a:buClr>
+                <a:srgbClr val="FFFF00"/>
+              </a:buClr>
+              <a:buSzPts val="2800"/>
+              <a:buFont typeface="Press Start 2P"/>
+              <a:buNone/>
+              <a:defRPr sz="2800" b="0" i="0" u="none" strike="noStrike" cap="none">
+                <a:solidFill>
+                  <a:srgbClr val="FFFF00"/>
+                </a:solidFill>
+                <a:latin typeface="Press Start 2P"/>
+                <a:ea typeface="Press Start 2P"/>
+                <a:cs typeface="Press Start 2P"/>
+                <a:sym typeface="Press Start 2P"/>
+              </a:defRPr>
+            </a:lvl7pPr>
+            <a:lvl8pPr marR="0" lvl="7" algn="l" rtl="0">
+              <a:lnSpc>
+                <a:spcPct val="100000"/>
+              </a:lnSpc>
+              <a:spcBef>
+                <a:spcPts val="0"/>
+              </a:spcBef>
+              <a:spcAft>
+                <a:spcPts val="0"/>
+              </a:spcAft>
+              <a:buClr>
+                <a:srgbClr val="FFFF00"/>
+              </a:buClr>
+              <a:buSzPts val="2800"/>
+              <a:buFont typeface="Press Start 2P"/>
+              <a:buNone/>
+              <a:defRPr sz="2800" b="0" i="0" u="none" strike="noStrike" cap="none">
+                <a:solidFill>
+                  <a:srgbClr val="FFFF00"/>
+                </a:solidFill>
+                <a:latin typeface="Press Start 2P"/>
+                <a:ea typeface="Press Start 2P"/>
+                <a:cs typeface="Press Start 2P"/>
+                <a:sym typeface="Press Start 2P"/>
+              </a:defRPr>
+            </a:lvl8pPr>
+            <a:lvl9pPr marR="0" lvl="8" algn="l" rtl="0">
+              <a:lnSpc>
+                <a:spcPct val="100000"/>
+              </a:lnSpc>
+              <a:spcBef>
+                <a:spcPts val="0"/>
+              </a:spcBef>
+              <a:spcAft>
+                <a:spcPts val="0"/>
+              </a:spcAft>
+              <a:buClr>
+                <a:srgbClr val="FFFF00"/>
+              </a:buClr>
+              <a:buSzPts val="2800"/>
+              <a:buFont typeface="Press Start 2P"/>
+              <a:buNone/>
+              <a:defRPr sz="2800" b="0" i="0" u="none" strike="noStrike" cap="none">
+                <a:solidFill>
+                  <a:srgbClr val="FFFF00"/>
+                </a:solidFill>
+                <a:latin typeface="Press Start 2P"/>
+                <a:ea typeface="Press Start 2P"/>
+                <a:cs typeface="Press Start 2P"/>
+                <a:sym typeface="Press Start 2P"/>
+              </a:defRPr>
+            </a:lvl9pPr>
+          </a:lstStyle>
+          <a:p>
+            <a:pPr algn="ctr">
+              <a:buClr>
+                <a:schemeClr val="dk1"/>
               </a:buClr>
               <a:buSzPts val="1100"/>
-              <a:buFont typeface="Press Start 2P" panose="00000500000000000000" pitchFamily="2" charset="0"/>
-              <a:buChar char="♦"/>
             </a:pPr>
-            <a:endParaRPr lang="en-US" sz="1000" dirty="0">
-              <a:solidFill>
-                <a:schemeClr val="bg1">
-                  <a:lumMod val="75000"/>
-                </a:schemeClr>
-              </a:solidFill>
-              <a:effectLst>
-                <a:glow rad="228600">
-                  <a:schemeClr val="accent4">
-                    <a:satMod val="175000"/>
-                    <a:alpha val="40000"/>
-                  </a:schemeClr>
-                </a:glow>
-              </a:effectLst>
-              <a:latin typeface="Press Start 2P" panose="00000500000000000000" pitchFamily="2" charset="0"/>
-            </a:endParaRPr>
-          </a:p>
+            <a:r>
+              <a:rPr lang="en-US" sz="2400" dirty="0">
+                <a:solidFill>
+                  <a:srgbClr val="AB5130"/>
+                </a:solidFill>
+                <a:effectLst>
+                  <a:glow rad="228600">
+                    <a:schemeClr val="accent4">
+                      <a:satMod val="175000"/>
+                      <a:alpha val="40000"/>
+                    </a:schemeClr>
+                  </a:glow>
+                </a:effectLst>
+              </a:rPr>
+              <a:t>Key Features</a:t>
+            </a:r>
+          </a:p>
+        </p:txBody>
+      </p:sp>
+      <p:pic>
+        <p:nvPicPr>
+          <p:cNvPr id="2" name="Picture 1" descr="A red cross on a black background&#10;&#10;AI-generated content may be incorrect.">
+            <a:extLst>
+              <a:ext uri="{FF2B5EF4-FFF2-40B4-BE49-F238E27FC236}">
+                <a16:creationId xmlns:a16="http://schemas.microsoft.com/office/drawing/2014/main" id="{F3263E97-DDD6-13A4-10DE-BEFFB65B299A}"/>
+              </a:ext>
+            </a:extLst>
+          </p:cNvPr>
+          <p:cNvPicPr>
+            <a:picLocks noChangeAspect="1"/>
+          </p:cNvPicPr>
+          <p:nvPr/>
+        </p:nvPicPr>
+        <p:blipFill>
+          <a:blip r:embed="rId4"/>
+          <a:stretch>
+            <a:fillRect/>
+          </a:stretch>
+        </p:blipFill>
+        <p:spPr>
+          <a:xfrm>
+            <a:off x="312978" y="4340822"/>
+            <a:ext cx="1362314" cy="461429"/>
+          </a:xfrm>
+          <a:prstGeom prst="rect">
+            <a:avLst/>
+          </a:prstGeom>
+          <a:effectLst>
+            <a:glow rad="228600">
+              <a:schemeClr val="accent4">
+                <a:satMod val="175000"/>
+                <a:alpha val="40000"/>
+              </a:schemeClr>
+            </a:glow>
+          </a:effectLst>
+        </p:spPr>
+      </p:pic>
+      <p:sp>
+        <p:nvSpPr>
+          <p:cNvPr id="3" name="Google Shape;1000;p37">
+            <a:extLst>
+              <a:ext uri="{FF2B5EF4-FFF2-40B4-BE49-F238E27FC236}">
+                <a16:creationId xmlns:a16="http://schemas.microsoft.com/office/drawing/2014/main" id="{10D74E85-2417-09F2-96D5-0AE1C99FF3EC}"/>
+              </a:ext>
+            </a:extLst>
+          </p:cNvPr>
+          <p:cNvSpPr txBox="1">
+            <a:spLocks/>
+          </p:cNvSpPr>
+          <p:nvPr/>
+        </p:nvSpPr>
+        <p:spPr>
+          <a:xfrm>
+            <a:off x="4658451" y="1167927"/>
+            <a:ext cx="3915923" cy="1112837"/>
+          </a:xfrm>
+          <a:prstGeom prst="rect">
+            <a:avLst/>
+          </a:prstGeom>
+          <a:noFill/>
+          <a:ln>
+            <a:noFill/>
+          </a:ln>
+        </p:spPr>
+        <p:txBody>
+          <a:bodyPr spcFirstLastPara="1" wrap="square" lIns="91425" tIns="91425" rIns="91425" bIns="91425" anchor="t" anchorCtr="0">
+            <a:noAutofit/>
+          </a:bodyPr>
+          <a:lstStyle>
+            <a:defPPr marR="0" lvl="0" algn="l" rtl="0">
+              <a:lnSpc>
+                <a:spcPct val="100000"/>
+              </a:lnSpc>
+              <a:spcBef>
+                <a:spcPts val="0"/>
+              </a:spcBef>
+              <a:spcAft>
+                <a:spcPts val="0"/>
+              </a:spcAft>
+            </a:defPPr>
+            <a:lvl1pPr marL="457200" marR="0" lvl="0" indent="-330200" algn="l" rtl="0">
+              <a:lnSpc>
+                <a:spcPct val="115000"/>
+              </a:lnSpc>
+              <a:spcBef>
+                <a:spcPts val="0"/>
+              </a:spcBef>
+              <a:spcAft>
+                <a:spcPts val="0"/>
+              </a:spcAft>
+              <a:buClr>
+                <a:schemeClr val="lt1"/>
+              </a:buClr>
+              <a:buSzPts val="1600"/>
+              <a:buFont typeface="Maven Pro"/>
+              <a:buChar char="●"/>
+              <a:defRPr sz="1600" b="0" i="0" u="none" strike="noStrike" cap="none">
+                <a:solidFill>
+                  <a:schemeClr val="lt1"/>
+                </a:solidFill>
+                <a:latin typeface="Maven Pro"/>
+                <a:ea typeface="Maven Pro"/>
+                <a:cs typeface="Maven Pro"/>
+                <a:sym typeface="Maven Pro"/>
+              </a:defRPr>
+            </a:lvl1pPr>
+            <a:lvl2pPr marL="914400" marR="0" lvl="1" indent="-330200" algn="l" rtl="0">
+              <a:lnSpc>
+                <a:spcPct val="115000"/>
+              </a:lnSpc>
+              <a:spcBef>
+                <a:spcPts val="1600"/>
+              </a:spcBef>
+              <a:spcAft>
+                <a:spcPts val="0"/>
+              </a:spcAft>
+              <a:buClr>
+                <a:schemeClr val="lt1"/>
+              </a:buClr>
+              <a:buSzPts val="1600"/>
+              <a:buFont typeface="Maven Pro"/>
+              <a:buChar char="○"/>
+              <a:defRPr sz="1600" b="0" i="0" u="none" strike="noStrike" cap="none">
+                <a:solidFill>
+                  <a:schemeClr val="lt1"/>
+                </a:solidFill>
+                <a:latin typeface="Maven Pro"/>
+                <a:ea typeface="Maven Pro"/>
+                <a:cs typeface="Maven Pro"/>
+                <a:sym typeface="Maven Pro"/>
+              </a:defRPr>
+            </a:lvl2pPr>
+            <a:lvl3pPr marL="1371600" marR="0" lvl="2" indent="-330200" algn="l" rtl="0">
+              <a:lnSpc>
+                <a:spcPct val="115000"/>
+              </a:lnSpc>
+              <a:spcBef>
+                <a:spcPts val="1600"/>
+              </a:spcBef>
+              <a:spcAft>
+                <a:spcPts val="0"/>
+              </a:spcAft>
+              <a:buClr>
+                <a:schemeClr val="lt1"/>
+              </a:buClr>
+              <a:buSzPts val="1600"/>
+              <a:buFont typeface="Maven Pro"/>
+              <a:buChar char="■"/>
+              <a:defRPr sz="1600" b="0" i="0" u="none" strike="noStrike" cap="none">
+                <a:solidFill>
+                  <a:schemeClr val="lt1"/>
+                </a:solidFill>
+                <a:latin typeface="Maven Pro"/>
+                <a:ea typeface="Maven Pro"/>
+                <a:cs typeface="Maven Pro"/>
+                <a:sym typeface="Maven Pro"/>
+              </a:defRPr>
+            </a:lvl3pPr>
+            <a:lvl4pPr marL="1828800" marR="0" lvl="3" indent="-330200" algn="l" rtl="0">
+              <a:lnSpc>
+                <a:spcPct val="115000"/>
+              </a:lnSpc>
+              <a:spcBef>
+                <a:spcPts val="1600"/>
+              </a:spcBef>
+              <a:spcAft>
+                <a:spcPts val="0"/>
+              </a:spcAft>
+              <a:buClr>
+                <a:schemeClr val="lt1"/>
+              </a:buClr>
+              <a:buSzPts val="1600"/>
+              <a:buFont typeface="Maven Pro"/>
+              <a:buChar char="●"/>
+              <a:defRPr sz="1600" b="0" i="0" u="none" strike="noStrike" cap="none">
+                <a:solidFill>
+                  <a:schemeClr val="lt1"/>
+                </a:solidFill>
+                <a:latin typeface="Maven Pro"/>
+                <a:ea typeface="Maven Pro"/>
+                <a:cs typeface="Maven Pro"/>
+                <a:sym typeface="Maven Pro"/>
+              </a:defRPr>
+            </a:lvl4pPr>
+            <a:lvl5pPr marL="2286000" marR="0" lvl="4" indent="-330200" algn="l" rtl="0">
+              <a:lnSpc>
+                <a:spcPct val="115000"/>
+              </a:lnSpc>
+              <a:spcBef>
+                <a:spcPts val="1600"/>
+              </a:spcBef>
+              <a:spcAft>
+                <a:spcPts val="0"/>
+              </a:spcAft>
+              <a:buClr>
+                <a:schemeClr val="lt1"/>
+              </a:buClr>
+              <a:buSzPts val="1600"/>
+              <a:buFont typeface="Maven Pro"/>
+              <a:buChar char="○"/>
+              <a:defRPr sz="1600" b="0" i="0" u="none" strike="noStrike" cap="none">
+                <a:solidFill>
+                  <a:schemeClr val="lt1"/>
+                </a:solidFill>
+                <a:latin typeface="Maven Pro"/>
+                <a:ea typeface="Maven Pro"/>
+                <a:cs typeface="Maven Pro"/>
+                <a:sym typeface="Maven Pro"/>
+              </a:defRPr>
+            </a:lvl5pPr>
+            <a:lvl6pPr marL="2743200" marR="0" lvl="5" indent="-330200" algn="l" rtl="0">
+              <a:lnSpc>
+                <a:spcPct val="115000"/>
+              </a:lnSpc>
+              <a:spcBef>
+                <a:spcPts val="1600"/>
+              </a:spcBef>
+              <a:spcAft>
+                <a:spcPts val="0"/>
+              </a:spcAft>
+              <a:buClr>
+                <a:schemeClr val="lt1"/>
+              </a:buClr>
+              <a:buSzPts val="1600"/>
+              <a:buFont typeface="Maven Pro"/>
+              <a:buChar char="■"/>
+              <a:defRPr sz="1600" b="0" i="0" u="none" strike="noStrike" cap="none">
+                <a:solidFill>
+                  <a:schemeClr val="lt1"/>
+                </a:solidFill>
+                <a:latin typeface="Maven Pro"/>
+                <a:ea typeface="Maven Pro"/>
+                <a:cs typeface="Maven Pro"/>
+                <a:sym typeface="Maven Pro"/>
+              </a:defRPr>
+            </a:lvl6pPr>
+            <a:lvl7pPr marL="3200400" marR="0" lvl="6" indent="-330200" algn="l" rtl="0">
+              <a:lnSpc>
+                <a:spcPct val="115000"/>
+              </a:lnSpc>
+              <a:spcBef>
+                <a:spcPts val="1600"/>
+              </a:spcBef>
+              <a:spcAft>
+                <a:spcPts val="0"/>
+              </a:spcAft>
+              <a:buClr>
+                <a:schemeClr val="lt1"/>
+              </a:buClr>
+              <a:buSzPts val="1600"/>
+              <a:buFont typeface="Maven Pro"/>
+              <a:buChar char="●"/>
+              <a:defRPr sz="1600" b="0" i="0" u="none" strike="noStrike" cap="none">
+                <a:solidFill>
+                  <a:schemeClr val="lt1"/>
+                </a:solidFill>
+                <a:latin typeface="Maven Pro"/>
+                <a:ea typeface="Maven Pro"/>
+                <a:cs typeface="Maven Pro"/>
+                <a:sym typeface="Maven Pro"/>
+              </a:defRPr>
+            </a:lvl7pPr>
+            <a:lvl8pPr marL="3657600" marR="0" lvl="7" indent="-330200" algn="l" rtl="0">
+              <a:lnSpc>
+                <a:spcPct val="115000"/>
+              </a:lnSpc>
+              <a:spcBef>
+                <a:spcPts val="1600"/>
+              </a:spcBef>
+              <a:spcAft>
+                <a:spcPts val="0"/>
+              </a:spcAft>
+              <a:buClr>
+                <a:schemeClr val="lt1"/>
+              </a:buClr>
+              <a:buSzPts val="1600"/>
+              <a:buFont typeface="Maven Pro"/>
+              <a:buChar char="○"/>
+              <a:defRPr sz="1600" b="0" i="0" u="none" strike="noStrike" cap="none">
+                <a:solidFill>
+                  <a:schemeClr val="lt1"/>
+                </a:solidFill>
+                <a:latin typeface="Maven Pro"/>
+                <a:ea typeface="Maven Pro"/>
+                <a:cs typeface="Maven Pro"/>
+                <a:sym typeface="Maven Pro"/>
+              </a:defRPr>
+            </a:lvl8pPr>
+            <a:lvl9pPr marL="4114800" marR="0" lvl="8" indent="-330200" algn="l" rtl="0">
+              <a:lnSpc>
+                <a:spcPct val="115000"/>
+              </a:lnSpc>
+              <a:spcBef>
+                <a:spcPts val="1600"/>
+              </a:spcBef>
+              <a:spcAft>
+                <a:spcPts val="1600"/>
+              </a:spcAft>
+              <a:buClr>
+                <a:schemeClr val="lt1"/>
+              </a:buClr>
+              <a:buSzPts val="1600"/>
+              <a:buFont typeface="Maven Pro"/>
+              <a:buChar char="■"/>
+              <a:defRPr sz="1600" b="0" i="0" u="none" strike="noStrike" cap="none">
+                <a:solidFill>
+                  <a:schemeClr val="lt1"/>
+                </a:solidFill>
+                <a:latin typeface="Maven Pro"/>
+                <a:ea typeface="Maven Pro"/>
+                <a:cs typeface="Maven Pro"/>
+                <a:sym typeface="Maven Pro"/>
+              </a:defRPr>
+            </a:lvl9pPr>
+          </a:lstStyle>
           <a:p>
             <a:pPr marL="171450" indent="-171450">
               <a:lnSpc>
@@ -22919,6 +24288,7 @@
                 <a:srgbClr val="AB5130"/>
               </a:buClr>
               <a:buSzPts val="1100"/>
+              <a:buFont typeface="Maven Pro"/>
               <a:buNone/>
             </a:pPr>
             <a:endParaRPr lang="en-US" sz="1000" dirty="0">
@@ -23033,12 +24403,478 @@
           </a:p>
         </p:txBody>
       </p:sp>
+    </p:spTree>
+    <p:extLst>
+      <p:ext uri="{BB962C8B-B14F-4D97-AF65-F5344CB8AC3E}">
+        <p14:creationId xmlns:p14="http://schemas.microsoft.com/office/powerpoint/2010/main" val="3923933956"/>
+      </p:ext>
+    </p:extLst>
+  </p:cSld>
+  <p:clrMapOvr>
+    <a:masterClrMapping/>
+  </p:clrMapOvr>
+</p:sld>
+</file>
+
+<file path=ppt/slides/slide6.xml><?xml version="1.0" encoding="utf-8"?>
+<p:sld xmlns:a="http://schemas.openxmlformats.org/drawingml/2006/main" xmlns:r="http://schemas.openxmlformats.org/officeDocument/2006/relationships" xmlns:p="http://schemas.openxmlformats.org/presentationml/2006/main">
+  <p:cSld>
+    <p:spTree>
+      <p:nvGrpSpPr>
+        <p:cNvPr id="1" name="Shape 998">
+          <a:extLst>
+            <a:ext uri="{FF2B5EF4-FFF2-40B4-BE49-F238E27FC236}">
+              <a16:creationId xmlns:a16="http://schemas.microsoft.com/office/drawing/2014/main" id="{57A6B33A-CC60-92B6-4C7E-A5F0A216079E}"/>
+            </a:ext>
+          </a:extLst>
+        </p:cNvPr>
+        <p:cNvGrpSpPr/>
+        <p:nvPr/>
+      </p:nvGrpSpPr>
+      <p:grpSpPr>
+        <a:xfrm>
+          <a:off x="0" y="0"/>
+          <a:ext cx="0" cy="0"/>
+          <a:chOff x="0" y="0"/>
+          <a:chExt cx="0" cy="0"/>
+        </a:xfrm>
+      </p:grpSpPr>
+      <p:pic>
+        <p:nvPicPr>
+          <p:cNvPr id="7" name="Picture 6" descr="A pixel art of a building">
+            <a:extLst>
+              <a:ext uri="{FF2B5EF4-FFF2-40B4-BE49-F238E27FC236}">
+                <a16:creationId xmlns:a16="http://schemas.microsoft.com/office/drawing/2014/main" id="{604A176A-9276-30C7-5E31-6668A3F2D2C4}"/>
+              </a:ext>
+            </a:extLst>
+          </p:cNvPr>
+          <p:cNvPicPr>
+            <a:picLocks noChangeAspect="1"/>
+          </p:cNvPicPr>
+          <p:nvPr/>
+        </p:nvPicPr>
+        <p:blipFill>
+          <a:blip r:embed="rId3">
+            <a:alphaModFix amt="70000"/>
+          </a:blip>
+          <a:stretch>
+            <a:fillRect/>
+          </a:stretch>
+        </p:blipFill>
+        <p:spPr>
+          <a:xfrm>
+            <a:off x="0" y="0"/>
+            <a:ext cx="9144000" cy="5143500"/>
+          </a:xfrm>
+          <a:prstGeom prst="rect">
+            <a:avLst/>
+          </a:prstGeom>
+        </p:spPr>
+      </p:pic>
+      <p:sp>
+        <p:nvSpPr>
+          <p:cNvPr id="1000" name="Google Shape;1000;p37">
+            <a:extLst>
+              <a:ext uri="{FF2B5EF4-FFF2-40B4-BE49-F238E27FC236}">
+                <a16:creationId xmlns:a16="http://schemas.microsoft.com/office/drawing/2014/main" id="{86E0AEF5-FA1E-F10A-35FA-83B2437E557D}"/>
+              </a:ext>
+            </a:extLst>
+          </p:cNvPr>
+          <p:cNvSpPr txBox="1">
+            <a:spLocks noGrp="1"/>
+          </p:cNvSpPr>
+          <p:nvPr>
+            <p:ph type="subTitle" idx="4294967295"/>
+          </p:nvPr>
+        </p:nvSpPr>
+        <p:spPr>
+          <a:xfrm>
+            <a:off x="848451" y="1085481"/>
+            <a:ext cx="7447097" cy="1112837"/>
+          </a:xfrm>
+          <a:prstGeom prst="rect">
+            <a:avLst/>
+          </a:prstGeom>
+        </p:spPr>
+        <p:txBody>
+          <a:bodyPr spcFirstLastPara="1" wrap="square" lIns="91425" tIns="91425" rIns="91425" bIns="91425" anchor="t" anchorCtr="0">
+            <a:noAutofit/>
+          </a:bodyPr>
+          <a:lstStyle/>
+          <a:p>
+            <a:pPr marL="171450" indent="-171450">
+              <a:lnSpc>
+                <a:spcPts val="1400"/>
+              </a:lnSpc>
+              <a:buClr>
+                <a:srgbClr val="AB5130"/>
+              </a:buClr>
+              <a:buSzPts val="1100"/>
+              <a:buFont typeface="Press Start 2P" panose="00000500000000000000" pitchFamily="2" charset="0"/>
+              <a:buChar char="♦"/>
+            </a:pPr>
+            <a:r>
+              <a:rPr lang="en-US" sz="1000" dirty="0">
+                <a:solidFill>
+                  <a:srgbClr val="F6CA15"/>
+                </a:solidFill>
+                <a:effectLst>
+                  <a:glow rad="228600">
+                    <a:schemeClr val="accent4">
+                      <a:satMod val="175000"/>
+                      <a:alpha val="40000"/>
+                    </a:schemeClr>
+                  </a:glow>
+                </a:effectLst>
+                <a:latin typeface="Press Start 2P" panose="00000500000000000000" pitchFamily="2" charset="0"/>
+              </a:rPr>
+              <a:t>Junk - </a:t>
+            </a:r>
+            <a:r>
+              <a:rPr lang="en-US" sz="1000" dirty="0">
+                <a:solidFill>
+                  <a:schemeClr val="bg1">
+                    <a:lumMod val="75000"/>
+                  </a:schemeClr>
+                </a:solidFill>
+                <a:effectLst>
+                  <a:glow rad="228600">
+                    <a:schemeClr val="accent4">
+                      <a:satMod val="175000"/>
+                      <a:alpha val="40000"/>
+                    </a:schemeClr>
+                  </a:glow>
+                </a:effectLst>
+                <a:latin typeface="Press Start 2P" panose="00000500000000000000" pitchFamily="2" charset="0"/>
+              </a:rPr>
+              <a:t>Odd gadgets you can equip to whack, poke, or do something questionably useful.</a:t>
+            </a:r>
+          </a:p>
+          <a:p>
+            <a:pPr marL="171450" indent="-171450">
+              <a:lnSpc>
+                <a:spcPts val="1400"/>
+              </a:lnSpc>
+              <a:buClr>
+                <a:srgbClr val="AB5130"/>
+              </a:buClr>
+              <a:buSzPts val="1100"/>
+              <a:buFont typeface="Press Start 2P" panose="00000500000000000000" pitchFamily="2" charset="0"/>
+              <a:buChar char="♦"/>
+            </a:pPr>
+            <a:endParaRPr lang="en-US" sz="1000" dirty="0">
+              <a:solidFill>
+                <a:schemeClr val="bg1">
+                  <a:lumMod val="75000"/>
+                </a:schemeClr>
+              </a:solidFill>
+              <a:effectLst>
+                <a:glow rad="228600">
+                  <a:schemeClr val="accent4">
+                    <a:satMod val="175000"/>
+                    <a:alpha val="40000"/>
+                  </a:schemeClr>
+                </a:glow>
+              </a:effectLst>
+              <a:latin typeface="Press Start 2P" panose="00000500000000000000" pitchFamily="2" charset="0"/>
+            </a:endParaRPr>
+          </a:p>
+          <a:p>
+            <a:pPr marL="171450" indent="-171450">
+              <a:lnSpc>
+                <a:spcPts val="1400"/>
+              </a:lnSpc>
+              <a:buClr>
+                <a:srgbClr val="AB5130"/>
+              </a:buClr>
+              <a:buSzPts val="1100"/>
+              <a:buFont typeface="Press Start 2P" panose="00000500000000000000" pitchFamily="2" charset="0"/>
+              <a:buChar char="♦"/>
+            </a:pPr>
+            <a:r>
+              <a:rPr lang="en-US" sz="1000" dirty="0">
+                <a:solidFill>
+                  <a:srgbClr val="F6CA15"/>
+                </a:solidFill>
+                <a:effectLst>
+                  <a:glow rad="228600">
+                    <a:schemeClr val="accent4">
+                      <a:satMod val="175000"/>
+                      <a:alpha val="40000"/>
+                    </a:schemeClr>
+                  </a:glow>
+                </a:effectLst>
+                <a:latin typeface="Press Start 2P" panose="00000500000000000000" pitchFamily="2" charset="0"/>
+              </a:rPr>
+              <a:t>Consumables - </a:t>
+            </a:r>
+            <a:r>
+              <a:rPr lang="en-US" sz="1000" dirty="0">
+                <a:solidFill>
+                  <a:schemeClr val="bg1">
+                    <a:lumMod val="75000"/>
+                  </a:schemeClr>
+                </a:solidFill>
+                <a:effectLst>
+                  <a:glow rad="228600">
+                    <a:schemeClr val="accent4">
+                      <a:satMod val="175000"/>
+                      <a:alpha val="40000"/>
+                    </a:schemeClr>
+                  </a:glow>
+                </a:effectLst>
+                <a:latin typeface="Press Start 2P" panose="00000500000000000000" pitchFamily="2" charset="0"/>
+              </a:rPr>
+              <a:t>Eat or drink anything: from healing snacks to chili-powered speed boosts.</a:t>
+            </a:r>
+          </a:p>
+          <a:p>
+            <a:pPr marL="171450" indent="-171450">
+              <a:lnSpc>
+                <a:spcPts val="1400"/>
+              </a:lnSpc>
+              <a:buClr>
+                <a:srgbClr val="AB5130"/>
+              </a:buClr>
+              <a:buSzPts val="1100"/>
+              <a:buFont typeface="Press Start 2P" panose="00000500000000000000" pitchFamily="2" charset="0"/>
+              <a:buChar char="♦"/>
+            </a:pPr>
+            <a:endParaRPr lang="en-US" sz="1000" dirty="0">
+              <a:solidFill>
+                <a:schemeClr val="bg1">
+                  <a:lumMod val="75000"/>
+                </a:schemeClr>
+              </a:solidFill>
+              <a:effectLst>
+                <a:glow rad="228600">
+                  <a:schemeClr val="accent4">
+                    <a:satMod val="175000"/>
+                    <a:alpha val="40000"/>
+                  </a:schemeClr>
+                </a:glow>
+              </a:effectLst>
+              <a:latin typeface="Press Start 2P" panose="00000500000000000000" pitchFamily="2" charset="0"/>
+            </a:endParaRPr>
+          </a:p>
+          <a:p>
+            <a:pPr marL="171450" indent="-171450">
+              <a:lnSpc>
+                <a:spcPts val="1400"/>
+              </a:lnSpc>
+              <a:buClr>
+                <a:srgbClr val="AB5130"/>
+              </a:buClr>
+              <a:buSzPts val="1100"/>
+              <a:buFont typeface="Press Start 2P" panose="00000500000000000000" pitchFamily="2" charset="0"/>
+              <a:buChar char="♦"/>
+            </a:pPr>
+            <a:r>
+              <a:rPr lang="en-US" sz="1000" dirty="0">
+                <a:solidFill>
+                  <a:srgbClr val="F6CA15"/>
+                </a:solidFill>
+                <a:effectLst>
+                  <a:glow rad="228600">
+                    <a:schemeClr val="accent4">
+                      <a:satMod val="175000"/>
+                      <a:alpha val="40000"/>
+                    </a:schemeClr>
+                  </a:glow>
+                </a:effectLst>
+                <a:latin typeface="Press Start 2P" panose="00000500000000000000" pitchFamily="2" charset="0"/>
+              </a:rPr>
+              <a:t>Key items - </a:t>
+            </a:r>
+            <a:r>
+              <a:rPr lang="en-US" sz="1000" dirty="0">
+                <a:solidFill>
+                  <a:schemeClr val="bg1">
+                    <a:lumMod val="75000"/>
+                  </a:schemeClr>
+                </a:solidFill>
+                <a:effectLst>
+                  <a:glow rad="228600">
+                    <a:schemeClr val="accent4">
+                      <a:satMod val="175000"/>
+                      <a:alpha val="40000"/>
+                    </a:schemeClr>
+                  </a:glow>
+                </a:effectLst>
+                <a:latin typeface="Press Start 2P" panose="00000500000000000000" pitchFamily="2" charset="0"/>
+              </a:rPr>
+              <a:t>Scene-specific tools for interacting with the environment: pick locks, operate machines, use kiosks, trigger devices.</a:t>
+            </a:r>
+          </a:p>
+          <a:p>
+            <a:pPr marL="171450" indent="-171450">
+              <a:lnSpc>
+                <a:spcPts val="1400"/>
+              </a:lnSpc>
+              <a:buClr>
+                <a:srgbClr val="AB5130"/>
+              </a:buClr>
+              <a:buSzPts val="1100"/>
+              <a:buFont typeface="Press Start 2P" panose="00000500000000000000" pitchFamily="2" charset="0"/>
+              <a:buChar char="♦"/>
+            </a:pPr>
+            <a:endParaRPr lang="en-US" sz="1000" dirty="0">
+              <a:solidFill>
+                <a:schemeClr val="bg1">
+                  <a:lumMod val="75000"/>
+                </a:schemeClr>
+              </a:solidFill>
+              <a:effectLst>
+                <a:glow rad="228600">
+                  <a:schemeClr val="accent4">
+                    <a:satMod val="175000"/>
+                    <a:alpha val="40000"/>
+                  </a:schemeClr>
+                </a:glow>
+              </a:effectLst>
+              <a:latin typeface="Press Start 2P" panose="00000500000000000000" pitchFamily="2" charset="0"/>
+            </a:endParaRPr>
+          </a:p>
+          <a:p>
+            <a:pPr marL="171450" indent="-171450">
+              <a:lnSpc>
+                <a:spcPts val="1400"/>
+              </a:lnSpc>
+              <a:buClr>
+                <a:srgbClr val="AB5130"/>
+              </a:buClr>
+              <a:buSzPts val="1100"/>
+              <a:buFont typeface="Press Start 2P" panose="00000500000000000000" pitchFamily="2" charset="0"/>
+              <a:buChar char="♦"/>
+            </a:pPr>
+            <a:r>
+              <a:rPr lang="en-US" sz="1000" dirty="0">
+                <a:solidFill>
+                  <a:srgbClr val="F6CA15"/>
+                </a:solidFill>
+                <a:effectLst>
+                  <a:glow rad="228600">
+                    <a:schemeClr val="accent4">
+                      <a:satMod val="175000"/>
+                      <a:alpha val="40000"/>
+                    </a:schemeClr>
+                  </a:glow>
+                </a:effectLst>
+                <a:latin typeface="Press Start 2P" panose="00000500000000000000" pitchFamily="2" charset="0"/>
+              </a:rPr>
+              <a:t>Trinkets - </a:t>
+            </a:r>
+            <a:r>
+              <a:rPr lang="en-US" sz="1000" dirty="0">
+                <a:solidFill>
+                  <a:schemeClr val="bg1">
+                    <a:lumMod val="75000"/>
+                  </a:schemeClr>
+                </a:solidFill>
+                <a:effectLst>
+                  <a:glow rad="228600">
+                    <a:schemeClr val="accent4">
+                      <a:satMod val="175000"/>
+                      <a:alpha val="40000"/>
+                    </a:schemeClr>
+                  </a:glow>
+                </a:effectLst>
+                <a:latin typeface="Press Start 2P" panose="00000500000000000000" pitchFamily="2" charset="0"/>
+              </a:rPr>
+              <a:t>Passive oddities with quirky powers. One at a time, so choose your curse wisely.</a:t>
+            </a:r>
+            <a:br>
+              <a:rPr lang="en-US" sz="1000" dirty="0">
+                <a:solidFill>
+                  <a:schemeClr val="bg1">
+                    <a:lumMod val="75000"/>
+                  </a:schemeClr>
+                </a:solidFill>
+                <a:effectLst>
+                  <a:glow rad="228600">
+                    <a:schemeClr val="accent4">
+                      <a:satMod val="175000"/>
+                      <a:alpha val="40000"/>
+                    </a:schemeClr>
+                  </a:glow>
+                </a:effectLst>
+                <a:latin typeface="Press Start 2P" panose="00000500000000000000" pitchFamily="2" charset="0"/>
+              </a:rPr>
+            </a:br>
+            <a:endParaRPr lang="en-US" sz="1000" dirty="0">
+              <a:solidFill>
+                <a:schemeClr val="bg1">
+                  <a:lumMod val="75000"/>
+                </a:schemeClr>
+              </a:solidFill>
+              <a:effectLst>
+                <a:glow rad="228600">
+                  <a:schemeClr val="accent4">
+                    <a:satMod val="175000"/>
+                    <a:alpha val="40000"/>
+                  </a:schemeClr>
+                </a:glow>
+              </a:effectLst>
+              <a:latin typeface="Press Start 2P" panose="00000500000000000000" pitchFamily="2" charset="0"/>
+            </a:endParaRPr>
+          </a:p>
+          <a:p>
+            <a:pPr marL="171450" indent="-171450">
+              <a:lnSpc>
+                <a:spcPts val="1400"/>
+              </a:lnSpc>
+              <a:buClr>
+                <a:srgbClr val="AB5130"/>
+              </a:buClr>
+              <a:buSzPts val="1100"/>
+              <a:buFont typeface="Press Start 2P" panose="00000500000000000000" pitchFamily="2" charset="0"/>
+              <a:buChar char="♦"/>
+            </a:pPr>
+            <a:r>
+              <a:rPr lang="en-US" sz="1000" dirty="0">
+                <a:solidFill>
+                  <a:srgbClr val="F6CA15"/>
+                </a:solidFill>
+                <a:effectLst>
+                  <a:glow rad="228600">
+                    <a:schemeClr val="accent4">
+                      <a:satMod val="175000"/>
+                      <a:alpha val="40000"/>
+                    </a:schemeClr>
+                  </a:glow>
+                </a:effectLst>
+                <a:latin typeface="Press Start 2P" panose="00000500000000000000" pitchFamily="2" charset="0"/>
+              </a:rPr>
+              <a:t>Perks &amp; Flaws - </a:t>
+            </a:r>
+            <a:r>
+              <a:rPr lang="en-US" sz="1000" dirty="0">
+                <a:solidFill>
+                  <a:schemeClr val="bg1">
+                    <a:lumMod val="75000"/>
+                  </a:schemeClr>
+                </a:solidFill>
+                <a:effectLst>
+                  <a:glow rad="228600">
+                    <a:schemeClr val="accent4">
+                      <a:satMod val="175000"/>
+                      <a:alpha val="40000"/>
+                    </a:schemeClr>
+                  </a:glow>
+                </a:effectLst>
+                <a:latin typeface="Press Start 2P" panose="00000500000000000000" pitchFamily="2" charset="0"/>
+              </a:rPr>
+              <a:t>Temporary and fixed states that twist your run and force players to adapt on the fly—sometimes (e.g., Overeat fast food and you might end up gassy, pausing mid-fight to clutch your stomach.)</a:t>
+            </a:r>
+          </a:p>
+        </p:txBody>
+      </p:sp>
       <p:sp>
         <p:nvSpPr>
           <p:cNvPr id="4" name="Google Shape;999;p37">
             <a:extLst>
               <a:ext uri="{FF2B5EF4-FFF2-40B4-BE49-F238E27FC236}">
-                <a16:creationId xmlns:a16="http://schemas.microsoft.com/office/drawing/2014/main" id="{9D51D7DF-2FB6-A59C-16D4-D49CA4CCDF04}"/>
+                <a16:creationId xmlns:a16="http://schemas.microsoft.com/office/drawing/2014/main" id="{2D50CFCA-D941-CA72-1816-D8BED8BC469F}"/>
               </a:ext>
             </a:extLst>
           </p:cNvPr>
@@ -23332,15 +25168,53 @@
                   </a:glow>
                 </a:effectLst>
               </a:rPr>
-              <a:t>Key Features</a:t>
+              <a:t>Inventory</a:t>
             </a:r>
           </a:p>
         </p:txBody>
       </p:sp>
+      <p:pic>
+        <p:nvPicPr>
+          <p:cNvPr id="2" name="Picture 1" descr="A red cross on a black background&#10;&#10;AI-generated content may be incorrect.">
+            <a:extLst>
+              <a:ext uri="{FF2B5EF4-FFF2-40B4-BE49-F238E27FC236}">
+                <a16:creationId xmlns:a16="http://schemas.microsoft.com/office/drawing/2014/main" id="{A9F76C34-6F53-8942-B268-C412ACA9FCAD}"/>
+              </a:ext>
+            </a:extLst>
+          </p:cNvPr>
+          <p:cNvPicPr>
+            <a:picLocks noChangeAspect="1"/>
+          </p:cNvPicPr>
+          <p:nvPr/>
+        </p:nvPicPr>
+        <p:blipFill>
+          <a:blip r:embed="rId4"/>
+          <a:stretch>
+            <a:fillRect/>
+          </a:stretch>
+        </p:blipFill>
+        <p:spPr>
+          <a:xfrm>
+            <a:off x="312978" y="4340822"/>
+            <a:ext cx="1362314" cy="461429"/>
+          </a:xfrm>
+          <a:prstGeom prst="rect">
+            <a:avLst/>
+          </a:prstGeom>
+          <a:effectLst>
+            <a:glow rad="228600">
+              <a:schemeClr val="accent4">
+                <a:satMod val="175000"/>
+                <a:alpha val="40000"/>
+              </a:schemeClr>
+            </a:glow>
+          </a:effectLst>
+        </p:spPr>
+      </p:pic>
     </p:spTree>
     <p:extLst>
       <p:ext uri="{BB962C8B-B14F-4D97-AF65-F5344CB8AC3E}">
-        <p14:creationId xmlns:p14="http://schemas.microsoft.com/office/powerpoint/2010/main" val="3923933956"/>
+        <p14:creationId xmlns:p14="http://schemas.microsoft.com/office/powerpoint/2010/main" val="3980575073"/>
       </p:ext>
     </p:extLst>
   </p:cSld>
@@ -23350,7 +25224,7 @@
 </p:sld>
 </file>
 
-<file path=ppt/slides/slide6.xml><?xml version="1.0" encoding="utf-8"?>
+<file path=ppt/slides/slide7.xml><?xml version="1.0" encoding="utf-8"?>
 <p:sld xmlns:a="http://schemas.openxmlformats.org/drawingml/2006/main" xmlns:r="http://schemas.openxmlformats.org/officeDocument/2006/relationships" xmlns:p="http://schemas.openxmlformats.org/presentationml/2006/main">
   <p:cSld>
     <p:spTree>
@@ -23369,10 +25243,10 @@
       </p:grpSpPr>
       <p:pic>
         <p:nvPicPr>
-          <p:cNvPr id="2" name="Picture 1" descr="A pixel art of a building">
+          <p:cNvPr id="25" name="Picture 24" descr="A pixel art of a building">
             <a:extLst>
               <a:ext uri="{FF2B5EF4-FFF2-40B4-BE49-F238E27FC236}">
-                <a16:creationId xmlns:a16="http://schemas.microsoft.com/office/drawing/2014/main" id="{52402C60-77A7-1E25-F9F5-F14CED294C62}"/>
+                <a16:creationId xmlns:a16="http://schemas.microsoft.com/office/drawing/2014/main" id="{70C4D7BA-8A8E-0FF1-EA15-68F4A3E9267C}"/>
               </a:ext>
             </a:extLst>
           </p:cNvPr>
@@ -23413,8 +25287,8 @@
         </p:nvSpPr>
         <p:spPr>
           <a:xfrm>
-            <a:off x="3674157" y="1320032"/>
-            <a:ext cx="1795683" cy="523220"/>
+            <a:off x="3662377" y="1114182"/>
+            <a:ext cx="1795683" cy="430887"/>
           </a:xfrm>
           <a:prstGeom prst="rect">
             <a:avLst/>
@@ -23429,11 +25303,9 @@
           <a:p>
             <a:pPr algn="ctr"/>
             <a:r>
-              <a:rPr lang="en-US" dirty="0">
+              <a:rPr lang="en-US" sz="1100" dirty="0">
                 <a:solidFill>
-                  <a:schemeClr val="bg1">
-                    <a:lumMod val="75000"/>
-                  </a:schemeClr>
+                  <a:srgbClr val="F6CA15"/>
                 </a:solidFill>
                 <a:effectLst>
                   <a:glow rad="228600">
@@ -23456,7 +25328,56 @@
           <a:p>
             <a:pPr algn="ctr"/>
             <a:r>
-              <a:rPr lang="en-US" dirty="0">
+              <a:rPr lang="en-US" sz="1100" dirty="0">
+                <a:solidFill>
+                  <a:srgbClr val="F6CA15"/>
+                </a:solidFill>
+                <a:effectLst>
+                  <a:glow rad="228600">
+                    <a:schemeClr val="accent4">
+                      <a:satMod val="175000"/>
+                      <a:alpha val="40000"/>
+                    </a:schemeClr>
+                  </a:glow>
+                </a:effectLst>
+                <a:latin typeface="Press Start 2P" panose="00000500000000000000" pitchFamily="2" charset="0"/>
+              </a:rPr>
+              <a:t>character</a:t>
+            </a:r>
+          </a:p>
+        </p:txBody>
+      </p:sp>
+      <p:sp>
+        <p:nvSpPr>
+          <p:cNvPr id="6" name="TextBox 5">
+            <a:extLst>
+              <a:ext uri="{FF2B5EF4-FFF2-40B4-BE49-F238E27FC236}">
+                <a16:creationId xmlns:a16="http://schemas.microsoft.com/office/drawing/2014/main" id="{7AA8074A-0EA5-C0F0-87D6-C4519DD2C7EE}"/>
+              </a:ext>
+            </a:extLst>
+          </p:cNvPr>
+          <p:cNvSpPr txBox="1"/>
+          <p:nvPr/>
+        </p:nvSpPr>
+        <p:spPr>
+          <a:xfrm>
+            <a:off x="6066210" y="1129405"/>
+            <a:ext cx="1508552" cy="430887"/>
+          </a:xfrm>
+          <a:prstGeom prst="rect">
+            <a:avLst/>
+          </a:prstGeom>
+          <a:noFill/>
+        </p:spPr>
+        <p:txBody>
+          <a:bodyPr wrap="square" rtlCol="0">
+            <a:spAutoFit/>
+          </a:bodyPr>
+          <a:lstStyle/>
+          <a:p>
+            <a:pPr algn="ctr"/>
+            <a:r>
+              <a:rPr lang="en-US" sz="1100" dirty="0">
                 <a:solidFill>
                   <a:schemeClr val="bg1">
                     <a:lumMod val="75000"/>
@@ -23472,17 +25393,17 @@
                 </a:effectLst>
                 <a:latin typeface="Press Start 2P" panose="00000500000000000000" pitchFamily="2" charset="0"/>
               </a:rPr>
-              <a:t>character</a:t>
+              <a:t>Begin ride</a:t>
             </a:r>
           </a:p>
         </p:txBody>
       </p:sp>
       <p:sp>
         <p:nvSpPr>
-          <p:cNvPr id="6" name="TextBox 5">
+          <p:cNvPr id="7" name="TextBox 6">
             <a:extLst>
               <a:ext uri="{FF2B5EF4-FFF2-40B4-BE49-F238E27FC236}">
-                <a16:creationId xmlns:a16="http://schemas.microsoft.com/office/drawing/2014/main" id="{7AA8074A-0EA5-C0F0-87D6-C4519DD2C7EE}"/>
+                <a16:creationId xmlns:a16="http://schemas.microsoft.com/office/drawing/2014/main" id="{DD3B9801-8A0A-0CC6-FEE7-0E721EA1372B}"/>
               </a:ext>
             </a:extLst>
           </p:cNvPr>
@@ -23491,8 +25412,8 @@
         </p:nvSpPr>
         <p:spPr>
           <a:xfrm>
-            <a:off x="5669681" y="2265852"/>
-            <a:ext cx="1082348" cy="523220"/>
+            <a:off x="4651506" y="1710374"/>
+            <a:ext cx="1875365" cy="430887"/>
           </a:xfrm>
           <a:prstGeom prst="rect">
             <a:avLst/>
@@ -23500,14 +25421,14 @@
           <a:noFill/>
         </p:spPr>
         <p:txBody>
-          <a:bodyPr wrap="none" rtlCol="0">
+          <a:bodyPr wrap="square" rtlCol="0">
             <a:spAutoFit/>
           </a:bodyPr>
           <a:lstStyle/>
           <a:p>
             <a:pPr algn="ctr"/>
             <a:r>
-              <a:rPr lang="en-US" dirty="0">
+              <a:rPr lang="en-US" sz="1050" dirty="0">
                 <a:solidFill>
                   <a:schemeClr val="bg1">
                     <a:lumMod val="75000"/>
@@ -23523,13 +25444,13 @@
                 </a:effectLst>
                 <a:latin typeface="Press Start 2P" panose="00000500000000000000" pitchFamily="2" charset="0"/>
               </a:rPr>
-              <a:t>Begin</a:t>
+              <a:t>Complete</a:t>
             </a:r>
           </a:p>
           <a:p>
             <a:pPr algn="ctr"/>
             <a:r>
-              <a:rPr lang="en-US" dirty="0">
+              <a:rPr lang="en-US" sz="1050" dirty="0">
                 <a:solidFill>
                   <a:schemeClr val="bg1">
                     <a:lumMod val="75000"/>
@@ -23545,17 +25466,17 @@
                 </a:effectLst>
                 <a:latin typeface="Press Start 2P" panose="00000500000000000000" pitchFamily="2" charset="0"/>
               </a:rPr>
-              <a:t>ride</a:t>
+              <a:t>stage</a:t>
             </a:r>
           </a:p>
         </p:txBody>
       </p:sp>
       <p:sp>
         <p:nvSpPr>
-          <p:cNvPr id="7" name="TextBox 6">
+          <p:cNvPr id="11" name="TextBox 10">
             <a:extLst>
               <a:ext uri="{FF2B5EF4-FFF2-40B4-BE49-F238E27FC236}">
-                <a16:creationId xmlns:a16="http://schemas.microsoft.com/office/drawing/2014/main" id="{DD3B9801-8A0A-0CC6-FEE7-0E721EA1372B}"/>
+                <a16:creationId xmlns:a16="http://schemas.microsoft.com/office/drawing/2014/main" id="{6962D20E-03EE-53B7-81AD-6ABEE4E53BFC}"/>
               </a:ext>
             </a:extLst>
           </p:cNvPr>
@@ -23564,8 +25485,8 @@
         </p:nvSpPr>
         <p:spPr>
           <a:xfrm>
-            <a:off x="3634317" y="3302282"/>
-            <a:ext cx="1875365" cy="523220"/>
+            <a:off x="1633992" y="1856526"/>
+            <a:ext cx="1889428" cy="415498"/>
           </a:xfrm>
           <a:prstGeom prst="rect">
             <a:avLst/>
@@ -23580,7 +25501,7 @@
           <a:p>
             <a:pPr algn="ctr"/>
             <a:r>
-              <a:rPr lang="en-US" dirty="0">
+              <a:rPr lang="en-US" sz="1050" dirty="0">
                 <a:solidFill>
                   <a:schemeClr val="bg1">
                     <a:lumMod val="75000"/>
@@ -23596,42 +25517,13 @@
                 </a:effectLst>
                 <a:latin typeface="Press Start 2P" panose="00000500000000000000" pitchFamily="2" charset="0"/>
               </a:rPr>
-              <a:t>Survive ride</a:t>
+              <a:t>Unlock new</a:t>
             </a:r>
           </a:p>
-        </p:txBody>
-      </p:sp>
-      <p:sp>
-        <p:nvSpPr>
-          <p:cNvPr id="11" name="TextBox 10">
-            <a:extLst>
-              <a:ext uri="{FF2B5EF4-FFF2-40B4-BE49-F238E27FC236}">
-                <a16:creationId xmlns:a16="http://schemas.microsoft.com/office/drawing/2014/main" id="{6962D20E-03EE-53B7-81AD-6ABEE4E53BFC}"/>
-              </a:ext>
-            </a:extLst>
-          </p:cNvPr>
-          <p:cNvSpPr txBox="1"/>
-          <p:nvPr/>
-        </p:nvSpPr>
-        <p:spPr>
-          <a:xfrm>
-            <a:off x="1523065" y="2243815"/>
-            <a:ext cx="2151092" cy="523220"/>
-          </a:xfrm>
-          <a:prstGeom prst="rect">
-            <a:avLst/>
-          </a:prstGeom>
-          <a:noFill/>
-        </p:spPr>
-        <p:txBody>
-          <a:bodyPr wrap="square" rtlCol="0">
-            <a:spAutoFit/>
-          </a:bodyPr>
-          <a:lstStyle/>
           <a:p>
             <a:pPr algn="ctr"/>
             <a:r>
-              <a:rPr lang="en-US" dirty="0">
+              <a:rPr lang="en-US" sz="1050" dirty="0">
                 <a:solidFill>
                   <a:schemeClr val="bg1">
                     <a:lumMod val="75000"/>
@@ -23647,29 +25539,7 @@
                 </a:effectLst>
                 <a:latin typeface="Press Start 2P" panose="00000500000000000000" pitchFamily="2" charset="0"/>
               </a:rPr>
-              <a:t>Unlock </a:t>
-            </a:r>
-          </a:p>
-          <a:p>
-            <a:pPr algn="ctr"/>
-            <a:r>
-              <a:rPr lang="en-US" dirty="0">
-                <a:solidFill>
-                  <a:schemeClr val="bg1">
-                    <a:lumMod val="75000"/>
-                  </a:schemeClr>
-                </a:solidFill>
-                <a:effectLst>
-                  <a:glow rad="228600">
-                    <a:schemeClr val="accent4">
-                      <a:satMod val="175000"/>
-                      <a:alpha val="40000"/>
-                    </a:schemeClr>
-                  </a:glow>
-                </a:effectLst>
-                <a:latin typeface="Press Start 2P" panose="00000500000000000000" pitchFamily="2" charset="0"/>
-              </a:rPr>
-              <a:t>new stuff</a:t>
+              <a:t>stuff</a:t>
             </a:r>
           </a:p>
         </p:txBody>
@@ -23687,20 +25557,23 @@
           <p:nvPr/>
         </p:nvSpPr>
         <p:spPr>
-          <a:xfrm rot="5400000">
-            <a:off x="5688794" y="1486979"/>
-            <a:ext cx="611370" cy="699519"/>
+          <a:xfrm>
+            <a:off x="2507982" y="1288583"/>
+            <a:ext cx="1217970" cy="415499"/>
           </a:xfrm>
           <a:prstGeom prst="bentArrow">
-            <a:avLst/>
+            <a:avLst>
+              <a:gd name="adj1" fmla="val 25000"/>
+              <a:gd name="adj2" fmla="val 25000"/>
+              <a:gd name="adj3" fmla="val 25000"/>
+              <a:gd name="adj4" fmla="val 43750"/>
+            </a:avLst>
           </a:prstGeom>
           <a:solidFill>
-            <a:schemeClr val="accent4"/>
+            <a:srgbClr val="3B7D4F"/>
           </a:solidFill>
           <a:ln>
-            <a:solidFill>
-              <a:srgbClr val="8F4D57"/>
-            </a:solidFill>
+            <a:noFill/>
           </a:ln>
           <a:effectLst>
             <a:glow rad="139700">
@@ -23732,7 +25605,7 @@
           <a:lstStyle/>
           <a:p>
             <a:pPr algn="ctr"/>
-            <a:endParaRPr lang="en-US">
+            <a:endParaRPr lang="en-US" dirty="0">
               <a:solidFill>
                 <a:schemeClr val="tx1"/>
               </a:solidFill>
@@ -23754,19 +25627,17 @@
         </p:nvSpPr>
         <p:spPr>
           <a:xfrm rot="10800000">
-            <a:off x="5536659" y="2952522"/>
-            <a:ext cx="699520" cy="699519"/>
+            <a:off x="6255179" y="1589972"/>
+            <a:ext cx="623048" cy="404925"/>
           </a:xfrm>
           <a:prstGeom prst="bentArrow">
             <a:avLst/>
           </a:prstGeom>
           <a:solidFill>
-            <a:schemeClr val="accent4"/>
+            <a:srgbClr val="AB5130"/>
           </a:solidFill>
           <a:ln>
-            <a:solidFill>
-              <a:srgbClr val="8F4D57"/>
-            </a:solidFill>
+            <a:noFill/>
           </a:ln>
           <a:effectLst>
             <a:glow rad="139700">
@@ -23820,19 +25691,17 @@
         </p:nvSpPr>
         <p:spPr>
           <a:xfrm rot="16200000">
-            <a:off x="2799757" y="2861912"/>
-            <a:ext cx="699520" cy="699519"/>
+            <a:off x="3133386" y="2795485"/>
+            <a:ext cx="414225" cy="1775928"/>
           </a:xfrm>
           <a:prstGeom prst="bentArrow">
             <a:avLst/>
           </a:prstGeom>
           <a:solidFill>
-            <a:schemeClr val="accent4"/>
+            <a:srgbClr val="3B7D4F"/>
           </a:solidFill>
           <a:ln>
-            <a:solidFill>
-              <a:srgbClr val="8F4D57"/>
-            </a:solidFill>
+            <a:noFill/>
           </a:ln>
           <a:effectLst>
             <a:glow rad="139700">
@@ -23886,8 +25755,8 @@
         </p:nvSpPr>
         <p:spPr>
           <a:xfrm>
-            <a:off x="2882175" y="1468783"/>
-            <a:ext cx="617102" cy="680156"/>
+            <a:off x="3912576" y="1782575"/>
+            <a:ext cx="889987" cy="404925"/>
           </a:xfrm>
           <a:prstGeom prst="bentArrow">
             <a:avLst>
@@ -23898,12 +25767,10 @@
             </a:avLst>
           </a:prstGeom>
           <a:solidFill>
-            <a:schemeClr val="accent4"/>
+            <a:srgbClr val="AB5130"/>
           </a:solidFill>
           <a:ln>
-            <a:solidFill>
-              <a:srgbClr val="8F4D57"/>
-            </a:solidFill>
+            <a:noFill/>
           </a:ln>
           <a:effectLst>
             <a:glow rad="139700">
@@ -24307,6 +26174,752 @@
           </a:prstGeom>
         </p:spPr>
       </p:pic>
+      <p:sp>
+        <p:nvSpPr>
+          <p:cNvPr id="3" name="Arrow: Right 2">
+            <a:extLst>
+              <a:ext uri="{FF2B5EF4-FFF2-40B4-BE49-F238E27FC236}">
+                <a16:creationId xmlns:a16="http://schemas.microsoft.com/office/drawing/2014/main" id="{C9C10463-FF49-09D8-03A6-0D71C02D0DFA}"/>
+              </a:ext>
+            </a:extLst>
+          </p:cNvPr>
+          <p:cNvSpPr/>
+          <p:nvPr/>
+        </p:nvSpPr>
+        <p:spPr>
+          <a:xfrm>
+            <a:off x="5434864" y="1207557"/>
+            <a:ext cx="820730" cy="267987"/>
+          </a:xfrm>
+          <a:prstGeom prst="rightArrow">
+            <a:avLst/>
+          </a:prstGeom>
+          <a:solidFill>
+            <a:srgbClr val="3B7D4F"/>
+          </a:solidFill>
+          <a:ln>
+            <a:noFill/>
+          </a:ln>
+          <a:effectLst>
+            <a:glow rad="139700">
+              <a:schemeClr val="accent4">
+                <a:satMod val="175000"/>
+                <a:alpha val="40000"/>
+              </a:schemeClr>
+            </a:glow>
+          </a:effectLst>
+        </p:spPr>
+        <p:style>
+          <a:lnRef idx="2">
+            <a:schemeClr val="accent1">
+              <a:shade val="15000"/>
+            </a:schemeClr>
+          </a:lnRef>
+          <a:fillRef idx="1">
+            <a:schemeClr val="accent1"/>
+          </a:fillRef>
+          <a:effectRef idx="0">
+            <a:schemeClr val="accent1"/>
+          </a:effectRef>
+          <a:fontRef idx="minor">
+            <a:schemeClr val="lt1"/>
+          </a:fontRef>
+        </p:style>
+        <p:txBody>
+          <a:bodyPr rtlCol="0" anchor="ctr"/>
+          <a:lstStyle/>
+          <a:p>
+            <a:pPr algn="ctr"/>
+            <a:endParaRPr lang="en-US">
+              <a:solidFill>
+                <a:schemeClr val="tx1"/>
+              </a:solidFill>
+            </a:endParaRPr>
+          </a:p>
+        </p:txBody>
+      </p:sp>
+      <p:sp>
+        <p:nvSpPr>
+          <p:cNvPr id="4" name="Flowchart: Decision 3">
+            <a:extLst>
+              <a:ext uri="{FF2B5EF4-FFF2-40B4-BE49-F238E27FC236}">
+                <a16:creationId xmlns:a16="http://schemas.microsoft.com/office/drawing/2014/main" id="{B14D1A25-1F5A-74DF-36D5-6CBB3203F698}"/>
+              </a:ext>
+            </a:extLst>
+          </p:cNvPr>
+          <p:cNvSpPr/>
+          <p:nvPr/>
+        </p:nvSpPr>
+        <p:spPr>
+          <a:xfrm>
+            <a:off x="4778403" y="2716516"/>
+            <a:ext cx="1602417" cy="667343"/>
+          </a:xfrm>
+          <a:prstGeom prst="flowChartDecision">
+            <a:avLst/>
+          </a:prstGeom>
+          <a:solidFill>
+            <a:srgbClr val="AB5130"/>
+          </a:solidFill>
+          <a:ln>
+            <a:noFill/>
+          </a:ln>
+          <a:effectLst>
+            <a:glow rad="139700">
+              <a:schemeClr val="accent4">
+                <a:satMod val="175000"/>
+                <a:alpha val="40000"/>
+              </a:schemeClr>
+            </a:glow>
+          </a:effectLst>
+        </p:spPr>
+        <p:style>
+          <a:lnRef idx="2">
+            <a:schemeClr val="accent1">
+              <a:shade val="15000"/>
+            </a:schemeClr>
+          </a:lnRef>
+          <a:fillRef idx="1">
+            <a:schemeClr val="accent1"/>
+          </a:fillRef>
+          <a:effectRef idx="0">
+            <a:schemeClr val="accent1"/>
+          </a:effectRef>
+          <a:fontRef idx="minor">
+            <a:schemeClr val="lt1"/>
+          </a:fontRef>
+        </p:style>
+        <p:txBody>
+          <a:bodyPr rtlCol="0" anchor="ctr"/>
+          <a:lstStyle/>
+          <a:p>
+            <a:pPr algn="ctr"/>
+            <a:r>
+              <a:rPr lang="en-US" sz="800" dirty="0">
+                <a:solidFill>
+                  <a:schemeClr val="bg1">
+                    <a:lumMod val="85000"/>
+                  </a:schemeClr>
+                </a:solidFill>
+                <a:latin typeface="Press Start 2P" panose="00000500000000000000" pitchFamily="2" charset="0"/>
+              </a:rPr>
+              <a:t>Last</a:t>
+            </a:r>
+          </a:p>
+          <a:p>
+            <a:pPr algn="ctr"/>
+            <a:r>
+              <a:rPr lang="en-US" sz="800" dirty="0">
+                <a:solidFill>
+                  <a:schemeClr val="bg1">
+                    <a:lumMod val="85000"/>
+                  </a:schemeClr>
+                </a:solidFill>
+                <a:latin typeface="Press Start 2P" panose="00000500000000000000" pitchFamily="2" charset="0"/>
+              </a:rPr>
+              <a:t>Stage?</a:t>
+            </a:r>
+          </a:p>
+        </p:txBody>
+      </p:sp>
+      <p:sp>
+        <p:nvSpPr>
+          <p:cNvPr id="9" name="Arrow: Right 8">
+            <a:extLst>
+              <a:ext uri="{FF2B5EF4-FFF2-40B4-BE49-F238E27FC236}">
+                <a16:creationId xmlns:a16="http://schemas.microsoft.com/office/drawing/2014/main" id="{CAC7028F-2236-D250-8B6C-809650446411}"/>
+              </a:ext>
+            </a:extLst>
+          </p:cNvPr>
+          <p:cNvSpPr/>
+          <p:nvPr/>
+        </p:nvSpPr>
+        <p:spPr>
+          <a:xfrm rot="5400000">
+            <a:off x="5369591" y="2288648"/>
+            <a:ext cx="439193" cy="215635"/>
+          </a:xfrm>
+          <a:prstGeom prst="rightArrow">
+            <a:avLst/>
+          </a:prstGeom>
+          <a:solidFill>
+            <a:srgbClr val="AB5130"/>
+          </a:solidFill>
+          <a:ln>
+            <a:noFill/>
+          </a:ln>
+          <a:effectLst>
+            <a:glow rad="139700">
+              <a:schemeClr val="accent4">
+                <a:satMod val="175000"/>
+                <a:alpha val="40000"/>
+              </a:schemeClr>
+            </a:glow>
+          </a:effectLst>
+        </p:spPr>
+        <p:style>
+          <a:lnRef idx="2">
+            <a:schemeClr val="accent1">
+              <a:shade val="15000"/>
+            </a:schemeClr>
+          </a:lnRef>
+          <a:fillRef idx="1">
+            <a:schemeClr val="accent1"/>
+          </a:fillRef>
+          <a:effectRef idx="0">
+            <a:schemeClr val="accent1"/>
+          </a:effectRef>
+          <a:fontRef idx="minor">
+            <a:schemeClr val="lt1"/>
+          </a:fontRef>
+        </p:style>
+        <p:txBody>
+          <a:bodyPr rtlCol="0" anchor="ctr"/>
+          <a:lstStyle/>
+          <a:p>
+            <a:pPr algn="ctr"/>
+            <a:endParaRPr lang="en-US">
+              <a:solidFill>
+                <a:schemeClr val="tx1"/>
+              </a:solidFill>
+            </a:endParaRPr>
+          </a:p>
+        </p:txBody>
+      </p:sp>
+      <p:sp>
+        <p:nvSpPr>
+          <p:cNvPr id="12" name="Arrow: Bent 11">
+            <a:extLst>
+              <a:ext uri="{FF2B5EF4-FFF2-40B4-BE49-F238E27FC236}">
+                <a16:creationId xmlns:a16="http://schemas.microsoft.com/office/drawing/2014/main" id="{9F485C33-58D3-49D0-DBC1-416A2E94BD7B}"/>
+              </a:ext>
+            </a:extLst>
+          </p:cNvPr>
+          <p:cNvSpPr/>
+          <p:nvPr/>
+        </p:nvSpPr>
+        <p:spPr>
+          <a:xfrm rot="16200000">
+            <a:off x="4076292" y="2491230"/>
+            <a:ext cx="404924" cy="855220"/>
+          </a:xfrm>
+          <a:prstGeom prst="bentArrow">
+            <a:avLst>
+              <a:gd name="adj1" fmla="val 25000"/>
+              <a:gd name="adj2" fmla="val 25000"/>
+              <a:gd name="adj3" fmla="val 25000"/>
+              <a:gd name="adj4" fmla="val 43750"/>
+            </a:avLst>
+          </a:prstGeom>
+          <a:solidFill>
+            <a:srgbClr val="AB5130"/>
+          </a:solidFill>
+          <a:ln>
+            <a:noFill/>
+          </a:ln>
+          <a:effectLst>
+            <a:glow rad="139700">
+              <a:schemeClr val="accent4">
+                <a:satMod val="175000"/>
+                <a:alpha val="40000"/>
+              </a:schemeClr>
+            </a:glow>
+          </a:effectLst>
+        </p:spPr>
+        <p:style>
+          <a:lnRef idx="2">
+            <a:schemeClr val="accent1">
+              <a:shade val="15000"/>
+            </a:schemeClr>
+          </a:lnRef>
+          <a:fillRef idx="1">
+            <a:schemeClr val="accent1"/>
+          </a:fillRef>
+          <a:effectRef idx="0">
+            <a:schemeClr val="accent1"/>
+          </a:effectRef>
+          <a:fontRef idx="minor">
+            <a:schemeClr val="lt1"/>
+          </a:fontRef>
+        </p:style>
+        <p:txBody>
+          <a:bodyPr rtlCol="0" anchor="ctr"/>
+          <a:lstStyle/>
+          <a:p>
+            <a:pPr algn="ctr"/>
+            <a:endParaRPr lang="en-US" dirty="0">
+              <a:solidFill>
+                <a:schemeClr val="tx1"/>
+              </a:solidFill>
+            </a:endParaRPr>
+          </a:p>
+        </p:txBody>
+      </p:sp>
+      <p:sp>
+        <p:nvSpPr>
+          <p:cNvPr id="14" name="TextBox 13">
+            <a:extLst>
+              <a:ext uri="{FF2B5EF4-FFF2-40B4-BE49-F238E27FC236}">
+                <a16:creationId xmlns:a16="http://schemas.microsoft.com/office/drawing/2014/main" id="{5B2DA5D3-5942-B776-D702-8B8FC61F2FD1}"/>
+              </a:ext>
+            </a:extLst>
+          </p:cNvPr>
+          <p:cNvSpPr txBox="1"/>
+          <p:nvPr/>
+        </p:nvSpPr>
+        <p:spPr>
+          <a:xfrm>
+            <a:off x="4004846" y="2716378"/>
+            <a:ext cx="817123" cy="261610"/>
+          </a:xfrm>
+          <a:prstGeom prst="rect">
+            <a:avLst/>
+          </a:prstGeom>
+          <a:noFill/>
+        </p:spPr>
+        <p:txBody>
+          <a:bodyPr wrap="square" rtlCol="0">
+            <a:spAutoFit/>
+          </a:bodyPr>
+          <a:lstStyle/>
+          <a:p>
+            <a:pPr algn="ctr"/>
+            <a:r>
+              <a:rPr lang="en-US" sz="1050" dirty="0">
+                <a:solidFill>
+                  <a:schemeClr val="bg1">
+                    <a:lumMod val="75000"/>
+                  </a:schemeClr>
+                </a:solidFill>
+                <a:effectLst>
+                  <a:glow rad="228600">
+                    <a:schemeClr val="accent4">
+                      <a:satMod val="175000"/>
+                      <a:alpha val="40000"/>
+                    </a:schemeClr>
+                  </a:glow>
+                </a:effectLst>
+                <a:latin typeface="Press Start 2P" panose="00000500000000000000" pitchFamily="2" charset="0"/>
+              </a:rPr>
+              <a:t>No</a:t>
+            </a:r>
+          </a:p>
+        </p:txBody>
+      </p:sp>
+      <p:sp>
+        <p:nvSpPr>
+          <p:cNvPr id="15" name="Arrow: Bent 14">
+            <a:extLst>
+              <a:ext uri="{FF2B5EF4-FFF2-40B4-BE49-F238E27FC236}">
+                <a16:creationId xmlns:a16="http://schemas.microsoft.com/office/drawing/2014/main" id="{5A9A217E-F411-A017-3097-C0F86105A3AA}"/>
+              </a:ext>
+            </a:extLst>
+          </p:cNvPr>
+          <p:cNvSpPr/>
+          <p:nvPr/>
+        </p:nvSpPr>
+        <p:spPr>
+          <a:xfrm rot="10800000">
+            <a:off x="5061343" y="3513315"/>
+            <a:ext cx="564186" cy="414228"/>
+          </a:xfrm>
+          <a:prstGeom prst="bentArrow">
+            <a:avLst/>
+          </a:prstGeom>
+          <a:solidFill>
+            <a:srgbClr val="3B7D4F"/>
+          </a:solidFill>
+          <a:ln>
+            <a:noFill/>
+          </a:ln>
+          <a:effectLst>
+            <a:glow rad="139700">
+              <a:schemeClr val="accent4">
+                <a:satMod val="175000"/>
+                <a:alpha val="40000"/>
+              </a:schemeClr>
+            </a:glow>
+          </a:effectLst>
+        </p:spPr>
+        <p:style>
+          <a:lnRef idx="2">
+            <a:schemeClr val="accent1">
+              <a:shade val="15000"/>
+            </a:schemeClr>
+          </a:lnRef>
+          <a:fillRef idx="1">
+            <a:schemeClr val="accent1"/>
+          </a:fillRef>
+          <a:effectRef idx="0">
+            <a:schemeClr val="accent1"/>
+          </a:effectRef>
+          <a:fontRef idx="minor">
+            <a:schemeClr val="lt1"/>
+          </a:fontRef>
+        </p:style>
+        <p:txBody>
+          <a:bodyPr rtlCol="0" anchor="ctr"/>
+          <a:lstStyle/>
+          <a:p>
+            <a:pPr algn="ctr"/>
+            <a:endParaRPr lang="en-US">
+              <a:solidFill>
+                <a:schemeClr val="tx1"/>
+              </a:solidFill>
+            </a:endParaRPr>
+          </a:p>
+        </p:txBody>
+      </p:sp>
+      <p:sp>
+        <p:nvSpPr>
+          <p:cNvPr id="16" name="TextBox 15">
+            <a:extLst>
+              <a:ext uri="{FF2B5EF4-FFF2-40B4-BE49-F238E27FC236}">
+                <a16:creationId xmlns:a16="http://schemas.microsoft.com/office/drawing/2014/main" id="{65D6BD1F-2665-08DC-1913-F7D9C6C21342}"/>
+              </a:ext>
+            </a:extLst>
+          </p:cNvPr>
+          <p:cNvSpPr txBox="1"/>
+          <p:nvPr/>
+        </p:nvSpPr>
+        <p:spPr>
+          <a:xfrm>
+            <a:off x="5522728" y="3561432"/>
+            <a:ext cx="817123" cy="253916"/>
+          </a:xfrm>
+          <a:prstGeom prst="rect">
+            <a:avLst/>
+          </a:prstGeom>
+          <a:noFill/>
+        </p:spPr>
+        <p:txBody>
+          <a:bodyPr wrap="square" rtlCol="0">
+            <a:spAutoFit/>
+          </a:bodyPr>
+          <a:lstStyle/>
+          <a:p>
+            <a:pPr algn="ctr"/>
+            <a:r>
+              <a:rPr lang="en-US" sz="1050" dirty="0">
+                <a:solidFill>
+                  <a:schemeClr val="bg1">
+                    <a:lumMod val="75000"/>
+                  </a:schemeClr>
+                </a:solidFill>
+                <a:effectLst>
+                  <a:glow rad="228600">
+                    <a:schemeClr val="accent4">
+                      <a:satMod val="175000"/>
+                      <a:alpha val="40000"/>
+                    </a:schemeClr>
+                  </a:glow>
+                </a:effectLst>
+                <a:latin typeface="Press Start 2P" panose="00000500000000000000" pitchFamily="2" charset="0"/>
+              </a:rPr>
+              <a:t>Yes</a:t>
+            </a:r>
+          </a:p>
+        </p:txBody>
+      </p:sp>
+      <p:sp>
+        <p:nvSpPr>
+          <p:cNvPr id="17" name="TextBox 16">
+            <a:extLst>
+              <a:ext uri="{FF2B5EF4-FFF2-40B4-BE49-F238E27FC236}">
+                <a16:creationId xmlns:a16="http://schemas.microsoft.com/office/drawing/2014/main" id="{086A60F9-2D45-BC29-4F1F-1DF1102C0999}"/>
+              </a:ext>
+            </a:extLst>
+          </p:cNvPr>
+          <p:cNvSpPr txBox="1"/>
+          <p:nvPr/>
+        </p:nvSpPr>
+        <p:spPr>
+          <a:xfrm>
+            <a:off x="3523420" y="2224498"/>
+            <a:ext cx="889987" cy="430887"/>
+          </a:xfrm>
+          <a:prstGeom prst="rect">
+            <a:avLst/>
+          </a:prstGeom>
+          <a:noFill/>
+        </p:spPr>
+        <p:txBody>
+          <a:bodyPr wrap="none" rtlCol="0">
+            <a:spAutoFit/>
+          </a:bodyPr>
+          <a:lstStyle/>
+          <a:p>
+            <a:pPr algn="ctr"/>
+            <a:r>
+              <a:rPr lang="en-US" sz="1100" dirty="0">
+                <a:solidFill>
+                  <a:schemeClr val="bg1">
+                    <a:lumMod val="75000"/>
+                  </a:schemeClr>
+                </a:solidFill>
+                <a:effectLst>
+                  <a:glow rad="228600">
+                    <a:schemeClr val="accent4">
+                      <a:satMod val="175000"/>
+                      <a:alpha val="40000"/>
+                    </a:schemeClr>
+                  </a:glow>
+                </a:effectLst>
+                <a:latin typeface="Press Start 2P" panose="00000500000000000000" pitchFamily="2" charset="0"/>
+              </a:rPr>
+              <a:t>Next</a:t>
+            </a:r>
+          </a:p>
+          <a:p>
+            <a:pPr algn="ctr"/>
+            <a:r>
+              <a:rPr lang="en-US" sz="1100" dirty="0">
+                <a:solidFill>
+                  <a:schemeClr val="bg1">
+                    <a:lumMod val="75000"/>
+                  </a:schemeClr>
+                </a:solidFill>
+                <a:effectLst>
+                  <a:glow rad="228600">
+                    <a:schemeClr val="accent4">
+                      <a:satMod val="175000"/>
+                      <a:alpha val="40000"/>
+                    </a:schemeClr>
+                  </a:glow>
+                </a:effectLst>
+                <a:latin typeface="Press Start 2P" panose="00000500000000000000" pitchFamily="2" charset="0"/>
+              </a:rPr>
+              <a:t>stage</a:t>
+            </a:r>
+          </a:p>
+        </p:txBody>
+      </p:sp>
+      <p:sp>
+        <p:nvSpPr>
+          <p:cNvPr id="18" name="TextBox 17">
+            <a:extLst>
+              <a:ext uri="{FF2B5EF4-FFF2-40B4-BE49-F238E27FC236}">
+                <a16:creationId xmlns:a16="http://schemas.microsoft.com/office/drawing/2014/main" id="{9200CC0D-DC01-E642-D9A2-4E9650D483AE}"/>
+              </a:ext>
+            </a:extLst>
+          </p:cNvPr>
+          <p:cNvSpPr txBox="1"/>
+          <p:nvPr/>
+        </p:nvSpPr>
+        <p:spPr>
+          <a:xfrm>
+            <a:off x="4231592" y="3618689"/>
+            <a:ext cx="855220" cy="430887"/>
+          </a:xfrm>
+          <a:prstGeom prst="rect">
+            <a:avLst/>
+          </a:prstGeom>
+          <a:noFill/>
+        </p:spPr>
+        <p:txBody>
+          <a:bodyPr wrap="square" rtlCol="0">
+            <a:spAutoFit/>
+          </a:bodyPr>
+          <a:lstStyle/>
+          <a:p>
+            <a:pPr algn="ctr"/>
+            <a:r>
+              <a:rPr lang="en-US" sz="1100" dirty="0">
+                <a:solidFill>
+                  <a:schemeClr val="bg1">
+                    <a:lumMod val="75000"/>
+                  </a:schemeClr>
+                </a:solidFill>
+                <a:effectLst>
+                  <a:glow rad="228600">
+                    <a:schemeClr val="accent4">
+                      <a:satMod val="175000"/>
+                      <a:alpha val="40000"/>
+                    </a:schemeClr>
+                  </a:glow>
+                </a:effectLst>
+                <a:latin typeface="Press Start 2P" panose="00000500000000000000" pitchFamily="2" charset="0"/>
+              </a:rPr>
+              <a:t>Exit ride</a:t>
+            </a:r>
+          </a:p>
+        </p:txBody>
+      </p:sp>
+      <p:sp>
+        <p:nvSpPr>
+          <p:cNvPr id="22" name="Arrow: Right 21">
+            <a:extLst>
+              <a:ext uri="{FF2B5EF4-FFF2-40B4-BE49-F238E27FC236}">
+                <a16:creationId xmlns:a16="http://schemas.microsoft.com/office/drawing/2014/main" id="{76508E62-73E6-54DC-71F0-F6DC954F317D}"/>
+              </a:ext>
+            </a:extLst>
+          </p:cNvPr>
+          <p:cNvSpPr/>
+          <p:nvPr/>
+        </p:nvSpPr>
+        <p:spPr>
+          <a:xfrm rot="16200000">
+            <a:off x="2407083" y="2445736"/>
+            <a:ext cx="302512" cy="211610"/>
+          </a:xfrm>
+          <a:prstGeom prst="rightArrow">
+            <a:avLst/>
+          </a:prstGeom>
+          <a:solidFill>
+            <a:srgbClr val="3B7D4F"/>
+          </a:solidFill>
+          <a:ln>
+            <a:noFill/>
+          </a:ln>
+          <a:effectLst>
+            <a:glow rad="139700">
+              <a:schemeClr val="accent4">
+                <a:satMod val="175000"/>
+                <a:alpha val="40000"/>
+              </a:schemeClr>
+            </a:glow>
+          </a:effectLst>
+        </p:spPr>
+        <p:style>
+          <a:lnRef idx="2">
+            <a:schemeClr val="accent1">
+              <a:shade val="15000"/>
+            </a:schemeClr>
+          </a:lnRef>
+          <a:fillRef idx="1">
+            <a:schemeClr val="accent1"/>
+          </a:fillRef>
+          <a:effectRef idx="0">
+            <a:schemeClr val="accent1"/>
+          </a:effectRef>
+          <a:fontRef idx="minor">
+            <a:schemeClr val="lt1"/>
+          </a:fontRef>
+        </p:style>
+        <p:txBody>
+          <a:bodyPr rtlCol="0" anchor="ctr"/>
+          <a:lstStyle/>
+          <a:p>
+            <a:pPr algn="ctr"/>
+            <a:endParaRPr lang="en-US">
+              <a:solidFill>
+                <a:schemeClr val="tx1"/>
+              </a:solidFill>
+            </a:endParaRPr>
+          </a:p>
+        </p:txBody>
+      </p:sp>
+      <p:sp>
+        <p:nvSpPr>
+          <p:cNvPr id="23" name="TextBox 22">
+            <a:extLst>
+              <a:ext uri="{FF2B5EF4-FFF2-40B4-BE49-F238E27FC236}">
+                <a16:creationId xmlns:a16="http://schemas.microsoft.com/office/drawing/2014/main" id="{C90A1ECD-9EA6-38D5-C131-B861460F0571}"/>
+              </a:ext>
+            </a:extLst>
+          </p:cNvPr>
+          <p:cNvSpPr txBox="1"/>
+          <p:nvPr/>
+        </p:nvSpPr>
+        <p:spPr>
+          <a:xfrm>
+            <a:off x="1778416" y="2801078"/>
+            <a:ext cx="1639183" cy="600164"/>
+          </a:xfrm>
+          <a:prstGeom prst="rect">
+            <a:avLst/>
+          </a:prstGeom>
+          <a:noFill/>
+        </p:spPr>
+        <p:txBody>
+          <a:bodyPr wrap="square" rtlCol="0">
+            <a:spAutoFit/>
+          </a:bodyPr>
+          <a:lstStyle/>
+          <a:p>
+            <a:pPr algn="ctr"/>
+            <a:r>
+              <a:rPr lang="en-US" sz="1100" dirty="0">
+                <a:solidFill>
+                  <a:schemeClr val="bg1">
+                    <a:lumMod val="75000"/>
+                  </a:schemeClr>
+                </a:solidFill>
+                <a:effectLst>
+                  <a:glow rad="228600">
+                    <a:schemeClr val="accent4">
+                      <a:satMod val="175000"/>
+                      <a:alpha val="40000"/>
+                    </a:schemeClr>
+                  </a:glow>
+                </a:effectLst>
+                <a:latin typeface="Press Start 2P" panose="00000500000000000000" pitchFamily="2" charset="0"/>
+              </a:rPr>
+              <a:t>Enter</a:t>
+            </a:r>
+          </a:p>
+          <a:p>
+            <a:pPr algn="ctr"/>
+            <a:r>
+              <a:rPr lang="en-US" sz="1100" dirty="0">
+                <a:solidFill>
+                  <a:schemeClr val="bg1">
+                    <a:lumMod val="75000"/>
+                  </a:schemeClr>
+                </a:solidFill>
+                <a:effectLst>
+                  <a:glow rad="228600">
+                    <a:schemeClr val="accent4">
+                      <a:satMod val="175000"/>
+                      <a:alpha val="40000"/>
+                    </a:schemeClr>
+                  </a:glow>
+                </a:effectLst>
+                <a:latin typeface="Press Start 2P" panose="00000500000000000000" pitchFamily="2" charset="0"/>
+              </a:rPr>
+              <a:t>amusement park</a:t>
+            </a:r>
+          </a:p>
+        </p:txBody>
+      </p:sp>
+      <p:pic>
+        <p:nvPicPr>
+          <p:cNvPr id="26" name="Picture 25" descr="A red cross on a black background&#10;&#10;AI-generated content may be incorrect.">
+            <a:extLst>
+              <a:ext uri="{FF2B5EF4-FFF2-40B4-BE49-F238E27FC236}">
+                <a16:creationId xmlns:a16="http://schemas.microsoft.com/office/drawing/2014/main" id="{F1E403FA-B25E-AF1B-ADA9-6CE981D0560C}"/>
+              </a:ext>
+            </a:extLst>
+          </p:cNvPr>
+          <p:cNvPicPr>
+            <a:picLocks noChangeAspect="1"/>
+          </p:cNvPicPr>
+          <p:nvPr/>
+        </p:nvPicPr>
+        <p:blipFill>
+          <a:blip r:embed="rId5"/>
+          <a:stretch>
+            <a:fillRect/>
+          </a:stretch>
+        </p:blipFill>
+        <p:spPr>
+          <a:xfrm>
+            <a:off x="312978" y="4340822"/>
+            <a:ext cx="1362314" cy="461429"/>
+          </a:xfrm>
+          <a:prstGeom prst="rect">
+            <a:avLst/>
+          </a:prstGeom>
+          <a:effectLst>
+            <a:glow rad="228600">
+              <a:schemeClr val="accent4">
+                <a:satMod val="175000"/>
+                <a:alpha val="40000"/>
+              </a:schemeClr>
+            </a:glow>
+          </a:effectLst>
+        </p:spPr>
+      </p:pic>
     </p:spTree>
     <p:extLst>
       <p:ext uri="{BB962C8B-B14F-4D97-AF65-F5344CB8AC3E}">
@@ -24320,7 +26933,7 @@
 </p:sld>
 </file>
 
-<file path=ppt/slides/slide7.xml><?xml version="1.0" encoding="utf-8"?>
+<file path=ppt/slides/slide8.xml><?xml version="1.0" encoding="utf-8"?>
 <p:sld xmlns:a="http://schemas.openxmlformats.org/drawingml/2006/main" xmlns:r="http://schemas.openxmlformats.org/officeDocument/2006/relationships" xmlns:p="http://schemas.openxmlformats.org/presentationml/2006/main">
   <p:cSld>
     <p:spTree>
@@ -24673,6 +27286,44 @@
           </a:p>
         </p:txBody>
       </p:sp>
+      <p:pic>
+        <p:nvPicPr>
+          <p:cNvPr id="3" name="Picture 2" descr="A red cross on a black background&#10;&#10;AI-generated content may be incorrect.">
+            <a:extLst>
+              <a:ext uri="{FF2B5EF4-FFF2-40B4-BE49-F238E27FC236}">
+                <a16:creationId xmlns:a16="http://schemas.microsoft.com/office/drawing/2014/main" id="{BB01612E-DD31-AB43-30D7-434F8A5A41F3}"/>
+              </a:ext>
+            </a:extLst>
+          </p:cNvPr>
+          <p:cNvPicPr>
+            <a:picLocks noChangeAspect="1"/>
+          </p:cNvPicPr>
+          <p:nvPr/>
+        </p:nvPicPr>
+        <p:blipFill>
+          <a:blip r:embed="rId3"/>
+          <a:stretch>
+            <a:fillRect/>
+          </a:stretch>
+        </p:blipFill>
+        <p:spPr>
+          <a:xfrm>
+            <a:off x="312978" y="4340822"/>
+            <a:ext cx="1362314" cy="461429"/>
+          </a:xfrm>
+          <a:prstGeom prst="rect">
+            <a:avLst/>
+          </a:prstGeom>
+          <a:effectLst>
+            <a:glow rad="228600">
+              <a:schemeClr val="accent4">
+                <a:satMod val="175000"/>
+                <a:alpha val="40000"/>
+              </a:schemeClr>
+            </a:glow>
+          </a:effectLst>
+        </p:spPr>
+      </p:pic>
     </p:spTree>
     <p:extLst>
       <p:ext uri="{BB962C8B-B14F-4D97-AF65-F5344CB8AC3E}">
@@ -24686,7 +27337,7 @@
 </p:sld>
 </file>
 
-<file path=ppt/slides/slide8.xml><?xml version="1.0" encoding="utf-8"?>
+<file path=ppt/slides/slide9.xml><?xml version="1.0" encoding="utf-8"?>
 <p:sld xmlns:a="http://schemas.openxmlformats.org/drawingml/2006/main" xmlns:r="http://schemas.openxmlformats.org/officeDocument/2006/relationships" xmlns:p="http://schemas.openxmlformats.org/presentationml/2006/main">
   <p:cSld>
     <p:spTree>
@@ -24810,99 +27461,6 @@
     <p:extLst>
       <p:ext uri="{BB962C8B-B14F-4D97-AF65-F5344CB8AC3E}">
         <p14:creationId xmlns:p14="http://schemas.microsoft.com/office/powerpoint/2010/main" val="2069842747"/>
-      </p:ext>
-    </p:extLst>
-  </p:cSld>
-  <p:clrMapOvr>
-    <a:masterClrMapping/>
-  </p:clrMapOvr>
-</p:sld>
-</file>
-
-<file path=ppt/slides/slide9.xml><?xml version="1.0" encoding="utf-8"?>
-<p:sld xmlns:a="http://schemas.openxmlformats.org/drawingml/2006/main" xmlns:r="http://schemas.openxmlformats.org/officeDocument/2006/relationships" xmlns:p="http://schemas.openxmlformats.org/presentationml/2006/main">
-  <p:cSld>
-    <p:spTree>
-      <p:nvGrpSpPr>
-        <p:cNvPr id="1" name=""/>
-        <p:cNvGrpSpPr/>
-        <p:nvPr/>
-      </p:nvGrpSpPr>
-      <p:grpSpPr>
-        <a:xfrm>
-          <a:off x="0" y="0"/>
-          <a:ext cx="0" cy="0"/>
-          <a:chOff x="0" y="0"/>
-          <a:chExt cx="0" cy="0"/>
-        </a:xfrm>
-      </p:grpSpPr>
-      <p:graphicFrame>
-        <p:nvGraphicFramePr>
-          <p:cNvPr id="2" name="Object 1">
-            <a:extLst>
-              <a:ext uri="{FF2B5EF4-FFF2-40B4-BE49-F238E27FC236}">
-                <a16:creationId xmlns:a16="http://schemas.microsoft.com/office/drawing/2014/main" id="{B8F103BA-FE0A-AA41-EBEC-DC6531E5551D}"/>
-              </a:ext>
-            </a:extLst>
-          </p:cNvPr>
-          <p:cNvGraphicFramePr>
-            <a:graphicFrameLocks noChangeAspect="1"/>
-          </p:cNvGraphicFramePr>
-          <p:nvPr>
-            <p:extLst>
-              <p:ext uri="{D42A27DB-BD31-4B8C-83A1-F6EECF244321}">
-                <p14:modId xmlns:p14="http://schemas.microsoft.com/office/powerpoint/2010/main" val="318484214"/>
-              </p:ext>
-            </p:extLst>
-          </p:nvPr>
-        </p:nvGraphicFramePr>
-        <p:xfrm>
-          <a:off x="0" y="0"/>
-          <a:ext cx="9144000" cy="5143500"/>
-        </p:xfrm>
-        <a:graphic>
-          <a:graphicData uri="http://schemas.openxmlformats.org/presentationml/2006/ole">
-            <mc:AlternateContent xmlns:mc="http://schemas.openxmlformats.org/markup-compatibility/2006">
-              <mc:Choice xmlns:v="urn:schemas-microsoft-com:vml" Requires="v">
-                <p:oleObj r:id="rId2" imgW="23457131" imgH="13194723" progId="">
-                  <p:embed/>
-                </p:oleObj>
-              </mc:Choice>
-              <mc:Fallback>
-                <p:oleObj r:id="rId2" imgW="23457131" imgH="13194723" progId="">
-                  <p:embed/>
-                  <p:pic>
-                    <p:nvPicPr>
-                      <p:cNvPr id="0" name=""/>
-                      <p:cNvPicPr/>
-                      <p:nvPr/>
-                    </p:nvPicPr>
-                    <p:blipFill>
-                      <a:blip r:embed="rId3"/>
-                      <a:stretch>
-                        <a:fillRect/>
-                      </a:stretch>
-                    </p:blipFill>
-                    <p:spPr>
-                      <a:xfrm>
-                        <a:off x="0" y="0"/>
-                        <a:ext cx="9144000" cy="5143500"/>
-                      </a:xfrm>
-                      <a:prstGeom prst="rect">
-                        <a:avLst/>
-                      </a:prstGeom>
-                    </p:spPr>
-                  </p:pic>
-                </p:oleObj>
-              </mc:Fallback>
-            </mc:AlternateContent>
-          </a:graphicData>
-        </a:graphic>
-      </p:graphicFrame>
-    </p:spTree>
-    <p:extLst>
-      <p:ext uri="{BB962C8B-B14F-4D97-AF65-F5344CB8AC3E}">
-        <p14:creationId xmlns:p14="http://schemas.microsoft.com/office/powerpoint/2010/main" val="1421057380"/>
       </p:ext>
     </p:extLst>
   </p:cSld>

--- a/Pitch Deck.pptx
+++ b/Pitch Deck.pptx
@@ -10,19 +10,19 @@
   <p:sldIdLst>
     <p:sldId id="330" r:id="rId2"/>
     <p:sldId id="260" r:id="rId3"/>
-    <p:sldId id="345" r:id="rId4"/>
-    <p:sldId id="346" r:id="rId5"/>
-    <p:sldId id="347" r:id="rId6"/>
-    <p:sldId id="349" r:id="rId7"/>
-    <p:sldId id="342" r:id="rId8"/>
-    <p:sldId id="348" r:id="rId9"/>
-    <p:sldId id="331" r:id="rId10"/>
-    <p:sldId id="333" r:id="rId11"/>
-    <p:sldId id="335" r:id="rId12"/>
-    <p:sldId id="337" r:id="rId13"/>
-    <p:sldId id="323" r:id="rId14"/>
-    <p:sldId id="324" r:id="rId15"/>
-    <p:sldId id="340" r:id="rId16"/>
+    <p:sldId id="350" r:id="rId4"/>
+    <p:sldId id="351" r:id="rId5"/>
+    <p:sldId id="345" r:id="rId6"/>
+    <p:sldId id="346" r:id="rId7"/>
+    <p:sldId id="349" r:id="rId8"/>
+    <p:sldId id="342" r:id="rId9"/>
+    <p:sldId id="348" r:id="rId10"/>
+    <p:sldId id="331" r:id="rId11"/>
+    <p:sldId id="333" r:id="rId12"/>
+    <p:sldId id="335" r:id="rId13"/>
+    <p:sldId id="337" r:id="rId14"/>
+    <p:sldId id="323" r:id="rId15"/>
+    <p:sldId id="324" r:id="rId16"/>
     <p:sldId id="326" r:id="rId17"/>
     <p:sldId id="320" r:id="rId18"/>
     <p:sldId id="343" r:id="rId19"/>
@@ -1085,6 +1085,260 @@
         <p:cNvPr id="1" name="Shape 995">
           <a:extLst>
             <a:ext uri="{FF2B5EF4-FFF2-40B4-BE49-F238E27FC236}">
+              <a16:creationId xmlns:a16="http://schemas.microsoft.com/office/drawing/2014/main" id="{780F424A-984B-8DE7-A098-1F34836D91B5}"/>
+            </a:ext>
+          </a:extLst>
+        </p:cNvPr>
+        <p:cNvGrpSpPr/>
+        <p:nvPr/>
+      </p:nvGrpSpPr>
+      <p:grpSpPr>
+        <a:xfrm>
+          <a:off x="0" y="0"/>
+          <a:ext cx="0" cy="0"/>
+          <a:chOff x="0" y="0"/>
+          <a:chExt cx="0" cy="0"/>
+        </a:xfrm>
+      </p:grpSpPr>
+      <p:sp>
+        <p:nvSpPr>
+          <p:cNvPr id="996" name="Google Shape;996;g6ed1d3ee59_0_10084:notes">
+            <a:extLst>
+              <a:ext uri="{FF2B5EF4-FFF2-40B4-BE49-F238E27FC236}">
+                <a16:creationId xmlns:a16="http://schemas.microsoft.com/office/drawing/2014/main" id="{835DCF18-8AFB-B827-9C96-C62B578BCB4A}"/>
+              </a:ext>
+            </a:extLst>
+          </p:cNvPr>
+          <p:cNvSpPr>
+            <a:spLocks noGrp="1" noRot="1" noChangeAspect="1"/>
+          </p:cNvSpPr>
+          <p:nvPr>
+            <p:ph type="sldImg" idx="2"/>
+          </p:nvPr>
+        </p:nvSpPr>
+        <p:spPr>
+          <a:xfrm>
+            <a:off x="381000" y="685800"/>
+            <a:ext cx="6096000" cy="3429000"/>
+          </a:xfrm>
+          <a:custGeom>
+            <a:avLst/>
+            <a:gdLst/>
+            <a:ahLst/>
+            <a:cxnLst/>
+            <a:rect l="l" t="t" r="r" b="b"/>
+            <a:pathLst>
+              <a:path w="120000" h="120000" extrusionOk="0">
+                <a:moveTo>
+                  <a:pt x="0" y="0"/>
+                </a:moveTo>
+                <a:lnTo>
+                  <a:pt x="120000" y="0"/>
+                </a:lnTo>
+                <a:lnTo>
+                  <a:pt x="120000" y="120000"/>
+                </a:lnTo>
+                <a:lnTo>
+                  <a:pt x="0" y="120000"/>
+                </a:lnTo>
+                <a:close/>
+              </a:path>
+            </a:pathLst>
+          </a:custGeom>
+        </p:spPr>
+      </p:sp>
+      <p:sp>
+        <p:nvSpPr>
+          <p:cNvPr id="997" name="Google Shape;997;g6ed1d3ee59_0_10084:notes">
+            <a:extLst>
+              <a:ext uri="{FF2B5EF4-FFF2-40B4-BE49-F238E27FC236}">
+                <a16:creationId xmlns:a16="http://schemas.microsoft.com/office/drawing/2014/main" id="{56662914-27BE-EECE-904C-10C6EDE4F17D}"/>
+              </a:ext>
+            </a:extLst>
+          </p:cNvPr>
+          <p:cNvSpPr txBox="1">
+            <a:spLocks noGrp="1"/>
+          </p:cNvSpPr>
+          <p:nvPr>
+            <p:ph type="body" idx="1"/>
+          </p:nvPr>
+        </p:nvSpPr>
+        <p:spPr>
+          <a:xfrm>
+            <a:off x="685800" y="4343400"/>
+            <a:ext cx="5486400" cy="4114800"/>
+          </a:xfrm>
+          <a:prstGeom prst="rect">
+            <a:avLst/>
+          </a:prstGeom>
+        </p:spPr>
+        <p:txBody>
+          <a:bodyPr spcFirstLastPara="1" wrap="square" lIns="91425" tIns="91425" rIns="91425" bIns="91425" anchor="t" anchorCtr="0">
+            <a:noAutofit/>
+          </a:bodyPr>
+          <a:lstStyle/>
+          <a:p>
+            <a:pPr marL="0" lvl="0" indent="0" algn="l" rtl="0">
+              <a:spcBef>
+                <a:spcPts val="0"/>
+              </a:spcBef>
+              <a:spcAft>
+                <a:spcPts val="0"/>
+              </a:spcAft>
+              <a:buNone/>
+            </a:pPr>
+            <a:endParaRPr/>
+          </a:p>
+        </p:txBody>
+      </p:sp>
+    </p:spTree>
+    <p:extLst>
+      <p:ext uri="{BB962C8B-B14F-4D97-AF65-F5344CB8AC3E}">
+        <p14:creationId xmlns:p14="http://schemas.microsoft.com/office/powerpoint/2010/main" val="2955623265"/>
+      </p:ext>
+    </p:extLst>
+  </p:cSld>
+  <p:clrMapOvr>
+    <a:masterClrMapping/>
+  </p:clrMapOvr>
+</p:notes>
+</file>
+
+<file path=ppt/notesSlides/notesSlide3.xml><?xml version="1.0" encoding="utf-8"?>
+<p:notes xmlns:a="http://schemas.openxmlformats.org/drawingml/2006/main" xmlns:r="http://schemas.openxmlformats.org/officeDocument/2006/relationships" xmlns:p="http://schemas.openxmlformats.org/presentationml/2006/main" showMasterSp="0" showMasterPhAnim="0">
+  <p:cSld>
+    <p:spTree>
+      <p:nvGrpSpPr>
+        <p:cNvPr id="1" name="Shape 995">
+          <a:extLst>
+            <a:ext uri="{FF2B5EF4-FFF2-40B4-BE49-F238E27FC236}">
+              <a16:creationId xmlns:a16="http://schemas.microsoft.com/office/drawing/2014/main" id="{933ADB03-200D-258B-C7C3-7908B842621D}"/>
+            </a:ext>
+          </a:extLst>
+        </p:cNvPr>
+        <p:cNvGrpSpPr/>
+        <p:nvPr/>
+      </p:nvGrpSpPr>
+      <p:grpSpPr>
+        <a:xfrm>
+          <a:off x="0" y="0"/>
+          <a:ext cx="0" cy="0"/>
+          <a:chOff x="0" y="0"/>
+          <a:chExt cx="0" cy="0"/>
+        </a:xfrm>
+      </p:grpSpPr>
+      <p:sp>
+        <p:nvSpPr>
+          <p:cNvPr id="996" name="Google Shape;996;g6ed1d3ee59_0_10084:notes">
+            <a:extLst>
+              <a:ext uri="{FF2B5EF4-FFF2-40B4-BE49-F238E27FC236}">
+                <a16:creationId xmlns:a16="http://schemas.microsoft.com/office/drawing/2014/main" id="{88312192-2B63-1398-952D-E6EC0E2DBFE3}"/>
+              </a:ext>
+            </a:extLst>
+          </p:cNvPr>
+          <p:cNvSpPr>
+            <a:spLocks noGrp="1" noRot="1" noChangeAspect="1"/>
+          </p:cNvSpPr>
+          <p:nvPr>
+            <p:ph type="sldImg" idx="2"/>
+          </p:nvPr>
+        </p:nvSpPr>
+        <p:spPr>
+          <a:xfrm>
+            <a:off x="381000" y="685800"/>
+            <a:ext cx="6096000" cy="3429000"/>
+          </a:xfrm>
+          <a:custGeom>
+            <a:avLst/>
+            <a:gdLst/>
+            <a:ahLst/>
+            <a:cxnLst/>
+            <a:rect l="l" t="t" r="r" b="b"/>
+            <a:pathLst>
+              <a:path w="120000" h="120000" extrusionOk="0">
+                <a:moveTo>
+                  <a:pt x="0" y="0"/>
+                </a:moveTo>
+                <a:lnTo>
+                  <a:pt x="120000" y="0"/>
+                </a:lnTo>
+                <a:lnTo>
+                  <a:pt x="120000" y="120000"/>
+                </a:lnTo>
+                <a:lnTo>
+                  <a:pt x="0" y="120000"/>
+                </a:lnTo>
+                <a:close/>
+              </a:path>
+            </a:pathLst>
+          </a:custGeom>
+        </p:spPr>
+      </p:sp>
+      <p:sp>
+        <p:nvSpPr>
+          <p:cNvPr id="997" name="Google Shape;997;g6ed1d3ee59_0_10084:notes">
+            <a:extLst>
+              <a:ext uri="{FF2B5EF4-FFF2-40B4-BE49-F238E27FC236}">
+                <a16:creationId xmlns:a16="http://schemas.microsoft.com/office/drawing/2014/main" id="{02890061-A834-5D1E-5E63-02581E059A14}"/>
+              </a:ext>
+            </a:extLst>
+          </p:cNvPr>
+          <p:cNvSpPr txBox="1">
+            <a:spLocks noGrp="1"/>
+          </p:cNvSpPr>
+          <p:nvPr>
+            <p:ph type="body" idx="1"/>
+          </p:nvPr>
+        </p:nvSpPr>
+        <p:spPr>
+          <a:xfrm>
+            <a:off x="685800" y="4343400"/>
+            <a:ext cx="5486400" cy="4114800"/>
+          </a:xfrm>
+          <a:prstGeom prst="rect">
+            <a:avLst/>
+          </a:prstGeom>
+        </p:spPr>
+        <p:txBody>
+          <a:bodyPr spcFirstLastPara="1" wrap="square" lIns="91425" tIns="91425" rIns="91425" bIns="91425" anchor="t" anchorCtr="0">
+            <a:noAutofit/>
+          </a:bodyPr>
+          <a:lstStyle/>
+          <a:p>
+            <a:pPr marL="0" lvl="0" indent="0" algn="l" rtl="0">
+              <a:spcBef>
+                <a:spcPts val="0"/>
+              </a:spcBef>
+              <a:spcAft>
+                <a:spcPts val="0"/>
+              </a:spcAft>
+              <a:buNone/>
+            </a:pPr>
+            <a:endParaRPr/>
+          </a:p>
+        </p:txBody>
+      </p:sp>
+    </p:spTree>
+    <p:extLst>
+      <p:ext uri="{BB962C8B-B14F-4D97-AF65-F5344CB8AC3E}">
+        <p14:creationId xmlns:p14="http://schemas.microsoft.com/office/powerpoint/2010/main" val="4269059410"/>
+      </p:ext>
+    </p:extLst>
+  </p:cSld>
+  <p:clrMapOvr>
+    <a:masterClrMapping/>
+  </p:clrMapOvr>
+</p:notes>
+</file>
+
+<file path=ppt/notesSlides/notesSlide4.xml><?xml version="1.0" encoding="utf-8"?>
+<p:notes xmlns:a="http://schemas.openxmlformats.org/drawingml/2006/main" xmlns:r="http://schemas.openxmlformats.org/officeDocument/2006/relationships" xmlns:p="http://schemas.openxmlformats.org/presentationml/2006/main" showMasterSp="0" showMasterPhAnim="0">
+  <p:cSld>
+    <p:spTree>
+      <p:nvGrpSpPr>
+        <p:cNvPr id="1" name="Shape 995">
+          <a:extLst>
+            <a:ext uri="{FF2B5EF4-FFF2-40B4-BE49-F238E27FC236}">
               <a16:creationId xmlns:a16="http://schemas.microsoft.com/office/drawing/2014/main" id="{0EAE9E16-E741-2AFC-528A-5D362D2279EC}"/>
             </a:ext>
           </a:extLst>
@@ -1204,7 +1458,7 @@
 </p:notes>
 </file>
 
-<file path=ppt/notesSlides/notesSlide3.xml><?xml version="1.0" encoding="utf-8"?>
+<file path=ppt/notesSlides/notesSlide5.xml><?xml version="1.0" encoding="utf-8"?>
 <p:notes xmlns:a="http://schemas.openxmlformats.org/drawingml/2006/main" xmlns:r="http://schemas.openxmlformats.org/officeDocument/2006/relationships" xmlns:p="http://schemas.openxmlformats.org/presentationml/2006/main" showMasterSp="0" showMasterPhAnim="0">
   <p:cSld>
     <p:spTree>
@@ -1331,134 +1585,7 @@
 </p:notes>
 </file>
 
-<file path=ppt/notesSlides/notesSlide4.xml><?xml version="1.0" encoding="utf-8"?>
-<p:notes xmlns:a="http://schemas.openxmlformats.org/drawingml/2006/main" xmlns:r="http://schemas.openxmlformats.org/officeDocument/2006/relationships" xmlns:p="http://schemas.openxmlformats.org/presentationml/2006/main" showMasterSp="0" showMasterPhAnim="0">
-  <p:cSld>
-    <p:spTree>
-      <p:nvGrpSpPr>
-        <p:cNvPr id="1" name="Shape 995">
-          <a:extLst>
-            <a:ext uri="{FF2B5EF4-FFF2-40B4-BE49-F238E27FC236}">
-              <a16:creationId xmlns:a16="http://schemas.microsoft.com/office/drawing/2014/main" id="{A13670B1-C436-4FF0-EEED-6C23F1EF47E5}"/>
-            </a:ext>
-          </a:extLst>
-        </p:cNvPr>
-        <p:cNvGrpSpPr/>
-        <p:nvPr/>
-      </p:nvGrpSpPr>
-      <p:grpSpPr>
-        <a:xfrm>
-          <a:off x="0" y="0"/>
-          <a:ext cx="0" cy="0"/>
-          <a:chOff x="0" y="0"/>
-          <a:chExt cx="0" cy="0"/>
-        </a:xfrm>
-      </p:grpSpPr>
-      <p:sp>
-        <p:nvSpPr>
-          <p:cNvPr id="996" name="Google Shape;996;g6ed1d3ee59_0_10084:notes">
-            <a:extLst>
-              <a:ext uri="{FF2B5EF4-FFF2-40B4-BE49-F238E27FC236}">
-                <a16:creationId xmlns:a16="http://schemas.microsoft.com/office/drawing/2014/main" id="{4C9A6B89-006F-BB09-A4BB-712C012DDB3F}"/>
-              </a:ext>
-            </a:extLst>
-          </p:cNvPr>
-          <p:cNvSpPr>
-            <a:spLocks noGrp="1" noRot="1" noChangeAspect="1"/>
-          </p:cNvSpPr>
-          <p:nvPr>
-            <p:ph type="sldImg" idx="2"/>
-          </p:nvPr>
-        </p:nvSpPr>
-        <p:spPr>
-          <a:xfrm>
-            <a:off x="381000" y="685800"/>
-            <a:ext cx="6096000" cy="3429000"/>
-          </a:xfrm>
-          <a:custGeom>
-            <a:avLst/>
-            <a:gdLst/>
-            <a:ahLst/>
-            <a:cxnLst/>
-            <a:rect l="l" t="t" r="r" b="b"/>
-            <a:pathLst>
-              <a:path w="120000" h="120000" extrusionOk="0">
-                <a:moveTo>
-                  <a:pt x="0" y="0"/>
-                </a:moveTo>
-                <a:lnTo>
-                  <a:pt x="120000" y="0"/>
-                </a:lnTo>
-                <a:lnTo>
-                  <a:pt x="120000" y="120000"/>
-                </a:lnTo>
-                <a:lnTo>
-                  <a:pt x="0" y="120000"/>
-                </a:lnTo>
-                <a:close/>
-              </a:path>
-            </a:pathLst>
-          </a:custGeom>
-        </p:spPr>
-      </p:sp>
-      <p:sp>
-        <p:nvSpPr>
-          <p:cNvPr id="997" name="Google Shape;997;g6ed1d3ee59_0_10084:notes">
-            <a:extLst>
-              <a:ext uri="{FF2B5EF4-FFF2-40B4-BE49-F238E27FC236}">
-                <a16:creationId xmlns:a16="http://schemas.microsoft.com/office/drawing/2014/main" id="{3A731BE7-B1CB-83C3-4C46-98DDFB6CFF44}"/>
-              </a:ext>
-            </a:extLst>
-          </p:cNvPr>
-          <p:cNvSpPr txBox="1">
-            <a:spLocks noGrp="1"/>
-          </p:cNvSpPr>
-          <p:nvPr>
-            <p:ph type="body" idx="1"/>
-          </p:nvPr>
-        </p:nvSpPr>
-        <p:spPr>
-          <a:xfrm>
-            <a:off x="685800" y="4343400"/>
-            <a:ext cx="5486400" cy="4114800"/>
-          </a:xfrm>
-          <a:prstGeom prst="rect">
-            <a:avLst/>
-          </a:prstGeom>
-        </p:spPr>
-        <p:txBody>
-          <a:bodyPr spcFirstLastPara="1" wrap="square" lIns="91425" tIns="91425" rIns="91425" bIns="91425" anchor="t" anchorCtr="0">
-            <a:noAutofit/>
-          </a:bodyPr>
-          <a:lstStyle/>
-          <a:p>
-            <a:pPr marL="0" lvl="0" indent="0" algn="l" rtl="0">
-              <a:spcBef>
-                <a:spcPts val="0"/>
-              </a:spcBef>
-              <a:spcAft>
-                <a:spcPts val="0"/>
-              </a:spcAft>
-              <a:buNone/>
-            </a:pPr>
-            <a:endParaRPr/>
-          </a:p>
-        </p:txBody>
-      </p:sp>
-    </p:spTree>
-    <p:extLst>
-      <p:ext uri="{BB962C8B-B14F-4D97-AF65-F5344CB8AC3E}">
-        <p14:creationId xmlns:p14="http://schemas.microsoft.com/office/powerpoint/2010/main" val="348008065"/>
-      </p:ext>
-    </p:extLst>
-  </p:cSld>
-  <p:clrMapOvr>
-    <a:masterClrMapping/>
-  </p:clrMapOvr>
-</p:notes>
-</file>
-
-<file path=ppt/notesSlides/notesSlide5.xml><?xml version="1.0" encoding="utf-8"?>
+<file path=ppt/notesSlides/notesSlide6.xml><?xml version="1.0" encoding="utf-8"?>
 <p:notes xmlns:a="http://schemas.openxmlformats.org/drawingml/2006/main" xmlns:r="http://schemas.openxmlformats.org/officeDocument/2006/relationships" xmlns:p="http://schemas.openxmlformats.org/presentationml/2006/main" showMasterSp="0" showMasterPhAnim="0">
   <p:cSld>
     <p:spTree>
@@ -1585,7 +1712,7 @@
 </p:notes>
 </file>
 
-<file path=ppt/notesSlides/notesSlide6.xml><?xml version="1.0" encoding="utf-8"?>
+<file path=ppt/notesSlides/notesSlide7.xml><?xml version="1.0" encoding="utf-8"?>
 <p:notes xmlns:a="http://schemas.openxmlformats.org/drawingml/2006/main" xmlns:r="http://schemas.openxmlformats.org/officeDocument/2006/relationships" xmlns:p="http://schemas.openxmlformats.org/presentationml/2006/main" showMasterSp="0" showMasterPhAnim="0">
   <p:cSld>
     <p:spTree>
@@ -1712,7 +1839,7 @@
 </p:notes>
 </file>
 
-<file path=ppt/notesSlides/notesSlide7.xml><?xml version="1.0" encoding="utf-8"?>
+<file path=ppt/notesSlides/notesSlide8.xml><?xml version="1.0" encoding="utf-8"?>
 <p:notes xmlns:a="http://schemas.openxmlformats.org/drawingml/2006/main" xmlns:r="http://schemas.openxmlformats.org/officeDocument/2006/relationships" xmlns:p="http://schemas.openxmlformats.org/presentationml/2006/main" showMasterSp="0" showMasterPhAnim="0">
   <p:cSld>
     <p:spTree>
@@ -1822,7 +1949,7 @@
               </a:spcAft>
               <a:buNone/>
             </a:pPr>
-            <a:endParaRPr/>
+            <a:endParaRPr dirty="0"/>
           </a:p>
         </p:txBody>
       </p:sp>
@@ -1830,133 +1957,6 @@
     <p:extLst>
       <p:ext uri="{BB962C8B-B14F-4D97-AF65-F5344CB8AC3E}">
         <p14:creationId xmlns:p14="http://schemas.microsoft.com/office/powerpoint/2010/main" val="3818429734"/>
-      </p:ext>
-    </p:extLst>
-  </p:cSld>
-  <p:clrMapOvr>
-    <a:masterClrMapping/>
-  </p:clrMapOvr>
-</p:notes>
-</file>
-
-<file path=ppt/notesSlides/notesSlide8.xml><?xml version="1.0" encoding="utf-8"?>
-<p:notes xmlns:a="http://schemas.openxmlformats.org/drawingml/2006/main" xmlns:r="http://schemas.openxmlformats.org/officeDocument/2006/relationships" xmlns:p="http://schemas.openxmlformats.org/presentationml/2006/main" showMasterSp="0" showMasterPhAnim="0">
-  <p:cSld>
-    <p:spTree>
-      <p:nvGrpSpPr>
-        <p:cNvPr id="1" name="Shape 995">
-          <a:extLst>
-            <a:ext uri="{FF2B5EF4-FFF2-40B4-BE49-F238E27FC236}">
-              <a16:creationId xmlns:a16="http://schemas.microsoft.com/office/drawing/2014/main" id="{7DCE523C-DE26-5190-B97C-FF87F49A9FEA}"/>
-            </a:ext>
-          </a:extLst>
-        </p:cNvPr>
-        <p:cNvGrpSpPr/>
-        <p:nvPr/>
-      </p:nvGrpSpPr>
-      <p:grpSpPr>
-        <a:xfrm>
-          <a:off x="0" y="0"/>
-          <a:ext cx="0" cy="0"/>
-          <a:chOff x="0" y="0"/>
-          <a:chExt cx="0" cy="0"/>
-        </a:xfrm>
-      </p:grpSpPr>
-      <p:sp>
-        <p:nvSpPr>
-          <p:cNvPr id="996" name="Google Shape;996;g6ed1d3ee59_0_10084:notes">
-            <a:extLst>
-              <a:ext uri="{FF2B5EF4-FFF2-40B4-BE49-F238E27FC236}">
-                <a16:creationId xmlns:a16="http://schemas.microsoft.com/office/drawing/2014/main" id="{707DD896-8C3B-1E11-4786-5F30C1622A00}"/>
-              </a:ext>
-            </a:extLst>
-          </p:cNvPr>
-          <p:cNvSpPr>
-            <a:spLocks noGrp="1" noRot="1" noChangeAspect="1"/>
-          </p:cNvSpPr>
-          <p:nvPr>
-            <p:ph type="sldImg" idx="2"/>
-          </p:nvPr>
-        </p:nvSpPr>
-        <p:spPr>
-          <a:xfrm>
-            <a:off x="381000" y="685800"/>
-            <a:ext cx="6096000" cy="3429000"/>
-          </a:xfrm>
-          <a:custGeom>
-            <a:avLst/>
-            <a:gdLst/>
-            <a:ahLst/>
-            <a:cxnLst/>
-            <a:rect l="l" t="t" r="r" b="b"/>
-            <a:pathLst>
-              <a:path w="120000" h="120000" extrusionOk="0">
-                <a:moveTo>
-                  <a:pt x="0" y="0"/>
-                </a:moveTo>
-                <a:lnTo>
-                  <a:pt x="120000" y="0"/>
-                </a:lnTo>
-                <a:lnTo>
-                  <a:pt x="120000" y="120000"/>
-                </a:lnTo>
-                <a:lnTo>
-                  <a:pt x="0" y="120000"/>
-                </a:lnTo>
-                <a:close/>
-              </a:path>
-            </a:pathLst>
-          </a:custGeom>
-        </p:spPr>
-      </p:sp>
-      <p:sp>
-        <p:nvSpPr>
-          <p:cNvPr id="997" name="Google Shape;997;g6ed1d3ee59_0_10084:notes">
-            <a:extLst>
-              <a:ext uri="{FF2B5EF4-FFF2-40B4-BE49-F238E27FC236}">
-                <a16:creationId xmlns:a16="http://schemas.microsoft.com/office/drawing/2014/main" id="{91901726-2938-2326-9227-D4BA020AE4E8}"/>
-              </a:ext>
-            </a:extLst>
-          </p:cNvPr>
-          <p:cNvSpPr txBox="1">
-            <a:spLocks noGrp="1"/>
-          </p:cNvSpPr>
-          <p:nvPr>
-            <p:ph type="body" idx="1"/>
-          </p:nvPr>
-        </p:nvSpPr>
-        <p:spPr>
-          <a:xfrm>
-            <a:off x="685800" y="4343400"/>
-            <a:ext cx="5486400" cy="4114800"/>
-          </a:xfrm>
-          <a:prstGeom prst="rect">
-            <a:avLst/>
-          </a:prstGeom>
-        </p:spPr>
-        <p:txBody>
-          <a:bodyPr spcFirstLastPara="1" wrap="square" lIns="91425" tIns="91425" rIns="91425" bIns="91425" anchor="t" anchorCtr="0">
-            <a:noAutofit/>
-          </a:bodyPr>
-          <a:lstStyle/>
-          <a:p>
-            <a:pPr marL="0" lvl="0" indent="0" algn="l" rtl="0">
-              <a:spcBef>
-                <a:spcPts val="0"/>
-              </a:spcBef>
-              <a:spcAft>
-                <a:spcPts val="0"/>
-              </a:spcAft>
-              <a:buNone/>
-            </a:pPr>
-            <a:endParaRPr/>
-          </a:p>
-        </p:txBody>
-      </p:sp>
-    </p:spTree>
-    <p:extLst>
-      <p:ext uri="{BB962C8B-B14F-4D97-AF65-F5344CB8AC3E}">
-        <p14:creationId xmlns:p14="http://schemas.microsoft.com/office/powerpoint/2010/main" val="2077654431"/>
       </p:ext>
     </p:extLst>
   </p:cSld>
@@ -17214,6 +17214,177 @@
           <p:cNvPr id="2" name="Object 1">
             <a:extLst>
               <a:ext uri="{FF2B5EF4-FFF2-40B4-BE49-F238E27FC236}">
+                <a16:creationId xmlns:a16="http://schemas.microsoft.com/office/drawing/2014/main" id="{BE986D8D-679B-DF16-78D6-36A609285C67}"/>
+              </a:ext>
+            </a:extLst>
+          </p:cNvPr>
+          <p:cNvGraphicFramePr>
+            <a:graphicFrameLocks noChangeAspect="1"/>
+          </p:cNvGraphicFramePr>
+          <p:nvPr>
+            <p:extLst>
+              <p:ext uri="{D42A27DB-BD31-4B8C-83A1-F6EECF244321}">
+                <p14:modId xmlns:p14="http://schemas.microsoft.com/office/powerpoint/2010/main" val="1568207707"/>
+              </p:ext>
+            </p:extLst>
+          </p:nvPr>
+        </p:nvGraphicFramePr>
+        <p:xfrm>
+          <a:off x="0" y="0"/>
+          <a:ext cx="9144000" cy="5143500"/>
+        </p:xfrm>
+        <a:graphic>
+          <a:graphicData uri="http://schemas.openxmlformats.org/presentationml/2006/ole">
+            <mc:AlternateContent xmlns:mc="http://schemas.openxmlformats.org/markup-compatibility/2006">
+              <mc:Choice xmlns:v="urn:schemas-microsoft-com:vml" Requires="v">
+                <p:oleObj r:id="rId2" imgW="23457131" imgH="13194723" progId="">
+                  <p:embed/>
+                </p:oleObj>
+              </mc:Choice>
+              <mc:Fallback>
+                <p:oleObj r:id="rId2" imgW="23457131" imgH="13194723" progId="">
+                  <p:embed/>
+                  <p:pic>
+                    <p:nvPicPr>
+                      <p:cNvPr id="0" name=""/>
+                      <p:cNvPicPr/>
+                      <p:nvPr/>
+                    </p:nvPicPr>
+                    <p:blipFill>
+                      <a:blip r:embed="rId3"/>
+                      <a:stretch>
+                        <a:fillRect/>
+                      </a:stretch>
+                    </p:blipFill>
+                    <p:spPr>
+                      <a:xfrm>
+                        <a:off x="0" y="0"/>
+                        <a:ext cx="9144000" cy="5143500"/>
+                      </a:xfrm>
+                      <a:prstGeom prst="rect">
+                        <a:avLst/>
+                      </a:prstGeom>
+                    </p:spPr>
+                  </p:pic>
+                </p:oleObj>
+              </mc:Fallback>
+            </mc:AlternateContent>
+          </a:graphicData>
+        </a:graphic>
+      </p:graphicFrame>
+      <p:sp>
+        <p:nvSpPr>
+          <p:cNvPr id="3" name="TextBox 2">
+            <a:extLst>
+              <a:ext uri="{FF2B5EF4-FFF2-40B4-BE49-F238E27FC236}">
+                <a16:creationId xmlns:a16="http://schemas.microsoft.com/office/drawing/2014/main" id="{69C3ACD7-63EA-AD11-D4E3-7D8D477A2334}"/>
+              </a:ext>
+            </a:extLst>
+          </p:cNvPr>
+          <p:cNvSpPr txBox="1"/>
+          <p:nvPr/>
+        </p:nvSpPr>
+        <p:spPr>
+          <a:xfrm>
+            <a:off x="6168853" y="104932"/>
+            <a:ext cx="2877711" cy="307777"/>
+          </a:xfrm>
+          <a:prstGeom prst="rect">
+            <a:avLst/>
+          </a:prstGeom>
+          <a:noFill/>
+        </p:spPr>
+        <p:txBody>
+          <a:bodyPr wrap="none" rtlCol="0">
+            <a:spAutoFit/>
+          </a:bodyPr>
+          <a:lstStyle/>
+          <a:p>
+            <a:r>
+              <a:rPr lang="en-US" dirty="0">
+                <a:solidFill>
+                  <a:srgbClr val="8F4D57"/>
+                </a:solidFill>
+                <a:latin typeface="Press Start 2P" panose="00000500000000000000" pitchFamily="2" charset="0"/>
+              </a:rPr>
+              <a:t>Lighting system</a:t>
+            </a:r>
+          </a:p>
+        </p:txBody>
+      </p:sp>
+      <p:pic>
+        <p:nvPicPr>
+          <p:cNvPr id="4" name="Picture 3" descr="A red cross on a black background&#10;&#10;AI-generated content may be incorrect.">
+            <a:extLst>
+              <a:ext uri="{FF2B5EF4-FFF2-40B4-BE49-F238E27FC236}">
+                <a16:creationId xmlns:a16="http://schemas.microsoft.com/office/drawing/2014/main" id="{492817C2-921D-0572-BF19-B28602869331}"/>
+              </a:ext>
+            </a:extLst>
+          </p:cNvPr>
+          <p:cNvPicPr>
+            <a:picLocks noChangeAspect="1"/>
+          </p:cNvPicPr>
+          <p:nvPr/>
+        </p:nvPicPr>
+        <p:blipFill>
+          <a:blip r:embed="rId4"/>
+          <a:stretch>
+            <a:fillRect/>
+          </a:stretch>
+        </p:blipFill>
+        <p:spPr>
+          <a:xfrm>
+            <a:off x="312978" y="4340822"/>
+            <a:ext cx="1362314" cy="461429"/>
+          </a:xfrm>
+          <a:prstGeom prst="rect">
+            <a:avLst/>
+          </a:prstGeom>
+          <a:effectLst>
+            <a:glow rad="228600">
+              <a:schemeClr val="accent4">
+                <a:satMod val="175000"/>
+                <a:alpha val="40000"/>
+              </a:schemeClr>
+            </a:glow>
+          </a:effectLst>
+        </p:spPr>
+      </p:pic>
+    </p:spTree>
+    <p:extLst>
+      <p:ext uri="{BB962C8B-B14F-4D97-AF65-F5344CB8AC3E}">
+        <p14:creationId xmlns:p14="http://schemas.microsoft.com/office/powerpoint/2010/main" val="2069842747"/>
+      </p:ext>
+    </p:extLst>
+  </p:cSld>
+  <p:clrMapOvr>
+    <a:masterClrMapping/>
+  </p:clrMapOvr>
+</p:sld>
+</file>
+
+<file path=ppt/slides/slide11.xml><?xml version="1.0" encoding="utf-8"?>
+<p:sld xmlns:a="http://schemas.openxmlformats.org/drawingml/2006/main" xmlns:r="http://schemas.openxmlformats.org/officeDocument/2006/relationships" xmlns:p="http://schemas.openxmlformats.org/presentationml/2006/main">
+  <p:cSld>
+    <p:spTree>
+      <p:nvGrpSpPr>
+        <p:cNvPr id="1" name=""/>
+        <p:cNvGrpSpPr/>
+        <p:nvPr/>
+      </p:nvGrpSpPr>
+      <p:grpSpPr>
+        <a:xfrm>
+          <a:off x="0" y="0"/>
+          <a:ext cx="0" cy="0"/>
+          <a:chOff x="0" y="0"/>
+          <a:chExt cx="0" cy="0"/>
+        </a:xfrm>
+      </p:grpSpPr>
+      <p:graphicFrame>
+        <p:nvGraphicFramePr>
+          <p:cNvPr id="2" name="Object 1">
+            <a:extLst>
+              <a:ext uri="{FF2B5EF4-FFF2-40B4-BE49-F238E27FC236}">
                 <a16:creationId xmlns:a16="http://schemas.microsoft.com/office/drawing/2014/main" id="{B8F103BA-FE0A-AA41-EBEC-DC6531E5551D}"/>
               </a:ext>
             </a:extLst>
@@ -17272,6 +17443,44 @@
           </a:graphicData>
         </a:graphic>
       </p:graphicFrame>
+      <p:pic>
+        <p:nvPicPr>
+          <p:cNvPr id="3" name="Picture 2" descr="A red cross on a black background&#10;&#10;AI-generated content may be incorrect.">
+            <a:extLst>
+              <a:ext uri="{FF2B5EF4-FFF2-40B4-BE49-F238E27FC236}">
+                <a16:creationId xmlns:a16="http://schemas.microsoft.com/office/drawing/2014/main" id="{E878CDF1-3B33-6849-F168-D2AABD7C3FEF}"/>
+              </a:ext>
+            </a:extLst>
+          </p:cNvPr>
+          <p:cNvPicPr>
+            <a:picLocks noChangeAspect="1"/>
+          </p:cNvPicPr>
+          <p:nvPr/>
+        </p:nvPicPr>
+        <p:blipFill>
+          <a:blip r:embed="rId4"/>
+          <a:stretch>
+            <a:fillRect/>
+          </a:stretch>
+        </p:blipFill>
+        <p:spPr>
+          <a:xfrm>
+            <a:off x="312978" y="4340822"/>
+            <a:ext cx="1362314" cy="461429"/>
+          </a:xfrm>
+          <a:prstGeom prst="rect">
+            <a:avLst/>
+          </a:prstGeom>
+          <a:effectLst>
+            <a:glow rad="228600">
+              <a:schemeClr val="accent4">
+                <a:satMod val="175000"/>
+                <a:alpha val="40000"/>
+              </a:schemeClr>
+            </a:glow>
+          </a:effectLst>
+        </p:spPr>
+      </p:pic>
     </p:spTree>
     <p:extLst>
       <p:ext uri="{BB962C8B-B14F-4D97-AF65-F5344CB8AC3E}">
@@ -17285,7 +17494,7 @@
 </p:sld>
 </file>
 
-<file path=ppt/slides/slide11.xml><?xml version="1.0" encoding="utf-8"?>
+<file path=ppt/slides/slide12.xml><?xml version="1.0" encoding="utf-8"?>
 <p:sld xmlns:a="http://schemas.openxmlformats.org/drawingml/2006/main" xmlns:r="http://schemas.openxmlformats.org/officeDocument/2006/relationships" xmlns:p="http://schemas.openxmlformats.org/presentationml/2006/main">
   <p:cSld>
     <p:spTree>
@@ -17365,6 +17574,44 @@
           </a:graphicData>
         </a:graphic>
       </p:graphicFrame>
+      <p:pic>
+        <p:nvPicPr>
+          <p:cNvPr id="3" name="Picture 2" descr="A red cross on a black background&#10;&#10;AI-generated content may be incorrect.">
+            <a:extLst>
+              <a:ext uri="{FF2B5EF4-FFF2-40B4-BE49-F238E27FC236}">
+                <a16:creationId xmlns:a16="http://schemas.microsoft.com/office/drawing/2014/main" id="{49A91C42-2962-3159-8631-1D07A723CD72}"/>
+              </a:ext>
+            </a:extLst>
+          </p:cNvPr>
+          <p:cNvPicPr>
+            <a:picLocks noChangeAspect="1"/>
+          </p:cNvPicPr>
+          <p:nvPr/>
+        </p:nvPicPr>
+        <p:blipFill>
+          <a:blip r:embed="rId4"/>
+          <a:stretch>
+            <a:fillRect/>
+          </a:stretch>
+        </p:blipFill>
+        <p:spPr>
+          <a:xfrm>
+            <a:off x="312978" y="4340822"/>
+            <a:ext cx="1362314" cy="461429"/>
+          </a:xfrm>
+          <a:prstGeom prst="rect">
+            <a:avLst/>
+          </a:prstGeom>
+          <a:effectLst>
+            <a:glow rad="228600">
+              <a:schemeClr val="accent4">
+                <a:satMod val="175000"/>
+                <a:alpha val="40000"/>
+              </a:schemeClr>
+            </a:glow>
+          </a:effectLst>
+        </p:spPr>
+      </p:pic>
     </p:spTree>
     <p:extLst>
       <p:ext uri="{BB962C8B-B14F-4D97-AF65-F5344CB8AC3E}">
@@ -17378,7 +17625,7 @@
 </p:sld>
 </file>
 
-<file path=ppt/slides/slide12.xml><?xml version="1.0" encoding="utf-8"?>
+<file path=ppt/slides/slide13.xml><?xml version="1.0" encoding="utf-8"?>
 <p:sld xmlns:a="http://schemas.openxmlformats.org/drawingml/2006/main" xmlns:r="http://schemas.openxmlformats.org/officeDocument/2006/relationships" xmlns:p="http://schemas.openxmlformats.org/presentationml/2006/main">
   <p:cSld>
     <p:spTree>
@@ -17458,6 +17705,44 @@
           </a:graphicData>
         </a:graphic>
       </p:graphicFrame>
+      <p:pic>
+        <p:nvPicPr>
+          <p:cNvPr id="3" name="Picture 2" descr="A red cross on a black background&#10;&#10;AI-generated content may be incorrect.">
+            <a:extLst>
+              <a:ext uri="{FF2B5EF4-FFF2-40B4-BE49-F238E27FC236}">
+                <a16:creationId xmlns:a16="http://schemas.microsoft.com/office/drawing/2014/main" id="{6390B03F-F3F2-3959-786F-1FB86E6AA899}"/>
+              </a:ext>
+            </a:extLst>
+          </p:cNvPr>
+          <p:cNvPicPr>
+            <a:picLocks noChangeAspect="1"/>
+          </p:cNvPicPr>
+          <p:nvPr/>
+        </p:nvPicPr>
+        <p:blipFill>
+          <a:blip r:embed="rId4"/>
+          <a:stretch>
+            <a:fillRect/>
+          </a:stretch>
+        </p:blipFill>
+        <p:spPr>
+          <a:xfrm>
+            <a:off x="312978" y="4340822"/>
+            <a:ext cx="1362314" cy="461429"/>
+          </a:xfrm>
+          <a:prstGeom prst="rect">
+            <a:avLst/>
+          </a:prstGeom>
+          <a:effectLst>
+            <a:glow rad="228600">
+              <a:schemeClr val="accent4">
+                <a:satMod val="175000"/>
+                <a:alpha val="40000"/>
+              </a:schemeClr>
+            </a:glow>
+          </a:effectLst>
+        </p:spPr>
+      </p:pic>
     </p:spTree>
     <p:extLst>
       <p:ext uri="{BB962C8B-B14F-4D97-AF65-F5344CB8AC3E}">
@@ -17471,7 +17756,7 @@
 </p:sld>
 </file>
 
-<file path=ppt/slides/slide13.xml><?xml version="1.0" encoding="utf-8"?>
+<file path=ppt/slides/slide14.xml><?xml version="1.0" encoding="utf-8"?>
 <p:sld xmlns:a="http://schemas.openxmlformats.org/drawingml/2006/main" xmlns:r="http://schemas.openxmlformats.org/officeDocument/2006/relationships" xmlns:p="http://schemas.openxmlformats.org/presentationml/2006/main">
   <p:cSld>
     <p:spTree>
@@ -17544,8 +17829,8 @@
         </p:nvSpPr>
         <p:spPr>
           <a:xfrm>
-            <a:off x="1865542" y="1105137"/>
-            <a:ext cx="5412916" cy="1112838"/>
+            <a:off x="1144873" y="1120127"/>
+            <a:ext cx="6854253" cy="1112838"/>
           </a:xfrm>
           <a:prstGeom prst="rect">
             <a:avLst/>
@@ -17565,18 +17850,16 @@
                 <a:spcPts val="1400"/>
               </a:lnSpc>
               <a:buClr>
-                <a:srgbClr val="AB5130"/>
+                <a:srgbClr val="BD6A62"/>
               </a:buClr>
               <a:buSzPts val="1100"/>
               <a:buFont typeface="Press Start 2P" panose="00000500000000000000" pitchFamily="2" charset="0"/>
-              <a:buChar char="♦"/>
+              <a:buChar char="★"/>
             </a:pPr>
             <a:r>
               <a:rPr lang="en-US" sz="1000" dirty="0">
                 <a:solidFill>
-                  <a:schemeClr val="bg1">
-                    <a:lumMod val="75000"/>
-                  </a:schemeClr>
+                  <a:srgbClr val="BD6A62"/>
                 </a:solidFill>
                 <a:effectLst>
                   <a:glow rad="228600">
@@ -17588,7 +17871,26 @@
                 </a:effectLst>
                 <a:latin typeface="Press Start 2P" panose="00000500000000000000" pitchFamily="2" charset="0"/>
               </a:rPr>
-              <a:t>Proprietary MonoGame/C# engine, proven across 3 shipped titles.</a:t>
+              <a:t>Technology complete:</a:t>
+            </a:r>
+            <a:r>
+              <a:rPr lang="en-US" sz="1000" dirty="0">
+                <a:solidFill>
+                  <a:schemeClr val="bg1">
+                    <a:lumMod val="75000"/>
+                  </a:schemeClr>
+                </a:solidFill>
+                <a:effectLst>
+                  <a:glow rad="228600">
+                    <a:schemeClr val="accent4">
+                      <a:satMod val="175000"/>
+                      <a:alpha val="40000"/>
+                    </a:schemeClr>
+                  </a:glow>
+                </a:effectLst>
+                <a:latin typeface="Press Start 2P" panose="00000500000000000000" pitchFamily="2" charset="0"/>
+              </a:rPr>
+              <a:t> proprietary MonoGame/C# engine, fully optimized and AOT-compatible (already proven on PC &amp; consoles).</a:t>
             </a:r>
           </a:p>
           <a:p>
@@ -17597,11 +17899,11 @@
                 <a:spcPts val="1400"/>
               </a:lnSpc>
               <a:buClr>
-                <a:srgbClr val="AB5130"/>
+                <a:srgbClr val="BD6A62"/>
               </a:buClr>
               <a:buSzPts val="1100"/>
               <a:buFont typeface="Press Start 2P" panose="00000500000000000000" pitchFamily="2" charset="0"/>
-              <a:buChar char="♦"/>
+              <a:buChar char="★"/>
             </a:pPr>
             <a:endParaRPr lang="en-US" sz="1000" dirty="0">
               <a:solidFill>
@@ -17626,18 +17928,16 @@
                 <a:spcPts val="1400"/>
               </a:lnSpc>
               <a:buClr>
-                <a:srgbClr val="AB5130"/>
+                <a:srgbClr val="BD6A62"/>
               </a:buClr>
               <a:buSzPts val="1100"/>
               <a:buFont typeface="Press Start 2P" panose="00000500000000000000" pitchFamily="2" charset="0"/>
-              <a:buChar char="♦"/>
+              <a:buChar char="★"/>
             </a:pPr>
             <a:r>
               <a:rPr lang="en-US" sz="1000" dirty="0">
                 <a:solidFill>
-                  <a:schemeClr val="bg1">
-                    <a:lumMod val="75000"/>
-                  </a:schemeClr>
+                  <a:srgbClr val="BD6A62"/>
                 </a:solidFill>
                 <a:effectLst>
                   <a:glow rad="228600">
@@ -17649,7 +17949,26 @@
                 </a:effectLst>
                 <a:latin typeface="Press Start 2P" panose="00000500000000000000" pitchFamily="2" charset="0"/>
               </a:rPr>
-              <a:t>Core gameplay and procedural generation already functional.</a:t>
+              <a:t>Playable prototype: </a:t>
+            </a:r>
+            <a:r>
+              <a:rPr lang="en-US" sz="1000" dirty="0">
+                <a:solidFill>
+                  <a:schemeClr val="bg1">
+                    <a:lumMod val="75000"/>
+                  </a:schemeClr>
+                </a:solidFill>
+                <a:effectLst>
+                  <a:glow rad="228600">
+                    <a:schemeClr val="accent4">
+                      <a:satMod val="175000"/>
+                      <a:alpha val="40000"/>
+                    </a:schemeClr>
+                  </a:glow>
+                </a:effectLst>
+                <a:latin typeface="Press Start 2P" panose="00000500000000000000" pitchFamily="2" charset="0"/>
+              </a:rPr>
+              <a:t>core gameplay loop working (movement, basic combat, carts, procedural generation, lighting).</a:t>
             </a:r>
           </a:p>
           <a:p>
@@ -17658,11 +17977,11 @@
                 <a:spcPts val="1400"/>
               </a:lnSpc>
               <a:buClr>
-                <a:srgbClr val="AB5130"/>
+                <a:srgbClr val="BD6A62"/>
               </a:buClr>
               <a:buSzPts val="1100"/>
               <a:buFont typeface="Press Start 2P" panose="00000500000000000000" pitchFamily="2" charset="0"/>
-              <a:buChar char="♦"/>
+              <a:buChar char="★"/>
             </a:pPr>
             <a:endParaRPr lang="en-US" sz="1000" dirty="0">
               <a:solidFill>
@@ -17687,18 +18006,16 @@
                 <a:spcPts val="1400"/>
               </a:lnSpc>
               <a:buClr>
-                <a:srgbClr val="AB5130"/>
+                <a:srgbClr val="BD6A62"/>
               </a:buClr>
               <a:buSzPts val="1100"/>
               <a:buFont typeface="Press Start 2P" panose="00000500000000000000" pitchFamily="2" charset="0"/>
-              <a:buChar char="♦"/>
+              <a:buChar char="★"/>
             </a:pPr>
             <a:r>
               <a:rPr lang="en-US" sz="1000" dirty="0">
                 <a:solidFill>
-                  <a:schemeClr val="bg1">
-                    <a:lumMod val="75000"/>
-                  </a:schemeClr>
+                  <a:srgbClr val="BD6A62"/>
                 </a:solidFill>
                 <a:effectLst>
                   <a:glow rad="228600">
@@ -17710,7 +18027,182 @@
                 </a:effectLst>
                 <a:latin typeface="Press Start 2P" panose="00000500000000000000" pitchFamily="2" charset="0"/>
               </a:rPr>
-              <a:t>Prototype playable with established art direction and humor.</a:t>
+              <a:t>Art direction established: </a:t>
+            </a:r>
+            <a:r>
+              <a:rPr lang="en-US" sz="1000" dirty="0">
+                <a:solidFill>
+                  <a:schemeClr val="bg1">
+                    <a:lumMod val="75000"/>
+                  </a:schemeClr>
+                </a:solidFill>
+                <a:effectLst>
+                  <a:glow rad="228600">
+                    <a:schemeClr val="accent4">
+                      <a:satMod val="175000"/>
+                      <a:alpha val="40000"/>
+                    </a:schemeClr>
+                  </a:glow>
+                </a:effectLst>
+                <a:latin typeface="Press Start 2P" panose="00000500000000000000" pitchFamily="2" charset="0"/>
+              </a:rPr>
+              <a:t>pixel art style defined.</a:t>
+            </a:r>
+          </a:p>
+          <a:p>
+            <a:pPr marL="171450" indent="-171450">
+              <a:lnSpc>
+                <a:spcPts val="1400"/>
+              </a:lnSpc>
+              <a:buClr>
+                <a:srgbClr val="BD6A62"/>
+              </a:buClr>
+              <a:buSzPts val="1100"/>
+              <a:buFont typeface="Press Start 2P" panose="00000500000000000000" pitchFamily="2" charset="0"/>
+              <a:buChar char="★"/>
+            </a:pPr>
+            <a:endParaRPr lang="en-US" sz="1000" dirty="0">
+              <a:solidFill>
+                <a:schemeClr val="bg1">
+                  <a:lumMod val="75000"/>
+                </a:schemeClr>
+              </a:solidFill>
+              <a:effectLst>
+                <a:glow rad="228600">
+                  <a:schemeClr val="accent4">
+                    <a:satMod val="175000"/>
+                    <a:alpha val="40000"/>
+                  </a:schemeClr>
+                </a:glow>
+              </a:effectLst>
+              <a:latin typeface="Press Start 2P" panose="00000500000000000000" pitchFamily="2" charset="0"/>
+            </a:endParaRPr>
+          </a:p>
+          <a:p>
+            <a:pPr marL="171450" indent="-171450">
+              <a:lnSpc>
+                <a:spcPts val="1400"/>
+              </a:lnSpc>
+              <a:buClr>
+                <a:srgbClr val="BD6A62"/>
+              </a:buClr>
+              <a:buSzPts val="1100"/>
+              <a:buFont typeface="Press Start 2P" panose="00000500000000000000" pitchFamily="2" charset="0"/>
+              <a:buChar char="★"/>
+            </a:pPr>
+            <a:r>
+              <a:rPr lang="en-US" sz="1000" dirty="0">
+                <a:solidFill>
+                  <a:srgbClr val="BD6A62"/>
+                </a:solidFill>
+                <a:effectLst>
+                  <a:glow rad="228600">
+                    <a:schemeClr val="accent4">
+                      <a:satMod val="175000"/>
+                      <a:alpha val="40000"/>
+                    </a:schemeClr>
+                  </a:glow>
+                </a:effectLst>
+                <a:latin typeface="Press Start 2P" panose="00000500000000000000" pitchFamily="2" charset="0"/>
+              </a:rPr>
+              <a:t>Tone &amp; humor tested: </a:t>
+            </a:r>
+            <a:r>
+              <a:rPr lang="en-US" sz="1000" dirty="0">
+                <a:solidFill>
+                  <a:schemeClr val="bg1">
+                    <a:lumMod val="75000"/>
+                  </a:schemeClr>
+                </a:solidFill>
+                <a:effectLst>
+                  <a:glow rad="228600">
+                    <a:schemeClr val="accent4">
+                      <a:satMod val="175000"/>
+                      <a:alpha val="40000"/>
+                    </a:schemeClr>
+                  </a:glow>
+                </a:effectLst>
+                <a:latin typeface="Press Start 2P" panose="00000500000000000000" pitchFamily="2" charset="0"/>
+              </a:rPr>
+              <a:t>prototype already showcases grotesque comedy + horror mix.</a:t>
+            </a:r>
+          </a:p>
+          <a:p>
+            <a:pPr marL="171450" indent="-171450">
+              <a:lnSpc>
+                <a:spcPts val="1400"/>
+              </a:lnSpc>
+              <a:buClr>
+                <a:srgbClr val="BD6A62"/>
+              </a:buClr>
+              <a:buSzPts val="1100"/>
+              <a:buFont typeface="Press Start 2P" panose="00000500000000000000" pitchFamily="2" charset="0"/>
+              <a:buChar char="★"/>
+            </a:pPr>
+            <a:endParaRPr lang="en-US" sz="1000" dirty="0">
+              <a:solidFill>
+                <a:schemeClr val="bg1">
+                  <a:lumMod val="75000"/>
+                </a:schemeClr>
+              </a:solidFill>
+              <a:effectLst>
+                <a:glow rad="228600">
+                  <a:schemeClr val="accent4">
+                    <a:satMod val="175000"/>
+                    <a:alpha val="40000"/>
+                  </a:schemeClr>
+                </a:glow>
+              </a:effectLst>
+              <a:latin typeface="Press Start 2P" panose="00000500000000000000" pitchFamily="2" charset="0"/>
+            </a:endParaRPr>
+          </a:p>
+          <a:p>
+            <a:pPr marL="171450" indent="-171450">
+              <a:lnSpc>
+                <a:spcPts val="1400"/>
+              </a:lnSpc>
+              <a:buClr>
+                <a:srgbClr val="BD6A62"/>
+              </a:buClr>
+              <a:buSzPts val="1100"/>
+              <a:buFont typeface="Press Start 2P" panose="00000500000000000000" pitchFamily="2" charset="0"/>
+              <a:buChar char="★"/>
+            </a:pPr>
+            <a:r>
+              <a:rPr lang="en-US" sz="1000" dirty="0">
+                <a:solidFill>
+                  <a:srgbClr val="BD6A62"/>
+                </a:solidFill>
+                <a:effectLst>
+                  <a:glow rad="228600">
+                    <a:schemeClr val="accent4">
+                      <a:satMod val="175000"/>
+                      <a:alpha val="40000"/>
+                    </a:schemeClr>
+                  </a:glow>
+                </a:effectLst>
+                <a:latin typeface="Press Start 2P" panose="00000500000000000000" pitchFamily="2" charset="0"/>
+              </a:rPr>
+              <a:t>Ready to scale: </a:t>
+            </a:r>
+            <a:r>
+              <a:rPr lang="en-US" sz="1000" dirty="0">
+                <a:solidFill>
+                  <a:schemeClr val="bg1">
+                    <a:lumMod val="75000"/>
+                  </a:schemeClr>
+                </a:solidFill>
+                <a:effectLst>
+                  <a:glow rad="228600">
+                    <a:schemeClr val="accent4">
+                      <a:satMod val="175000"/>
+                      <a:alpha val="40000"/>
+                    </a:schemeClr>
+                  </a:glow>
+                </a:effectLst>
+                <a:latin typeface="Press Start 2P" panose="00000500000000000000" pitchFamily="2" charset="0"/>
+              </a:rPr>
+              <a:t>with the base systems stable, next step is expanding into full adventure content.</a:t>
             </a:r>
           </a:p>
         </p:txBody>
@@ -18070,7 +18562,7 @@
 </p:sld>
 </file>
 
-<file path=ppt/slides/slide14.xml><?xml version="1.0" encoding="utf-8"?>
+<file path=ppt/slides/slide15.xml><?xml version="1.0" encoding="utf-8"?>
 <p:sld xmlns:a="http://schemas.openxmlformats.org/drawingml/2006/main" xmlns:r="http://schemas.openxmlformats.org/officeDocument/2006/relationships" xmlns:p="http://schemas.openxmlformats.org/presentationml/2006/main">
   <p:cSld>
     <p:spTree>
@@ -18143,8 +18635,8 @@
         </p:nvSpPr>
         <p:spPr>
           <a:xfrm>
-            <a:off x="1396373" y="1068634"/>
-            <a:ext cx="6351254" cy="1112838"/>
+            <a:off x="816816" y="1808752"/>
+            <a:ext cx="7722645" cy="1112838"/>
           </a:xfrm>
           <a:prstGeom prst="rect">
             <a:avLst/>
@@ -18164,18 +18656,16 @@
                 <a:spcPts val="1400"/>
               </a:lnSpc>
               <a:buClr>
-                <a:srgbClr val="AB5130"/>
+                <a:srgbClr val="BD6A62"/>
               </a:buClr>
               <a:buSzPts val="1100"/>
               <a:buFont typeface="Press Start 2P" panose="00000500000000000000" pitchFamily="2" charset="0"/>
-              <a:buChar char="♦"/>
+              <a:buChar char="★"/>
             </a:pPr>
             <a:r>
               <a:rPr lang="en-US" sz="1000" dirty="0">
                 <a:solidFill>
-                  <a:schemeClr val="bg1">
-                    <a:lumMod val="75000"/>
-                  </a:schemeClr>
+                  <a:srgbClr val="BD6A62"/>
                 </a:solidFill>
                 <a:effectLst>
                   <a:glow rad="228600">
@@ -18187,7 +18677,26 @@
                 </a:effectLst>
                 <a:latin typeface="Press Start 2P" panose="00000500000000000000" pitchFamily="2" charset="0"/>
               </a:rPr>
-              <a:t>Funding to produce the entire adventure: gameplay content, narrative, and the extensive set of assets needed for a deep procedural experience.</a:t>
+              <a:t>Procedural Content: </a:t>
+            </a:r>
+            <a:r>
+              <a:rPr lang="en-US" sz="1000" dirty="0">
+                <a:solidFill>
+                  <a:schemeClr val="bg1">
+                    <a:lumMod val="75000"/>
+                  </a:schemeClr>
+                </a:solidFill>
+                <a:effectLst>
+                  <a:glow rad="228600">
+                    <a:schemeClr val="accent4">
+                      <a:satMod val="175000"/>
+                      <a:alpha val="40000"/>
+                    </a:schemeClr>
+                  </a:glow>
+                </a:effectLst>
+                <a:latin typeface="Press Start 2P" panose="00000500000000000000" pitchFamily="2" charset="0"/>
+              </a:rPr>
+              <a:t>dozens of environment objects, unique bosses, hundreds of items, narrative events and secrets.</a:t>
             </a:r>
           </a:p>
           <a:p>
@@ -18196,11 +18705,11 @@
                 <a:spcPts val="1400"/>
               </a:lnSpc>
               <a:buClr>
-                <a:srgbClr val="AB5130"/>
+                <a:srgbClr val="BD6A62"/>
               </a:buClr>
               <a:buSzPts val="1100"/>
               <a:buFont typeface="Press Start 2P" panose="00000500000000000000" pitchFamily="2" charset="0"/>
-              <a:buChar char="♦"/>
+              <a:buChar char="★"/>
             </a:pPr>
             <a:endParaRPr lang="en-US" sz="1000" dirty="0">
               <a:solidFill>
@@ -18225,18 +18734,16 @@
                 <a:spcPts val="1400"/>
               </a:lnSpc>
               <a:buClr>
-                <a:srgbClr val="AB5130"/>
+                <a:srgbClr val="BD6A62"/>
               </a:buClr>
               <a:buSzPts val="1100"/>
               <a:buFont typeface="Press Start 2P" panose="00000500000000000000" pitchFamily="2" charset="0"/>
-              <a:buChar char="♦"/>
+              <a:buChar char="★"/>
             </a:pPr>
             <a:r>
               <a:rPr lang="en-US" sz="1000" dirty="0">
                 <a:solidFill>
-                  <a:schemeClr val="bg1">
-                    <a:lumMod val="75000"/>
-                  </a:schemeClr>
+                  <a:srgbClr val="BD6A62"/>
                 </a:solidFill>
                 <a:effectLst>
                   <a:glow rad="228600">
@@ -18248,7 +18755,26 @@
                 </a:effectLst>
                 <a:latin typeface="Press Start 2P" panose="00000500000000000000" pitchFamily="2" charset="0"/>
               </a:rPr>
-              <a:t>Marketing and trailers.</a:t>
+              <a:t>Art &amp; Animation: </a:t>
+            </a:r>
+            <a:r>
+              <a:rPr lang="en-US" sz="1000" dirty="0">
+                <a:solidFill>
+                  <a:schemeClr val="bg1">
+                    <a:lumMod val="75000"/>
+                  </a:schemeClr>
+                </a:solidFill>
+                <a:effectLst>
+                  <a:glow rad="228600">
+                    <a:schemeClr val="accent4">
+                      <a:satMod val="175000"/>
+                      <a:alpha val="40000"/>
+                    </a:schemeClr>
+                  </a:glow>
+                </a:effectLst>
+                <a:latin typeface="Press Start 2P" panose="00000500000000000000" pitchFamily="2" charset="0"/>
+              </a:rPr>
+              <a:t>full set of characters, monsters, and environment assets matching our established art style.</a:t>
             </a:r>
           </a:p>
           <a:p>
@@ -18257,11 +18783,11 @@
                 <a:spcPts val="1400"/>
               </a:lnSpc>
               <a:buClr>
-                <a:srgbClr val="AB5130"/>
+                <a:srgbClr val="BD6A62"/>
               </a:buClr>
               <a:buSzPts val="1100"/>
               <a:buFont typeface="Press Start 2P" panose="00000500000000000000" pitchFamily="2" charset="0"/>
-              <a:buChar char="♦"/>
+              <a:buChar char="★"/>
             </a:pPr>
             <a:endParaRPr lang="en-US" sz="1000" dirty="0">
               <a:solidFill>
@@ -18286,18 +18812,16 @@
                 <a:spcPts val="1400"/>
               </a:lnSpc>
               <a:buClr>
-                <a:srgbClr val="AB5130"/>
+                <a:srgbClr val="BD6A62"/>
               </a:buClr>
               <a:buSzPts val="1100"/>
               <a:buFont typeface="Press Start 2P" panose="00000500000000000000" pitchFamily="2" charset="0"/>
-              <a:buChar char="♦"/>
+              <a:buChar char="★"/>
             </a:pPr>
             <a:r>
               <a:rPr lang="en-US" sz="1000" dirty="0">
                 <a:solidFill>
-                  <a:schemeClr val="bg1">
-                    <a:lumMod val="75000"/>
-                  </a:schemeClr>
+                  <a:srgbClr val="BD6A62"/>
                 </a:solidFill>
                 <a:effectLst>
                   <a:glow rad="228600">
@@ -18309,7 +18833,26 @@
                 </a:effectLst>
                 <a:latin typeface="Press Start 2P" panose="00000500000000000000" pitchFamily="2" charset="0"/>
               </a:rPr>
-              <a:t>Professional localization.</a:t>
+              <a:t>Audio: </a:t>
+            </a:r>
+            <a:r>
+              <a:rPr lang="en-US" sz="1000" dirty="0">
+                <a:solidFill>
+                  <a:schemeClr val="bg1">
+                    <a:lumMod val="75000"/>
+                  </a:schemeClr>
+                </a:solidFill>
+                <a:effectLst>
+                  <a:glow rad="228600">
+                    <a:schemeClr val="accent4">
+                      <a:satMod val="175000"/>
+                      <a:alpha val="40000"/>
+                    </a:schemeClr>
+                  </a:glow>
+                </a:effectLst>
+                <a:latin typeface="Press Start 2P" panose="00000500000000000000" pitchFamily="2" charset="0"/>
+              </a:rPr>
+              <a:t>complete soundtrack and SFX production.</a:t>
             </a:r>
           </a:p>
           <a:p>
@@ -18318,11 +18861,11 @@
                 <a:spcPts val="1400"/>
               </a:lnSpc>
               <a:buClr>
-                <a:srgbClr val="AB5130"/>
+                <a:srgbClr val="BD6A62"/>
               </a:buClr>
               <a:buSzPts val="1100"/>
               <a:buFont typeface="Press Start 2P" panose="00000500000000000000" pitchFamily="2" charset="0"/>
-              <a:buChar char="♦"/>
+              <a:buChar char="★"/>
             </a:pPr>
             <a:endParaRPr lang="en-US" sz="1000" dirty="0">
               <a:solidFill>
@@ -18347,18 +18890,16 @@
                 <a:spcPts val="1400"/>
               </a:lnSpc>
               <a:buClr>
-                <a:srgbClr val="AB5130"/>
+                <a:srgbClr val="BD6A62"/>
               </a:buClr>
               <a:buSzPts val="1100"/>
               <a:buFont typeface="Press Start 2P" panose="00000500000000000000" pitchFamily="2" charset="0"/>
-              <a:buChar char="♦"/>
+              <a:buChar char="★"/>
             </a:pPr>
             <a:r>
               <a:rPr lang="en-US" sz="1000" dirty="0">
                 <a:solidFill>
-                  <a:schemeClr val="bg1">
-                    <a:lumMod val="75000"/>
-                  </a:schemeClr>
+                  <a:srgbClr val="BD6A62"/>
                 </a:solidFill>
                 <a:effectLst>
                   <a:glow rad="228600">
@@ -18370,7 +18911,104 @@
                 </a:effectLst>
                 <a:latin typeface="Press Start 2P" panose="00000500000000000000" pitchFamily="2" charset="0"/>
               </a:rPr>
-              <a:t>Console porting if needed. Our code is AOT-compatible which makes porting easy.</a:t>
+              <a:t>Ports &amp; Localization: </a:t>
+            </a:r>
+            <a:r>
+              <a:rPr lang="en-US" sz="1000" dirty="0">
+                <a:solidFill>
+                  <a:schemeClr val="bg1">
+                    <a:lumMod val="75000"/>
+                  </a:schemeClr>
+                </a:solidFill>
+                <a:effectLst>
+                  <a:glow rad="228600">
+                    <a:schemeClr val="accent4">
+                      <a:satMod val="175000"/>
+                      <a:alpha val="40000"/>
+                    </a:schemeClr>
+                  </a:glow>
+                </a:effectLst>
+                <a:latin typeface="Press Start 2P" panose="00000500000000000000" pitchFamily="2" charset="0"/>
+              </a:rPr>
+              <a:t>console versions and professional localization to maximize reach.</a:t>
+            </a:r>
+          </a:p>
+          <a:p>
+            <a:pPr marL="171450" indent="-171450">
+              <a:lnSpc>
+                <a:spcPts val="1400"/>
+              </a:lnSpc>
+              <a:buClr>
+                <a:srgbClr val="BD6A62"/>
+              </a:buClr>
+              <a:buSzPts val="1100"/>
+              <a:buFont typeface="Press Start 2P" panose="00000500000000000000" pitchFamily="2" charset="0"/>
+              <a:buChar char="★"/>
+            </a:pPr>
+            <a:endParaRPr lang="en-US" sz="1000" dirty="0">
+              <a:solidFill>
+                <a:schemeClr val="bg1">
+                  <a:lumMod val="75000"/>
+                </a:schemeClr>
+              </a:solidFill>
+              <a:effectLst>
+                <a:glow rad="228600">
+                  <a:schemeClr val="accent4">
+                    <a:satMod val="175000"/>
+                    <a:alpha val="40000"/>
+                  </a:schemeClr>
+                </a:glow>
+              </a:effectLst>
+              <a:latin typeface="Press Start 2P" panose="00000500000000000000" pitchFamily="2" charset="0"/>
+            </a:endParaRPr>
+          </a:p>
+          <a:p>
+            <a:pPr marL="171450" indent="-171450">
+              <a:lnSpc>
+                <a:spcPts val="1400"/>
+              </a:lnSpc>
+              <a:buClr>
+                <a:srgbClr val="BD6A62"/>
+              </a:buClr>
+              <a:buSzPts val="1100"/>
+              <a:buFont typeface="Press Start 2P" panose="00000500000000000000" pitchFamily="2" charset="0"/>
+              <a:buChar char="★"/>
+            </a:pPr>
+            <a:r>
+              <a:rPr lang="en-US" sz="1000" dirty="0">
+                <a:solidFill>
+                  <a:srgbClr val="BD6A62"/>
+                </a:solidFill>
+                <a:effectLst>
+                  <a:glow rad="228600">
+                    <a:schemeClr val="accent4">
+                      <a:satMod val="175000"/>
+                      <a:alpha val="40000"/>
+                    </a:schemeClr>
+                  </a:glow>
+                </a:effectLst>
+                <a:latin typeface="Press Start 2P" panose="00000500000000000000" pitchFamily="2" charset="0"/>
+              </a:rPr>
+              <a:t>Marketing Assets: </a:t>
+            </a:r>
+            <a:r>
+              <a:rPr lang="en-US" sz="1000" dirty="0">
+                <a:solidFill>
+                  <a:schemeClr val="bg1">
+                    <a:lumMod val="75000"/>
+                  </a:schemeClr>
+                </a:solidFill>
+                <a:effectLst>
+                  <a:glow rad="228600">
+                    <a:schemeClr val="accent4">
+                      <a:satMod val="175000"/>
+                      <a:alpha val="40000"/>
+                    </a:schemeClr>
+                  </a:glow>
+                </a:effectLst>
+                <a:latin typeface="Press Start 2P" panose="00000500000000000000" pitchFamily="2" charset="0"/>
+              </a:rPr>
+              <a:t>trailers, key art, promotional material.</a:t>
             </a:r>
           </a:p>
         </p:txBody>
@@ -18717,98 +19355,29 @@
           </a:effectLst>
         </p:spPr>
       </p:pic>
-    </p:spTree>
-    <p:extLst>
-      <p:ext uri="{BB962C8B-B14F-4D97-AF65-F5344CB8AC3E}">
-        <p14:creationId xmlns:p14="http://schemas.microsoft.com/office/powerpoint/2010/main" val="4289735502"/>
-      </p:ext>
-    </p:extLst>
-  </p:cSld>
-  <p:clrMapOvr>
-    <a:masterClrMapping/>
-  </p:clrMapOvr>
-</p:sld>
-</file>
-
-<file path=ppt/slides/slide15.xml><?xml version="1.0" encoding="utf-8"?>
-<p:sld xmlns:a="http://schemas.openxmlformats.org/drawingml/2006/main" xmlns:r="http://schemas.openxmlformats.org/officeDocument/2006/relationships" xmlns:p="http://schemas.openxmlformats.org/presentationml/2006/main">
-  <p:cSld>
-    <p:spTree>
-      <p:nvGrpSpPr>
-        <p:cNvPr id="1" name="Shape 998">
-          <a:extLst>
-            <a:ext uri="{FF2B5EF4-FFF2-40B4-BE49-F238E27FC236}">
-              <a16:creationId xmlns:a16="http://schemas.microsoft.com/office/drawing/2014/main" id="{D475C2DD-0B55-73BB-627B-13753326C4E7}"/>
-            </a:ext>
-          </a:extLst>
-        </p:cNvPr>
-        <p:cNvGrpSpPr/>
-        <p:nvPr/>
-      </p:nvGrpSpPr>
-      <p:grpSpPr>
-        <a:xfrm>
-          <a:off x="0" y="0"/>
-          <a:ext cx="0" cy="0"/>
-          <a:chOff x="0" y="0"/>
-          <a:chExt cx="0" cy="0"/>
-        </a:xfrm>
-      </p:grpSpPr>
-      <p:pic>
-        <p:nvPicPr>
-          <p:cNvPr id="2" name="Picture 1" descr="A pixel art of a building">
+      <p:sp>
+        <p:nvSpPr>
+          <p:cNvPr id="5" name="Google Shape;1000;p37">
             <a:extLst>
               <a:ext uri="{FF2B5EF4-FFF2-40B4-BE49-F238E27FC236}">
-                <a16:creationId xmlns:a16="http://schemas.microsoft.com/office/drawing/2014/main" id="{C77928D7-BDBB-2EE8-380A-3F50D150BD34}"/>
-              </a:ext>
-            </a:extLst>
-          </p:cNvPr>
-          <p:cNvPicPr>
-            <a:picLocks noChangeAspect="1"/>
-          </p:cNvPicPr>
-          <p:nvPr/>
-        </p:nvPicPr>
-        <p:blipFill>
-          <a:blip r:embed="rId3">
-            <a:alphaModFix amt="70000"/>
-          </a:blip>
-          <a:stretch>
-            <a:fillRect/>
-          </a:stretch>
-        </p:blipFill>
-        <p:spPr>
-          <a:xfrm>
-            <a:off x="0" y="0"/>
-            <a:ext cx="9144000" cy="5143500"/>
-          </a:xfrm>
-          <a:prstGeom prst="rect">
-            <a:avLst/>
-          </a:prstGeom>
-        </p:spPr>
-      </p:pic>
-      <p:sp>
-        <p:nvSpPr>
-          <p:cNvPr id="1000" name="Google Shape;1000;p37">
-            <a:extLst>
-              <a:ext uri="{FF2B5EF4-FFF2-40B4-BE49-F238E27FC236}">
-                <a16:creationId xmlns:a16="http://schemas.microsoft.com/office/drawing/2014/main" id="{1B6F1C17-A735-E874-93DD-AEAEEA9D8F4F}"/>
+                <a16:creationId xmlns:a16="http://schemas.microsoft.com/office/drawing/2014/main" id="{8B4A7F50-5EC1-FD4D-5356-932AC1A2B096}"/>
               </a:ext>
             </a:extLst>
           </p:cNvPr>
           <p:cNvSpPr txBox="1">
-            <a:spLocks noGrp="1"/>
+            <a:spLocks/>
           </p:cNvSpPr>
-          <p:nvPr>
-            <p:ph type="subTitle" idx="4294967295"/>
-          </p:nvPr>
+          <p:nvPr/>
         </p:nvSpPr>
         <p:spPr>
           <a:xfrm>
-            <a:off x="2343175" y="1148669"/>
-            <a:ext cx="4457650" cy="777875"/>
+            <a:off x="816816" y="919526"/>
+            <a:ext cx="7510368" cy="664909"/>
           </a:xfrm>
           <a:prstGeom prst="rect">
             <a:avLst/>
           </a:prstGeom>
+          <a:noFill/>
           <a:ln>
             <a:noFill/>
           </a:ln>
@@ -18817,9 +19386,255 @@
           <a:bodyPr spcFirstLastPara="1" wrap="square" lIns="91425" tIns="91425" rIns="91425" bIns="91425" anchor="t" anchorCtr="0">
             <a:noAutofit/>
           </a:bodyPr>
-          <a:lstStyle/>
-          <a:p>
-            <a:pPr marL="171450" indent="-171450">
+          <a:lstStyle>
+            <a:defPPr marR="0" lvl="0" algn="l" rtl="0">
+              <a:lnSpc>
+                <a:spcPct val="100000"/>
+              </a:lnSpc>
+              <a:spcBef>
+                <a:spcPts val="0"/>
+              </a:spcBef>
+              <a:spcAft>
+                <a:spcPts val="0"/>
+              </a:spcAft>
+            </a:defPPr>
+            <a:lvl1pPr marL="457200" marR="0" lvl="0" indent="-330200" algn="l" rtl="0">
+              <a:lnSpc>
+                <a:spcPct val="115000"/>
+              </a:lnSpc>
+              <a:spcBef>
+                <a:spcPts val="0"/>
+              </a:spcBef>
+              <a:spcAft>
+                <a:spcPts val="0"/>
+              </a:spcAft>
+              <a:buClr>
+                <a:schemeClr val="lt1"/>
+              </a:buClr>
+              <a:buSzPts val="1600"/>
+              <a:buFont typeface="Maven Pro"/>
+              <a:buChar char="●"/>
+              <a:defRPr sz="1600" b="0" i="0" u="none" strike="noStrike" cap="none">
+                <a:solidFill>
+                  <a:schemeClr val="lt1"/>
+                </a:solidFill>
+                <a:latin typeface="Maven Pro"/>
+                <a:ea typeface="Maven Pro"/>
+                <a:cs typeface="Maven Pro"/>
+                <a:sym typeface="Maven Pro"/>
+              </a:defRPr>
+            </a:lvl1pPr>
+            <a:lvl2pPr marL="914400" marR="0" lvl="1" indent="-330200" algn="l" rtl="0">
+              <a:lnSpc>
+                <a:spcPct val="115000"/>
+              </a:lnSpc>
+              <a:spcBef>
+                <a:spcPts val="1600"/>
+              </a:spcBef>
+              <a:spcAft>
+                <a:spcPts val="0"/>
+              </a:spcAft>
+              <a:buClr>
+                <a:schemeClr val="lt1"/>
+              </a:buClr>
+              <a:buSzPts val="1600"/>
+              <a:buFont typeface="Maven Pro"/>
+              <a:buChar char="○"/>
+              <a:defRPr sz="1600" b="0" i="0" u="none" strike="noStrike" cap="none">
+                <a:solidFill>
+                  <a:schemeClr val="lt1"/>
+                </a:solidFill>
+                <a:latin typeface="Maven Pro"/>
+                <a:ea typeface="Maven Pro"/>
+                <a:cs typeface="Maven Pro"/>
+                <a:sym typeface="Maven Pro"/>
+              </a:defRPr>
+            </a:lvl2pPr>
+            <a:lvl3pPr marL="1371600" marR="0" lvl="2" indent="-330200" algn="l" rtl="0">
+              <a:lnSpc>
+                <a:spcPct val="115000"/>
+              </a:lnSpc>
+              <a:spcBef>
+                <a:spcPts val="1600"/>
+              </a:spcBef>
+              <a:spcAft>
+                <a:spcPts val="0"/>
+              </a:spcAft>
+              <a:buClr>
+                <a:schemeClr val="lt1"/>
+              </a:buClr>
+              <a:buSzPts val="1600"/>
+              <a:buFont typeface="Maven Pro"/>
+              <a:buChar char="■"/>
+              <a:defRPr sz="1600" b="0" i="0" u="none" strike="noStrike" cap="none">
+                <a:solidFill>
+                  <a:schemeClr val="lt1"/>
+                </a:solidFill>
+                <a:latin typeface="Maven Pro"/>
+                <a:ea typeface="Maven Pro"/>
+                <a:cs typeface="Maven Pro"/>
+                <a:sym typeface="Maven Pro"/>
+              </a:defRPr>
+            </a:lvl3pPr>
+            <a:lvl4pPr marL="1828800" marR="0" lvl="3" indent="-330200" algn="l" rtl="0">
+              <a:lnSpc>
+                <a:spcPct val="115000"/>
+              </a:lnSpc>
+              <a:spcBef>
+                <a:spcPts val="1600"/>
+              </a:spcBef>
+              <a:spcAft>
+                <a:spcPts val="0"/>
+              </a:spcAft>
+              <a:buClr>
+                <a:schemeClr val="lt1"/>
+              </a:buClr>
+              <a:buSzPts val="1600"/>
+              <a:buFont typeface="Maven Pro"/>
+              <a:buChar char="●"/>
+              <a:defRPr sz="1600" b="0" i="0" u="none" strike="noStrike" cap="none">
+                <a:solidFill>
+                  <a:schemeClr val="lt1"/>
+                </a:solidFill>
+                <a:latin typeface="Maven Pro"/>
+                <a:ea typeface="Maven Pro"/>
+                <a:cs typeface="Maven Pro"/>
+                <a:sym typeface="Maven Pro"/>
+              </a:defRPr>
+            </a:lvl4pPr>
+            <a:lvl5pPr marL="2286000" marR="0" lvl="4" indent="-330200" algn="l" rtl="0">
+              <a:lnSpc>
+                <a:spcPct val="115000"/>
+              </a:lnSpc>
+              <a:spcBef>
+                <a:spcPts val="1600"/>
+              </a:spcBef>
+              <a:spcAft>
+                <a:spcPts val="0"/>
+              </a:spcAft>
+              <a:buClr>
+                <a:schemeClr val="lt1"/>
+              </a:buClr>
+              <a:buSzPts val="1600"/>
+              <a:buFont typeface="Maven Pro"/>
+              <a:buChar char="○"/>
+              <a:defRPr sz="1600" b="0" i="0" u="none" strike="noStrike" cap="none">
+                <a:solidFill>
+                  <a:schemeClr val="lt1"/>
+                </a:solidFill>
+                <a:latin typeface="Maven Pro"/>
+                <a:ea typeface="Maven Pro"/>
+                <a:cs typeface="Maven Pro"/>
+                <a:sym typeface="Maven Pro"/>
+              </a:defRPr>
+            </a:lvl5pPr>
+            <a:lvl6pPr marL="2743200" marR="0" lvl="5" indent="-330200" algn="l" rtl="0">
+              <a:lnSpc>
+                <a:spcPct val="115000"/>
+              </a:lnSpc>
+              <a:spcBef>
+                <a:spcPts val="1600"/>
+              </a:spcBef>
+              <a:spcAft>
+                <a:spcPts val="0"/>
+              </a:spcAft>
+              <a:buClr>
+                <a:schemeClr val="lt1"/>
+              </a:buClr>
+              <a:buSzPts val="1600"/>
+              <a:buFont typeface="Maven Pro"/>
+              <a:buChar char="■"/>
+              <a:defRPr sz="1600" b="0" i="0" u="none" strike="noStrike" cap="none">
+                <a:solidFill>
+                  <a:schemeClr val="lt1"/>
+                </a:solidFill>
+                <a:latin typeface="Maven Pro"/>
+                <a:ea typeface="Maven Pro"/>
+                <a:cs typeface="Maven Pro"/>
+                <a:sym typeface="Maven Pro"/>
+              </a:defRPr>
+            </a:lvl6pPr>
+            <a:lvl7pPr marL="3200400" marR="0" lvl="6" indent="-330200" algn="l" rtl="0">
+              <a:lnSpc>
+                <a:spcPct val="115000"/>
+              </a:lnSpc>
+              <a:spcBef>
+                <a:spcPts val="1600"/>
+              </a:spcBef>
+              <a:spcAft>
+                <a:spcPts val="0"/>
+              </a:spcAft>
+              <a:buClr>
+                <a:schemeClr val="lt1"/>
+              </a:buClr>
+              <a:buSzPts val="1600"/>
+              <a:buFont typeface="Maven Pro"/>
+              <a:buChar char="●"/>
+              <a:defRPr sz="1600" b="0" i="0" u="none" strike="noStrike" cap="none">
+                <a:solidFill>
+                  <a:schemeClr val="lt1"/>
+                </a:solidFill>
+                <a:latin typeface="Maven Pro"/>
+                <a:ea typeface="Maven Pro"/>
+                <a:cs typeface="Maven Pro"/>
+                <a:sym typeface="Maven Pro"/>
+              </a:defRPr>
+            </a:lvl7pPr>
+            <a:lvl8pPr marL="3657600" marR="0" lvl="7" indent="-330200" algn="l" rtl="0">
+              <a:lnSpc>
+                <a:spcPct val="115000"/>
+              </a:lnSpc>
+              <a:spcBef>
+                <a:spcPts val="1600"/>
+              </a:spcBef>
+              <a:spcAft>
+                <a:spcPts val="0"/>
+              </a:spcAft>
+              <a:buClr>
+                <a:schemeClr val="lt1"/>
+              </a:buClr>
+              <a:buSzPts val="1600"/>
+              <a:buFont typeface="Maven Pro"/>
+              <a:buChar char="○"/>
+              <a:defRPr sz="1600" b="0" i="0" u="none" strike="noStrike" cap="none">
+                <a:solidFill>
+                  <a:schemeClr val="lt1"/>
+                </a:solidFill>
+                <a:latin typeface="Maven Pro"/>
+                <a:ea typeface="Maven Pro"/>
+                <a:cs typeface="Maven Pro"/>
+                <a:sym typeface="Maven Pro"/>
+              </a:defRPr>
+            </a:lvl8pPr>
+            <a:lvl9pPr marL="4114800" marR="0" lvl="8" indent="-330200" algn="l" rtl="0">
+              <a:lnSpc>
+                <a:spcPct val="115000"/>
+              </a:lnSpc>
+              <a:spcBef>
+                <a:spcPts val="1600"/>
+              </a:spcBef>
+              <a:spcAft>
+                <a:spcPts val="1600"/>
+              </a:spcAft>
+              <a:buClr>
+                <a:schemeClr val="lt1"/>
+              </a:buClr>
+              <a:buSzPts val="1600"/>
+              <a:buFont typeface="Maven Pro"/>
+              <a:buChar char="■"/>
+              <a:defRPr sz="1600" b="0" i="0" u="none" strike="noStrike" cap="none">
+                <a:solidFill>
+                  <a:schemeClr val="lt1"/>
+                </a:solidFill>
+                <a:latin typeface="Maven Pro"/>
+                <a:ea typeface="Maven Pro"/>
+                <a:cs typeface="Maven Pro"/>
+                <a:sym typeface="Maven Pro"/>
+              </a:defRPr>
+            </a:lvl9pPr>
+          </a:lstStyle>
+          <a:p>
+            <a:pPr marL="0" indent="0">
               <a:lnSpc>
                 <a:spcPts val="1400"/>
               </a:lnSpc>
@@ -18827,8 +19642,7 @@
                 <a:srgbClr val="AB5130"/>
               </a:buClr>
               <a:buSzPts val="1100"/>
-              <a:buFont typeface="Press Start 2P" panose="00000500000000000000" pitchFamily="2" charset="0"/>
-              <a:buChar char="♦"/>
+              <a:buNone/>
             </a:pPr>
             <a:r>
               <a:rPr lang="en-US" sz="1000" dirty="0">
@@ -18847,330 +19661,12 @@
                 </a:effectLst>
                 <a:latin typeface="Press Start 2P" panose="00000500000000000000" pitchFamily="2" charset="0"/>
               </a:rPr>
-              <a:t>Expandable world with DLCs: new creatures, items, and procedural environments.</a:t>
+              <a:t>We are seeking funding to </a:t>
             </a:r>
-          </a:p>
-        </p:txBody>
-      </p:sp>
-      <p:pic>
-        <p:nvPicPr>
-          <p:cNvPr id="7" name="Picture 6" descr="A pixelated red and black object&#10;&#10;AI-generated content may be incorrect.">
-            <a:extLst>
-              <a:ext uri="{FF2B5EF4-FFF2-40B4-BE49-F238E27FC236}">
-                <a16:creationId xmlns:a16="http://schemas.microsoft.com/office/drawing/2014/main" id="{291CFB07-6019-4BA9-C919-6AAEC0AD6426}"/>
-              </a:ext>
-            </a:extLst>
-          </p:cNvPr>
-          <p:cNvPicPr>
-            <a:picLocks noChangeAspect="1"/>
-          </p:cNvPicPr>
-          <p:nvPr/>
-        </p:nvPicPr>
-        <p:blipFill>
-          <a:blip r:embed="rId4"/>
-          <a:stretch>
-            <a:fillRect/>
-          </a:stretch>
-        </p:blipFill>
-        <p:spPr>
-          <a:xfrm>
-            <a:off x="3428918" y="3605893"/>
-            <a:ext cx="3021047" cy="1174852"/>
-          </a:xfrm>
-          <a:prstGeom prst="rect">
-            <a:avLst/>
-          </a:prstGeom>
-        </p:spPr>
-      </p:pic>
-      <p:sp>
-        <p:nvSpPr>
-          <p:cNvPr id="3" name="Google Shape;999;p37">
-            <a:extLst>
-              <a:ext uri="{FF2B5EF4-FFF2-40B4-BE49-F238E27FC236}">
-                <a16:creationId xmlns:a16="http://schemas.microsoft.com/office/drawing/2014/main" id="{CC355999-B787-A7A1-5AC3-FF867872200D}"/>
-              </a:ext>
-            </a:extLst>
-          </p:cNvPr>
-          <p:cNvSpPr txBox="1">
-            <a:spLocks/>
-          </p:cNvSpPr>
-          <p:nvPr/>
-        </p:nvSpPr>
-        <p:spPr>
-          <a:xfrm>
-            <a:off x="2043566" y="362755"/>
-            <a:ext cx="5067392" cy="526471"/>
-          </a:xfrm>
-          <a:prstGeom prst="rect">
-            <a:avLst/>
-          </a:prstGeom>
-          <a:noFill/>
-          <a:ln>
-            <a:noFill/>
-          </a:ln>
-        </p:spPr>
-        <p:txBody>
-          <a:bodyPr spcFirstLastPara="1" wrap="square" lIns="91425" tIns="91425" rIns="91425" bIns="91425" anchor="ctr" anchorCtr="0">
-            <a:noAutofit/>
-          </a:bodyPr>
-          <a:lstStyle>
-            <a:defPPr marR="0" lvl="0" algn="l" rtl="0">
-              <a:lnSpc>
-                <a:spcPct val="100000"/>
-              </a:lnSpc>
-              <a:spcBef>
-                <a:spcPts val="0"/>
-              </a:spcBef>
-              <a:spcAft>
-                <a:spcPts val="0"/>
-              </a:spcAft>
-            </a:defPPr>
-            <a:lvl1pPr marR="0" lvl="0" algn="l" rtl="0">
-              <a:lnSpc>
-                <a:spcPct val="100000"/>
-              </a:lnSpc>
-              <a:spcBef>
-                <a:spcPts val="0"/>
-              </a:spcBef>
-              <a:spcAft>
-                <a:spcPts val="0"/>
-              </a:spcAft>
-              <a:buClr>
-                <a:srgbClr val="FFFF00"/>
-              </a:buClr>
-              <a:buSzPts val="3000"/>
-              <a:buFont typeface="Press Start 2P"/>
-              <a:buNone/>
-              <a:defRPr sz="3000" b="0" i="0" u="none" strike="noStrike" cap="none">
-                <a:solidFill>
-                  <a:srgbClr val="FFFF00"/>
-                </a:solidFill>
-                <a:latin typeface="Press Start 2P"/>
-                <a:ea typeface="Press Start 2P"/>
-                <a:cs typeface="Press Start 2P"/>
-                <a:sym typeface="Press Start 2P"/>
-              </a:defRPr>
-            </a:lvl1pPr>
-            <a:lvl2pPr marR="0" lvl="1" algn="l" rtl="0">
-              <a:lnSpc>
-                <a:spcPct val="100000"/>
-              </a:lnSpc>
-              <a:spcBef>
-                <a:spcPts val="0"/>
-              </a:spcBef>
-              <a:spcAft>
-                <a:spcPts val="0"/>
-              </a:spcAft>
-              <a:buClr>
-                <a:srgbClr val="FFFF00"/>
-              </a:buClr>
-              <a:buSzPts val="2800"/>
-              <a:buFont typeface="Press Start 2P"/>
-              <a:buNone/>
-              <a:defRPr sz="2800" b="0" i="0" u="none" strike="noStrike" cap="none">
-                <a:solidFill>
-                  <a:srgbClr val="FFFF00"/>
-                </a:solidFill>
-                <a:latin typeface="Press Start 2P"/>
-                <a:ea typeface="Press Start 2P"/>
-                <a:cs typeface="Press Start 2P"/>
-                <a:sym typeface="Press Start 2P"/>
-              </a:defRPr>
-            </a:lvl2pPr>
-            <a:lvl3pPr marR="0" lvl="2" algn="l" rtl="0">
-              <a:lnSpc>
-                <a:spcPct val="100000"/>
-              </a:lnSpc>
-              <a:spcBef>
-                <a:spcPts val="0"/>
-              </a:spcBef>
-              <a:spcAft>
-                <a:spcPts val="0"/>
-              </a:spcAft>
-              <a:buClr>
-                <a:srgbClr val="FFFF00"/>
-              </a:buClr>
-              <a:buSzPts val="2800"/>
-              <a:buFont typeface="Press Start 2P"/>
-              <a:buNone/>
-              <a:defRPr sz="2800" b="0" i="0" u="none" strike="noStrike" cap="none">
-                <a:solidFill>
-                  <a:srgbClr val="FFFF00"/>
-                </a:solidFill>
-                <a:latin typeface="Press Start 2P"/>
-                <a:ea typeface="Press Start 2P"/>
-                <a:cs typeface="Press Start 2P"/>
-                <a:sym typeface="Press Start 2P"/>
-              </a:defRPr>
-            </a:lvl3pPr>
-            <a:lvl4pPr marR="0" lvl="3" algn="l" rtl="0">
-              <a:lnSpc>
-                <a:spcPct val="100000"/>
-              </a:lnSpc>
-              <a:spcBef>
-                <a:spcPts val="0"/>
-              </a:spcBef>
-              <a:spcAft>
-                <a:spcPts val="0"/>
-              </a:spcAft>
-              <a:buClr>
-                <a:srgbClr val="FFFF00"/>
-              </a:buClr>
-              <a:buSzPts val="2800"/>
-              <a:buFont typeface="Press Start 2P"/>
-              <a:buNone/>
-              <a:defRPr sz="2800" b="0" i="0" u="none" strike="noStrike" cap="none">
-                <a:solidFill>
-                  <a:srgbClr val="FFFF00"/>
-                </a:solidFill>
-                <a:latin typeface="Press Start 2P"/>
-                <a:ea typeface="Press Start 2P"/>
-                <a:cs typeface="Press Start 2P"/>
-                <a:sym typeface="Press Start 2P"/>
-              </a:defRPr>
-            </a:lvl4pPr>
-            <a:lvl5pPr marR="0" lvl="4" algn="l" rtl="0">
-              <a:lnSpc>
-                <a:spcPct val="100000"/>
-              </a:lnSpc>
-              <a:spcBef>
-                <a:spcPts val="0"/>
-              </a:spcBef>
-              <a:spcAft>
-                <a:spcPts val="0"/>
-              </a:spcAft>
-              <a:buClr>
-                <a:srgbClr val="FFFF00"/>
-              </a:buClr>
-              <a:buSzPts val="2800"/>
-              <a:buFont typeface="Press Start 2P"/>
-              <a:buNone/>
-              <a:defRPr sz="2800" b="0" i="0" u="none" strike="noStrike" cap="none">
-                <a:solidFill>
-                  <a:srgbClr val="FFFF00"/>
-                </a:solidFill>
-                <a:latin typeface="Press Start 2P"/>
-                <a:ea typeface="Press Start 2P"/>
-                <a:cs typeface="Press Start 2P"/>
-                <a:sym typeface="Press Start 2P"/>
-              </a:defRPr>
-            </a:lvl5pPr>
-            <a:lvl6pPr marR="0" lvl="5" algn="l" rtl="0">
-              <a:lnSpc>
-                <a:spcPct val="100000"/>
-              </a:lnSpc>
-              <a:spcBef>
-                <a:spcPts val="0"/>
-              </a:spcBef>
-              <a:spcAft>
-                <a:spcPts val="0"/>
-              </a:spcAft>
-              <a:buClr>
-                <a:srgbClr val="FFFF00"/>
-              </a:buClr>
-              <a:buSzPts val="2800"/>
-              <a:buFont typeface="Press Start 2P"/>
-              <a:buNone/>
-              <a:defRPr sz="2800" b="0" i="0" u="none" strike="noStrike" cap="none">
-                <a:solidFill>
-                  <a:srgbClr val="FFFF00"/>
-                </a:solidFill>
-                <a:latin typeface="Press Start 2P"/>
-                <a:ea typeface="Press Start 2P"/>
-                <a:cs typeface="Press Start 2P"/>
-                <a:sym typeface="Press Start 2P"/>
-              </a:defRPr>
-            </a:lvl6pPr>
-            <a:lvl7pPr marR="0" lvl="6" algn="l" rtl="0">
-              <a:lnSpc>
-                <a:spcPct val="100000"/>
-              </a:lnSpc>
-              <a:spcBef>
-                <a:spcPts val="0"/>
-              </a:spcBef>
-              <a:spcAft>
-                <a:spcPts val="0"/>
-              </a:spcAft>
-              <a:buClr>
-                <a:srgbClr val="FFFF00"/>
-              </a:buClr>
-              <a:buSzPts val="2800"/>
-              <a:buFont typeface="Press Start 2P"/>
-              <a:buNone/>
-              <a:defRPr sz="2800" b="0" i="0" u="none" strike="noStrike" cap="none">
-                <a:solidFill>
-                  <a:srgbClr val="FFFF00"/>
-                </a:solidFill>
-                <a:latin typeface="Press Start 2P"/>
-                <a:ea typeface="Press Start 2P"/>
-                <a:cs typeface="Press Start 2P"/>
-                <a:sym typeface="Press Start 2P"/>
-              </a:defRPr>
-            </a:lvl7pPr>
-            <a:lvl8pPr marR="0" lvl="7" algn="l" rtl="0">
-              <a:lnSpc>
-                <a:spcPct val="100000"/>
-              </a:lnSpc>
-              <a:spcBef>
-                <a:spcPts val="0"/>
-              </a:spcBef>
-              <a:spcAft>
-                <a:spcPts val="0"/>
-              </a:spcAft>
-              <a:buClr>
-                <a:srgbClr val="FFFF00"/>
-              </a:buClr>
-              <a:buSzPts val="2800"/>
-              <a:buFont typeface="Press Start 2P"/>
-              <a:buNone/>
-              <a:defRPr sz="2800" b="0" i="0" u="none" strike="noStrike" cap="none">
-                <a:solidFill>
-                  <a:srgbClr val="FFFF00"/>
-                </a:solidFill>
-                <a:latin typeface="Press Start 2P"/>
-                <a:ea typeface="Press Start 2P"/>
-                <a:cs typeface="Press Start 2P"/>
-                <a:sym typeface="Press Start 2P"/>
-              </a:defRPr>
-            </a:lvl8pPr>
-            <a:lvl9pPr marR="0" lvl="8" algn="l" rtl="0">
-              <a:lnSpc>
-                <a:spcPct val="100000"/>
-              </a:lnSpc>
-              <a:spcBef>
-                <a:spcPts val="0"/>
-              </a:spcBef>
-              <a:spcAft>
-                <a:spcPts val="0"/>
-              </a:spcAft>
-              <a:buClr>
-                <a:srgbClr val="FFFF00"/>
-              </a:buClr>
-              <a:buSzPts val="2800"/>
-              <a:buFont typeface="Press Start 2P"/>
-              <a:buNone/>
-              <a:defRPr sz="2800" b="0" i="0" u="none" strike="noStrike" cap="none">
-                <a:solidFill>
-                  <a:srgbClr val="FFFF00"/>
-                </a:solidFill>
-                <a:latin typeface="Press Start 2P"/>
-                <a:ea typeface="Press Start 2P"/>
-                <a:cs typeface="Press Start 2P"/>
-                <a:sym typeface="Press Start 2P"/>
-              </a:defRPr>
-            </a:lvl9pPr>
-          </a:lstStyle>
-          <a:p>
-            <a:pPr algn="ctr">
-              <a:buClr>
-                <a:schemeClr val="dk1"/>
-              </a:buClr>
-              <a:buSzPts val="1100"/>
-            </a:pPr>
             <a:r>
-              <a:rPr lang="en-US" sz="2400" dirty="0">
-                <a:solidFill>
-                  <a:srgbClr val="AB5130"/>
+              <a:rPr lang="en-US" sz="1000" dirty="0">
+                <a:solidFill>
+                  <a:srgbClr val="BD6A62"/>
                 </a:solidFill>
                 <a:effectLst>
                   <a:glow rad="228600">
@@ -19180,54 +19676,72 @@
                     </a:schemeClr>
                   </a:glow>
                 </a:effectLst>
+                <a:latin typeface="Press Start 2P" panose="00000500000000000000" pitchFamily="2" charset="0"/>
               </a:rPr>
-              <a:t>Future Growth</a:t>
+              <a:t>produce the complete adventure</a:t>
+            </a:r>
+            <a:r>
+              <a:rPr lang="en-US" sz="1000" dirty="0">
+                <a:solidFill>
+                  <a:schemeClr val="bg1">
+                    <a:lumMod val="75000"/>
+                  </a:schemeClr>
+                </a:solidFill>
+                <a:effectLst>
+                  <a:glow rad="228600">
+                    <a:schemeClr val="accent4">
+                      <a:satMod val="175000"/>
+                      <a:alpha val="40000"/>
+                    </a:schemeClr>
+                  </a:glow>
+                </a:effectLst>
+                <a:latin typeface="Press Start 2P" panose="00000500000000000000" pitchFamily="2" charset="0"/>
+              </a:rPr>
+              <a:t>, building on top of our already functional core engine and prototype. We need </a:t>
+            </a:r>
+            <a:r>
+              <a:rPr lang="en-US" sz="1000" dirty="0">
+                <a:solidFill>
+                  <a:srgbClr val="BD6A62"/>
+                </a:solidFill>
+                <a:effectLst>
+                  <a:glow rad="228600">
+                    <a:schemeClr val="accent4">
+                      <a:satMod val="175000"/>
+                      <a:alpha val="40000"/>
+                    </a:schemeClr>
+                  </a:glow>
+                </a:effectLst>
+                <a:latin typeface="Press Start 2P" panose="00000500000000000000" pitchFamily="2" charset="0"/>
+              </a:rPr>
+              <a:t>content and scale:</a:t>
+            </a:r>
+            <a:r>
+              <a:rPr lang="en-US" sz="1000" dirty="0">
+                <a:solidFill>
+                  <a:schemeClr val="bg1">
+                    <a:lumMod val="75000"/>
+                  </a:schemeClr>
+                </a:solidFill>
+                <a:effectLst>
+                  <a:glow rad="228600">
+                    <a:schemeClr val="accent4">
+                      <a:satMod val="175000"/>
+                      <a:alpha val="40000"/>
+                    </a:schemeClr>
+                  </a:glow>
+                </a:effectLst>
+                <a:latin typeface="Press Start 2P" panose="00000500000000000000" pitchFamily="2" charset="0"/>
+              </a:rPr>
+              <a:t> </a:t>
             </a:r>
           </a:p>
         </p:txBody>
       </p:sp>
-      <p:pic>
-        <p:nvPicPr>
-          <p:cNvPr id="4" name="Picture 3" descr="A red cross on a black background&#10;&#10;AI-generated content may be incorrect.">
-            <a:extLst>
-              <a:ext uri="{FF2B5EF4-FFF2-40B4-BE49-F238E27FC236}">
-                <a16:creationId xmlns:a16="http://schemas.microsoft.com/office/drawing/2014/main" id="{94D08BD7-0DC1-9958-4E1D-4C6558D63EDC}"/>
-              </a:ext>
-            </a:extLst>
-          </p:cNvPr>
-          <p:cNvPicPr>
-            <a:picLocks noChangeAspect="1"/>
-          </p:cNvPicPr>
-          <p:nvPr/>
-        </p:nvPicPr>
-        <p:blipFill>
-          <a:blip r:embed="rId5"/>
-          <a:stretch>
-            <a:fillRect/>
-          </a:stretch>
-        </p:blipFill>
-        <p:spPr>
-          <a:xfrm>
-            <a:off x="312978" y="4340822"/>
-            <a:ext cx="1362314" cy="461429"/>
-          </a:xfrm>
-          <a:prstGeom prst="rect">
-            <a:avLst/>
-          </a:prstGeom>
-          <a:effectLst>
-            <a:glow rad="228600">
-              <a:schemeClr val="accent4">
-                <a:satMod val="175000"/>
-                <a:alpha val="40000"/>
-              </a:schemeClr>
-            </a:glow>
-          </a:effectLst>
-        </p:spPr>
-      </p:pic>
     </p:spTree>
     <p:extLst>
       <p:ext uri="{BB962C8B-B14F-4D97-AF65-F5344CB8AC3E}">
-        <p14:creationId xmlns:p14="http://schemas.microsoft.com/office/powerpoint/2010/main" val="711566286"/>
+        <p14:creationId xmlns:p14="http://schemas.microsoft.com/office/powerpoint/2010/main" val="4289735502"/>
       </p:ext>
     </p:extLst>
   </p:cSld>
@@ -19331,11 +19845,11 @@
                 <a:spcPts val="1400"/>
               </a:lnSpc>
               <a:buClr>
-                <a:srgbClr val="AB5130"/>
+                <a:srgbClr val="BD6A62"/>
               </a:buClr>
               <a:buSzPts val="1100"/>
               <a:buFont typeface="Press Start 2P" panose="00000500000000000000" pitchFamily="2" charset="0"/>
-              <a:buChar char="♦"/>
+              <a:buChar char="★"/>
             </a:pPr>
             <a:r>
               <a:rPr lang="en-US" sz="1000" dirty="0">
@@ -19363,11 +19877,11 @@
                 <a:spcPts val="1400"/>
               </a:lnSpc>
               <a:buClr>
-                <a:srgbClr val="AB5130"/>
+                <a:srgbClr val="BD6A62"/>
               </a:buClr>
               <a:buSzPts val="1100"/>
               <a:buFont typeface="Press Start 2P" panose="00000500000000000000" pitchFamily="2" charset="0"/>
-              <a:buChar char="♦"/>
+              <a:buChar char="★"/>
             </a:pPr>
             <a:endParaRPr lang="en-US" sz="1000" dirty="0">
               <a:solidFill>
@@ -19392,11 +19906,11 @@
                 <a:spcPts val="1400"/>
               </a:lnSpc>
               <a:buClr>
-                <a:srgbClr val="AB5130"/>
+                <a:srgbClr val="BD6A62"/>
               </a:buClr>
               <a:buSzPts val="1100"/>
               <a:buFont typeface="Press Start 2P" panose="00000500000000000000" pitchFamily="2" charset="0"/>
-              <a:buChar char="♦"/>
+              <a:buChar char="★"/>
             </a:pPr>
             <a:r>
               <a:rPr lang="en-US" sz="1000" dirty="0">
@@ -19417,72 +19931,18 @@
               </a:rPr>
               <a:t>3 games shipped on PC and major consoles, award-winning for creativity and originality.</a:t>
             </a:r>
-            <a:br>
-              <a:rPr lang="en-US" sz="1000" dirty="0">
-                <a:solidFill>
-                  <a:schemeClr val="bg1">
-                    <a:lumMod val="75000"/>
-                  </a:schemeClr>
-                </a:solidFill>
-                <a:effectLst>
-                  <a:glow rad="228600">
-                    <a:schemeClr val="accent4">
-                      <a:satMod val="175000"/>
-                      <a:alpha val="40000"/>
-                    </a:schemeClr>
-                  </a:glow>
-                </a:effectLst>
-                <a:latin typeface="Press Start 2P" panose="00000500000000000000" pitchFamily="2" charset="0"/>
-              </a:rPr>
-            </a:br>
-            <a:br>
-              <a:rPr lang="en-US" sz="1000" dirty="0">
-                <a:solidFill>
-                  <a:schemeClr val="bg1">
-                    <a:lumMod val="75000"/>
-                  </a:schemeClr>
-                </a:solidFill>
-                <a:effectLst>
-                  <a:glow rad="228600">
-                    <a:schemeClr val="accent4">
-                      <a:satMod val="175000"/>
-                      <a:alpha val="40000"/>
-                    </a:schemeClr>
-                  </a:glow>
-                </a:effectLst>
-                <a:latin typeface="Press Start 2P" panose="00000500000000000000" pitchFamily="2" charset="0"/>
-              </a:rPr>
-            </a:br>
-            <a:r>
-              <a:rPr lang="en-US" sz="1000" dirty="0">
-                <a:solidFill>
-                  <a:schemeClr val="bg1">
-                    <a:lumMod val="75000"/>
-                  </a:schemeClr>
-                </a:solidFill>
-                <a:effectLst>
-                  <a:glow rad="228600">
-                    <a:schemeClr val="accent4">
-                      <a:satMod val="175000"/>
-                      <a:alpha val="40000"/>
-                    </a:schemeClr>
-                  </a:glow>
-                </a:effectLst>
-                <a:latin typeface="Press Start 2P" panose="00000500000000000000" pitchFamily="2" charset="0"/>
-              </a:rPr>
-              <a:t>All games with the same publisher, proving both trust in our work and our reliability as long-term partners.</a:t>
-            </a:r>
-          </a:p>
-          <a:p>
-            <a:pPr marL="0" indent="0">
+          </a:p>
+          <a:p>
+            <a:pPr marL="171450" indent="-171450">
               <a:lnSpc>
                 <a:spcPts val="1400"/>
               </a:lnSpc>
               <a:buClr>
-                <a:srgbClr val="AB5130"/>
+                <a:srgbClr val="BD6A62"/>
               </a:buClr>
               <a:buSzPts val="1100"/>
-              <a:buNone/>
+              <a:buFont typeface="Press Start 2P" panose="00000500000000000000" pitchFamily="2" charset="0"/>
+              <a:buChar char="★"/>
             </a:pPr>
             <a:endParaRPr lang="en-US" sz="1000" dirty="0">
               <a:solidFill>
@@ -19507,11 +19967,72 @@
                 <a:spcPts val="1400"/>
               </a:lnSpc>
               <a:buClr>
-                <a:srgbClr val="AB5130"/>
+                <a:srgbClr val="BD6A62"/>
               </a:buClr>
               <a:buSzPts val="1100"/>
               <a:buFont typeface="Press Start 2P" panose="00000500000000000000" pitchFamily="2" charset="0"/>
-              <a:buChar char="♦"/>
+              <a:buChar char="★"/>
+            </a:pPr>
+            <a:r>
+              <a:rPr lang="en-US" sz="1000" dirty="0">
+                <a:solidFill>
+                  <a:schemeClr val="bg1">
+                    <a:lumMod val="75000"/>
+                  </a:schemeClr>
+                </a:solidFill>
+                <a:effectLst>
+                  <a:glow rad="228600">
+                    <a:schemeClr val="accent4">
+                      <a:satMod val="175000"/>
+                      <a:alpha val="40000"/>
+                    </a:schemeClr>
+                  </a:glow>
+                </a:effectLst>
+                <a:latin typeface="Press Start 2P" panose="00000500000000000000" pitchFamily="2" charset="0"/>
+              </a:rPr>
+              <a:t>All games with the same publisher, proving both trust in our work and our reliability as long-term partners.</a:t>
+            </a:r>
+          </a:p>
+          <a:p>
+            <a:pPr marL="171450" indent="-171450">
+              <a:lnSpc>
+                <a:spcPts val="1400"/>
+              </a:lnSpc>
+              <a:buClr>
+                <a:srgbClr val="BD6A62"/>
+              </a:buClr>
+              <a:buSzPts val="1100"/>
+              <a:buFont typeface="Press Start 2P" panose="00000500000000000000" pitchFamily="2" charset="0"/>
+              <a:buChar char="★"/>
+            </a:pPr>
+            <a:endParaRPr lang="en-US" sz="1000" dirty="0">
+              <a:solidFill>
+                <a:schemeClr val="bg1">
+                  <a:lumMod val="75000"/>
+                </a:schemeClr>
+              </a:solidFill>
+              <a:effectLst>
+                <a:glow rad="228600">
+                  <a:schemeClr val="accent4">
+                    <a:satMod val="175000"/>
+                    <a:alpha val="40000"/>
+                  </a:schemeClr>
+                </a:glow>
+              </a:effectLst>
+              <a:latin typeface="Press Start 2P" panose="00000500000000000000" pitchFamily="2" charset="0"/>
+            </a:endParaRPr>
+          </a:p>
+          <a:p>
+            <a:pPr marL="171450" indent="-171450">
+              <a:lnSpc>
+                <a:spcPts val="1400"/>
+              </a:lnSpc>
+              <a:buClr>
+                <a:srgbClr val="BD6A62"/>
+              </a:buClr>
+              <a:buSzPts val="1100"/>
+              <a:buFont typeface="Press Start 2P" panose="00000500000000000000" pitchFamily="2" charset="0"/>
+              <a:buChar char="★"/>
             </a:pPr>
             <a:r>
               <a:rPr lang="en-US" sz="1000" dirty="0">
@@ -20023,8 +20544,8 @@
         </p:nvSpPr>
         <p:spPr>
           <a:xfrm>
-            <a:off x="1606490" y="1068230"/>
-            <a:ext cx="5813150" cy="1112838"/>
+            <a:off x="587425" y="1038096"/>
+            <a:ext cx="7969148" cy="1112838"/>
           </a:xfrm>
           <a:prstGeom prst="rect">
             <a:avLst/>
@@ -20041,21 +20562,19 @@
           <a:p>
             <a:pPr marL="285750" indent="-285750">
               <a:lnSpc>
-                <a:spcPts val="1400"/>
+                <a:spcPct val="100000"/>
               </a:lnSpc>
               <a:buClr>
-                <a:srgbClr val="AB5130"/>
+                <a:srgbClr val="BD6A62"/>
               </a:buClr>
               <a:buSzPts val="1100"/>
               <a:buFont typeface="Press Start 2P" panose="00000500000000000000" pitchFamily="2" charset="0"/>
-              <a:buChar char="♦"/>
+              <a:buChar char="★"/>
             </a:pPr>
             <a:r>
               <a:rPr lang="en-US" sz="1000" dirty="0">
                 <a:solidFill>
-                  <a:schemeClr val="bg1">
-                    <a:lumMod val="75000"/>
-                  </a:schemeClr>
+                  <a:srgbClr val="BD6A62"/>
                 </a:solidFill>
                 <a:effectLst>
                   <a:glow rad="228600">
@@ -20067,7 +20586,43 @@
                 </a:effectLst>
                 <a:latin typeface="Press Start 2P" panose="00000500000000000000" pitchFamily="2" charset="0"/>
               </a:rPr>
-              <a:t>Estimated development time: xx months.</a:t>
+              <a:t>Development time:</a:t>
+            </a:r>
+            <a:r>
+              <a:rPr lang="en-US" sz="1000" dirty="0">
+                <a:solidFill>
+                  <a:srgbClr val="AB5130"/>
+                </a:solidFill>
+                <a:effectLst>
+                  <a:glow rad="228600">
+                    <a:schemeClr val="accent4">
+                      <a:satMod val="175000"/>
+                      <a:alpha val="40000"/>
+                    </a:schemeClr>
+                  </a:glow>
+                </a:effectLst>
+                <a:latin typeface="Press Start 2P" panose="00000500000000000000" pitchFamily="2" charset="0"/>
+              </a:rPr>
+              <a:t> </a:t>
+            </a:r>
+            <a:r>
+              <a:rPr lang="en-US" sz="1000" dirty="0">
+                <a:solidFill>
+                  <a:schemeClr val="bg1">
+                    <a:lumMod val="75000"/>
+                  </a:schemeClr>
+                </a:solidFill>
+                <a:effectLst>
+                  <a:glow rad="228600">
+                    <a:schemeClr val="accent4">
+                      <a:satMod val="175000"/>
+                      <a:alpha val="40000"/>
+                    </a:schemeClr>
+                  </a:glow>
+                </a:effectLst>
+                <a:latin typeface="Press Start 2P" panose="00000500000000000000" pitchFamily="2" charset="0"/>
+              </a:rPr>
+              <a:t>14 months.</a:t>
             </a:r>
             <a:br>
               <a:rPr lang="en-US" sz="1000" dirty="0">
@@ -20107,21 +20662,19 @@
           <a:p>
             <a:pPr marL="285750" indent="-285750">
               <a:lnSpc>
-                <a:spcPts val="1400"/>
+                <a:spcPct val="100000"/>
               </a:lnSpc>
               <a:buClr>
-                <a:srgbClr val="AB5130"/>
+                <a:srgbClr val="BD6A62"/>
               </a:buClr>
               <a:buSzPts val="1100"/>
               <a:buFont typeface="Press Start 2P" panose="00000500000000000000" pitchFamily="2" charset="0"/>
-              <a:buChar char="♦"/>
+              <a:buChar char="★"/>
             </a:pPr>
             <a:r>
               <a:rPr lang="en-US" sz="1000" dirty="0">
                 <a:solidFill>
-                  <a:schemeClr val="bg1">
-                    <a:lumMod val="75000"/>
-                  </a:schemeClr>
+                  <a:srgbClr val="BD6A62"/>
                 </a:solidFill>
                 <a:effectLst>
                   <a:glow rad="228600">
@@ -20133,10 +20686,10 @@
                 </a:effectLst>
                 <a:latin typeface="Press Start 2P" panose="00000500000000000000" pitchFamily="2" charset="0"/>
               </a:rPr>
-              <a:t>Estimated budget</a:t>
+              <a:t>Budget: </a:t>
             </a:r>
             <a:r>
-              <a:rPr lang="en-US" sz="1000">
+              <a:rPr lang="en-US" sz="1000" dirty="0">
                 <a:solidFill>
                   <a:schemeClr val="bg1">
                     <a:lumMod val="75000"/>
@@ -20152,39 +20705,20 @@
                 </a:effectLst>
                 <a:latin typeface="Press Start 2P" panose="00000500000000000000" pitchFamily="2" charset="0"/>
               </a:rPr>
-              <a:t>: xxx </a:t>
-            </a:r>
-            <a:r>
-              <a:rPr lang="en-US" sz="1000" dirty="0">
-                <a:solidFill>
-                  <a:schemeClr val="bg1">
-                    <a:lumMod val="75000"/>
-                  </a:schemeClr>
-                </a:solidFill>
-                <a:effectLst>
-                  <a:glow rad="228600">
-                    <a:schemeClr val="accent4">
-                      <a:satMod val="175000"/>
-                      <a:alpha val="40000"/>
-                    </a:schemeClr>
-                  </a:glow>
-                </a:effectLst>
-                <a:latin typeface="Press Start 2P" panose="00000500000000000000" pitchFamily="2" charset="0"/>
-              </a:rPr>
-              <a:t>USD (*)</a:t>
+              <a:t>220K USD (*)</a:t>
             </a:r>
           </a:p>
           <a:p>
             <a:pPr marL="285750" indent="-285750">
               <a:lnSpc>
-                <a:spcPts val="1400"/>
+                <a:spcPct val="100000"/>
               </a:lnSpc>
               <a:buClr>
-                <a:srgbClr val="AB5130"/>
+                <a:srgbClr val="BD6A62"/>
               </a:buClr>
               <a:buSzPts val="1100"/>
               <a:buFont typeface="Press Start 2P" panose="00000500000000000000" pitchFamily="2" charset="0"/>
-              <a:buChar char="♦"/>
+              <a:buChar char="★"/>
             </a:pPr>
             <a:endParaRPr lang="en-US" sz="1000" dirty="0">
               <a:solidFill>
@@ -20206,21 +20740,19 @@
           <a:p>
             <a:pPr marL="285750" indent="-285750">
               <a:lnSpc>
-                <a:spcPts val="1400"/>
+                <a:spcPts val="1600"/>
               </a:lnSpc>
               <a:buClr>
-                <a:srgbClr val="AB5130"/>
+                <a:srgbClr val="BD6A62"/>
               </a:buClr>
               <a:buSzPts val="1100"/>
               <a:buFont typeface="Press Start 2P" panose="00000500000000000000" pitchFamily="2" charset="0"/>
-              <a:buChar char="♦"/>
+              <a:buChar char="★"/>
             </a:pPr>
             <a:r>
               <a:rPr lang="en-US" sz="1000" dirty="0">
                 <a:solidFill>
-                  <a:schemeClr val="bg1">
-                    <a:lumMod val="75000"/>
-                  </a:schemeClr>
+                  <a:srgbClr val="BD6A62"/>
                 </a:solidFill>
                 <a:effectLst>
                   <a:glow rad="228600">
@@ -20232,8 +20764,323 @@
                 </a:effectLst>
                 <a:latin typeface="Press Start 2P" panose="00000500000000000000" pitchFamily="2" charset="0"/>
               </a:rPr>
-              <a:t>Core team: Lead Designers (2), Programmer, Writer, Background Artist, 2D Animator, Composer</a:t>
+              <a:t>Final content scope: </a:t>
             </a:r>
+            <a:r>
+              <a:rPr lang="en-US" sz="1000" dirty="0">
+                <a:solidFill>
+                  <a:schemeClr val="bg1">
+                    <a:lumMod val="75000"/>
+                  </a:schemeClr>
+                </a:solidFill>
+                <a:effectLst>
+                  <a:glow rad="228600">
+                    <a:schemeClr val="accent4">
+                      <a:satMod val="175000"/>
+                      <a:alpha val="40000"/>
+                    </a:schemeClr>
+                  </a:glow>
+                </a:effectLst>
+                <a:latin typeface="Press Start 2P" panose="00000500000000000000" pitchFamily="2" charset="0"/>
+              </a:rPr>
+              <a:t>12+ bosses, 30+ creatures, 200+ items, 40+ environment objects, 6-8 biomes → 15–25 hours of gameplay (average run-based replayability).</a:t>
+            </a:r>
+          </a:p>
+          <a:p>
+            <a:pPr marL="285750" indent="-285750">
+              <a:lnSpc>
+                <a:spcPct val="100000"/>
+              </a:lnSpc>
+              <a:buClr>
+                <a:srgbClr val="BD6A62"/>
+              </a:buClr>
+              <a:buSzPts val="1100"/>
+              <a:buFont typeface="Press Start 2P" panose="00000500000000000000" pitchFamily="2" charset="0"/>
+              <a:buChar char="★"/>
+            </a:pPr>
+            <a:endParaRPr lang="en-US" sz="1000" dirty="0">
+              <a:solidFill>
+                <a:schemeClr val="bg1">
+                  <a:lumMod val="75000"/>
+                </a:schemeClr>
+              </a:solidFill>
+              <a:effectLst>
+                <a:glow rad="228600">
+                  <a:schemeClr val="accent4">
+                    <a:satMod val="175000"/>
+                    <a:alpha val="40000"/>
+                  </a:schemeClr>
+                </a:glow>
+              </a:effectLst>
+              <a:latin typeface="Press Start 2P" panose="00000500000000000000" pitchFamily="2" charset="0"/>
+            </a:endParaRPr>
+          </a:p>
+          <a:p>
+            <a:pPr marL="285750" indent="-285750">
+              <a:lnSpc>
+                <a:spcPct val="100000"/>
+              </a:lnSpc>
+              <a:buClr>
+                <a:srgbClr val="BD6A62"/>
+              </a:buClr>
+              <a:buSzPts val="1100"/>
+              <a:buFont typeface="Press Start 2P" panose="00000500000000000000" pitchFamily="2" charset="0"/>
+              <a:buChar char="★"/>
+            </a:pPr>
+            <a:r>
+              <a:rPr lang="en-US" sz="1000" dirty="0">
+                <a:solidFill>
+                  <a:srgbClr val="BD6A62"/>
+                </a:solidFill>
+                <a:effectLst>
+                  <a:glow rad="228600">
+                    <a:schemeClr val="accent4">
+                      <a:satMod val="175000"/>
+                      <a:alpha val="40000"/>
+                    </a:schemeClr>
+                  </a:glow>
+                </a:effectLst>
+                <a:latin typeface="Press Start 2P" panose="00000500000000000000" pitchFamily="2" charset="0"/>
+              </a:rPr>
+              <a:t>Core team:</a:t>
+            </a:r>
+          </a:p>
+          <a:p>
+            <a:pPr marL="742950" lvl="1" indent="-285750">
+              <a:lnSpc>
+                <a:spcPts val="400"/>
+              </a:lnSpc>
+              <a:buClr>
+                <a:srgbClr val="BD6A62"/>
+              </a:buClr>
+              <a:buSzPts val="1100"/>
+              <a:buFont typeface="Press Start 2P" panose="00000500000000000000" pitchFamily="2" charset="0"/>
+              <a:buChar char="♦"/>
+            </a:pPr>
+            <a:r>
+              <a:rPr lang="en-US" sz="1000">
+                <a:solidFill>
+                  <a:schemeClr val="bg1">
+                    <a:lumMod val="75000"/>
+                  </a:schemeClr>
+                </a:solidFill>
+                <a:effectLst>
+                  <a:glow rad="228600">
+                    <a:schemeClr val="accent4">
+                      <a:satMod val="175000"/>
+                      <a:alpha val="40000"/>
+                    </a:schemeClr>
+                  </a:glow>
+                </a:effectLst>
+                <a:latin typeface="Press Start 2P" panose="00000500000000000000" pitchFamily="2" charset="0"/>
+              </a:rPr>
+              <a:t>Lead Designers (2)</a:t>
+            </a:r>
+            <a:endParaRPr lang="en-US" sz="1000" dirty="0">
+              <a:solidFill>
+                <a:schemeClr val="bg1">
+                  <a:lumMod val="75000"/>
+                </a:schemeClr>
+              </a:solidFill>
+              <a:effectLst>
+                <a:glow rad="228600">
+                  <a:schemeClr val="accent4">
+                    <a:satMod val="175000"/>
+                    <a:alpha val="40000"/>
+                  </a:schemeClr>
+                </a:glow>
+              </a:effectLst>
+              <a:latin typeface="Press Start 2P" panose="00000500000000000000" pitchFamily="2" charset="0"/>
+            </a:endParaRPr>
+          </a:p>
+          <a:p>
+            <a:pPr marL="742950" lvl="1" indent="-285750">
+              <a:lnSpc>
+                <a:spcPts val="400"/>
+              </a:lnSpc>
+              <a:buClr>
+                <a:srgbClr val="BD6A62"/>
+              </a:buClr>
+              <a:buSzPts val="1100"/>
+              <a:buFont typeface="Press Start 2P" panose="00000500000000000000" pitchFamily="2" charset="0"/>
+              <a:buChar char="♦"/>
+            </a:pPr>
+            <a:r>
+              <a:rPr lang="en-US" sz="1000" dirty="0">
+                <a:solidFill>
+                  <a:schemeClr val="bg1">
+                    <a:lumMod val="75000"/>
+                  </a:schemeClr>
+                </a:solidFill>
+                <a:effectLst>
+                  <a:glow rad="228600">
+                    <a:schemeClr val="accent4">
+                      <a:satMod val="175000"/>
+                      <a:alpha val="40000"/>
+                    </a:schemeClr>
+                  </a:glow>
+                </a:effectLst>
+                <a:latin typeface="Press Start 2P" panose="00000500000000000000" pitchFamily="2" charset="0"/>
+              </a:rPr>
+              <a:t>Programmer</a:t>
+            </a:r>
+          </a:p>
+          <a:p>
+            <a:pPr marL="742950" lvl="1" indent="-285750">
+              <a:lnSpc>
+                <a:spcPts val="400"/>
+              </a:lnSpc>
+              <a:buClr>
+                <a:srgbClr val="BD6A62"/>
+              </a:buClr>
+              <a:buSzPts val="1100"/>
+              <a:buFont typeface="Press Start 2P" panose="00000500000000000000" pitchFamily="2" charset="0"/>
+              <a:buChar char="♦"/>
+            </a:pPr>
+            <a:r>
+              <a:rPr lang="en-US" sz="1000" dirty="0">
+                <a:solidFill>
+                  <a:schemeClr val="bg1">
+                    <a:lumMod val="75000"/>
+                  </a:schemeClr>
+                </a:solidFill>
+                <a:effectLst>
+                  <a:glow rad="228600">
+                    <a:schemeClr val="accent4">
+                      <a:satMod val="175000"/>
+                      <a:alpha val="40000"/>
+                    </a:schemeClr>
+                  </a:glow>
+                </a:effectLst>
+                <a:latin typeface="Press Start 2P" panose="00000500000000000000" pitchFamily="2" charset="0"/>
+              </a:rPr>
+              <a:t>Writer</a:t>
+            </a:r>
+          </a:p>
+          <a:p>
+            <a:pPr marL="742950" lvl="1" indent="-285750">
+              <a:lnSpc>
+                <a:spcPts val="400"/>
+              </a:lnSpc>
+              <a:buClr>
+                <a:srgbClr val="BD6A62"/>
+              </a:buClr>
+              <a:buSzPts val="1100"/>
+              <a:buFont typeface="Press Start 2P" panose="00000500000000000000" pitchFamily="2" charset="0"/>
+              <a:buChar char="♦"/>
+            </a:pPr>
+            <a:r>
+              <a:rPr lang="en-US" sz="1000" dirty="0">
+                <a:solidFill>
+                  <a:schemeClr val="bg1">
+                    <a:lumMod val="75000"/>
+                  </a:schemeClr>
+                </a:solidFill>
+                <a:effectLst>
+                  <a:glow rad="228600">
+                    <a:schemeClr val="accent4">
+                      <a:satMod val="175000"/>
+                      <a:alpha val="40000"/>
+                    </a:schemeClr>
+                  </a:glow>
+                </a:effectLst>
+                <a:latin typeface="Press Start 2P" panose="00000500000000000000" pitchFamily="2" charset="0"/>
+              </a:rPr>
+              <a:t>Background Artist</a:t>
+            </a:r>
+          </a:p>
+          <a:p>
+            <a:pPr marL="742950" lvl="1" indent="-285750">
+              <a:lnSpc>
+                <a:spcPts val="400"/>
+              </a:lnSpc>
+              <a:buClr>
+                <a:srgbClr val="BD6A62"/>
+              </a:buClr>
+              <a:buSzPts val="1100"/>
+              <a:buFont typeface="Press Start 2P" panose="00000500000000000000" pitchFamily="2" charset="0"/>
+              <a:buChar char="♦"/>
+            </a:pPr>
+            <a:r>
+              <a:rPr lang="en-US" sz="1000" dirty="0">
+                <a:solidFill>
+                  <a:schemeClr val="bg1">
+                    <a:lumMod val="75000"/>
+                  </a:schemeClr>
+                </a:solidFill>
+                <a:effectLst>
+                  <a:glow rad="228600">
+                    <a:schemeClr val="accent4">
+                      <a:satMod val="175000"/>
+                      <a:alpha val="40000"/>
+                    </a:schemeClr>
+                  </a:glow>
+                </a:effectLst>
+                <a:latin typeface="Press Start 2P" panose="00000500000000000000" pitchFamily="2" charset="0"/>
+              </a:rPr>
+              <a:t>2D Animator</a:t>
+            </a:r>
+          </a:p>
+          <a:p>
+            <a:pPr marL="742950" lvl="1" indent="-285750">
+              <a:lnSpc>
+                <a:spcPts val="400"/>
+              </a:lnSpc>
+              <a:buClr>
+                <a:srgbClr val="BD6A62"/>
+              </a:buClr>
+              <a:buSzPts val="1100"/>
+              <a:buFont typeface="Press Start 2P" panose="00000500000000000000" pitchFamily="2" charset="0"/>
+              <a:buChar char="♦"/>
+            </a:pPr>
+            <a:r>
+              <a:rPr lang="en-US" sz="1000" dirty="0">
+                <a:solidFill>
+                  <a:schemeClr val="bg1">
+                    <a:lumMod val="75000"/>
+                  </a:schemeClr>
+                </a:solidFill>
+                <a:effectLst>
+                  <a:glow rad="228600">
+                    <a:schemeClr val="accent4">
+                      <a:satMod val="175000"/>
+                      <a:alpha val="40000"/>
+                    </a:schemeClr>
+                  </a:glow>
+                </a:effectLst>
+                <a:latin typeface="Press Start 2P" panose="00000500000000000000" pitchFamily="2" charset="0"/>
+              </a:rPr>
+              <a:t>Composer</a:t>
+            </a:r>
+          </a:p>
+          <a:p>
+            <a:pPr marL="285750" indent="-285750">
+              <a:lnSpc>
+                <a:spcPct val="100000"/>
+              </a:lnSpc>
+              <a:buClr>
+                <a:srgbClr val="BD6A62"/>
+              </a:buClr>
+              <a:buSzPts val="1100"/>
+              <a:buFont typeface="Press Start 2P" panose="00000500000000000000" pitchFamily="2" charset="0"/>
+              <a:buChar char="★"/>
+            </a:pPr>
+            <a:endParaRPr lang="en-US" sz="1000" dirty="0">
+              <a:solidFill>
+                <a:schemeClr val="bg1">
+                  <a:lumMod val="75000"/>
+                </a:schemeClr>
+              </a:solidFill>
+              <a:effectLst>
+                <a:glow rad="228600">
+                  <a:schemeClr val="accent4">
+                    <a:satMod val="175000"/>
+                    <a:alpha val="40000"/>
+                  </a:schemeClr>
+                </a:glow>
+              </a:effectLst>
+              <a:latin typeface="Press Start 2P" panose="00000500000000000000" pitchFamily="2" charset="0"/>
+            </a:endParaRPr>
           </a:p>
         </p:txBody>
       </p:sp>
@@ -20908,6 +21755,36 @@
               </a:schemeClr>
             </a:glow>
           </a:effectLst>
+        </p:spPr>
+      </p:pic>
+      <p:pic>
+        <p:nvPicPr>
+          <p:cNvPr id="6" name="Picture 5" descr="A pixelated red and black object&#10;&#10;AI-generated content may be incorrect.">
+            <a:extLst>
+              <a:ext uri="{FF2B5EF4-FFF2-40B4-BE49-F238E27FC236}">
+                <a16:creationId xmlns:a16="http://schemas.microsoft.com/office/drawing/2014/main" id="{5F7740B9-4FBA-4BE0-6988-0AA73B6B899D}"/>
+              </a:ext>
+            </a:extLst>
+          </p:cNvPr>
+          <p:cNvPicPr>
+            <a:picLocks noChangeAspect="1"/>
+          </p:cNvPicPr>
+          <p:nvPr/>
+        </p:nvPicPr>
+        <p:blipFill>
+          <a:blip r:embed="rId5"/>
+          <a:stretch>
+            <a:fillRect/>
+          </a:stretch>
+        </p:blipFill>
+        <p:spPr>
+          <a:xfrm>
+            <a:off x="6161609" y="3412643"/>
+            <a:ext cx="2862470" cy="1113183"/>
+          </a:xfrm>
+          <a:prstGeom prst="rect">
+            <a:avLst/>
+          </a:prstGeom>
         </p:spPr>
       </p:pic>
     </p:spTree>
@@ -21293,7 +22170,7 @@
         </p:nvSpPr>
         <p:spPr>
           <a:xfrm>
-            <a:off x="2766710" y="2730560"/>
+            <a:off x="2766708" y="2781296"/>
             <a:ext cx="3279517" cy="400290"/>
           </a:xfrm>
           <a:prstGeom prst="rect">
@@ -21316,7 +22193,7 @@
               <a:buSzPts val="1100"/>
             </a:pPr>
             <a:r>
-              <a:rPr lang="en-US" sz="2400" dirty="0">
+              <a:rPr lang="en-US" sz="1800" dirty="0">
                 <a:solidFill>
                   <a:srgbClr val="F6CA15"/>
                 </a:solidFill>
@@ -21330,7 +22207,24 @@
                 </a:effectLst>
                 <a:latin typeface="Press Start 2P" panose="00000500000000000000" pitchFamily="2" charset="0"/>
               </a:rPr>
-              <a:t>Thanks!</a:t>
+              <a:t>Thanks</a:t>
+            </a:r>
+            <a:r>
+              <a:rPr lang="en-US" sz="2400" dirty="0">
+                <a:solidFill>
+                  <a:srgbClr val="F6CA15"/>
+                </a:solidFill>
+                <a:effectLst>
+                  <a:glow rad="228600">
+                    <a:schemeClr val="accent4">
+                      <a:satMod val="175000"/>
+                      <a:alpha val="40000"/>
+                    </a:schemeClr>
+                  </a:glow>
+                </a:effectLst>
+                <a:latin typeface="Press Start 2P" panose="00000500000000000000" pitchFamily="2" charset="0"/>
+              </a:rPr>
+              <a:t>!</a:t>
             </a:r>
           </a:p>
         </p:txBody>
@@ -21358,8 +22252,8 @@
         </p:blipFill>
         <p:spPr>
           <a:xfrm>
-            <a:off x="3097766" y="831147"/>
-            <a:ext cx="2948461" cy="1899413"/>
+            <a:off x="2958879" y="744785"/>
+            <a:ext cx="3226242" cy="2078361"/>
           </a:xfrm>
           <a:prstGeom prst="rect">
             <a:avLst/>
@@ -21830,8 +22724,8 @@
         </p:nvSpPr>
         <p:spPr>
           <a:xfrm>
-            <a:off x="1241001" y="1007008"/>
-            <a:ext cx="6661989" cy="1112837"/>
+            <a:off x="1247129" y="1057574"/>
+            <a:ext cx="6649733" cy="1112837"/>
           </a:xfrm>
           <a:prstGeom prst="rect">
             <a:avLst/>
@@ -21870,7 +22764,7 @@
                 </a:effectLst>
                 <a:latin typeface="Press Start 2P" panose="00000500000000000000" pitchFamily="2" charset="0"/>
               </a:rPr>
-              <a:t>A 2D pixel art roguelite adventure with dark humor, twisted monsters, secret places and hundreds of bizarre items. </a:t>
+              <a:t>A 2D pixel-art roguelite adventure where grotesque horror collides with absurd comedy.</a:t>
             </a:r>
           </a:p>
           <a:p>
@@ -21929,7 +22823,7 @@
                 </a:effectLst>
                 <a:latin typeface="Press Start 2P" panose="00000500000000000000" pitchFamily="2" charset="0"/>
               </a:rPr>
-              <a:t>Two lazy journalists trapped in a demon-possessed horror ride where every cart is your only chance to survive.</a:t>
+              <a:t>Two lazy journalists trapped in a demon-possessed horror ride where every cart is their only chance to survive.</a:t>
             </a:r>
           </a:p>
         </p:txBody>
@@ -21981,6 +22875,2064 @@
 </file>
 
 <file path=ppt/slides/slide3.xml><?xml version="1.0" encoding="utf-8"?>
+<p:sld xmlns:a="http://schemas.openxmlformats.org/drawingml/2006/main" xmlns:r="http://schemas.openxmlformats.org/officeDocument/2006/relationships" xmlns:p="http://schemas.openxmlformats.org/presentationml/2006/main">
+  <p:cSld>
+    <p:spTree>
+      <p:nvGrpSpPr>
+        <p:cNvPr id="1" name="Shape 998">
+          <a:extLst>
+            <a:ext uri="{FF2B5EF4-FFF2-40B4-BE49-F238E27FC236}">
+              <a16:creationId xmlns:a16="http://schemas.microsoft.com/office/drawing/2014/main" id="{59DDBFF2-B1FB-4113-D291-30E81F48EF5E}"/>
+            </a:ext>
+          </a:extLst>
+        </p:cNvPr>
+        <p:cNvGrpSpPr/>
+        <p:nvPr/>
+      </p:nvGrpSpPr>
+      <p:grpSpPr>
+        <a:xfrm>
+          <a:off x="0" y="0"/>
+          <a:ext cx="0" cy="0"/>
+          <a:chOff x="0" y="0"/>
+          <a:chExt cx="0" cy="0"/>
+        </a:xfrm>
+      </p:grpSpPr>
+      <p:pic>
+        <p:nvPicPr>
+          <p:cNvPr id="5" name="Picture 4" descr="A pixel art of a building">
+            <a:extLst>
+              <a:ext uri="{FF2B5EF4-FFF2-40B4-BE49-F238E27FC236}">
+                <a16:creationId xmlns:a16="http://schemas.microsoft.com/office/drawing/2014/main" id="{59AAAA8F-F620-C6A9-A90D-0FF928EF483F}"/>
+              </a:ext>
+            </a:extLst>
+          </p:cNvPr>
+          <p:cNvPicPr>
+            <a:picLocks noChangeAspect="1"/>
+          </p:cNvPicPr>
+          <p:nvPr/>
+        </p:nvPicPr>
+        <p:blipFill>
+          <a:blip r:embed="rId3">
+            <a:alphaModFix amt="70000"/>
+          </a:blip>
+          <a:stretch>
+            <a:fillRect/>
+          </a:stretch>
+        </p:blipFill>
+        <p:spPr>
+          <a:xfrm>
+            <a:off x="0" y="0"/>
+            <a:ext cx="9144000" cy="5143500"/>
+          </a:xfrm>
+          <a:prstGeom prst="rect">
+            <a:avLst/>
+          </a:prstGeom>
+        </p:spPr>
+      </p:pic>
+      <p:sp>
+        <p:nvSpPr>
+          <p:cNvPr id="1000" name="Google Shape;1000;p37">
+            <a:extLst>
+              <a:ext uri="{FF2B5EF4-FFF2-40B4-BE49-F238E27FC236}">
+                <a16:creationId xmlns:a16="http://schemas.microsoft.com/office/drawing/2014/main" id="{6A32EE8A-0DFD-7F7F-DA35-B894B7CD5258}"/>
+              </a:ext>
+            </a:extLst>
+          </p:cNvPr>
+          <p:cNvSpPr txBox="1">
+            <a:spLocks noGrp="1"/>
+          </p:cNvSpPr>
+          <p:nvPr>
+            <p:ph type="subTitle" idx="4294967295"/>
+          </p:nvPr>
+        </p:nvSpPr>
+        <p:spPr>
+          <a:xfrm>
+            <a:off x="1558486" y="1184526"/>
+            <a:ext cx="6027027" cy="1112837"/>
+          </a:xfrm>
+          <a:prstGeom prst="rect">
+            <a:avLst/>
+          </a:prstGeom>
+        </p:spPr>
+        <p:txBody>
+          <a:bodyPr spcFirstLastPara="1" wrap="square" lIns="91425" tIns="91425" rIns="91425" bIns="91425" anchor="t" anchorCtr="0">
+            <a:noAutofit/>
+          </a:bodyPr>
+          <a:lstStyle/>
+          <a:p>
+            <a:pPr marL="171450" indent="-171450">
+              <a:lnSpc>
+                <a:spcPts val="1400"/>
+              </a:lnSpc>
+              <a:buClr>
+                <a:srgbClr val="BD6A62"/>
+              </a:buClr>
+              <a:buSzPts val="1100"/>
+              <a:buFont typeface="Press Start 2P" panose="00000500000000000000" pitchFamily="2" charset="0"/>
+              <a:buChar char="★"/>
+            </a:pPr>
+            <a:r>
+              <a:rPr lang="en-US" sz="1000" dirty="0">
+                <a:solidFill>
+                  <a:srgbClr val="BD6A62"/>
+                </a:solidFill>
+                <a:effectLst>
+                  <a:glow rad="228600">
+                    <a:schemeClr val="accent4">
+                      <a:satMod val="175000"/>
+                      <a:alpha val="40000"/>
+                    </a:schemeClr>
+                  </a:glow>
+                </a:effectLst>
+                <a:latin typeface="Press Start 2P" panose="00000500000000000000" pitchFamily="2" charset="0"/>
+              </a:rPr>
+              <a:t>Bizarre comedy: </a:t>
+            </a:r>
+            <a:r>
+              <a:rPr lang="en-US" sz="1000" dirty="0">
+                <a:solidFill>
+                  <a:schemeClr val="bg1">
+                    <a:lumMod val="75000"/>
+                  </a:schemeClr>
+                </a:solidFill>
+                <a:effectLst>
+                  <a:glow rad="228600">
+                    <a:schemeClr val="accent4">
+                      <a:satMod val="175000"/>
+                      <a:alpha val="40000"/>
+                    </a:schemeClr>
+                  </a:glow>
+                </a:effectLst>
+                <a:latin typeface="Press Start 2P" panose="00000500000000000000" pitchFamily="2" charset="0"/>
+              </a:rPr>
+              <a:t>a mix of scares and absurd laughs rarely seen in the genre.</a:t>
+            </a:r>
+          </a:p>
+          <a:p>
+            <a:pPr marL="171450" indent="-171450">
+              <a:lnSpc>
+                <a:spcPts val="1400"/>
+              </a:lnSpc>
+              <a:buClr>
+                <a:srgbClr val="BD6A62"/>
+              </a:buClr>
+              <a:buSzPts val="1100"/>
+              <a:buFont typeface="Press Start 2P" panose="00000500000000000000" pitchFamily="2" charset="0"/>
+              <a:buChar char="★"/>
+            </a:pPr>
+            <a:endParaRPr lang="en-US" sz="1000" dirty="0">
+              <a:solidFill>
+                <a:schemeClr val="bg1">
+                  <a:lumMod val="75000"/>
+                </a:schemeClr>
+              </a:solidFill>
+              <a:effectLst>
+                <a:glow rad="228600">
+                  <a:schemeClr val="accent4">
+                    <a:satMod val="175000"/>
+                    <a:alpha val="40000"/>
+                  </a:schemeClr>
+                </a:glow>
+              </a:effectLst>
+              <a:latin typeface="Press Start 2P" panose="00000500000000000000" pitchFamily="2" charset="0"/>
+            </a:endParaRPr>
+          </a:p>
+          <a:p>
+            <a:pPr marL="171450" indent="-171450">
+              <a:lnSpc>
+                <a:spcPts val="1400"/>
+              </a:lnSpc>
+              <a:buClr>
+                <a:srgbClr val="BD6A62"/>
+              </a:buClr>
+              <a:buSzPts val="1100"/>
+              <a:buFont typeface="Press Start 2P" panose="00000500000000000000" pitchFamily="2" charset="0"/>
+              <a:buChar char="★"/>
+            </a:pPr>
+            <a:r>
+              <a:rPr lang="en-US" sz="1000" dirty="0">
+                <a:solidFill>
+                  <a:srgbClr val="BD6A62"/>
+                </a:solidFill>
+                <a:effectLst>
+                  <a:glow rad="228600">
+                    <a:schemeClr val="accent4">
+                      <a:satMod val="175000"/>
+                      <a:alpha val="40000"/>
+                    </a:schemeClr>
+                  </a:glow>
+                </a:effectLst>
+                <a:latin typeface="Press Start 2P" panose="00000500000000000000" pitchFamily="2" charset="0"/>
+              </a:rPr>
+              <a:t>Accessible chaos: </a:t>
+            </a:r>
+            <a:r>
+              <a:rPr lang="en-US" sz="1000" dirty="0">
+                <a:solidFill>
+                  <a:schemeClr val="bg1">
+                    <a:lumMod val="75000"/>
+                  </a:schemeClr>
+                </a:solidFill>
+                <a:effectLst>
+                  <a:glow rad="228600">
+                    <a:schemeClr val="accent4">
+                      <a:satMod val="175000"/>
+                      <a:alpha val="40000"/>
+                    </a:schemeClr>
+                  </a:glow>
+                </a:effectLst>
+                <a:latin typeface="Press Start 2P" panose="00000500000000000000" pitchFamily="2" charset="0"/>
+              </a:rPr>
+              <a:t>combat focuses on items and creativity instead of twitch reflexes, opening to a wider audience.</a:t>
+            </a:r>
+          </a:p>
+          <a:p>
+            <a:pPr marL="171450" indent="-171450">
+              <a:lnSpc>
+                <a:spcPts val="1400"/>
+              </a:lnSpc>
+              <a:buClr>
+                <a:srgbClr val="BD6A62"/>
+              </a:buClr>
+              <a:buSzPts val="1100"/>
+              <a:buFont typeface="Press Start 2P" panose="00000500000000000000" pitchFamily="2" charset="0"/>
+              <a:buChar char="★"/>
+            </a:pPr>
+            <a:endParaRPr lang="en-US" sz="1000" dirty="0">
+              <a:solidFill>
+                <a:schemeClr val="bg1">
+                  <a:lumMod val="75000"/>
+                </a:schemeClr>
+              </a:solidFill>
+              <a:effectLst>
+                <a:glow rad="228600">
+                  <a:schemeClr val="accent4">
+                    <a:satMod val="175000"/>
+                    <a:alpha val="40000"/>
+                  </a:schemeClr>
+                </a:glow>
+              </a:effectLst>
+              <a:latin typeface="Press Start 2P" panose="00000500000000000000" pitchFamily="2" charset="0"/>
+            </a:endParaRPr>
+          </a:p>
+          <a:p>
+            <a:pPr marL="171450" indent="-171450">
+              <a:lnSpc>
+                <a:spcPts val="1400"/>
+              </a:lnSpc>
+              <a:buClr>
+                <a:srgbClr val="BD6A62"/>
+              </a:buClr>
+              <a:buSzPts val="1100"/>
+              <a:buFont typeface="Press Start 2P" panose="00000500000000000000" pitchFamily="2" charset="0"/>
+              <a:buChar char="★"/>
+            </a:pPr>
+            <a:r>
+              <a:rPr lang="en-US" sz="1000" dirty="0">
+                <a:solidFill>
+                  <a:srgbClr val="BD6A62"/>
+                </a:solidFill>
+                <a:effectLst>
+                  <a:glow rad="228600">
+                    <a:schemeClr val="accent4">
+                      <a:satMod val="175000"/>
+                      <a:alpha val="40000"/>
+                    </a:schemeClr>
+                  </a:glow>
+                </a:effectLst>
+                <a:latin typeface="Press Start 2P" panose="00000500000000000000" pitchFamily="2" charset="0"/>
+              </a:rPr>
+              <a:t>Rebellious satire: </a:t>
+            </a:r>
+            <a:r>
+              <a:rPr lang="en-US" sz="1000" dirty="0">
+                <a:solidFill>
+                  <a:schemeClr val="bg1">
+                    <a:lumMod val="75000"/>
+                  </a:schemeClr>
+                </a:solidFill>
+                <a:effectLst>
+                  <a:glow rad="228600">
+                    <a:schemeClr val="accent4">
+                      <a:satMod val="175000"/>
+                      <a:alpha val="40000"/>
+                    </a:schemeClr>
+                  </a:glow>
+                </a:effectLst>
+                <a:latin typeface="Press Start 2P" panose="00000500000000000000" pitchFamily="2" charset="0"/>
+              </a:rPr>
+              <a:t>politically incorrect acid humor that exposes the absurdities, injustices, and horrors of our real world.</a:t>
+            </a:r>
+          </a:p>
+          <a:p>
+            <a:pPr marL="171450" indent="-171450">
+              <a:lnSpc>
+                <a:spcPts val="1400"/>
+              </a:lnSpc>
+              <a:buClr>
+                <a:srgbClr val="BD6A62"/>
+              </a:buClr>
+              <a:buSzPts val="1100"/>
+              <a:buFont typeface="Press Start 2P" panose="00000500000000000000" pitchFamily="2" charset="0"/>
+              <a:buChar char="★"/>
+            </a:pPr>
+            <a:endParaRPr lang="en-US" sz="1000" dirty="0">
+              <a:solidFill>
+                <a:srgbClr val="BD6A62"/>
+              </a:solidFill>
+              <a:effectLst>
+                <a:glow rad="228600">
+                  <a:schemeClr val="accent4">
+                    <a:satMod val="175000"/>
+                    <a:alpha val="40000"/>
+                  </a:schemeClr>
+                </a:glow>
+              </a:effectLst>
+              <a:latin typeface="Press Start 2P" panose="00000500000000000000" pitchFamily="2" charset="0"/>
+            </a:endParaRPr>
+          </a:p>
+          <a:p>
+            <a:pPr marL="171450" indent="-171450">
+              <a:lnSpc>
+                <a:spcPts val="1400"/>
+              </a:lnSpc>
+              <a:buClr>
+                <a:srgbClr val="BD6A62"/>
+              </a:buClr>
+              <a:buSzPts val="1100"/>
+              <a:buFont typeface="Press Start 2P" panose="00000500000000000000" pitchFamily="2" charset="0"/>
+              <a:buChar char="★"/>
+            </a:pPr>
+            <a:r>
+              <a:rPr lang="en-US" sz="1000" dirty="0">
+                <a:solidFill>
+                  <a:srgbClr val="BD6A62"/>
+                </a:solidFill>
+                <a:effectLst>
+                  <a:glow rad="228600">
+                    <a:schemeClr val="accent4">
+                      <a:satMod val="175000"/>
+                      <a:alpha val="40000"/>
+                    </a:schemeClr>
+                  </a:glow>
+                </a:effectLst>
+                <a:latin typeface="Press Start 2P" panose="00000500000000000000" pitchFamily="2" charset="0"/>
+              </a:rPr>
+              <a:t>The haunted ride: </a:t>
+            </a:r>
+            <a:r>
+              <a:rPr lang="en-US" sz="1000" dirty="0">
+                <a:solidFill>
+                  <a:schemeClr val="bg1">
+                    <a:lumMod val="75000"/>
+                  </a:schemeClr>
+                </a:solidFill>
+                <a:effectLst>
+                  <a:glow rad="228600">
+                    <a:schemeClr val="accent4">
+                      <a:satMod val="175000"/>
+                      <a:alpha val="40000"/>
+                    </a:schemeClr>
+                  </a:glow>
+                </a:effectLst>
+                <a:latin typeface="Press Start 2P" panose="00000500000000000000" pitchFamily="2" charset="0"/>
+              </a:rPr>
+              <a:t>a cursed horror ride with its own twisted logic, instead of generic dungeons or caves.</a:t>
+            </a:r>
+          </a:p>
+          <a:p>
+            <a:pPr marL="171450" indent="-171450">
+              <a:lnSpc>
+                <a:spcPts val="1400"/>
+              </a:lnSpc>
+              <a:buClr>
+                <a:srgbClr val="BD6A62"/>
+              </a:buClr>
+              <a:buSzPts val="1100"/>
+              <a:buFont typeface="Press Start 2P" panose="00000500000000000000" pitchFamily="2" charset="0"/>
+              <a:buChar char="★"/>
+            </a:pPr>
+            <a:endParaRPr lang="en-US" sz="1000" dirty="0">
+              <a:solidFill>
+                <a:schemeClr val="bg1">
+                  <a:lumMod val="75000"/>
+                </a:schemeClr>
+              </a:solidFill>
+              <a:effectLst>
+                <a:glow rad="228600">
+                  <a:schemeClr val="accent4">
+                    <a:satMod val="175000"/>
+                    <a:alpha val="40000"/>
+                  </a:schemeClr>
+                </a:glow>
+              </a:effectLst>
+              <a:latin typeface="Press Start 2P" panose="00000500000000000000" pitchFamily="2" charset="0"/>
+            </a:endParaRPr>
+          </a:p>
+          <a:p>
+            <a:pPr marL="171450" indent="-171450">
+              <a:lnSpc>
+                <a:spcPts val="1400"/>
+              </a:lnSpc>
+              <a:buClr>
+                <a:srgbClr val="BD6A62"/>
+              </a:buClr>
+              <a:buSzPts val="1100"/>
+              <a:buFont typeface="Press Start 2P" panose="00000500000000000000" pitchFamily="2" charset="0"/>
+              <a:buChar char="♦"/>
+            </a:pPr>
+            <a:endParaRPr lang="en-US" sz="1000" dirty="0">
+              <a:solidFill>
+                <a:schemeClr val="bg1">
+                  <a:lumMod val="75000"/>
+                </a:schemeClr>
+              </a:solidFill>
+              <a:effectLst>
+                <a:glow rad="228600">
+                  <a:schemeClr val="accent4">
+                    <a:satMod val="175000"/>
+                    <a:alpha val="40000"/>
+                  </a:schemeClr>
+                </a:glow>
+              </a:effectLst>
+              <a:latin typeface="Press Start 2P" panose="00000500000000000000" pitchFamily="2" charset="0"/>
+            </a:endParaRPr>
+          </a:p>
+          <a:p>
+            <a:pPr marL="171450" indent="-171450">
+              <a:lnSpc>
+                <a:spcPts val="1400"/>
+              </a:lnSpc>
+              <a:buClr>
+                <a:srgbClr val="BD6A62"/>
+              </a:buClr>
+              <a:buSzPts val="1100"/>
+              <a:buFont typeface="Press Start 2P" panose="00000500000000000000" pitchFamily="2" charset="0"/>
+              <a:buChar char="♦"/>
+            </a:pPr>
+            <a:endParaRPr lang="en-US" sz="1000" dirty="0">
+              <a:solidFill>
+                <a:schemeClr val="bg1">
+                  <a:lumMod val="75000"/>
+                </a:schemeClr>
+              </a:solidFill>
+              <a:effectLst>
+                <a:glow rad="228600">
+                  <a:schemeClr val="accent4">
+                    <a:satMod val="175000"/>
+                    <a:alpha val="40000"/>
+                  </a:schemeClr>
+                </a:glow>
+              </a:effectLst>
+              <a:latin typeface="Press Start 2P" panose="00000500000000000000" pitchFamily="2" charset="0"/>
+            </a:endParaRPr>
+          </a:p>
+          <a:p>
+            <a:pPr marL="171450" indent="-171450">
+              <a:lnSpc>
+                <a:spcPts val="1400"/>
+              </a:lnSpc>
+              <a:buClr>
+                <a:srgbClr val="BD6A62"/>
+              </a:buClr>
+              <a:buSzPts val="1100"/>
+              <a:buFont typeface="Press Start 2P" panose="00000500000000000000" pitchFamily="2" charset="0"/>
+              <a:buChar char="♦"/>
+            </a:pPr>
+            <a:endParaRPr lang="en-US" sz="1000" dirty="0">
+              <a:solidFill>
+                <a:schemeClr val="bg1">
+                  <a:lumMod val="75000"/>
+                </a:schemeClr>
+              </a:solidFill>
+              <a:effectLst>
+                <a:glow rad="228600">
+                  <a:schemeClr val="accent4">
+                    <a:satMod val="175000"/>
+                    <a:alpha val="40000"/>
+                  </a:schemeClr>
+                </a:glow>
+              </a:effectLst>
+              <a:latin typeface="Press Start 2P" panose="00000500000000000000" pitchFamily="2" charset="0"/>
+            </a:endParaRPr>
+          </a:p>
+          <a:p>
+            <a:pPr marL="171450" indent="-171450">
+              <a:lnSpc>
+                <a:spcPts val="1400"/>
+              </a:lnSpc>
+              <a:buClr>
+                <a:srgbClr val="BD6A62"/>
+              </a:buClr>
+              <a:buSzPts val="1100"/>
+              <a:buFont typeface="Press Start 2P" panose="00000500000000000000" pitchFamily="2" charset="0"/>
+              <a:buChar char="♦"/>
+            </a:pPr>
+            <a:endParaRPr lang="en-US" sz="1000" dirty="0">
+              <a:solidFill>
+                <a:schemeClr val="bg1">
+                  <a:lumMod val="75000"/>
+                </a:schemeClr>
+              </a:solidFill>
+              <a:effectLst>
+                <a:glow rad="228600">
+                  <a:schemeClr val="accent4">
+                    <a:satMod val="175000"/>
+                    <a:alpha val="40000"/>
+                  </a:schemeClr>
+                </a:glow>
+              </a:effectLst>
+              <a:latin typeface="Press Start 2P" panose="00000500000000000000" pitchFamily="2" charset="0"/>
+            </a:endParaRPr>
+          </a:p>
+          <a:p>
+            <a:pPr marL="171450" indent="-171450">
+              <a:lnSpc>
+                <a:spcPts val="1400"/>
+              </a:lnSpc>
+              <a:buClr>
+                <a:srgbClr val="BD6A62"/>
+              </a:buClr>
+              <a:buSzPts val="1100"/>
+              <a:buFont typeface="Press Start 2P" panose="00000500000000000000" pitchFamily="2" charset="0"/>
+              <a:buChar char="♦"/>
+            </a:pPr>
+            <a:endParaRPr lang="en-US" sz="1000" dirty="0">
+              <a:solidFill>
+                <a:schemeClr val="bg1">
+                  <a:lumMod val="75000"/>
+                </a:schemeClr>
+              </a:solidFill>
+              <a:effectLst>
+                <a:glow rad="228600">
+                  <a:schemeClr val="accent4">
+                    <a:satMod val="175000"/>
+                    <a:alpha val="40000"/>
+                  </a:schemeClr>
+                </a:glow>
+              </a:effectLst>
+              <a:latin typeface="Press Start 2P" panose="00000500000000000000" pitchFamily="2" charset="0"/>
+            </a:endParaRPr>
+          </a:p>
+        </p:txBody>
+      </p:sp>
+      <p:sp>
+        <p:nvSpPr>
+          <p:cNvPr id="4" name="Google Shape;999;p37">
+            <a:extLst>
+              <a:ext uri="{FF2B5EF4-FFF2-40B4-BE49-F238E27FC236}">
+                <a16:creationId xmlns:a16="http://schemas.microsoft.com/office/drawing/2014/main" id="{E6E32264-52A2-B655-6D15-2DC8E7C46D25}"/>
+              </a:ext>
+            </a:extLst>
+          </p:cNvPr>
+          <p:cNvSpPr txBox="1">
+            <a:spLocks/>
+          </p:cNvSpPr>
+          <p:nvPr/>
+        </p:nvSpPr>
+        <p:spPr>
+          <a:xfrm>
+            <a:off x="2043566" y="362755"/>
+            <a:ext cx="5067392" cy="526471"/>
+          </a:xfrm>
+          <a:prstGeom prst="rect">
+            <a:avLst/>
+          </a:prstGeom>
+          <a:noFill/>
+          <a:ln>
+            <a:noFill/>
+          </a:ln>
+        </p:spPr>
+        <p:txBody>
+          <a:bodyPr spcFirstLastPara="1" wrap="square" lIns="91425" tIns="91425" rIns="91425" bIns="91425" anchor="ctr" anchorCtr="0">
+            <a:noAutofit/>
+          </a:bodyPr>
+          <a:lstStyle>
+            <a:defPPr marR="0" lvl="0" algn="l" rtl="0">
+              <a:lnSpc>
+                <a:spcPct val="100000"/>
+              </a:lnSpc>
+              <a:spcBef>
+                <a:spcPts val="0"/>
+              </a:spcBef>
+              <a:spcAft>
+                <a:spcPts val="0"/>
+              </a:spcAft>
+            </a:defPPr>
+            <a:lvl1pPr marR="0" lvl="0" algn="l" rtl="0">
+              <a:lnSpc>
+                <a:spcPct val="100000"/>
+              </a:lnSpc>
+              <a:spcBef>
+                <a:spcPts val="0"/>
+              </a:spcBef>
+              <a:spcAft>
+                <a:spcPts val="0"/>
+              </a:spcAft>
+              <a:buClr>
+                <a:srgbClr val="FFFF00"/>
+              </a:buClr>
+              <a:buSzPts val="3000"/>
+              <a:buFont typeface="Press Start 2P"/>
+              <a:buNone/>
+              <a:defRPr sz="3000" b="0" i="0" u="none" strike="noStrike" cap="none">
+                <a:solidFill>
+                  <a:srgbClr val="FFFF00"/>
+                </a:solidFill>
+                <a:latin typeface="Press Start 2P"/>
+                <a:ea typeface="Press Start 2P"/>
+                <a:cs typeface="Press Start 2P"/>
+                <a:sym typeface="Press Start 2P"/>
+              </a:defRPr>
+            </a:lvl1pPr>
+            <a:lvl2pPr marR="0" lvl="1" algn="l" rtl="0">
+              <a:lnSpc>
+                <a:spcPct val="100000"/>
+              </a:lnSpc>
+              <a:spcBef>
+                <a:spcPts val="0"/>
+              </a:spcBef>
+              <a:spcAft>
+                <a:spcPts val="0"/>
+              </a:spcAft>
+              <a:buClr>
+                <a:srgbClr val="FFFF00"/>
+              </a:buClr>
+              <a:buSzPts val="2800"/>
+              <a:buFont typeface="Press Start 2P"/>
+              <a:buNone/>
+              <a:defRPr sz="2800" b="0" i="0" u="none" strike="noStrike" cap="none">
+                <a:solidFill>
+                  <a:srgbClr val="FFFF00"/>
+                </a:solidFill>
+                <a:latin typeface="Press Start 2P"/>
+                <a:ea typeface="Press Start 2P"/>
+                <a:cs typeface="Press Start 2P"/>
+                <a:sym typeface="Press Start 2P"/>
+              </a:defRPr>
+            </a:lvl2pPr>
+            <a:lvl3pPr marR="0" lvl="2" algn="l" rtl="0">
+              <a:lnSpc>
+                <a:spcPct val="100000"/>
+              </a:lnSpc>
+              <a:spcBef>
+                <a:spcPts val="0"/>
+              </a:spcBef>
+              <a:spcAft>
+                <a:spcPts val="0"/>
+              </a:spcAft>
+              <a:buClr>
+                <a:srgbClr val="FFFF00"/>
+              </a:buClr>
+              <a:buSzPts val="2800"/>
+              <a:buFont typeface="Press Start 2P"/>
+              <a:buNone/>
+              <a:defRPr sz="2800" b="0" i="0" u="none" strike="noStrike" cap="none">
+                <a:solidFill>
+                  <a:srgbClr val="FFFF00"/>
+                </a:solidFill>
+                <a:latin typeface="Press Start 2P"/>
+                <a:ea typeface="Press Start 2P"/>
+                <a:cs typeface="Press Start 2P"/>
+                <a:sym typeface="Press Start 2P"/>
+              </a:defRPr>
+            </a:lvl3pPr>
+            <a:lvl4pPr marR="0" lvl="3" algn="l" rtl="0">
+              <a:lnSpc>
+                <a:spcPct val="100000"/>
+              </a:lnSpc>
+              <a:spcBef>
+                <a:spcPts val="0"/>
+              </a:spcBef>
+              <a:spcAft>
+                <a:spcPts val="0"/>
+              </a:spcAft>
+              <a:buClr>
+                <a:srgbClr val="FFFF00"/>
+              </a:buClr>
+              <a:buSzPts val="2800"/>
+              <a:buFont typeface="Press Start 2P"/>
+              <a:buNone/>
+              <a:defRPr sz="2800" b="0" i="0" u="none" strike="noStrike" cap="none">
+                <a:solidFill>
+                  <a:srgbClr val="FFFF00"/>
+                </a:solidFill>
+                <a:latin typeface="Press Start 2P"/>
+                <a:ea typeface="Press Start 2P"/>
+                <a:cs typeface="Press Start 2P"/>
+                <a:sym typeface="Press Start 2P"/>
+              </a:defRPr>
+            </a:lvl4pPr>
+            <a:lvl5pPr marR="0" lvl="4" algn="l" rtl="0">
+              <a:lnSpc>
+                <a:spcPct val="100000"/>
+              </a:lnSpc>
+              <a:spcBef>
+                <a:spcPts val="0"/>
+              </a:spcBef>
+              <a:spcAft>
+                <a:spcPts val="0"/>
+              </a:spcAft>
+              <a:buClr>
+                <a:srgbClr val="FFFF00"/>
+              </a:buClr>
+              <a:buSzPts val="2800"/>
+              <a:buFont typeface="Press Start 2P"/>
+              <a:buNone/>
+              <a:defRPr sz="2800" b="0" i="0" u="none" strike="noStrike" cap="none">
+                <a:solidFill>
+                  <a:srgbClr val="FFFF00"/>
+                </a:solidFill>
+                <a:latin typeface="Press Start 2P"/>
+                <a:ea typeface="Press Start 2P"/>
+                <a:cs typeface="Press Start 2P"/>
+                <a:sym typeface="Press Start 2P"/>
+              </a:defRPr>
+            </a:lvl5pPr>
+            <a:lvl6pPr marR="0" lvl="5" algn="l" rtl="0">
+              <a:lnSpc>
+                <a:spcPct val="100000"/>
+              </a:lnSpc>
+              <a:spcBef>
+                <a:spcPts val="0"/>
+              </a:spcBef>
+              <a:spcAft>
+                <a:spcPts val="0"/>
+              </a:spcAft>
+              <a:buClr>
+                <a:srgbClr val="FFFF00"/>
+              </a:buClr>
+              <a:buSzPts val="2800"/>
+              <a:buFont typeface="Press Start 2P"/>
+              <a:buNone/>
+              <a:defRPr sz="2800" b="0" i="0" u="none" strike="noStrike" cap="none">
+                <a:solidFill>
+                  <a:srgbClr val="FFFF00"/>
+                </a:solidFill>
+                <a:latin typeface="Press Start 2P"/>
+                <a:ea typeface="Press Start 2P"/>
+                <a:cs typeface="Press Start 2P"/>
+                <a:sym typeface="Press Start 2P"/>
+              </a:defRPr>
+            </a:lvl6pPr>
+            <a:lvl7pPr marR="0" lvl="6" algn="l" rtl="0">
+              <a:lnSpc>
+                <a:spcPct val="100000"/>
+              </a:lnSpc>
+              <a:spcBef>
+                <a:spcPts val="0"/>
+              </a:spcBef>
+              <a:spcAft>
+                <a:spcPts val="0"/>
+              </a:spcAft>
+              <a:buClr>
+                <a:srgbClr val="FFFF00"/>
+              </a:buClr>
+              <a:buSzPts val="2800"/>
+              <a:buFont typeface="Press Start 2P"/>
+              <a:buNone/>
+              <a:defRPr sz="2800" b="0" i="0" u="none" strike="noStrike" cap="none">
+                <a:solidFill>
+                  <a:srgbClr val="FFFF00"/>
+                </a:solidFill>
+                <a:latin typeface="Press Start 2P"/>
+                <a:ea typeface="Press Start 2P"/>
+                <a:cs typeface="Press Start 2P"/>
+                <a:sym typeface="Press Start 2P"/>
+              </a:defRPr>
+            </a:lvl7pPr>
+            <a:lvl8pPr marR="0" lvl="7" algn="l" rtl="0">
+              <a:lnSpc>
+                <a:spcPct val="100000"/>
+              </a:lnSpc>
+              <a:spcBef>
+                <a:spcPts val="0"/>
+              </a:spcBef>
+              <a:spcAft>
+                <a:spcPts val="0"/>
+              </a:spcAft>
+              <a:buClr>
+                <a:srgbClr val="FFFF00"/>
+              </a:buClr>
+              <a:buSzPts val="2800"/>
+              <a:buFont typeface="Press Start 2P"/>
+              <a:buNone/>
+              <a:defRPr sz="2800" b="0" i="0" u="none" strike="noStrike" cap="none">
+                <a:solidFill>
+                  <a:srgbClr val="FFFF00"/>
+                </a:solidFill>
+                <a:latin typeface="Press Start 2P"/>
+                <a:ea typeface="Press Start 2P"/>
+                <a:cs typeface="Press Start 2P"/>
+                <a:sym typeface="Press Start 2P"/>
+              </a:defRPr>
+            </a:lvl8pPr>
+            <a:lvl9pPr marR="0" lvl="8" algn="l" rtl="0">
+              <a:lnSpc>
+                <a:spcPct val="100000"/>
+              </a:lnSpc>
+              <a:spcBef>
+                <a:spcPts val="0"/>
+              </a:spcBef>
+              <a:spcAft>
+                <a:spcPts val="0"/>
+              </a:spcAft>
+              <a:buClr>
+                <a:srgbClr val="FFFF00"/>
+              </a:buClr>
+              <a:buSzPts val="2800"/>
+              <a:buFont typeface="Press Start 2P"/>
+              <a:buNone/>
+              <a:defRPr sz="2800" b="0" i="0" u="none" strike="noStrike" cap="none">
+                <a:solidFill>
+                  <a:srgbClr val="FFFF00"/>
+                </a:solidFill>
+                <a:latin typeface="Press Start 2P"/>
+                <a:ea typeface="Press Start 2P"/>
+                <a:cs typeface="Press Start 2P"/>
+                <a:sym typeface="Press Start 2P"/>
+              </a:defRPr>
+            </a:lvl9pPr>
+          </a:lstStyle>
+          <a:p>
+            <a:pPr algn="ctr">
+              <a:buClr>
+                <a:schemeClr val="dk1"/>
+              </a:buClr>
+              <a:buSzPts val="1100"/>
+            </a:pPr>
+            <a:r>
+              <a:rPr lang="en-US" sz="2400" dirty="0">
+                <a:solidFill>
+                  <a:srgbClr val="AB5130"/>
+                </a:solidFill>
+                <a:effectLst>
+                  <a:glow rad="228600">
+                    <a:schemeClr val="accent4">
+                      <a:satMod val="175000"/>
+                      <a:alpha val="40000"/>
+                    </a:schemeClr>
+                  </a:glow>
+                </a:effectLst>
+              </a:rPr>
+              <a:t>Why It’s Unique</a:t>
+            </a:r>
+          </a:p>
+        </p:txBody>
+      </p:sp>
+      <p:pic>
+        <p:nvPicPr>
+          <p:cNvPr id="2" name="Picture 1" descr="A red cross on a black background&#10;&#10;AI-generated content may be incorrect.">
+            <a:extLst>
+              <a:ext uri="{FF2B5EF4-FFF2-40B4-BE49-F238E27FC236}">
+                <a16:creationId xmlns:a16="http://schemas.microsoft.com/office/drawing/2014/main" id="{F642A61D-E1CE-1E72-9D75-9AE3884FA325}"/>
+              </a:ext>
+            </a:extLst>
+          </p:cNvPr>
+          <p:cNvPicPr>
+            <a:picLocks noChangeAspect="1"/>
+          </p:cNvPicPr>
+          <p:nvPr/>
+        </p:nvPicPr>
+        <p:blipFill>
+          <a:blip r:embed="rId4"/>
+          <a:stretch>
+            <a:fillRect/>
+          </a:stretch>
+        </p:blipFill>
+        <p:spPr>
+          <a:xfrm>
+            <a:off x="312978" y="4340822"/>
+            <a:ext cx="1362314" cy="461429"/>
+          </a:xfrm>
+          <a:prstGeom prst="rect">
+            <a:avLst/>
+          </a:prstGeom>
+          <a:effectLst>
+            <a:glow rad="228600">
+              <a:schemeClr val="accent4">
+                <a:satMod val="175000"/>
+                <a:alpha val="40000"/>
+              </a:schemeClr>
+            </a:glow>
+          </a:effectLst>
+        </p:spPr>
+      </p:pic>
+    </p:spTree>
+    <p:extLst>
+      <p:ext uri="{BB962C8B-B14F-4D97-AF65-F5344CB8AC3E}">
+        <p14:creationId xmlns:p14="http://schemas.microsoft.com/office/powerpoint/2010/main" val="2935173221"/>
+      </p:ext>
+    </p:extLst>
+  </p:cSld>
+  <p:clrMapOvr>
+    <a:masterClrMapping/>
+  </p:clrMapOvr>
+</p:sld>
+</file>
+
+<file path=ppt/slides/slide4.xml><?xml version="1.0" encoding="utf-8"?>
+<p:sld xmlns:a="http://schemas.openxmlformats.org/drawingml/2006/main" xmlns:r="http://schemas.openxmlformats.org/officeDocument/2006/relationships" xmlns:p="http://schemas.openxmlformats.org/presentationml/2006/main">
+  <p:cSld>
+    <p:spTree>
+      <p:nvGrpSpPr>
+        <p:cNvPr id="1" name="Shape 998">
+          <a:extLst>
+            <a:ext uri="{FF2B5EF4-FFF2-40B4-BE49-F238E27FC236}">
+              <a16:creationId xmlns:a16="http://schemas.microsoft.com/office/drawing/2014/main" id="{A87C6DD4-3F48-186B-FC05-1008CDCC13F5}"/>
+            </a:ext>
+          </a:extLst>
+        </p:cNvPr>
+        <p:cNvGrpSpPr/>
+        <p:nvPr/>
+      </p:nvGrpSpPr>
+      <p:grpSpPr>
+        <a:xfrm>
+          <a:off x="0" y="0"/>
+          <a:ext cx="0" cy="0"/>
+          <a:chOff x="0" y="0"/>
+          <a:chExt cx="0" cy="0"/>
+        </a:xfrm>
+      </p:grpSpPr>
+      <p:pic>
+        <p:nvPicPr>
+          <p:cNvPr id="5" name="Picture 4" descr="A pixel art of a building">
+            <a:extLst>
+              <a:ext uri="{FF2B5EF4-FFF2-40B4-BE49-F238E27FC236}">
+                <a16:creationId xmlns:a16="http://schemas.microsoft.com/office/drawing/2014/main" id="{7E95556F-87C4-1552-F8EB-11CC3133BC69}"/>
+              </a:ext>
+            </a:extLst>
+          </p:cNvPr>
+          <p:cNvPicPr>
+            <a:picLocks noChangeAspect="1"/>
+          </p:cNvPicPr>
+          <p:nvPr/>
+        </p:nvPicPr>
+        <p:blipFill>
+          <a:blip r:embed="rId3">
+            <a:alphaModFix amt="70000"/>
+          </a:blip>
+          <a:stretch>
+            <a:fillRect/>
+          </a:stretch>
+        </p:blipFill>
+        <p:spPr>
+          <a:xfrm>
+            <a:off x="0" y="0"/>
+            <a:ext cx="9144000" cy="5143500"/>
+          </a:xfrm>
+          <a:prstGeom prst="rect">
+            <a:avLst/>
+          </a:prstGeom>
+        </p:spPr>
+      </p:pic>
+      <p:sp>
+        <p:nvSpPr>
+          <p:cNvPr id="1000" name="Google Shape;1000;p37">
+            <a:extLst>
+              <a:ext uri="{FF2B5EF4-FFF2-40B4-BE49-F238E27FC236}">
+                <a16:creationId xmlns:a16="http://schemas.microsoft.com/office/drawing/2014/main" id="{65F14BB6-487B-792E-D17E-E33AD6852B4E}"/>
+              </a:ext>
+            </a:extLst>
+          </p:cNvPr>
+          <p:cNvSpPr txBox="1">
+            <a:spLocks noGrp="1"/>
+          </p:cNvSpPr>
+          <p:nvPr>
+            <p:ph type="subTitle" idx="4294967295"/>
+          </p:nvPr>
+        </p:nvSpPr>
+        <p:spPr>
+          <a:xfrm>
+            <a:off x="673140" y="981477"/>
+            <a:ext cx="3898859" cy="2727430"/>
+          </a:xfrm>
+          <a:prstGeom prst="rect">
+            <a:avLst/>
+          </a:prstGeom>
+        </p:spPr>
+        <p:txBody>
+          <a:bodyPr spcFirstLastPara="1" wrap="square" lIns="91425" tIns="91425" rIns="91425" bIns="91425" anchor="t" anchorCtr="0">
+            <a:noAutofit/>
+          </a:bodyPr>
+          <a:lstStyle/>
+          <a:p>
+            <a:pPr marL="0" indent="0">
+              <a:lnSpc>
+                <a:spcPct val="150000"/>
+              </a:lnSpc>
+              <a:buClr>
+                <a:srgbClr val="AB5130"/>
+              </a:buClr>
+              <a:buSzPts val="1100"/>
+              <a:buNone/>
+            </a:pPr>
+            <a:r>
+              <a:rPr lang="en-US" sz="1200" dirty="0">
+                <a:solidFill>
+                  <a:srgbClr val="BD6A62"/>
+                </a:solidFill>
+                <a:effectLst>
+                  <a:glow rad="228600">
+                    <a:schemeClr val="accent4">
+                      <a:satMod val="175000"/>
+                      <a:alpha val="40000"/>
+                    </a:schemeClr>
+                  </a:glow>
+                </a:effectLst>
+                <a:latin typeface="Press Start 2P" panose="00000500000000000000" pitchFamily="2" charset="0"/>
+              </a:rPr>
+              <a:t>Core audience</a:t>
+            </a:r>
+          </a:p>
+          <a:p>
+            <a:pPr marL="171450" indent="-171450">
+              <a:lnSpc>
+                <a:spcPct val="150000"/>
+              </a:lnSpc>
+              <a:buClr>
+                <a:srgbClr val="BD6A62"/>
+              </a:buClr>
+              <a:buSzPts val="1100"/>
+              <a:buFont typeface="Press Start 2P" panose="00000500000000000000" pitchFamily="2" charset="0"/>
+              <a:buChar char="★"/>
+            </a:pPr>
+            <a:r>
+              <a:rPr lang="en-US" sz="1000" dirty="0">
+                <a:solidFill>
+                  <a:schemeClr val="bg1">
+                    <a:lumMod val="75000"/>
+                  </a:schemeClr>
+                </a:solidFill>
+                <a:effectLst>
+                  <a:glow rad="228600">
+                    <a:schemeClr val="accent4">
+                      <a:satMod val="175000"/>
+                      <a:alpha val="40000"/>
+                    </a:schemeClr>
+                  </a:glow>
+                </a:effectLst>
+                <a:latin typeface="Press Start 2P" panose="00000500000000000000" pitchFamily="2" charset="0"/>
+              </a:rPr>
+              <a:t>Fans of roguelites (Binding of Isaac, Spelunky).</a:t>
+            </a:r>
+          </a:p>
+          <a:p>
+            <a:pPr marL="171450" indent="-171450">
+              <a:lnSpc>
+                <a:spcPct val="150000"/>
+              </a:lnSpc>
+              <a:buClr>
+                <a:srgbClr val="BD6A62"/>
+              </a:buClr>
+              <a:buSzPts val="1100"/>
+              <a:buFont typeface="Press Start 2P" panose="00000500000000000000" pitchFamily="2" charset="0"/>
+              <a:buChar char="★"/>
+            </a:pPr>
+            <a:endParaRPr lang="en-US" sz="1000" dirty="0">
+              <a:solidFill>
+                <a:schemeClr val="bg1">
+                  <a:lumMod val="75000"/>
+                </a:schemeClr>
+              </a:solidFill>
+              <a:effectLst>
+                <a:glow rad="228600">
+                  <a:schemeClr val="accent4">
+                    <a:satMod val="175000"/>
+                    <a:alpha val="40000"/>
+                  </a:schemeClr>
+                </a:glow>
+              </a:effectLst>
+              <a:latin typeface="Press Start 2P" panose="00000500000000000000" pitchFamily="2" charset="0"/>
+            </a:endParaRPr>
+          </a:p>
+          <a:p>
+            <a:pPr marL="171450" indent="-171450">
+              <a:lnSpc>
+                <a:spcPct val="150000"/>
+              </a:lnSpc>
+              <a:buClr>
+                <a:srgbClr val="BD6A62"/>
+              </a:buClr>
+              <a:buSzPts val="1100"/>
+              <a:buFont typeface="Press Start 2P" panose="00000500000000000000" pitchFamily="2" charset="0"/>
+              <a:buChar char="★"/>
+            </a:pPr>
+            <a:r>
+              <a:rPr lang="en-US" sz="1000" dirty="0">
+                <a:solidFill>
+                  <a:schemeClr val="bg1">
+                    <a:lumMod val="75000"/>
+                  </a:schemeClr>
+                </a:solidFill>
+                <a:effectLst>
+                  <a:glow rad="228600">
+                    <a:schemeClr val="accent4">
+                      <a:satMod val="175000"/>
+                      <a:alpha val="40000"/>
+                    </a:schemeClr>
+                  </a:glow>
+                </a:effectLst>
+                <a:latin typeface="Press Start 2P" panose="00000500000000000000" pitchFamily="2" charset="0"/>
+              </a:rPr>
+              <a:t>Players who enjoy dark humor and absurd comedy (South Park, Adult Swim).</a:t>
+            </a:r>
+          </a:p>
+          <a:p>
+            <a:pPr marL="171450" indent="-171450">
+              <a:lnSpc>
+                <a:spcPct val="150000"/>
+              </a:lnSpc>
+              <a:buClr>
+                <a:srgbClr val="BD6A62"/>
+              </a:buClr>
+              <a:buSzPts val="1100"/>
+              <a:buFont typeface="Press Start 2P" panose="00000500000000000000" pitchFamily="2" charset="0"/>
+              <a:buChar char="★"/>
+            </a:pPr>
+            <a:endParaRPr lang="en-US" sz="1000" dirty="0">
+              <a:solidFill>
+                <a:schemeClr val="bg1">
+                  <a:lumMod val="75000"/>
+                </a:schemeClr>
+              </a:solidFill>
+              <a:effectLst>
+                <a:glow rad="228600">
+                  <a:schemeClr val="accent4">
+                    <a:satMod val="175000"/>
+                    <a:alpha val="40000"/>
+                  </a:schemeClr>
+                </a:glow>
+              </a:effectLst>
+              <a:latin typeface="Press Start 2P" panose="00000500000000000000" pitchFamily="2" charset="0"/>
+            </a:endParaRPr>
+          </a:p>
+          <a:p>
+            <a:pPr marL="171450" indent="-171450">
+              <a:lnSpc>
+                <a:spcPct val="150000"/>
+              </a:lnSpc>
+              <a:buClr>
+                <a:srgbClr val="BD6A62"/>
+              </a:buClr>
+              <a:buSzPts val="1100"/>
+              <a:buFont typeface="Press Start 2P" panose="00000500000000000000" pitchFamily="2" charset="0"/>
+              <a:buChar char="★"/>
+            </a:pPr>
+            <a:r>
+              <a:rPr lang="en-US" sz="1000" dirty="0">
+                <a:solidFill>
+                  <a:schemeClr val="bg1">
+                    <a:lumMod val="75000"/>
+                  </a:schemeClr>
+                </a:solidFill>
+                <a:effectLst>
+                  <a:glow rad="228600">
+                    <a:schemeClr val="accent4">
+                      <a:satMod val="175000"/>
+                      <a:alpha val="40000"/>
+                    </a:schemeClr>
+                  </a:glow>
+                </a:effectLst>
+                <a:latin typeface="Press Start 2P" panose="00000500000000000000" pitchFamily="2" charset="0"/>
+              </a:rPr>
+              <a:t>Gamers who like quirky pixel-art indie hits.</a:t>
+            </a:r>
+          </a:p>
+          <a:p>
+            <a:pPr marL="171450" indent="-171450">
+              <a:lnSpc>
+                <a:spcPct val="150000"/>
+              </a:lnSpc>
+              <a:buClr>
+                <a:srgbClr val="AB5130"/>
+              </a:buClr>
+              <a:buSzPts val="1100"/>
+              <a:buFont typeface="Press Start 2P" panose="00000500000000000000" pitchFamily="2" charset="0"/>
+              <a:buChar char="♦"/>
+            </a:pPr>
+            <a:endParaRPr lang="en-US" sz="1000" dirty="0">
+              <a:solidFill>
+                <a:schemeClr val="bg1">
+                  <a:lumMod val="75000"/>
+                </a:schemeClr>
+              </a:solidFill>
+              <a:effectLst>
+                <a:glow rad="228600">
+                  <a:schemeClr val="accent4">
+                    <a:satMod val="175000"/>
+                    <a:alpha val="40000"/>
+                  </a:schemeClr>
+                </a:glow>
+              </a:effectLst>
+              <a:latin typeface="Press Start 2P" panose="00000500000000000000" pitchFamily="2" charset="0"/>
+            </a:endParaRPr>
+          </a:p>
+          <a:p>
+            <a:pPr marL="171450" indent="-171450">
+              <a:lnSpc>
+                <a:spcPct val="150000"/>
+              </a:lnSpc>
+              <a:buClr>
+                <a:srgbClr val="AB5130"/>
+              </a:buClr>
+              <a:buSzPts val="1100"/>
+              <a:buFont typeface="Press Start 2P" panose="00000500000000000000" pitchFamily="2" charset="0"/>
+              <a:buChar char="♦"/>
+            </a:pPr>
+            <a:endParaRPr lang="en-US" sz="1000" dirty="0">
+              <a:solidFill>
+                <a:schemeClr val="bg1">
+                  <a:lumMod val="75000"/>
+                </a:schemeClr>
+              </a:solidFill>
+              <a:effectLst>
+                <a:glow rad="228600">
+                  <a:schemeClr val="accent4">
+                    <a:satMod val="175000"/>
+                    <a:alpha val="40000"/>
+                  </a:schemeClr>
+                </a:glow>
+              </a:effectLst>
+              <a:latin typeface="Press Start 2P" panose="00000500000000000000" pitchFamily="2" charset="0"/>
+            </a:endParaRPr>
+          </a:p>
+        </p:txBody>
+      </p:sp>
+      <p:sp>
+        <p:nvSpPr>
+          <p:cNvPr id="4" name="Google Shape;999;p37">
+            <a:extLst>
+              <a:ext uri="{FF2B5EF4-FFF2-40B4-BE49-F238E27FC236}">
+                <a16:creationId xmlns:a16="http://schemas.microsoft.com/office/drawing/2014/main" id="{A9363D26-FBA7-5997-1A95-6F1A7D61837D}"/>
+              </a:ext>
+            </a:extLst>
+          </p:cNvPr>
+          <p:cNvSpPr txBox="1">
+            <a:spLocks/>
+          </p:cNvSpPr>
+          <p:nvPr/>
+        </p:nvSpPr>
+        <p:spPr>
+          <a:xfrm>
+            <a:off x="2043566" y="362755"/>
+            <a:ext cx="5067392" cy="526471"/>
+          </a:xfrm>
+          <a:prstGeom prst="rect">
+            <a:avLst/>
+          </a:prstGeom>
+          <a:noFill/>
+          <a:ln>
+            <a:noFill/>
+          </a:ln>
+        </p:spPr>
+        <p:txBody>
+          <a:bodyPr spcFirstLastPara="1" wrap="square" lIns="91425" tIns="91425" rIns="91425" bIns="91425" anchor="ctr" anchorCtr="0">
+            <a:noAutofit/>
+          </a:bodyPr>
+          <a:lstStyle>
+            <a:defPPr marR="0" lvl="0" algn="l" rtl="0">
+              <a:lnSpc>
+                <a:spcPct val="100000"/>
+              </a:lnSpc>
+              <a:spcBef>
+                <a:spcPts val="0"/>
+              </a:spcBef>
+              <a:spcAft>
+                <a:spcPts val="0"/>
+              </a:spcAft>
+            </a:defPPr>
+            <a:lvl1pPr marR="0" lvl="0" algn="l" rtl="0">
+              <a:lnSpc>
+                <a:spcPct val="100000"/>
+              </a:lnSpc>
+              <a:spcBef>
+                <a:spcPts val="0"/>
+              </a:spcBef>
+              <a:spcAft>
+                <a:spcPts val="0"/>
+              </a:spcAft>
+              <a:buClr>
+                <a:srgbClr val="FFFF00"/>
+              </a:buClr>
+              <a:buSzPts val="3000"/>
+              <a:buFont typeface="Press Start 2P"/>
+              <a:buNone/>
+              <a:defRPr sz="3000" b="0" i="0" u="none" strike="noStrike" cap="none">
+                <a:solidFill>
+                  <a:srgbClr val="FFFF00"/>
+                </a:solidFill>
+                <a:latin typeface="Press Start 2P"/>
+                <a:ea typeface="Press Start 2P"/>
+                <a:cs typeface="Press Start 2P"/>
+                <a:sym typeface="Press Start 2P"/>
+              </a:defRPr>
+            </a:lvl1pPr>
+            <a:lvl2pPr marR="0" lvl="1" algn="l" rtl="0">
+              <a:lnSpc>
+                <a:spcPct val="100000"/>
+              </a:lnSpc>
+              <a:spcBef>
+                <a:spcPts val="0"/>
+              </a:spcBef>
+              <a:spcAft>
+                <a:spcPts val="0"/>
+              </a:spcAft>
+              <a:buClr>
+                <a:srgbClr val="FFFF00"/>
+              </a:buClr>
+              <a:buSzPts val="2800"/>
+              <a:buFont typeface="Press Start 2P"/>
+              <a:buNone/>
+              <a:defRPr sz="2800" b="0" i="0" u="none" strike="noStrike" cap="none">
+                <a:solidFill>
+                  <a:srgbClr val="FFFF00"/>
+                </a:solidFill>
+                <a:latin typeface="Press Start 2P"/>
+                <a:ea typeface="Press Start 2P"/>
+                <a:cs typeface="Press Start 2P"/>
+                <a:sym typeface="Press Start 2P"/>
+              </a:defRPr>
+            </a:lvl2pPr>
+            <a:lvl3pPr marR="0" lvl="2" algn="l" rtl="0">
+              <a:lnSpc>
+                <a:spcPct val="100000"/>
+              </a:lnSpc>
+              <a:spcBef>
+                <a:spcPts val="0"/>
+              </a:spcBef>
+              <a:spcAft>
+                <a:spcPts val="0"/>
+              </a:spcAft>
+              <a:buClr>
+                <a:srgbClr val="FFFF00"/>
+              </a:buClr>
+              <a:buSzPts val="2800"/>
+              <a:buFont typeface="Press Start 2P"/>
+              <a:buNone/>
+              <a:defRPr sz="2800" b="0" i="0" u="none" strike="noStrike" cap="none">
+                <a:solidFill>
+                  <a:srgbClr val="FFFF00"/>
+                </a:solidFill>
+                <a:latin typeface="Press Start 2P"/>
+                <a:ea typeface="Press Start 2P"/>
+                <a:cs typeface="Press Start 2P"/>
+                <a:sym typeface="Press Start 2P"/>
+              </a:defRPr>
+            </a:lvl3pPr>
+            <a:lvl4pPr marR="0" lvl="3" algn="l" rtl="0">
+              <a:lnSpc>
+                <a:spcPct val="100000"/>
+              </a:lnSpc>
+              <a:spcBef>
+                <a:spcPts val="0"/>
+              </a:spcBef>
+              <a:spcAft>
+                <a:spcPts val="0"/>
+              </a:spcAft>
+              <a:buClr>
+                <a:srgbClr val="FFFF00"/>
+              </a:buClr>
+              <a:buSzPts val="2800"/>
+              <a:buFont typeface="Press Start 2P"/>
+              <a:buNone/>
+              <a:defRPr sz="2800" b="0" i="0" u="none" strike="noStrike" cap="none">
+                <a:solidFill>
+                  <a:srgbClr val="FFFF00"/>
+                </a:solidFill>
+                <a:latin typeface="Press Start 2P"/>
+                <a:ea typeface="Press Start 2P"/>
+                <a:cs typeface="Press Start 2P"/>
+                <a:sym typeface="Press Start 2P"/>
+              </a:defRPr>
+            </a:lvl4pPr>
+            <a:lvl5pPr marR="0" lvl="4" algn="l" rtl="0">
+              <a:lnSpc>
+                <a:spcPct val="100000"/>
+              </a:lnSpc>
+              <a:spcBef>
+                <a:spcPts val="0"/>
+              </a:spcBef>
+              <a:spcAft>
+                <a:spcPts val="0"/>
+              </a:spcAft>
+              <a:buClr>
+                <a:srgbClr val="FFFF00"/>
+              </a:buClr>
+              <a:buSzPts val="2800"/>
+              <a:buFont typeface="Press Start 2P"/>
+              <a:buNone/>
+              <a:defRPr sz="2800" b="0" i="0" u="none" strike="noStrike" cap="none">
+                <a:solidFill>
+                  <a:srgbClr val="FFFF00"/>
+                </a:solidFill>
+                <a:latin typeface="Press Start 2P"/>
+                <a:ea typeface="Press Start 2P"/>
+                <a:cs typeface="Press Start 2P"/>
+                <a:sym typeface="Press Start 2P"/>
+              </a:defRPr>
+            </a:lvl5pPr>
+            <a:lvl6pPr marR="0" lvl="5" algn="l" rtl="0">
+              <a:lnSpc>
+                <a:spcPct val="100000"/>
+              </a:lnSpc>
+              <a:spcBef>
+                <a:spcPts val="0"/>
+              </a:spcBef>
+              <a:spcAft>
+                <a:spcPts val="0"/>
+              </a:spcAft>
+              <a:buClr>
+                <a:srgbClr val="FFFF00"/>
+              </a:buClr>
+              <a:buSzPts val="2800"/>
+              <a:buFont typeface="Press Start 2P"/>
+              <a:buNone/>
+              <a:defRPr sz="2800" b="0" i="0" u="none" strike="noStrike" cap="none">
+                <a:solidFill>
+                  <a:srgbClr val="FFFF00"/>
+                </a:solidFill>
+                <a:latin typeface="Press Start 2P"/>
+                <a:ea typeface="Press Start 2P"/>
+                <a:cs typeface="Press Start 2P"/>
+                <a:sym typeface="Press Start 2P"/>
+              </a:defRPr>
+            </a:lvl6pPr>
+            <a:lvl7pPr marR="0" lvl="6" algn="l" rtl="0">
+              <a:lnSpc>
+                <a:spcPct val="100000"/>
+              </a:lnSpc>
+              <a:spcBef>
+                <a:spcPts val="0"/>
+              </a:spcBef>
+              <a:spcAft>
+                <a:spcPts val="0"/>
+              </a:spcAft>
+              <a:buClr>
+                <a:srgbClr val="FFFF00"/>
+              </a:buClr>
+              <a:buSzPts val="2800"/>
+              <a:buFont typeface="Press Start 2P"/>
+              <a:buNone/>
+              <a:defRPr sz="2800" b="0" i="0" u="none" strike="noStrike" cap="none">
+                <a:solidFill>
+                  <a:srgbClr val="FFFF00"/>
+                </a:solidFill>
+                <a:latin typeface="Press Start 2P"/>
+                <a:ea typeface="Press Start 2P"/>
+                <a:cs typeface="Press Start 2P"/>
+                <a:sym typeface="Press Start 2P"/>
+              </a:defRPr>
+            </a:lvl7pPr>
+            <a:lvl8pPr marR="0" lvl="7" algn="l" rtl="0">
+              <a:lnSpc>
+                <a:spcPct val="100000"/>
+              </a:lnSpc>
+              <a:spcBef>
+                <a:spcPts val="0"/>
+              </a:spcBef>
+              <a:spcAft>
+                <a:spcPts val="0"/>
+              </a:spcAft>
+              <a:buClr>
+                <a:srgbClr val="FFFF00"/>
+              </a:buClr>
+              <a:buSzPts val="2800"/>
+              <a:buFont typeface="Press Start 2P"/>
+              <a:buNone/>
+              <a:defRPr sz="2800" b="0" i="0" u="none" strike="noStrike" cap="none">
+                <a:solidFill>
+                  <a:srgbClr val="FFFF00"/>
+                </a:solidFill>
+                <a:latin typeface="Press Start 2P"/>
+                <a:ea typeface="Press Start 2P"/>
+                <a:cs typeface="Press Start 2P"/>
+                <a:sym typeface="Press Start 2P"/>
+              </a:defRPr>
+            </a:lvl8pPr>
+            <a:lvl9pPr marR="0" lvl="8" algn="l" rtl="0">
+              <a:lnSpc>
+                <a:spcPct val="100000"/>
+              </a:lnSpc>
+              <a:spcBef>
+                <a:spcPts val="0"/>
+              </a:spcBef>
+              <a:spcAft>
+                <a:spcPts val="0"/>
+              </a:spcAft>
+              <a:buClr>
+                <a:srgbClr val="FFFF00"/>
+              </a:buClr>
+              <a:buSzPts val="2800"/>
+              <a:buFont typeface="Press Start 2P"/>
+              <a:buNone/>
+              <a:defRPr sz="2800" b="0" i="0" u="none" strike="noStrike" cap="none">
+                <a:solidFill>
+                  <a:srgbClr val="FFFF00"/>
+                </a:solidFill>
+                <a:latin typeface="Press Start 2P"/>
+                <a:ea typeface="Press Start 2P"/>
+                <a:cs typeface="Press Start 2P"/>
+                <a:sym typeface="Press Start 2P"/>
+              </a:defRPr>
+            </a:lvl9pPr>
+          </a:lstStyle>
+          <a:p>
+            <a:pPr algn="ctr">
+              <a:buClr>
+                <a:schemeClr val="dk1"/>
+              </a:buClr>
+              <a:buSzPts val="1100"/>
+            </a:pPr>
+            <a:r>
+              <a:rPr lang="en-US" sz="2400" dirty="0">
+                <a:solidFill>
+                  <a:srgbClr val="AB5130"/>
+                </a:solidFill>
+                <a:effectLst>
+                  <a:glow rad="228600">
+                    <a:schemeClr val="accent4">
+                      <a:satMod val="175000"/>
+                      <a:alpha val="40000"/>
+                    </a:schemeClr>
+                  </a:glow>
+                </a:effectLst>
+              </a:rPr>
+              <a:t>Target &amp; Market</a:t>
+            </a:r>
+          </a:p>
+        </p:txBody>
+      </p:sp>
+      <p:pic>
+        <p:nvPicPr>
+          <p:cNvPr id="2" name="Picture 1" descr="A red cross on a black background&#10;&#10;AI-generated content may be incorrect.">
+            <a:extLst>
+              <a:ext uri="{FF2B5EF4-FFF2-40B4-BE49-F238E27FC236}">
+                <a16:creationId xmlns:a16="http://schemas.microsoft.com/office/drawing/2014/main" id="{38CE7E91-9306-6B5F-DEE5-B617A60B266C}"/>
+              </a:ext>
+            </a:extLst>
+          </p:cNvPr>
+          <p:cNvPicPr>
+            <a:picLocks noChangeAspect="1"/>
+          </p:cNvPicPr>
+          <p:nvPr/>
+        </p:nvPicPr>
+        <p:blipFill>
+          <a:blip r:embed="rId4"/>
+          <a:stretch>
+            <a:fillRect/>
+          </a:stretch>
+        </p:blipFill>
+        <p:spPr>
+          <a:xfrm>
+            <a:off x="312978" y="4340822"/>
+            <a:ext cx="1362314" cy="461429"/>
+          </a:xfrm>
+          <a:prstGeom prst="rect">
+            <a:avLst/>
+          </a:prstGeom>
+          <a:effectLst>
+            <a:glow rad="228600">
+              <a:schemeClr val="accent4">
+                <a:satMod val="175000"/>
+                <a:alpha val="40000"/>
+              </a:schemeClr>
+            </a:glow>
+          </a:effectLst>
+        </p:spPr>
+      </p:pic>
+      <p:sp>
+        <p:nvSpPr>
+          <p:cNvPr id="6" name="Google Shape;1000;p37">
+            <a:extLst>
+              <a:ext uri="{FF2B5EF4-FFF2-40B4-BE49-F238E27FC236}">
+                <a16:creationId xmlns:a16="http://schemas.microsoft.com/office/drawing/2014/main" id="{5FA6FDA3-A8F8-EC55-8BAC-B5FAC550795A}"/>
+              </a:ext>
+            </a:extLst>
+          </p:cNvPr>
+          <p:cNvSpPr txBox="1">
+            <a:spLocks/>
+          </p:cNvSpPr>
+          <p:nvPr/>
+        </p:nvSpPr>
+        <p:spPr>
+          <a:xfrm>
+            <a:off x="4721196" y="981477"/>
+            <a:ext cx="4212942" cy="3454755"/>
+          </a:xfrm>
+          <a:prstGeom prst="rect">
+            <a:avLst/>
+          </a:prstGeom>
+          <a:noFill/>
+          <a:ln>
+            <a:noFill/>
+          </a:ln>
+        </p:spPr>
+        <p:txBody>
+          <a:bodyPr spcFirstLastPara="1" wrap="square" lIns="91425" tIns="91425" rIns="91425" bIns="91425" anchor="t" anchorCtr="0">
+            <a:noAutofit/>
+          </a:bodyPr>
+          <a:lstStyle>
+            <a:defPPr marR="0" lvl="0" algn="l" rtl="0">
+              <a:lnSpc>
+                <a:spcPct val="100000"/>
+              </a:lnSpc>
+              <a:spcBef>
+                <a:spcPts val="0"/>
+              </a:spcBef>
+              <a:spcAft>
+                <a:spcPts val="0"/>
+              </a:spcAft>
+            </a:defPPr>
+            <a:lvl1pPr marL="457200" marR="0" lvl="0" indent="-330200" algn="l" rtl="0">
+              <a:lnSpc>
+                <a:spcPct val="115000"/>
+              </a:lnSpc>
+              <a:spcBef>
+                <a:spcPts val="0"/>
+              </a:spcBef>
+              <a:spcAft>
+                <a:spcPts val="0"/>
+              </a:spcAft>
+              <a:buClr>
+                <a:schemeClr val="lt1"/>
+              </a:buClr>
+              <a:buSzPts val="1600"/>
+              <a:buFont typeface="Maven Pro"/>
+              <a:buChar char="●"/>
+              <a:defRPr sz="1600" b="0" i="0" u="none" strike="noStrike" cap="none">
+                <a:solidFill>
+                  <a:schemeClr val="lt1"/>
+                </a:solidFill>
+                <a:latin typeface="Maven Pro"/>
+                <a:ea typeface="Maven Pro"/>
+                <a:cs typeface="Maven Pro"/>
+                <a:sym typeface="Maven Pro"/>
+              </a:defRPr>
+            </a:lvl1pPr>
+            <a:lvl2pPr marL="914400" marR="0" lvl="1" indent="-330200" algn="l" rtl="0">
+              <a:lnSpc>
+                <a:spcPct val="115000"/>
+              </a:lnSpc>
+              <a:spcBef>
+                <a:spcPts val="1600"/>
+              </a:spcBef>
+              <a:spcAft>
+                <a:spcPts val="0"/>
+              </a:spcAft>
+              <a:buClr>
+                <a:schemeClr val="lt1"/>
+              </a:buClr>
+              <a:buSzPts val="1600"/>
+              <a:buFont typeface="Maven Pro"/>
+              <a:buChar char="○"/>
+              <a:defRPr sz="1600" b="0" i="0" u="none" strike="noStrike" cap="none">
+                <a:solidFill>
+                  <a:schemeClr val="lt1"/>
+                </a:solidFill>
+                <a:latin typeface="Maven Pro"/>
+                <a:ea typeface="Maven Pro"/>
+                <a:cs typeface="Maven Pro"/>
+                <a:sym typeface="Maven Pro"/>
+              </a:defRPr>
+            </a:lvl2pPr>
+            <a:lvl3pPr marL="1371600" marR="0" lvl="2" indent="-330200" algn="l" rtl="0">
+              <a:lnSpc>
+                <a:spcPct val="115000"/>
+              </a:lnSpc>
+              <a:spcBef>
+                <a:spcPts val="1600"/>
+              </a:spcBef>
+              <a:spcAft>
+                <a:spcPts val="0"/>
+              </a:spcAft>
+              <a:buClr>
+                <a:schemeClr val="lt1"/>
+              </a:buClr>
+              <a:buSzPts val="1600"/>
+              <a:buFont typeface="Maven Pro"/>
+              <a:buChar char="■"/>
+              <a:defRPr sz="1600" b="0" i="0" u="none" strike="noStrike" cap="none">
+                <a:solidFill>
+                  <a:schemeClr val="lt1"/>
+                </a:solidFill>
+                <a:latin typeface="Maven Pro"/>
+                <a:ea typeface="Maven Pro"/>
+                <a:cs typeface="Maven Pro"/>
+                <a:sym typeface="Maven Pro"/>
+              </a:defRPr>
+            </a:lvl3pPr>
+            <a:lvl4pPr marL="1828800" marR="0" lvl="3" indent="-330200" algn="l" rtl="0">
+              <a:lnSpc>
+                <a:spcPct val="115000"/>
+              </a:lnSpc>
+              <a:spcBef>
+                <a:spcPts val="1600"/>
+              </a:spcBef>
+              <a:spcAft>
+                <a:spcPts val="0"/>
+              </a:spcAft>
+              <a:buClr>
+                <a:schemeClr val="lt1"/>
+              </a:buClr>
+              <a:buSzPts val="1600"/>
+              <a:buFont typeface="Maven Pro"/>
+              <a:buChar char="●"/>
+              <a:defRPr sz="1600" b="0" i="0" u="none" strike="noStrike" cap="none">
+                <a:solidFill>
+                  <a:schemeClr val="lt1"/>
+                </a:solidFill>
+                <a:latin typeface="Maven Pro"/>
+                <a:ea typeface="Maven Pro"/>
+                <a:cs typeface="Maven Pro"/>
+                <a:sym typeface="Maven Pro"/>
+              </a:defRPr>
+            </a:lvl4pPr>
+            <a:lvl5pPr marL="2286000" marR="0" lvl="4" indent="-330200" algn="l" rtl="0">
+              <a:lnSpc>
+                <a:spcPct val="115000"/>
+              </a:lnSpc>
+              <a:spcBef>
+                <a:spcPts val="1600"/>
+              </a:spcBef>
+              <a:spcAft>
+                <a:spcPts val="0"/>
+              </a:spcAft>
+              <a:buClr>
+                <a:schemeClr val="lt1"/>
+              </a:buClr>
+              <a:buSzPts val="1600"/>
+              <a:buFont typeface="Maven Pro"/>
+              <a:buChar char="○"/>
+              <a:defRPr sz="1600" b="0" i="0" u="none" strike="noStrike" cap="none">
+                <a:solidFill>
+                  <a:schemeClr val="lt1"/>
+                </a:solidFill>
+                <a:latin typeface="Maven Pro"/>
+                <a:ea typeface="Maven Pro"/>
+                <a:cs typeface="Maven Pro"/>
+                <a:sym typeface="Maven Pro"/>
+              </a:defRPr>
+            </a:lvl5pPr>
+            <a:lvl6pPr marL="2743200" marR="0" lvl="5" indent="-330200" algn="l" rtl="0">
+              <a:lnSpc>
+                <a:spcPct val="115000"/>
+              </a:lnSpc>
+              <a:spcBef>
+                <a:spcPts val="1600"/>
+              </a:spcBef>
+              <a:spcAft>
+                <a:spcPts val="0"/>
+              </a:spcAft>
+              <a:buClr>
+                <a:schemeClr val="lt1"/>
+              </a:buClr>
+              <a:buSzPts val="1600"/>
+              <a:buFont typeface="Maven Pro"/>
+              <a:buChar char="■"/>
+              <a:defRPr sz="1600" b="0" i="0" u="none" strike="noStrike" cap="none">
+                <a:solidFill>
+                  <a:schemeClr val="lt1"/>
+                </a:solidFill>
+                <a:latin typeface="Maven Pro"/>
+                <a:ea typeface="Maven Pro"/>
+                <a:cs typeface="Maven Pro"/>
+                <a:sym typeface="Maven Pro"/>
+              </a:defRPr>
+            </a:lvl6pPr>
+            <a:lvl7pPr marL="3200400" marR="0" lvl="6" indent="-330200" algn="l" rtl="0">
+              <a:lnSpc>
+                <a:spcPct val="115000"/>
+              </a:lnSpc>
+              <a:spcBef>
+                <a:spcPts val="1600"/>
+              </a:spcBef>
+              <a:spcAft>
+                <a:spcPts val="0"/>
+              </a:spcAft>
+              <a:buClr>
+                <a:schemeClr val="lt1"/>
+              </a:buClr>
+              <a:buSzPts val="1600"/>
+              <a:buFont typeface="Maven Pro"/>
+              <a:buChar char="●"/>
+              <a:defRPr sz="1600" b="0" i="0" u="none" strike="noStrike" cap="none">
+                <a:solidFill>
+                  <a:schemeClr val="lt1"/>
+                </a:solidFill>
+                <a:latin typeface="Maven Pro"/>
+                <a:ea typeface="Maven Pro"/>
+                <a:cs typeface="Maven Pro"/>
+                <a:sym typeface="Maven Pro"/>
+              </a:defRPr>
+            </a:lvl7pPr>
+            <a:lvl8pPr marL="3657600" marR="0" lvl="7" indent="-330200" algn="l" rtl="0">
+              <a:lnSpc>
+                <a:spcPct val="115000"/>
+              </a:lnSpc>
+              <a:spcBef>
+                <a:spcPts val="1600"/>
+              </a:spcBef>
+              <a:spcAft>
+                <a:spcPts val="0"/>
+              </a:spcAft>
+              <a:buClr>
+                <a:schemeClr val="lt1"/>
+              </a:buClr>
+              <a:buSzPts val="1600"/>
+              <a:buFont typeface="Maven Pro"/>
+              <a:buChar char="○"/>
+              <a:defRPr sz="1600" b="0" i="0" u="none" strike="noStrike" cap="none">
+                <a:solidFill>
+                  <a:schemeClr val="lt1"/>
+                </a:solidFill>
+                <a:latin typeface="Maven Pro"/>
+                <a:ea typeface="Maven Pro"/>
+                <a:cs typeface="Maven Pro"/>
+                <a:sym typeface="Maven Pro"/>
+              </a:defRPr>
+            </a:lvl8pPr>
+            <a:lvl9pPr marL="4114800" marR="0" lvl="8" indent="-330200" algn="l" rtl="0">
+              <a:lnSpc>
+                <a:spcPct val="115000"/>
+              </a:lnSpc>
+              <a:spcBef>
+                <a:spcPts val="1600"/>
+              </a:spcBef>
+              <a:spcAft>
+                <a:spcPts val="1600"/>
+              </a:spcAft>
+              <a:buClr>
+                <a:schemeClr val="lt1"/>
+              </a:buClr>
+              <a:buSzPts val="1600"/>
+              <a:buFont typeface="Maven Pro"/>
+              <a:buChar char="■"/>
+              <a:defRPr sz="1600" b="0" i="0" u="none" strike="noStrike" cap="none">
+                <a:solidFill>
+                  <a:schemeClr val="lt1"/>
+                </a:solidFill>
+                <a:latin typeface="Maven Pro"/>
+                <a:ea typeface="Maven Pro"/>
+                <a:cs typeface="Maven Pro"/>
+                <a:sym typeface="Maven Pro"/>
+              </a:defRPr>
+            </a:lvl9pPr>
+          </a:lstStyle>
+          <a:p>
+            <a:pPr marL="0" indent="0">
+              <a:lnSpc>
+                <a:spcPct val="150000"/>
+              </a:lnSpc>
+              <a:buClr>
+                <a:srgbClr val="AB5130"/>
+              </a:buClr>
+              <a:buSzPts val="1100"/>
+              <a:buFont typeface="Maven Pro"/>
+              <a:buNone/>
+            </a:pPr>
+            <a:r>
+              <a:rPr lang="en-US" sz="1200" dirty="0">
+                <a:solidFill>
+                  <a:srgbClr val="BD6A62"/>
+                </a:solidFill>
+                <a:effectLst>
+                  <a:glow rad="228600">
+                    <a:schemeClr val="accent4">
+                      <a:satMod val="175000"/>
+                      <a:alpha val="40000"/>
+                    </a:schemeClr>
+                  </a:glow>
+                </a:effectLst>
+                <a:latin typeface="Press Start 2P" panose="00000500000000000000" pitchFamily="2" charset="0"/>
+              </a:rPr>
+              <a:t>Market fit</a:t>
+            </a:r>
+            <a:endParaRPr lang="en-US" sz="1000" dirty="0">
+              <a:solidFill>
+                <a:srgbClr val="BD6A62"/>
+              </a:solidFill>
+              <a:effectLst>
+                <a:glow rad="228600">
+                  <a:schemeClr val="accent4">
+                    <a:satMod val="175000"/>
+                    <a:alpha val="40000"/>
+                  </a:schemeClr>
+                </a:glow>
+              </a:effectLst>
+              <a:latin typeface="Press Start 2P" panose="00000500000000000000" pitchFamily="2" charset="0"/>
+            </a:endParaRPr>
+          </a:p>
+          <a:p>
+            <a:pPr marL="171450" indent="-171450">
+              <a:lnSpc>
+                <a:spcPct val="150000"/>
+              </a:lnSpc>
+              <a:buClr>
+                <a:srgbClr val="BD6A62"/>
+              </a:buClr>
+              <a:buSzPts val="1100"/>
+              <a:buFont typeface="Press Start 2P" panose="00000500000000000000" pitchFamily="2" charset="0"/>
+              <a:buChar char="★"/>
+            </a:pPr>
+            <a:r>
+              <a:rPr lang="en-US" sz="1000" dirty="0">
+                <a:solidFill>
+                  <a:schemeClr val="bg1">
+                    <a:lumMod val="75000"/>
+                  </a:schemeClr>
+                </a:solidFill>
+                <a:effectLst>
+                  <a:glow rad="228600">
+                    <a:schemeClr val="accent4">
+                      <a:satMod val="175000"/>
+                      <a:alpha val="40000"/>
+                    </a:schemeClr>
+                  </a:glow>
+                </a:effectLst>
+                <a:latin typeface="Press Start 2P" panose="00000500000000000000" pitchFamily="2" charset="0"/>
+              </a:rPr>
+              <a:t>Roguelites remain one of the most successful indie genres on PC/console.</a:t>
+            </a:r>
+          </a:p>
+          <a:p>
+            <a:pPr marL="171450" indent="-171450">
+              <a:lnSpc>
+                <a:spcPct val="150000"/>
+              </a:lnSpc>
+              <a:buClr>
+                <a:srgbClr val="BD6A62"/>
+              </a:buClr>
+              <a:buSzPts val="1100"/>
+              <a:buFont typeface="Press Start 2P" panose="00000500000000000000" pitchFamily="2" charset="0"/>
+              <a:buChar char="★"/>
+            </a:pPr>
+            <a:endParaRPr lang="en-US" sz="1000" dirty="0">
+              <a:solidFill>
+                <a:schemeClr val="bg1">
+                  <a:lumMod val="75000"/>
+                </a:schemeClr>
+              </a:solidFill>
+              <a:effectLst>
+                <a:glow rad="228600">
+                  <a:schemeClr val="accent4">
+                    <a:satMod val="175000"/>
+                    <a:alpha val="40000"/>
+                  </a:schemeClr>
+                </a:glow>
+              </a:effectLst>
+              <a:latin typeface="Press Start 2P" panose="00000500000000000000" pitchFamily="2" charset="0"/>
+            </a:endParaRPr>
+          </a:p>
+          <a:p>
+            <a:pPr marL="171450" indent="-171450">
+              <a:lnSpc>
+                <a:spcPct val="150000"/>
+              </a:lnSpc>
+              <a:buClr>
+                <a:srgbClr val="BD6A62"/>
+              </a:buClr>
+              <a:buSzPts val="1100"/>
+              <a:buFont typeface="Press Start 2P" panose="00000500000000000000" pitchFamily="2" charset="0"/>
+              <a:buChar char="★"/>
+            </a:pPr>
+            <a:r>
+              <a:rPr lang="en-US" sz="1000" dirty="0">
+                <a:solidFill>
+                  <a:schemeClr val="bg1">
+                    <a:lumMod val="75000"/>
+                  </a:schemeClr>
+                </a:solidFill>
+                <a:effectLst>
+                  <a:glow rad="228600">
+                    <a:schemeClr val="accent4">
+                      <a:satMod val="175000"/>
+                      <a:alpha val="40000"/>
+                    </a:schemeClr>
+                  </a:glow>
+                </a:effectLst>
+                <a:latin typeface="Press Start 2P" panose="00000500000000000000" pitchFamily="2" charset="0"/>
+              </a:rPr>
+              <a:t>Our mix of simple combat + bizarre humor opens the door to both hardcore roguelite fans and more casual players.</a:t>
+            </a:r>
+          </a:p>
+          <a:p>
+            <a:pPr marL="171450" indent="-171450">
+              <a:lnSpc>
+                <a:spcPct val="150000"/>
+              </a:lnSpc>
+              <a:buClr>
+                <a:srgbClr val="BD6A62"/>
+              </a:buClr>
+              <a:buSzPts val="1100"/>
+              <a:buFont typeface="Press Start 2P" panose="00000500000000000000" pitchFamily="2" charset="0"/>
+              <a:buChar char="★"/>
+            </a:pPr>
+            <a:endParaRPr lang="en-US" sz="1000" dirty="0">
+              <a:solidFill>
+                <a:schemeClr val="bg1">
+                  <a:lumMod val="75000"/>
+                </a:schemeClr>
+              </a:solidFill>
+              <a:effectLst>
+                <a:glow rad="228600">
+                  <a:schemeClr val="accent4">
+                    <a:satMod val="175000"/>
+                    <a:alpha val="40000"/>
+                  </a:schemeClr>
+                </a:glow>
+              </a:effectLst>
+              <a:latin typeface="Press Start 2P" panose="00000500000000000000" pitchFamily="2" charset="0"/>
+            </a:endParaRPr>
+          </a:p>
+          <a:p>
+            <a:pPr marL="171450" indent="-171450">
+              <a:lnSpc>
+                <a:spcPct val="150000"/>
+              </a:lnSpc>
+              <a:buClr>
+                <a:srgbClr val="BD6A62"/>
+              </a:buClr>
+              <a:buSzPts val="1100"/>
+              <a:buFont typeface="Press Start 2P" panose="00000500000000000000" pitchFamily="2" charset="0"/>
+              <a:buChar char="★"/>
+            </a:pPr>
+            <a:r>
+              <a:rPr lang="en-US" sz="1000" dirty="0">
+                <a:solidFill>
+                  <a:schemeClr val="bg1">
+                    <a:lumMod val="75000"/>
+                  </a:schemeClr>
+                </a:solidFill>
+                <a:effectLst>
+                  <a:glow rad="228600">
+                    <a:schemeClr val="accent4">
+                      <a:satMod val="175000"/>
+                      <a:alpha val="40000"/>
+                    </a:schemeClr>
+                  </a:glow>
+                </a:effectLst>
+                <a:latin typeface="Press Start 2P" panose="00000500000000000000" pitchFamily="2" charset="0"/>
+              </a:rPr>
+              <a:t>Distinctive identity: grotesque yet funny, procedural yet narrative-driven.</a:t>
+            </a:r>
+          </a:p>
+        </p:txBody>
+      </p:sp>
+    </p:spTree>
+    <p:extLst>
+      <p:ext uri="{BB962C8B-B14F-4D97-AF65-F5344CB8AC3E}">
+        <p14:creationId xmlns:p14="http://schemas.microsoft.com/office/powerpoint/2010/main" val="2912989014"/>
+      </p:ext>
+    </p:extLst>
+  </p:cSld>
+  <p:clrMapOvr>
+    <a:masterClrMapping/>
+  </p:clrMapOvr>
+</p:sld>
+</file>
+
+<file path=ppt/slides/slide5.xml><?xml version="1.0" encoding="utf-8"?>
 <p:sld xmlns:a="http://schemas.openxmlformats.org/drawingml/2006/main" xmlns:r="http://schemas.openxmlformats.org/officeDocument/2006/relationships" xmlns:p="http://schemas.openxmlformats.org/presentationml/2006/main">
   <p:cSld>
     <p:spTree>
@@ -22337,7 +25289,7 @@
 </p:sld>
 </file>
 
-<file path=ppt/slides/slide4.xml><?xml version="1.0" encoding="utf-8"?>
+<file path=ppt/slides/slide6.xml><?xml version="1.0" encoding="utf-8"?>
 <p:sld xmlns:a="http://schemas.openxmlformats.org/drawingml/2006/main" xmlns:r="http://schemas.openxmlformats.org/officeDocument/2006/relationships" xmlns:p="http://schemas.openxmlformats.org/presentationml/2006/main">
   <p:cSld>
     <p:spTree>
@@ -22411,7 +25363,7 @@
         <p:spPr>
           <a:xfrm>
             <a:off x="468268" y="1057573"/>
-            <a:ext cx="3943625" cy="1112837"/>
+            <a:ext cx="4103732" cy="1112837"/>
           </a:xfrm>
           <a:prstGeom prst="rect">
             <a:avLst/>
@@ -22428,11 +25380,11 @@
                 <a:spcPts val="1400"/>
               </a:lnSpc>
               <a:buClr>
-                <a:srgbClr val="AB5130"/>
+                <a:srgbClr val="BD6A62"/>
               </a:buClr>
               <a:buSzPts val="1100"/>
               <a:buFont typeface="Press Start 2P" panose="00000500000000000000" pitchFamily="2" charset="0"/>
-              <a:buChar char="♦"/>
+              <a:buChar char="★"/>
             </a:pPr>
             <a:r>
               <a:rPr lang="en-US" sz="1000" dirty="0">
@@ -22451,7 +25403,7 @@
                 </a:effectLst>
                 <a:latin typeface="Press Start 2P" panose="00000500000000000000" pitchFamily="2" charset="0"/>
               </a:rPr>
-              <a:t>Explore an evil horror ride filled with ugly creatures, traps, puzzles, items and secrets.</a:t>
+              <a:t>Explore an evil horror ride filled with ugly creatures, funny characters, traps, puzzles, items and secrets.</a:t>
             </a:r>
           </a:p>
           <a:p>
@@ -22460,11 +25412,11 @@
                 <a:spcPts val="1400"/>
               </a:lnSpc>
               <a:buClr>
-                <a:srgbClr val="AB5130"/>
+                <a:srgbClr val="BD6A62"/>
               </a:buClr>
               <a:buSzPts val="1100"/>
               <a:buFont typeface="Press Start 2P" panose="00000500000000000000" pitchFamily="2" charset="0"/>
-              <a:buChar char="♦"/>
+              <a:buChar char="★"/>
             </a:pPr>
             <a:endParaRPr lang="en-US" sz="1000" dirty="0">
               <a:solidFill>
@@ -22489,11 +25441,11 @@
                 <a:spcPts val="1400"/>
               </a:lnSpc>
               <a:buClr>
-                <a:srgbClr val="AB5130"/>
+                <a:srgbClr val="BD6A62"/>
               </a:buClr>
               <a:buSzPts val="1100"/>
               <a:buFont typeface="Press Start 2P" panose="00000500000000000000" pitchFamily="2" charset="0"/>
-              <a:buChar char="♦"/>
+              <a:buChar char="★"/>
             </a:pPr>
             <a:r>
               <a:rPr lang="en-US" sz="1000" dirty="0">
@@ -22512,7 +25464,7 @@
                 </a:effectLst>
                 <a:latin typeface="Press Start 2P" panose="00000500000000000000" pitchFamily="2" charset="0"/>
               </a:rPr>
-              <a:t>Simple 2D bizarre action. Push carts and face grotesque monsters and bosses.</a:t>
+              <a:t>Atmospheric lighting-darkness itself becomes an obstacle—sometimes only your items can pierce it.</a:t>
             </a:r>
           </a:p>
           <a:p>
@@ -22521,11 +25473,11 @@
                 <a:spcPts val="1400"/>
               </a:lnSpc>
               <a:buClr>
-                <a:srgbClr val="AB5130"/>
+                <a:srgbClr val="BD6A62"/>
               </a:buClr>
               <a:buSzPts val="1100"/>
               <a:buFont typeface="Press Start 2P" panose="00000500000000000000" pitchFamily="2" charset="0"/>
-              <a:buChar char="♦"/>
+              <a:buChar char="★"/>
             </a:pPr>
             <a:endParaRPr lang="en-US" sz="1000" dirty="0">
               <a:solidFill>
@@ -22550,11 +25502,11 @@
                 <a:spcPts val="1400"/>
               </a:lnSpc>
               <a:buClr>
-                <a:srgbClr val="AB5130"/>
+                <a:srgbClr val="BD6A62"/>
               </a:buClr>
               <a:buSzPts val="1100"/>
               <a:buFont typeface="Press Start 2P" panose="00000500000000000000" pitchFamily="2" charset="0"/>
-              <a:buChar char="♦"/>
+              <a:buChar char="★"/>
             </a:pPr>
             <a:r>
               <a:rPr lang="en-US" sz="1000" dirty="0">
@@ -22573,8 +25525,66 @@
                 </a:effectLst>
                 <a:latin typeface="Press Start 2P" panose="00000500000000000000" pitchFamily="2" charset="0"/>
               </a:rPr>
-              <a:t>Permadeath - each death teaches something new and unlocks items.</a:t>
+              <a:t>Narrative meta-goals: layers of mystery and long-term objectives beyond survival.</a:t>
             </a:r>
+          </a:p>
+          <a:p>
+            <a:pPr marL="171450" indent="-171450">
+              <a:lnSpc>
+                <a:spcPts val="1400"/>
+              </a:lnSpc>
+              <a:buClr>
+                <a:srgbClr val="BD6A62"/>
+              </a:buClr>
+              <a:buSzPts val="1100"/>
+              <a:buFont typeface="Press Start 2P" panose="00000500000000000000" pitchFamily="2" charset="0"/>
+              <a:buChar char="★"/>
+            </a:pPr>
+            <a:endParaRPr lang="en-US" sz="1000" dirty="0">
+              <a:solidFill>
+                <a:schemeClr val="bg1">
+                  <a:lumMod val="75000"/>
+                </a:schemeClr>
+              </a:solidFill>
+              <a:effectLst>
+                <a:glow rad="228600">
+                  <a:schemeClr val="accent4">
+                    <a:satMod val="175000"/>
+                    <a:alpha val="40000"/>
+                  </a:schemeClr>
+                </a:glow>
+              </a:effectLst>
+              <a:latin typeface="Press Start 2P" panose="00000500000000000000" pitchFamily="2" charset="0"/>
+            </a:endParaRPr>
+          </a:p>
+          <a:p>
+            <a:pPr marL="171450" indent="-171450">
+              <a:lnSpc>
+                <a:spcPts val="1400"/>
+              </a:lnSpc>
+              <a:buClr>
+                <a:srgbClr val="BD6A62"/>
+              </a:buClr>
+              <a:buSzPts val="1100"/>
+              <a:buFont typeface="Press Start 2P" panose="00000500000000000000" pitchFamily="2" charset="0"/>
+              <a:buChar char="★"/>
+            </a:pPr>
+            <a:endParaRPr lang="en-US" sz="1000" dirty="0">
+              <a:solidFill>
+                <a:schemeClr val="bg1">
+                  <a:lumMod val="75000"/>
+                </a:schemeClr>
+              </a:solidFill>
+              <a:effectLst>
+                <a:glow rad="228600">
+                  <a:schemeClr val="accent4">
+                    <a:satMod val="175000"/>
+                    <a:alpha val="40000"/>
+                  </a:schemeClr>
+                </a:glow>
+              </a:effectLst>
+              <a:latin typeface="Press Start 2P" panose="00000500000000000000" pitchFamily="2" charset="0"/>
+            </a:endParaRPr>
           </a:p>
         </p:txBody>
       </p:sp>
@@ -23204,11 +26214,11 @@
                 <a:spcPts val="1400"/>
               </a:lnSpc>
               <a:buClr>
-                <a:srgbClr val="AB5130"/>
+                <a:srgbClr val="BD6A62"/>
               </a:buClr>
               <a:buSzPts val="1100"/>
               <a:buFont typeface="Press Start 2P" panose="00000500000000000000" pitchFamily="2" charset="0"/>
-              <a:buChar char="♦"/>
+              <a:buChar char="★"/>
             </a:pPr>
             <a:r>
               <a:rPr lang="en-US" sz="1000" dirty="0">
@@ -23227,7 +26237,7 @@
                 </a:effectLst>
                 <a:latin typeface="Press Start 2P" panose="00000500000000000000" pitchFamily="2" charset="0"/>
               </a:rPr>
-              <a:t>Play as either Idle twin, each with unique abilities and exclusive paths.</a:t>
+              <a:t>Procedurally generated levels making every run unpredictable.</a:t>
             </a:r>
           </a:p>
           <a:p>
@@ -23236,11 +26246,11 @@
                 <a:spcPts val="1400"/>
               </a:lnSpc>
               <a:buClr>
-                <a:srgbClr val="AB5130"/>
+                <a:srgbClr val="BD6A62"/>
               </a:buClr>
               <a:buSzPts val="1100"/>
               <a:buFont typeface="Press Start 2P" panose="00000500000000000000" pitchFamily="2" charset="0"/>
-              <a:buChar char="♦"/>
+              <a:buChar char="★"/>
             </a:pPr>
             <a:endParaRPr lang="en-US" sz="1000" dirty="0">
               <a:solidFill>
@@ -23265,11 +26275,11 @@
                 <a:spcPts val="1400"/>
               </a:lnSpc>
               <a:buClr>
-                <a:srgbClr val="AB5130"/>
+                <a:srgbClr val="BD6A62"/>
               </a:buClr>
               <a:buSzPts val="1100"/>
               <a:buFont typeface="Press Start 2P" panose="00000500000000000000" pitchFamily="2" charset="0"/>
-              <a:buChar char="♦"/>
+              <a:buChar char="★"/>
             </a:pPr>
             <a:r>
               <a:rPr lang="en-US" sz="1000" dirty="0">
@@ -23288,7 +26298,7 @@
                 </a:effectLst>
                 <a:latin typeface="Press Start 2P" panose="00000500000000000000" pitchFamily="2" charset="0"/>
               </a:rPr>
-              <a:t>Rescue parodies of lost celebrities with bizarre rewards (Bill Fences, Donald Grump. Elon Husk).</a:t>
+              <a:t>Permadeath - each death teaches something new and unlocks items.</a:t>
             </a:r>
           </a:p>
           <a:p>
@@ -23297,11 +26307,11 @@
                 <a:spcPts val="1400"/>
               </a:lnSpc>
               <a:buClr>
-                <a:srgbClr val="AB5130"/>
+                <a:srgbClr val="BD6A62"/>
               </a:buClr>
               <a:buSzPts val="1100"/>
               <a:buFont typeface="Press Start 2P" panose="00000500000000000000" pitchFamily="2" charset="0"/>
-              <a:buChar char="♦"/>
+              <a:buChar char="★"/>
             </a:pPr>
             <a:endParaRPr lang="en-US" sz="1000" dirty="0">
               <a:solidFill>
@@ -23326,11 +26336,11 @@
                 <a:spcPts val="1400"/>
               </a:lnSpc>
               <a:buClr>
-                <a:srgbClr val="AB5130"/>
+                <a:srgbClr val="BD6A62"/>
               </a:buClr>
               <a:buSzPts val="1100"/>
               <a:buFont typeface="Press Start 2P" panose="00000500000000000000" pitchFamily="2" charset="0"/>
-              <a:buChar char="♦"/>
+              <a:buChar char="★"/>
             </a:pPr>
             <a:r>
               <a:rPr lang="en-US" sz="1000" dirty="0">
@@ -23349,7 +26359,7 @@
                 </a:effectLst>
                 <a:latin typeface="Press Start 2P" panose="00000500000000000000" pitchFamily="2" charset="0"/>
               </a:rPr>
-              <a:t>Narrative twist with meta-goals to bring layers of mystery and long-term goals.</a:t>
+              <a:t>Play as either Idle twin, each with unique abilities and sometimes exclusive paths.</a:t>
             </a:r>
           </a:p>
           <a:p>
@@ -23358,162 +26368,11 @@
                 <a:spcPts val="1400"/>
               </a:lnSpc>
               <a:buClr>
-                <a:srgbClr val="AB5130"/>
+                <a:srgbClr val="BD6A62"/>
               </a:buClr>
               <a:buSzPts val="1100"/>
               <a:buFont typeface="Press Start 2P" panose="00000500000000000000" pitchFamily="2" charset="0"/>
-              <a:buChar char="♦"/>
-            </a:pPr>
-            <a:endParaRPr lang="en-US" sz="1000" dirty="0">
-              <a:solidFill>
-                <a:srgbClr val="8F4D57"/>
-              </a:solidFill>
-              <a:latin typeface="Press Start 2P" panose="00000500000000000000" pitchFamily="2" charset="0"/>
-            </a:endParaRPr>
-          </a:p>
-        </p:txBody>
-      </p:sp>
-    </p:spTree>
-    <p:extLst>
-      <p:ext uri="{BB962C8B-B14F-4D97-AF65-F5344CB8AC3E}">
-        <p14:creationId xmlns:p14="http://schemas.microsoft.com/office/powerpoint/2010/main" val="518475266"/>
-      </p:ext>
-    </p:extLst>
-  </p:cSld>
-  <p:clrMapOvr>
-    <a:masterClrMapping/>
-  </p:clrMapOvr>
-</p:sld>
-</file>
-
-<file path=ppt/slides/slide5.xml><?xml version="1.0" encoding="utf-8"?>
-<p:sld xmlns:a="http://schemas.openxmlformats.org/drawingml/2006/main" xmlns:r="http://schemas.openxmlformats.org/officeDocument/2006/relationships" xmlns:p="http://schemas.openxmlformats.org/presentationml/2006/main">
-  <p:cSld>
-    <p:spTree>
-      <p:nvGrpSpPr>
-        <p:cNvPr id="1" name="Shape 998">
-          <a:extLst>
-            <a:ext uri="{FF2B5EF4-FFF2-40B4-BE49-F238E27FC236}">
-              <a16:creationId xmlns:a16="http://schemas.microsoft.com/office/drawing/2014/main" id="{69A2DC82-5308-B4D3-F2AB-4C5F2D8CAD34}"/>
-            </a:ext>
-          </a:extLst>
-        </p:cNvPr>
-        <p:cNvGrpSpPr/>
-        <p:nvPr/>
-      </p:nvGrpSpPr>
-      <p:grpSpPr>
-        <a:xfrm>
-          <a:off x="0" y="0"/>
-          <a:ext cx="0" cy="0"/>
-          <a:chOff x="0" y="0"/>
-          <a:chExt cx="0" cy="0"/>
-        </a:xfrm>
-      </p:grpSpPr>
-      <p:pic>
-        <p:nvPicPr>
-          <p:cNvPr id="7" name="Picture 6" descr="A pixel art of a building">
-            <a:extLst>
-              <a:ext uri="{FF2B5EF4-FFF2-40B4-BE49-F238E27FC236}">
-                <a16:creationId xmlns:a16="http://schemas.microsoft.com/office/drawing/2014/main" id="{10E48D33-20E2-8C9E-87A0-0ED650853912}"/>
-              </a:ext>
-            </a:extLst>
-          </p:cNvPr>
-          <p:cNvPicPr>
-            <a:picLocks noChangeAspect="1"/>
-          </p:cNvPicPr>
-          <p:nvPr/>
-        </p:nvPicPr>
-        <p:blipFill>
-          <a:blip r:embed="rId3">
-            <a:alphaModFix amt="70000"/>
-          </a:blip>
-          <a:stretch>
-            <a:fillRect/>
-          </a:stretch>
-        </p:blipFill>
-        <p:spPr>
-          <a:xfrm>
-            <a:off x="0" y="0"/>
-            <a:ext cx="9144000" cy="5143500"/>
-          </a:xfrm>
-          <a:prstGeom prst="rect">
-            <a:avLst/>
-          </a:prstGeom>
-        </p:spPr>
-      </p:pic>
-      <p:sp>
-        <p:nvSpPr>
-          <p:cNvPr id="1000" name="Google Shape;1000;p37">
-            <a:extLst>
-              <a:ext uri="{FF2B5EF4-FFF2-40B4-BE49-F238E27FC236}">
-                <a16:creationId xmlns:a16="http://schemas.microsoft.com/office/drawing/2014/main" id="{BCFCE1A6-28CC-9EF8-2D9A-E51D0ABB963F}"/>
-              </a:ext>
-            </a:extLst>
-          </p:cNvPr>
-          <p:cNvSpPr txBox="1">
-            <a:spLocks noGrp="1"/>
-          </p:cNvSpPr>
-          <p:nvPr>
-            <p:ph type="subTitle" idx="4294967295"/>
-          </p:nvPr>
-        </p:nvSpPr>
-        <p:spPr>
-          <a:xfrm>
-            <a:off x="503677" y="1167927"/>
-            <a:ext cx="3723549" cy="1112837"/>
-          </a:xfrm>
-          <a:prstGeom prst="rect">
-            <a:avLst/>
-          </a:prstGeom>
-        </p:spPr>
-        <p:txBody>
-          <a:bodyPr spcFirstLastPara="1" wrap="square" lIns="91425" tIns="91425" rIns="91425" bIns="91425" anchor="t" anchorCtr="0">
-            <a:noAutofit/>
-          </a:bodyPr>
-          <a:lstStyle/>
-          <a:p>
-            <a:pPr marL="171450" indent="-171450">
-              <a:lnSpc>
-                <a:spcPts val="1400"/>
-              </a:lnSpc>
-              <a:buClr>
-                <a:srgbClr val="AB5130"/>
-              </a:buClr>
-              <a:buSzPts val="1100"/>
-              <a:buFont typeface="Press Start 2P" panose="00000500000000000000" pitchFamily="2" charset="0"/>
-              <a:buChar char="♦"/>
-            </a:pPr>
-            <a:r>
-              <a:rPr lang="en-US" sz="1000" dirty="0">
-                <a:solidFill>
-                  <a:schemeClr val="bg1">
-                    <a:lumMod val="75000"/>
-                  </a:schemeClr>
-                </a:solidFill>
-                <a:effectLst>
-                  <a:glow rad="228600">
-                    <a:schemeClr val="accent4">
-                      <a:satMod val="175000"/>
-                      <a:alpha val="40000"/>
-                    </a:schemeClr>
-                  </a:glow>
-                </a:effectLst>
-                <a:latin typeface="Press Start 2P" panose="00000500000000000000" pitchFamily="2" charset="0"/>
-              </a:rPr>
-              <a:t>Unique blend of grotesque horror and comedy.</a:t>
-            </a:r>
-          </a:p>
-          <a:p>
-            <a:pPr marL="171450" indent="-171450">
-              <a:lnSpc>
-                <a:spcPts val="1400"/>
-              </a:lnSpc>
-              <a:buClr>
-                <a:srgbClr val="AB5130"/>
-              </a:buClr>
-              <a:buSzPts val="1100"/>
-              <a:buFont typeface="Press Start 2P" panose="00000500000000000000" pitchFamily="2" charset="0"/>
-              <a:buChar char="♦"/>
+              <a:buChar char="★"/>
             </a:pPr>
             <a:endParaRPr lang="en-US" sz="1000" dirty="0">
               <a:solidFill>
@@ -23538,11 +26397,11 @@
                 <a:spcPts val="1400"/>
               </a:lnSpc>
               <a:buClr>
-                <a:srgbClr val="AB5130"/>
+                <a:srgbClr val="BD6A62"/>
               </a:buClr>
               <a:buSzPts val="1100"/>
               <a:buFont typeface="Press Start 2P" panose="00000500000000000000" pitchFamily="2" charset="0"/>
-              <a:buChar char="♦"/>
+              <a:buChar char="★"/>
             </a:pPr>
             <a:r>
               <a:rPr lang="en-US" sz="1000" dirty="0">
@@ -23561,21 +26420,26 @@
                 </a:effectLst>
                 <a:latin typeface="Press Start 2P" panose="00000500000000000000" pitchFamily="2" charset="0"/>
               </a:rPr>
-              <a:t>Procedurally generated levels.</a:t>
+              <a:t>Rescue twisted parodies of real-world celebrities—each with a ridiculous name and a bizarre quirk that mocks their persona. </a:t>
             </a:r>
-          </a:p>
-          <a:p>
-            <a:pPr marL="171450" indent="-171450">
-              <a:lnSpc>
-                <a:spcPts val="1400"/>
-              </a:lnSpc>
-              <a:buClr>
-                <a:srgbClr val="AB5130"/>
-              </a:buClr>
-              <a:buSzPts val="1100"/>
-              <a:buFont typeface="Press Start 2P" panose="00000500000000000000" pitchFamily="2" charset="0"/>
-              <a:buChar char="♦"/>
-            </a:pPr>
+            <a:br>
+              <a:rPr lang="en-US" sz="1000" dirty="0">
+                <a:solidFill>
+                  <a:schemeClr val="bg1">
+                    <a:lumMod val="75000"/>
+                  </a:schemeClr>
+                </a:solidFill>
+                <a:effectLst>
+                  <a:glow rad="228600">
+                    <a:schemeClr val="accent4">
+                      <a:satMod val="175000"/>
+                      <a:alpha val="40000"/>
+                    </a:schemeClr>
+                  </a:glow>
+                </a:effectLst>
+                <a:latin typeface="Press Start 2P" panose="00000500000000000000" pitchFamily="2" charset="0"/>
+              </a:rPr>
+            </a:br>
             <a:endParaRPr lang="en-US" sz="1000" dirty="0">
               <a:solidFill>
                 <a:schemeClr val="bg1">
@@ -23593,820 +26457,12 @@
               <a:latin typeface="Press Start 2P" panose="00000500000000000000" pitchFamily="2" charset="0"/>
             </a:endParaRPr>
           </a:p>
-          <a:p>
-            <a:pPr marL="171450" indent="-171450">
-              <a:lnSpc>
-                <a:spcPts val="1400"/>
-              </a:lnSpc>
-              <a:buClr>
-                <a:srgbClr val="AB5130"/>
-              </a:buClr>
-              <a:buSzPts val="1100"/>
-              <a:buFont typeface="Press Start 2P" panose="00000500000000000000" pitchFamily="2" charset="0"/>
-              <a:buChar char="♦"/>
-            </a:pPr>
-            <a:r>
-              <a:rPr lang="en-US" sz="1000" dirty="0">
-                <a:solidFill>
-                  <a:schemeClr val="bg1">
-                    <a:lumMod val="75000"/>
-                  </a:schemeClr>
-                </a:solidFill>
-                <a:effectLst>
-                  <a:glow rad="228600">
-                    <a:schemeClr val="accent4">
-                      <a:satMod val="175000"/>
-                      <a:alpha val="40000"/>
-                    </a:schemeClr>
-                  </a:glow>
-                </a:effectLst>
-                <a:latin typeface="Press Start 2P" panose="00000500000000000000" pitchFamily="2" charset="0"/>
-              </a:rPr>
-              <a:t>Atmospheric 2D lighting – sometimes only your items can pierce it.</a:t>
-            </a:r>
-          </a:p>
-        </p:txBody>
-      </p:sp>
-      <p:sp>
-        <p:nvSpPr>
-          <p:cNvPr id="4" name="Google Shape;999;p37">
-            <a:extLst>
-              <a:ext uri="{FF2B5EF4-FFF2-40B4-BE49-F238E27FC236}">
-                <a16:creationId xmlns:a16="http://schemas.microsoft.com/office/drawing/2014/main" id="{9D51D7DF-2FB6-A59C-16D4-D49CA4CCDF04}"/>
-              </a:ext>
-            </a:extLst>
-          </p:cNvPr>
-          <p:cNvSpPr txBox="1">
-            <a:spLocks/>
-          </p:cNvSpPr>
-          <p:nvPr/>
-        </p:nvSpPr>
-        <p:spPr>
-          <a:xfrm>
-            <a:off x="2043566" y="362755"/>
-            <a:ext cx="5067392" cy="526471"/>
-          </a:xfrm>
-          <a:prstGeom prst="rect">
-            <a:avLst/>
-          </a:prstGeom>
-          <a:noFill/>
-          <a:ln>
-            <a:noFill/>
-          </a:ln>
-        </p:spPr>
-        <p:txBody>
-          <a:bodyPr spcFirstLastPara="1" wrap="square" lIns="91425" tIns="91425" rIns="91425" bIns="91425" anchor="ctr" anchorCtr="0">
-            <a:noAutofit/>
-          </a:bodyPr>
-          <a:lstStyle>
-            <a:defPPr marR="0" lvl="0" algn="l" rtl="0">
-              <a:lnSpc>
-                <a:spcPct val="100000"/>
-              </a:lnSpc>
-              <a:spcBef>
-                <a:spcPts val="0"/>
-              </a:spcBef>
-              <a:spcAft>
-                <a:spcPts val="0"/>
-              </a:spcAft>
-            </a:defPPr>
-            <a:lvl1pPr marR="0" lvl="0" algn="l" rtl="0">
-              <a:lnSpc>
-                <a:spcPct val="100000"/>
-              </a:lnSpc>
-              <a:spcBef>
-                <a:spcPts val="0"/>
-              </a:spcBef>
-              <a:spcAft>
-                <a:spcPts val="0"/>
-              </a:spcAft>
-              <a:buClr>
-                <a:srgbClr val="FFFF00"/>
-              </a:buClr>
-              <a:buSzPts val="3000"/>
-              <a:buFont typeface="Press Start 2P"/>
-              <a:buNone/>
-              <a:defRPr sz="3000" b="0" i="0" u="none" strike="noStrike" cap="none">
-                <a:solidFill>
-                  <a:srgbClr val="FFFF00"/>
-                </a:solidFill>
-                <a:latin typeface="Press Start 2P"/>
-                <a:ea typeface="Press Start 2P"/>
-                <a:cs typeface="Press Start 2P"/>
-                <a:sym typeface="Press Start 2P"/>
-              </a:defRPr>
-            </a:lvl1pPr>
-            <a:lvl2pPr marR="0" lvl="1" algn="l" rtl="0">
-              <a:lnSpc>
-                <a:spcPct val="100000"/>
-              </a:lnSpc>
-              <a:spcBef>
-                <a:spcPts val="0"/>
-              </a:spcBef>
-              <a:spcAft>
-                <a:spcPts val="0"/>
-              </a:spcAft>
-              <a:buClr>
-                <a:srgbClr val="FFFF00"/>
-              </a:buClr>
-              <a:buSzPts val="2800"/>
-              <a:buFont typeface="Press Start 2P"/>
-              <a:buNone/>
-              <a:defRPr sz="2800" b="0" i="0" u="none" strike="noStrike" cap="none">
-                <a:solidFill>
-                  <a:srgbClr val="FFFF00"/>
-                </a:solidFill>
-                <a:latin typeface="Press Start 2P"/>
-                <a:ea typeface="Press Start 2P"/>
-                <a:cs typeface="Press Start 2P"/>
-                <a:sym typeface="Press Start 2P"/>
-              </a:defRPr>
-            </a:lvl2pPr>
-            <a:lvl3pPr marR="0" lvl="2" algn="l" rtl="0">
-              <a:lnSpc>
-                <a:spcPct val="100000"/>
-              </a:lnSpc>
-              <a:spcBef>
-                <a:spcPts val="0"/>
-              </a:spcBef>
-              <a:spcAft>
-                <a:spcPts val="0"/>
-              </a:spcAft>
-              <a:buClr>
-                <a:srgbClr val="FFFF00"/>
-              </a:buClr>
-              <a:buSzPts val="2800"/>
-              <a:buFont typeface="Press Start 2P"/>
-              <a:buNone/>
-              <a:defRPr sz="2800" b="0" i="0" u="none" strike="noStrike" cap="none">
-                <a:solidFill>
-                  <a:srgbClr val="FFFF00"/>
-                </a:solidFill>
-                <a:latin typeface="Press Start 2P"/>
-                <a:ea typeface="Press Start 2P"/>
-                <a:cs typeface="Press Start 2P"/>
-                <a:sym typeface="Press Start 2P"/>
-              </a:defRPr>
-            </a:lvl3pPr>
-            <a:lvl4pPr marR="0" lvl="3" algn="l" rtl="0">
-              <a:lnSpc>
-                <a:spcPct val="100000"/>
-              </a:lnSpc>
-              <a:spcBef>
-                <a:spcPts val="0"/>
-              </a:spcBef>
-              <a:spcAft>
-                <a:spcPts val="0"/>
-              </a:spcAft>
-              <a:buClr>
-                <a:srgbClr val="FFFF00"/>
-              </a:buClr>
-              <a:buSzPts val="2800"/>
-              <a:buFont typeface="Press Start 2P"/>
-              <a:buNone/>
-              <a:defRPr sz="2800" b="0" i="0" u="none" strike="noStrike" cap="none">
-                <a:solidFill>
-                  <a:srgbClr val="FFFF00"/>
-                </a:solidFill>
-                <a:latin typeface="Press Start 2P"/>
-                <a:ea typeface="Press Start 2P"/>
-                <a:cs typeface="Press Start 2P"/>
-                <a:sym typeface="Press Start 2P"/>
-              </a:defRPr>
-            </a:lvl4pPr>
-            <a:lvl5pPr marR="0" lvl="4" algn="l" rtl="0">
-              <a:lnSpc>
-                <a:spcPct val="100000"/>
-              </a:lnSpc>
-              <a:spcBef>
-                <a:spcPts val="0"/>
-              </a:spcBef>
-              <a:spcAft>
-                <a:spcPts val="0"/>
-              </a:spcAft>
-              <a:buClr>
-                <a:srgbClr val="FFFF00"/>
-              </a:buClr>
-              <a:buSzPts val="2800"/>
-              <a:buFont typeface="Press Start 2P"/>
-              <a:buNone/>
-              <a:defRPr sz="2800" b="0" i="0" u="none" strike="noStrike" cap="none">
-                <a:solidFill>
-                  <a:srgbClr val="FFFF00"/>
-                </a:solidFill>
-                <a:latin typeface="Press Start 2P"/>
-                <a:ea typeface="Press Start 2P"/>
-                <a:cs typeface="Press Start 2P"/>
-                <a:sym typeface="Press Start 2P"/>
-              </a:defRPr>
-            </a:lvl5pPr>
-            <a:lvl6pPr marR="0" lvl="5" algn="l" rtl="0">
-              <a:lnSpc>
-                <a:spcPct val="100000"/>
-              </a:lnSpc>
-              <a:spcBef>
-                <a:spcPts val="0"/>
-              </a:spcBef>
-              <a:spcAft>
-                <a:spcPts val="0"/>
-              </a:spcAft>
-              <a:buClr>
-                <a:srgbClr val="FFFF00"/>
-              </a:buClr>
-              <a:buSzPts val="2800"/>
-              <a:buFont typeface="Press Start 2P"/>
-              <a:buNone/>
-              <a:defRPr sz="2800" b="0" i="0" u="none" strike="noStrike" cap="none">
-                <a:solidFill>
-                  <a:srgbClr val="FFFF00"/>
-                </a:solidFill>
-                <a:latin typeface="Press Start 2P"/>
-                <a:ea typeface="Press Start 2P"/>
-                <a:cs typeface="Press Start 2P"/>
-                <a:sym typeface="Press Start 2P"/>
-              </a:defRPr>
-            </a:lvl6pPr>
-            <a:lvl7pPr marR="0" lvl="6" algn="l" rtl="0">
-              <a:lnSpc>
-                <a:spcPct val="100000"/>
-              </a:lnSpc>
-              <a:spcBef>
-                <a:spcPts val="0"/>
-              </a:spcBef>
-              <a:spcAft>
-                <a:spcPts val="0"/>
-              </a:spcAft>
-              <a:buClr>
-                <a:srgbClr val="FFFF00"/>
-              </a:buClr>
-              <a:buSzPts val="2800"/>
-              <a:buFont typeface="Press Start 2P"/>
-              <a:buNone/>
-              <a:defRPr sz="2800" b="0" i="0" u="none" strike="noStrike" cap="none">
-                <a:solidFill>
-                  <a:srgbClr val="FFFF00"/>
-                </a:solidFill>
-                <a:latin typeface="Press Start 2P"/>
-                <a:ea typeface="Press Start 2P"/>
-                <a:cs typeface="Press Start 2P"/>
-                <a:sym typeface="Press Start 2P"/>
-              </a:defRPr>
-            </a:lvl7pPr>
-            <a:lvl8pPr marR="0" lvl="7" algn="l" rtl="0">
-              <a:lnSpc>
-                <a:spcPct val="100000"/>
-              </a:lnSpc>
-              <a:spcBef>
-                <a:spcPts val="0"/>
-              </a:spcBef>
-              <a:spcAft>
-                <a:spcPts val="0"/>
-              </a:spcAft>
-              <a:buClr>
-                <a:srgbClr val="FFFF00"/>
-              </a:buClr>
-              <a:buSzPts val="2800"/>
-              <a:buFont typeface="Press Start 2P"/>
-              <a:buNone/>
-              <a:defRPr sz="2800" b="0" i="0" u="none" strike="noStrike" cap="none">
-                <a:solidFill>
-                  <a:srgbClr val="FFFF00"/>
-                </a:solidFill>
-                <a:latin typeface="Press Start 2P"/>
-                <a:ea typeface="Press Start 2P"/>
-                <a:cs typeface="Press Start 2P"/>
-                <a:sym typeface="Press Start 2P"/>
-              </a:defRPr>
-            </a:lvl8pPr>
-            <a:lvl9pPr marR="0" lvl="8" algn="l" rtl="0">
-              <a:lnSpc>
-                <a:spcPct val="100000"/>
-              </a:lnSpc>
-              <a:spcBef>
-                <a:spcPts val="0"/>
-              </a:spcBef>
-              <a:spcAft>
-                <a:spcPts val="0"/>
-              </a:spcAft>
-              <a:buClr>
-                <a:srgbClr val="FFFF00"/>
-              </a:buClr>
-              <a:buSzPts val="2800"/>
-              <a:buFont typeface="Press Start 2P"/>
-              <a:buNone/>
-              <a:defRPr sz="2800" b="0" i="0" u="none" strike="noStrike" cap="none">
-                <a:solidFill>
-                  <a:srgbClr val="FFFF00"/>
-                </a:solidFill>
-                <a:latin typeface="Press Start 2P"/>
-                <a:ea typeface="Press Start 2P"/>
-                <a:cs typeface="Press Start 2P"/>
-                <a:sym typeface="Press Start 2P"/>
-              </a:defRPr>
-            </a:lvl9pPr>
-          </a:lstStyle>
-          <a:p>
-            <a:pPr algn="ctr">
-              <a:buClr>
-                <a:schemeClr val="dk1"/>
-              </a:buClr>
-              <a:buSzPts val="1100"/>
-            </a:pPr>
-            <a:r>
-              <a:rPr lang="en-US" sz="2400" dirty="0">
-                <a:solidFill>
-                  <a:srgbClr val="AB5130"/>
-                </a:solidFill>
-                <a:effectLst>
-                  <a:glow rad="228600">
-                    <a:schemeClr val="accent4">
-                      <a:satMod val="175000"/>
-                      <a:alpha val="40000"/>
-                    </a:schemeClr>
-                  </a:glow>
-                </a:effectLst>
-              </a:rPr>
-              <a:t>Key Features</a:t>
-            </a:r>
-          </a:p>
-        </p:txBody>
-      </p:sp>
-      <p:pic>
-        <p:nvPicPr>
-          <p:cNvPr id="2" name="Picture 1" descr="A red cross on a black background&#10;&#10;AI-generated content may be incorrect.">
-            <a:extLst>
-              <a:ext uri="{FF2B5EF4-FFF2-40B4-BE49-F238E27FC236}">
-                <a16:creationId xmlns:a16="http://schemas.microsoft.com/office/drawing/2014/main" id="{F3263E97-DDD6-13A4-10DE-BEFFB65B299A}"/>
-              </a:ext>
-            </a:extLst>
-          </p:cNvPr>
-          <p:cNvPicPr>
-            <a:picLocks noChangeAspect="1"/>
-          </p:cNvPicPr>
-          <p:nvPr/>
-        </p:nvPicPr>
-        <p:blipFill>
-          <a:blip r:embed="rId4"/>
-          <a:stretch>
-            <a:fillRect/>
-          </a:stretch>
-        </p:blipFill>
-        <p:spPr>
-          <a:xfrm>
-            <a:off x="312978" y="4340822"/>
-            <a:ext cx="1362314" cy="461429"/>
-          </a:xfrm>
-          <a:prstGeom prst="rect">
-            <a:avLst/>
-          </a:prstGeom>
-          <a:effectLst>
-            <a:glow rad="228600">
-              <a:schemeClr val="accent4">
-                <a:satMod val="175000"/>
-                <a:alpha val="40000"/>
-              </a:schemeClr>
-            </a:glow>
-          </a:effectLst>
-        </p:spPr>
-      </p:pic>
-      <p:sp>
-        <p:nvSpPr>
-          <p:cNvPr id="3" name="Google Shape;1000;p37">
-            <a:extLst>
-              <a:ext uri="{FF2B5EF4-FFF2-40B4-BE49-F238E27FC236}">
-                <a16:creationId xmlns:a16="http://schemas.microsoft.com/office/drawing/2014/main" id="{10D74E85-2417-09F2-96D5-0AE1C99FF3EC}"/>
-              </a:ext>
-            </a:extLst>
-          </p:cNvPr>
-          <p:cNvSpPr txBox="1">
-            <a:spLocks/>
-          </p:cNvSpPr>
-          <p:nvPr/>
-        </p:nvSpPr>
-        <p:spPr>
-          <a:xfrm>
-            <a:off x="4658451" y="1167927"/>
-            <a:ext cx="3915923" cy="1112837"/>
-          </a:xfrm>
-          <a:prstGeom prst="rect">
-            <a:avLst/>
-          </a:prstGeom>
-          <a:noFill/>
-          <a:ln>
-            <a:noFill/>
-          </a:ln>
-        </p:spPr>
-        <p:txBody>
-          <a:bodyPr spcFirstLastPara="1" wrap="square" lIns="91425" tIns="91425" rIns="91425" bIns="91425" anchor="t" anchorCtr="0">
-            <a:noAutofit/>
-          </a:bodyPr>
-          <a:lstStyle>
-            <a:defPPr marR="0" lvl="0" algn="l" rtl="0">
-              <a:lnSpc>
-                <a:spcPct val="100000"/>
-              </a:lnSpc>
-              <a:spcBef>
-                <a:spcPts val="0"/>
-              </a:spcBef>
-              <a:spcAft>
-                <a:spcPts val="0"/>
-              </a:spcAft>
-            </a:defPPr>
-            <a:lvl1pPr marL="457200" marR="0" lvl="0" indent="-330200" algn="l" rtl="0">
-              <a:lnSpc>
-                <a:spcPct val="115000"/>
-              </a:lnSpc>
-              <a:spcBef>
-                <a:spcPts val="0"/>
-              </a:spcBef>
-              <a:spcAft>
-                <a:spcPts val="0"/>
-              </a:spcAft>
-              <a:buClr>
-                <a:schemeClr val="lt1"/>
-              </a:buClr>
-              <a:buSzPts val="1600"/>
-              <a:buFont typeface="Maven Pro"/>
-              <a:buChar char="●"/>
-              <a:defRPr sz="1600" b="0" i="0" u="none" strike="noStrike" cap="none">
-                <a:solidFill>
-                  <a:schemeClr val="lt1"/>
-                </a:solidFill>
-                <a:latin typeface="Maven Pro"/>
-                <a:ea typeface="Maven Pro"/>
-                <a:cs typeface="Maven Pro"/>
-                <a:sym typeface="Maven Pro"/>
-              </a:defRPr>
-            </a:lvl1pPr>
-            <a:lvl2pPr marL="914400" marR="0" lvl="1" indent="-330200" algn="l" rtl="0">
-              <a:lnSpc>
-                <a:spcPct val="115000"/>
-              </a:lnSpc>
-              <a:spcBef>
-                <a:spcPts val="1600"/>
-              </a:spcBef>
-              <a:spcAft>
-                <a:spcPts val="0"/>
-              </a:spcAft>
-              <a:buClr>
-                <a:schemeClr val="lt1"/>
-              </a:buClr>
-              <a:buSzPts val="1600"/>
-              <a:buFont typeface="Maven Pro"/>
-              <a:buChar char="○"/>
-              <a:defRPr sz="1600" b="0" i="0" u="none" strike="noStrike" cap="none">
-                <a:solidFill>
-                  <a:schemeClr val="lt1"/>
-                </a:solidFill>
-                <a:latin typeface="Maven Pro"/>
-                <a:ea typeface="Maven Pro"/>
-                <a:cs typeface="Maven Pro"/>
-                <a:sym typeface="Maven Pro"/>
-              </a:defRPr>
-            </a:lvl2pPr>
-            <a:lvl3pPr marL="1371600" marR="0" lvl="2" indent="-330200" algn="l" rtl="0">
-              <a:lnSpc>
-                <a:spcPct val="115000"/>
-              </a:lnSpc>
-              <a:spcBef>
-                <a:spcPts val="1600"/>
-              </a:spcBef>
-              <a:spcAft>
-                <a:spcPts val="0"/>
-              </a:spcAft>
-              <a:buClr>
-                <a:schemeClr val="lt1"/>
-              </a:buClr>
-              <a:buSzPts val="1600"/>
-              <a:buFont typeface="Maven Pro"/>
-              <a:buChar char="■"/>
-              <a:defRPr sz="1600" b="0" i="0" u="none" strike="noStrike" cap="none">
-                <a:solidFill>
-                  <a:schemeClr val="lt1"/>
-                </a:solidFill>
-                <a:latin typeface="Maven Pro"/>
-                <a:ea typeface="Maven Pro"/>
-                <a:cs typeface="Maven Pro"/>
-                <a:sym typeface="Maven Pro"/>
-              </a:defRPr>
-            </a:lvl3pPr>
-            <a:lvl4pPr marL="1828800" marR="0" lvl="3" indent="-330200" algn="l" rtl="0">
-              <a:lnSpc>
-                <a:spcPct val="115000"/>
-              </a:lnSpc>
-              <a:spcBef>
-                <a:spcPts val="1600"/>
-              </a:spcBef>
-              <a:spcAft>
-                <a:spcPts val="0"/>
-              </a:spcAft>
-              <a:buClr>
-                <a:schemeClr val="lt1"/>
-              </a:buClr>
-              <a:buSzPts val="1600"/>
-              <a:buFont typeface="Maven Pro"/>
-              <a:buChar char="●"/>
-              <a:defRPr sz="1600" b="0" i="0" u="none" strike="noStrike" cap="none">
-                <a:solidFill>
-                  <a:schemeClr val="lt1"/>
-                </a:solidFill>
-                <a:latin typeface="Maven Pro"/>
-                <a:ea typeface="Maven Pro"/>
-                <a:cs typeface="Maven Pro"/>
-                <a:sym typeface="Maven Pro"/>
-              </a:defRPr>
-            </a:lvl4pPr>
-            <a:lvl5pPr marL="2286000" marR="0" lvl="4" indent="-330200" algn="l" rtl="0">
-              <a:lnSpc>
-                <a:spcPct val="115000"/>
-              </a:lnSpc>
-              <a:spcBef>
-                <a:spcPts val="1600"/>
-              </a:spcBef>
-              <a:spcAft>
-                <a:spcPts val="0"/>
-              </a:spcAft>
-              <a:buClr>
-                <a:schemeClr val="lt1"/>
-              </a:buClr>
-              <a:buSzPts val="1600"/>
-              <a:buFont typeface="Maven Pro"/>
-              <a:buChar char="○"/>
-              <a:defRPr sz="1600" b="0" i="0" u="none" strike="noStrike" cap="none">
-                <a:solidFill>
-                  <a:schemeClr val="lt1"/>
-                </a:solidFill>
-                <a:latin typeface="Maven Pro"/>
-                <a:ea typeface="Maven Pro"/>
-                <a:cs typeface="Maven Pro"/>
-                <a:sym typeface="Maven Pro"/>
-              </a:defRPr>
-            </a:lvl5pPr>
-            <a:lvl6pPr marL="2743200" marR="0" lvl="5" indent="-330200" algn="l" rtl="0">
-              <a:lnSpc>
-                <a:spcPct val="115000"/>
-              </a:lnSpc>
-              <a:spcBef>
-                <a:spcPts val="1600"/>
-              </a:spcBef>
-              <a:spcAft>
-                <a:spcPts val="0"/>
-              </a:spcAft>
-              <a:buClr>
-                <a:schemeClr val="lt1"/>
-              </a:buClr>
-              <a:buSzPts val="1600"/>
-              <a:buFont typeface="Maven Pro"/>
-              <a:buChar char="■"/>
-              <a:defRPr sz="1600" b="0" i="0" u="none" strike="noStrike" cap="none">
-                <a:solidFill>
-                  <a:schemeClr val="lt1"/>
-                </a:solidFill>
-                <a:latin typeface="Maven Pro"/>
-                <a:ea typeface="Maven Pro"/>
-                <a:cs typeface="Maven Pro"/>
-                <a:sym typeface="Maven Pro"/>
-              </a:defRPr>
-            </a:lvl6pPr>
-            <a:lvl7pPr marL="3200400" marR="0" lvl="6" indent="-330200" algn="l" rtl="0">
-              <a:lnSpc>
-                <a:spcPct val="115000"/>
-              </a:lnSpc>
-              <a:spcBef>
-                <a:spcPts val="1600"/>
-              </a:spcBef>
-              <a:spcAft>
-                <a:spcPts val="0"/>
-              </a:spcAft>
-              <a:buClr>
-                <a:schemeClr val="lt1"/>
-              </a:buClr>
-              <a:buSzPts val="1600"/>
-              <a:buFont typeface="Maven Pro"/>
-              <a:buChar char="●"/>
-              <a:defRPr sz="1600" b="0" i="0" u="none" strike="noStrike" cap="none">
-                <a:solidFill>
-                  <a:schemeClr val="lt1"/>
-                </a:solidFill>
-                <a:latin typeface="Maven Pro"/>
-                <a:ea typeface="Maven Pro"/>
-                <a:cs typeface="Maven Pro"/>
-                <a:sym typeface="Maven Pro"/>
-              </a:defRPr>
-            </a:lvl7pPr>
-            <a:lvl8pPr marL="3657600" marR="0" lvl="7" indent="-330200" algn="l" rtl="0">
-              <a:lnSpc>
-                <a:spcPct val="115000"/>
-              </a:lnSpc>
-              <a:spcBef>
-                <a:spcPts val="1600"/>
-              </a:spcBef>
-              <a:spcAft>
-                <a:spcPts val="0"/>
-              </a:spcAft>
-              <a:buClr>
-                <a:schemeClr val="lt1"/>
-              </a:buClr>
-              <a:buSzPts val="1600"/>
-              <a:buFont typeface="Maven Pro"/>
-              <a:buChar char="○"/>
-              <a:defRPr sz="1600" b="0" i="0" u="none" strike="noStrike" cap="none">
-                <a:solidFill>
-                  <a:schemeClr val="lt1"/>
-                </a:solidFill>
-                <a:latin typeface="Maven Pro"/>
-                <a:ea typeface="Maven Pro"/>
-                <a:cs typeface="Maven Pro"/>
-                <a:sym typeface="Maven Pro"/>
-              </a:defRPr>
-            </a:lvl8pPr>
-            <a:lvl9pPr marL="4114800" marR="0" lvl="8" indent="-330200" algn="l" rtl="0">
-              <a:lnSpc>
-                <a:spcPct val="115000"/>
-              </a:lnSpc>
-              <a:spcBef>
-                <a:spcPts val="1600"/>
-              </a:spcBef>
-              <a:spcAft>
-                <a:spcPts val="1600"/>
-              </a:spcAft>
-              <a:buClr>
-                <a:schemeClr val="lt1"/>
-              </a:buClr>
-              <a:buSzPts val="1600"/>
-              <a:buFont typeface="Maven Pro"/>
-              <a:buChar char="■"/>
-              <a:defRPr sz="1600" b="0" i="0" u="none" strike="noStrike" cap="none">
-                <a:solidFill>
-                  <a:schemeClr val="lt1"/>
-                </a:solidFill>
-                <a:latin typeface="Maven Pro"/>
-                <a:ea typeface="Maven Pro"/>
-                <a:cs typeface="Maven Pro"/>
-                <a:sym typeface="Maven Pro"/>
-              </a:defRPr>
-            </a:lvl9pPr>
-          </a:lstStyle>
-          <a:p>
-            <a:pPr marL="171450" indent="-171450">
-              <a:lnSpc>
-                <a:spcPts val="1400"/>
-              </a:lnSpc>
-              <a:buClr>
-                <a:srgbClr val="AB5130"/>
-              </a:buClr>
-              <a:buSzPts val="1100"/>
-              <a:buFont typeface="Press Start 2P" panose="00000500000000000000" pitchFamily="2" charset="0"/>
-              <a:buChar char="♦"/>
-            </a:pPr>
-            <a:r>
-              <a:rPr lang="en-US" sz="1000" dirty="0">
-                <a:solidFill>
-                  <a:schemeClr val="bg1">
-                    <a:lumMod val="75000"/>
-                  </a:schemeClr>
-                </a:solidFill>
-                <a:effectLst>
-                  <a:glow rad="228600">
-                    <a:schemeClr val="accent4">
-                      <a:satMod val="175000"/>
-                      <a:alpha val="40000"/>
-                    </a:schemeClr>
-                  </a:glow>
-                </a:effectLst>
-                <a:latin typeface="Press Start 2P" panose="00000500000000000000" pitchFamily="2" charset="0"/>
-              </a:rPr>
-              <a:t>Earn tickets and exchange them for strange but useful souvenirs.</a:t>
-            </a:r>
-          </a:p>
-          <a:p>
-            <a:pPr marL="0" indent="0">
-              <a:lnSpc>
-                <a:spcPts val="1400"/>
-              </a:lnSpc>
-              <a:buClr>
-                <a:srgbClr val="AB5130"/>
-              </a:buClr>
-              <a:buSzPts val="1100"/>
-              <a:buFont typeface="Maven Pro"/>
-              <a:buNone/>
-            </a:pPr>
-            <a:endParaRPr lang="en-US" sz="1000" dirty="0">
-              <a:solidFill>
-                <a:schemeClr val="bg1">
-                  <a:lumMod val="75000"/>
-                </a:schemeClr>
-              </a:solidFill>
-              <a:effectLst>
-                <a:glow rad="228600">
-                  <a:schemeClr val="accent4">
-                    <a:satMod val="175000"/>
-                    <a:alpha val="40000"/>
-                  </a:schemeClr>
-                </a:glow>
-              </a:effectLst>
-              <a:latin typeface="Press Start 2P" panose="00000500000000000000" pitchFamily="2" charset="0"/>
-            </a:endParaRPr>
-          </a:p>
-          <a:p>
-            <a:pPr marL="171450" indent="-171450">
-              <a:lnSpc>
-                <a:spcPts val="1400"/>
-              </a:lnSpc>
-              <a:buClr>
-                <a:srgbClr val="AB5130"/>
-              </a:buClr>
-              <a:buSzPts val="1100"/>
-              <a:buFont typeface="Press Start 2P" panose="00000500000000000000" pitchFamily="2" charset="0"/>
-              <a:buChar char="♦"/>
-            </a:pPr>
-            <a:r>
-              <a:rPr lang="en-US" sz="1000" dirty="0">
-                <a:solidFill>
-                  <a:schemeClr val="bg1">
-                    <a:lumMod val="75000"/>
-                  </a:schemeClr>
-                </a:solidFill>
-                <a:effectLst>
-                  <a:glow rad="228600">
-                    <a:schemeClr val="accent4">
-                      <a:satMod val="175000"/>
-                      <a:alpha val="40000"/>
-                    </a:schemeClr>
-                  </a:glow>
-                </a:effectLst>
-                <a:latin typeface="Press Start 2P" panose="00000500000000000000" pitchFamily="2" charset="0"/>
-              </a:rPr>
-              <a:t>’90s-inspired jazzy MIDI soundtrack.</a:t>
-            </a:r>
-          </a:p>
-          <a:p>
-            <a:pPr marL="171450" indent="-171450">
-              <a:lnSpc>
-                <a:spcPts val="1400"/>
-              </a:lnSpc>
-              <a:buClr>
-                <a:srgbClr val="AB5130"/>
-              </a:buClr>
-              <a:buSzPts val="1100"/>
-              <a:buFont typeface="Press Start 2P" panose="00000500000000000000" pitchFamily="2" charset="0"/>
-              <a:buChar char="♦"/>
-            </a:pPr>
-            <a:endParaRPr lang="en-US" sz="1000" dirty="0">
-              <a:solidFill>
-                <a:schemeClr val="bg1">
-                  <a:lumMod val="75000"/>
-                </a:schemeClr>
-              </a:solidFill>
-              <a:effectLst>
-                <a:glow rad="228600">
-                  <a:schemeClr val="accent4">
-                    <a:satMod val="175000"/>
-                    <a:alpha val="40000"/>
-                  </a:schemeClr>
-                </a:glow>
-              </a:effectLst>
-              <a:latin typeface="Press Start 2P" panose="00000500000000000000" pitchFamily="2" charset="0"/>
-            </a:endParaRPr>
-          </a:p>
-          <a:p>
-            <a:pPr marL="171450" indent="-171450">
-              <a:lnSpc>
-                <a:spcPts val="1400"/>
-              </a:lnSpc>
-              <a:buClr>
-                <a:srgbClr val="AB5130"/>
-              </a:buClr>
-              <a:buSzPts val="1100"/>
-              <a:buFont typeface="Press Start 2P" panose="00000500000000000000" pitchFamily="2" charset="0"/>
-              <a:buChar char="♦"/>
-            </a:pPr>
-            <a:r>
-              <a:rPr lang="en-US" sz="1000" dirty="0">
-                <a:solidFill>
-                  <a:schemeClr val="bg1">
-                    <a:lumMod val="75000"/>
-                  </a:schemeClr>
-                </a:solidFill>
-                <a:effectLst>
-                  <a:glow rad="228600">
-                    <a:schemeClr val="accent4">
-                      <a:satMod val="175000"/>
-                      <a:alpha val="40000"/>
-                    </a:schemeClr>
-                  </a:glow>
-                </a:effectLst>
-                <a:latin typeface="Press Start 2P" panose="00000500000000000000" pitchFamily="2" charset="0"/>
-              </a:rPr>
-              <a:t>Players can earn new content by defeating bosses, surviving runs, discovering secret areas, or completing bizarre hidden tasks.</a:t>
-            </a:r>
-          </a:p>
         </p:txBody>
       </p:sp>
     </p:spTree>
     <p:extLst>
       <p:ext uri="{BB962C8B-B14F-4D97-AF65-F5344CB8AC3E}">
-        <p14:creationId xmlns:p14="http://schemas.microsoft.com/office/powerpoint/2010/main" val="3923933956"/>
+        <p14:creationId xmlns:p14="http://schemas.microsoft.com/office/powerpoint/2010/main" val="518475266"/>
       </p:ext>
     </p:extLst>
   </p:cSld>
@@ -24416,7 +26472,7 @@
 </p:sld>
 </file>
 
-<file path=ppt/slides/slide6.xml><?xml version="1.0" encoding="utf-8"?>
+<file path=ppt/slides/slide7.xml><?xml version="1.0" encoding="utf-8"?>
 <p:sld xmlns:a="http://schemas.openxmlformats.org/drawingml/2006/main" xmlns:r="http://schemas.openxmlformats.org/officeDocument/2006/relationships" xmlns:p="http://schemas.openxmlformats.org/presentationml/2006/main">
   <p:cSld>
     <p:spTree>
@@ -24489,8 +26545,8 @@
         </p:nvSpPr>
         <p:spPr>
           <a:xfrm>
-            <a:off x="848451" y="1085481"/>
-            <a:ext cx="7447097" cy="1112837"/>
+            <a:off x="848451" y="1070491"/>
+            <a:ext cx="7538546" cy="1112837"/>
           </a:xfrm>
           <a:prstGeom prst="rect">
             <a:avLst/>
@@ -24507,16 +26563,16 @@
                 <a:spcPts val="1400"/>
               </a:lnSpc>
               <a:buClr>
-                <a:srgbClr val="AB5130"/>
+                <a:srgbClr val="BD6A62"/>
               </a:buClr>
               <a:buSzPts val="1100"/>
               <a:buFont typeface="Press Start 2P" panose="00000500000000000000" pitchFamily="2" charset="0"/>
-              <a:buChar char="♦"/>
+              <a:buChar char="★"/>
             </a:pPr>
             <a:r>
               <a:rPr lang="en-US" sz="1000" dirty="0">
                 <a:solidFill>
-                  <a:srgbClr val="F6CA15"/>
+                  <a:srgbClr val="BD6A62"/>
                 </a:solidFill>
                 <a:effectLst>
                   <a:glow rad="228600">
@@ -24556,11 +26612,11 @@
                 <a:spcPts val="1400"/>
               </a:lnSpc>
               <a:buClr>
-                <a:srgbClr val="AB5130"/>
+                <a:srgbClr val="BD6A62"/>
               </a:buClr>
               <a:buSzPts val="1100"/>
               <a:buFont typeface="Press Start 2P" panose="00000500000000000000" pitchFamily="2" charset="0"/>
-              <a:buChar char="♦"/>
+              <a:buChar char="★"/>
             </a:pPr>
             <a:endParaRPr lang="en-US" sz="1000" dirty="0">
               <a:solidFill>
@@ -24585,16 +26641,16 @@
                 <a:spcPts val="1400"/>
               </a:lnSpc>
               <a:buClr>
-                <a:srgbClr val="AB5130"/>
+                <a:srgbClr val="BD6A62"/>
               </a:buClr>
               <a:buSzPts val="1100"/>
               <a:buFont typeface="Press Start 2P" panose="00000500000000000000" pitchFamily="2" charset="0"/>
-              <a:buChar char="♦"/>
+              <a:buChar char="★"/>
             </a:pPr>
             <a:r>
               <a:rPr lang="en-US" sz="1000" dirty="0">
                 <a:solidFill>
-                  <a:srgbClr val="F6CA15"/>
+                  <a:srgbClr val="BD6A62"/>
                 </a:solidFill>
                 <a:effectLst>
                   <a:glow rad="228600">
@@ -24634,11 +26690,87 @@
                 <a:spcPts val="1400"/>
               </a:lnSpc>
               <a:buClr>
-                <a:srgbClr val="AB5130"/>
+                <a:srgbClr val="BD6A62"/>
               </a:buClr>
               <a:buSzPts val="1100"/>
               <a:buFont typeface="Press Start 2P" panose="00000500000000000000" pitchFamily="2" charset="0"/>
-              <a:buChar char="♦"/>
+              <a:buChar char="★"/>
+            </a:pPr>
+            <a:endParaRPr lang="en-US" sz="1000" dirty="0">
+              <a:solidFill>
+                <a:srgbClr val="BD6A62"/>
+              </a:solidFill>
+              <a:effectLst>
+                <a:glow rad="228600">
+                  <a:schemeClr val="accent4">
+                    <a:satMod val="175000"/>
+                    <a:alpha val="40000"/>
+                  </a:schemeClr>
+                </a:glow>
+              </a:effectLst>
+              <a:latin typeface="Press Start 2P" panose="00000500000000000000" pitchFamily="2" charset="0"/>
+            </a:endParaRPr>
+          </a:p>
+          <a:p>
+            <a:pPr marL="171450" indent="-171450">
+              <a:lnSpc>
+                <a:spcPts val="1400"/>
+              </a:lnSpc>
+              <a:buClr>
+                <a:srgbClr val="BD6A62"/>
+              </a:buClr>
+              <a:buSzPts val="1100"/>
+              <a:buFont typeface="Press Start 2P" panose="00000500000000000000" pitchFamily="2" charset="0"/>
+              <a:buChar char="★"/>
+            </a:pPr>
+            <a:r>
+              <a:rPr lang="en-US" sz="1000" dirty="0">
+                <a:solidFill>
+                  <a:srgbClr val="BD6A62"/>
+                </a:solidFill>
+                <a:effectLst>
+                  <a:glow rad="228600">
+                    <a:schemeClr val="accent4">
+                      <a:satMod val="175000"/>
+                      <a:alpha val="40000"/>
+                    </a:schemeClr>
+                  </a:glow>
+                </a:effectLst>
+                <a:latin typeface="Press Start 2P" panose="00000500000000000000" pitchFamily="2" charset="0"/>
+              </a:rPr>
+              <a:t>Key items - </a:t>
+            </a:r>
+            <a:r>
+              <a:rPr lang="en-US" sz="1000" dirty="0">
+                <a:solidFill>
+                  <a:schemeClr val="bg1">
+                    <a:lumMod val="75000"/>
+                  </a:schemeClr>
+                </a:solidFill>
+                <a:effectLst>
+                  <a:glow rad="228600">
+                    <a:schemeClr val="accent4">
+                      <a:satMod val="175000"/>
+                      <a:alpha val="40000"/>
+                    </a:schemeClr>
+                  </a:glow>
+                </a:effectLst>
+                <a:latin typeface="Press Start 2P" panose="00000500000000000000" pitchFamily="2" charset="0"/>
+              </a:rPr>
+              <a:t>Scene-specific tools for interacting with the environment.</a:t>
+            </a:r>
+          </a:p>
+          <a:p>
+            <a:pPr marL="171450" indent="-171450">
+              <a:lnSpc>
+                <a:spcPts val="1400"/>
+              </a:lnSpc>
+              <a:buClr>
+                <a:srgbClr val="BD6A62"/>
+              </a:buClr>
+              <a:buSzPts val="1100"/>
+              <a:buFont typeface="Press Start 2P" panose="00000500000000000000" pitchFamily="2" charset="0"/>
+              <a:buChar char="★"/>
             </a:pPr>
             <a:endParaRPr lang="en-US" sz="1000" dirty="0">
               <a:solidFill>
@@ -24663,94 +26795,16 @@
                 <a:spcPts val="1400"/>
               </a:lnSpc>
               <a:buClr>
-                <a:srgbClr val="AB5130"/>
+                <a:srgbClr val="BD6A62"/>
               </a:buClr>
               <a:buSzPts val="1100"/>
               <a:buFont typeface="Press Start 2P" panose="00000500000000000000" pitchFamily="2" charset="0"/>
-              <a:buChar char="♦"/>
+              <a:buChar char="★"/>
             </a:pPr>
             <a:r>
               <a:rPr lang="en-US" sz="1000" dirty="0">
                 <a:solidFill>
-                  <a:srgbClr val="F6CA15"/>
-                </a:solidFill>
-                <a:effectLst>
-                  <a:glow rad="228600">
-                    <a:schemeClr val="accent4">
-                      <a:satMod val="175000"/>
-                      <a:alpha val="40000"/>
-                    </a:schemeClr>
-                  </a:glow>
-                </a:effectLst>
-                <a:latin typeface="Press Start 2P" panose="00000500000000000000" pitchFamily="2" charset="0"/>
-              </a:rPr>
-              <a:t>Key items - </a:t>
-            </a:r>
-            <a:r>
-              <a:rPr lang="en-US" sz="1000" dirty="0">
-                <a:solidFill>
-                  <a:schemeClr val="bg1">
-                    <a:lumMod val="75000"/>
-                  </a:schemeClr>
-                </a:solidFill>
-                <a:effectLst>
-                  <a:glow rad="228600">
-                    <a:schemeClr val="accent4">
-                      <a:satMod val="175000"/>
-                      <a:alpha val="40000"/>
-                    </a:schemeClr>
-                  </a:glow>
-                </a:effectLst>
-                <a:latin typeface="Press Start 2P" panose="00000500000000000000" pitchFamily="2" charset="0"/>
-              </a:rPr>
-              <a:t>Scene-specific tools for interacting with the environment: pick locks, operate machines, use kiosks, trigger devices.</a:t>
-            </a:r>
-          </a:p>
-          <a:p>
-            <a:pPr marL="171450" indent="-171450">
-              <a:lnSpc>
-                <a:spcPts val="1400"/>
-              </a:lnSpc>
-              <a:buClr>
-                <a:srgbClr val="AB5130"/>
-              </a:buClr>
-              <a:buSzPts val="1100"/>
-              <a:buFont typeface="Press Start 2P" panose="00000500000000000000" pitchFamily="2" charset="0"/>
-              <a:buChar char="♦"/>
-            </a:pPr>
-            <a:endParaRPr lang="en-US" sz="1000" dirty="0">
-              <a:solidFill>
-                <a:schemeClr val="bg1">
-                  <a:lumMod val="75000"/>
-                </a:schemeClr>
-              </a:solidFill>
-              <a:effectLst>
-                <a:glow rad="228600">
-                  <a:schemeClr val="accent4">
-                    <a:satMod val="175000"/>
-                    <a:alpha val="40000"/>
-                  </a:schemeClr>
-                </a:glow>
-              </a:effectLst>
-              <a:latin typeface="Press Start 2P" panose="00000500000000000000" pitchFamily="2" charset="0"/>
-            </a:endParaRPr>
-          </a:p>
-          <a:p>
-            <a:pPr marL="171450" indent="-171450">
-              <a:lnSpc>
-                <a:spcPts val="1400"/>
-              </a:lnSpc>
-              <a:buClr>
-                <a:srgbClr val="AB5130"/>
-              </a:buClr>
-              <a:buSzPts val="1100"/>
-              <a:buFont typeface="Press Start 2P" panose="00000500000000000000" pitchFamily="2" charset="0"/>
-              <a:buChar char="♦"/>
-            </a:pPr>
-            <a:r>
-              <a:rPr lang="en-US" sz="1000" dirty="0">
-                <a:solidFill>
-                  <a:srgbClr val="F6CA15"/>
+                  <a:srgbClr val="BD6A62"/>
                 </a:solidFill>
                 <a:effectLst>
                   <a:glow rad="228600">
@@ -24781,7 +26835,7 @@
                 </a:effectLst>
                 <a:latin typeface="Press Start 2P" panose="00000500000000000000" pitchFamily="2" charset="0"/>
               </a:rPr>
-              <a:t>Passive oddities with quirky powers. One at a time, so choose your curse wisely.</a:t>
+              <a:t>Passive oddities with quirky powers. One at a time, so choose wisely.</a:t>
             </a:r>
             <a:br>
               <a:rPr lang="en-US" sz="1000" dirty="0">
@@ -24803,9 +26857,7 @@
             </a:br>
             <a:endParaRPr lang="en-US" sz="1000" dirty="0">
               <a:solidFill>
-                <a:schemeClr val="bg1">
-                  <a:lumMod val="75000"/>
-                </a:schemeClr>
+                <a:srgbClr val="BD6A62"/>
               </a:solidFill>
               <a:effectLst>
                 <a:glow rad="228600">
@@ -24824,16 +26876,16 @@
                 <a:spcPts val="1400"/>
               </a:lnSpc>
               <a:buClr>
-                <a:srgbClr val="AB5130"/>
+                <a:srgbClr val="BD6A62"/>
               </a:buClr>
               <a:buSzPts val="1100"/>
               <a:buFont typeface="Press Start 2P" panose="00000500000000000000" pitchFamily="2" charset="0"/>
-              <a:buChar char="♦"/>
+              <a:buChar char="★"/>
             </a:pPr>
             <a:r>
               <a:rPr lang="en-US" sz="1000" dirty="0">
                 <a:solidFill>
-                  <a:srgbClr val="F6CA15"/>
+                  <a:srgbClr val="BD6A62"/>
                 </a:solidFill>
                 <a:effectLst>
                   <a:glow rad="228600">
@@ -25224,7 +27276,7 @@
 </p:sld>
 </file>
 
-<file path=ppt/slides/slide7.xml><?xml version="1.0" encoding="utf-8"?>
+<file path=ppt/slides/slide8.xml><?xml version="1.0" encoding="utf-8"?>
 <p:sld xmlns:a="http://schemas.openxmlformats.org/drawingml/2006/main" xmlns:r="http://schemas.openxmlformats.org/officeDocument/2006/relationships" xmlns:p="http://schemas.openxmlformats.org/presentationml/2006/main">
   <p:cSld>
     <p:spTree>
@@ -25305,7 +27357,7 @@
             <a:r>
               <a:rPr lang="en-US" sz="1100" dirty="0">
                 <a:solidFill>
-                  <a:srgbClr val="F6CA15"/>
+                  <a:srgbClr val="3B7D4F"/>
                 </a:solidFill>
                 <a:effectLst>
                   <a:glow rad="228600">
@@ -25330,7 +27382,7 @@
             <a:r>
               <a:rPr lang="en-US" sz="1100" dirty="0">
                 <a:solidFill>
-                  <a:srgbClr val="F6CA15"/>
+                  <a:srgbClr val="3B7D4F"/>
                 </a:solidFill>
                 <a:effectLst>
                   <a:glow rad="228600">
@@ -26933,7 +28985,7 @@
 </p:sld>
 </file>
 
-<file path=ppt/slides/slide8.xml><?xml version="1.0" encoding="utf-8"?>
+<file path=ppt/slides/slide9.xml><?xml version="1.0" encoding="utf-8"?>
 <p:sld xmlns:a="http://schemas.openxmlformats.org/drawingml/2006/main" xmlns:r="http://schemas.openxmlformats.org/officeDocument/2006/relationships" xmlns:p="http://schemas.openxmlformats.org/presentationml/2006/main">
   <p:cSld>
     <p:spTree>
@@ -27328,139 +29380,6 @@
     <p:extLst>
       <p:ext uri="{BB962C8B-B14F-4D97-AF65-F5344CB8AC3E}">
         <p14:creationId xmlns:p14="http://schemas.microsoft.com/office/powerpoint/2010/main" val="2884053907"/>
-      </p:ext>
-    </p:extLst>
-  </p:cSld>
-  <p:clrMapOvr>
-    <a:masterClrMapping/>
-  </p:clrMapOvr>
-</p:sld>
-</file>
-
-<file path=ppt/slides/slide9.xml><?xml version="1.0" encoding="utf-8"?>
-<p:sld xmlns:a="http://schemas.openxmlformats.org/drawingml/2006/main" xmlns:r="http://schemas.openxmlformats.org/officeDocument/2006/relationships" xmlns:p="http://schemas.openxmlformats.org/presentationml/2006/main">
-  <p:cSld>
-    <p:spTree>
-      <p:nvGrpSpPr>
-        <p:cNvPr id="1" name=""/>
-        <p:cNvGrpSpPr/>
-        <p:nvPr/>
-      </p:nvGrpSpPr>
-      <p:grpSpPr>
-        <a:xfrm>
-          <a:off x="0" y="0"/>
-          <a:ext cx="0" cy="0"/>
-          <a:chOff x="0" y="0"/>
-          <a:chExt cx="0" cy="0"/>
-        </a:xfrm>
-      </p:grpSpPr>
-      <p:graphicFrame>
-        <p:nvGraphicFramePr>
-          <p:cNvPr id="2" name="Object 1">
-            <a:extLst>
-              <a:ext uri="{FF2B5EF4-FFF2-40B4-BE49-F238E27FC236}">
-                <a16:creationId xmlns:a16="http://schemas.microsoft.com/office/drawing/2014/main" id="{BE986D8D-679B-DF16-78D6-36A609285C67}"/>
-              </a:ext>
-            </a:extLst>
-          </p:cNvPr>
-          <p:cNvGraphicFramePr>
-            <a:graphicFrameLocks noChangeAspect="1"/>
-          </p:cNvGraphicFramePr>
-          <p:nvPr>
-            <p:extLst>
-              <p:ext uri="{D42A27DB-BD31-4B8C-83A1-F6EECF244321}">
-                <p14:modId xmlns:p14="http://schemas.microsoft.com/office/powerpoint/2010/main" val="1568207707"/>
-              </p:ext>
-            </p:extLst>
-          </p:nvPr>
-        </p:nvGraphicFramePr>
-        <p:xfrm>
-          <a:off x="0" y="0"/>
-          <a:ext cx="9144000" cy="5143500"/>
-        </p:xfrm>
-        <a:graphic>
-          <a:graphicData uri="http://schemas.openxmlformats.org/presentationml/2006/ole">
-            <mc:AlternateContent xmlns:mc="http://schemas.openxmlformats.org/markup-compatibility/2006">
-              <mc:Choice xmlns:v="urn:schemas-microsoft-com:vml" Requires="v">
-                <p:oleObj r:id="rId2" imgW="23457131" imgH="13194723" progId="">
-                  <p:embed/>
-                </p:oleObj>
-              </mc:Choice>
-              <mc:Fallback>
-                <p:oleObj r:id="rId2" imgW="23457131" imgH="13194723" progId="">
-                  <p:embed/>
-                  <p:pic>
-                    <p:nvPicPr>
-                      <p:cNvPr id="0" name=""/>
-                      <p:cNvPicPr/>
-                      <p:nvPr/>
-                    </p:nvPicPr>
-                    <p:blipFill>
-                      <a:blip r:embed="rId3"/>
-                      <a:stretch>
-                        <a:fillRect/>
-                      </a:stretch>
-                    </p:blipFill>
-                    <p:spPr>
-                      <a:xfrm>
-                        <a:off x="0" y="0"/>
-                        <a:ext cx="9144000" cy="5143500"/>
-                      </a:xfrm>
-                      <a:prstGeom prst="rect">
-                        <a:avLst/>
-                      </a:prstGeom>
-                    </p:spPr>
-                  </p:pic>
-                </p:oleObj>
-              </mc:Fallback>
-            </mc:AlternateContent>
-          </a:graphicData>
-        </a:graphic>
-      </p:graphicFrame>
-      <p:sp>
-        <p:nvSpPr>
-          <p:cNvPr id="3" name="TextBox 2">
-            <a:extLst>
-              <a:ext uri="{FF2B5EF4-FFF2-40B4-BE49-F238E27FC236}">
-                <a16:creationId xmlns:a16="http://schemas.microsoft.com/office/drawing/2014/main" id="{69C3ACD7-63EA-AD11-D4E3-7D8D477A2334}"/>
-              </a:ext>
-            </a:extLst>
-          </p:cNvPr>
-          <p:cNvSpPr txBox="1"/>
-          <p:nvPr/>
-        </p:nvSpPr>
-        <p:spPr>
-          <a:xfrm>
-            <a:off x="6168853" y="104932"/>
-            <a:ext cx="2877711" cy="307777"/>
-          </a:xfrm>
-          <a:prstGeom prst="rect">
-            <a:avLst/>
-          </a:prstGeom>
-          <a:noFill/>
-        </p:spPr>
-        <p:txBody>
-          <a:bodyPr wrap="none" rtlCol="0">
-            <a:spAutoFit/>
-          </a:bodyPr>
-          <a:lstStyle/>
-          <a:p>
-            <a:r>
-              <a:rPr lang="en-US" dirty="0">
-                <a:solidFill>
-                  <a:srgbClr val="8F4D57"/>
-                </a:solidFill>
-                <a:latin typeface="Press Start 2P" panose="00000500000000000000" pitchFamily="2" charset="0"/>
-              </a:rPr>
-              <a:t>Lighting system</a:t>
-            </a:r>
-          </a:p>
-        </p:txBody>
-      </p:sp>
-    </p:spTree>
-    <p:extLst>
-      <p:ext uri="{BB962C8B-B14F-4D97-AF65-F5344CB8AC3E}">
-        <p14:creationId xmlns:p14="http://schemas.microsoft.com/office/powerpoint/2010/main" val="2069842747"/>
       </p:ext>
     </p:extLst>
   </p:cSld>
